--- a/output/260925__Status_frente2_resultados.pptx
+++ b/output/260925__Status_frente2_resultados.pptx
@@ -3938,7 +3938,7 @@
         </p:nvGraphicFramePr>
         <p:xfrm>
           <a:off x="384048" y="2148586"/>
-          <a:ext cx="4169706" cy="749808"/>
+          <a:ext cx="4169706" cy="1708023"/>
         </p:xfrm>
         <a:graphic>
           <a:graphicData uri="http://schemas.openxmlformats.org/drawingml/2006/table">
@@ -3957,7 +3957,7 @@
                 <a:gridCol w="364849"/>
                 <a:gridCol w="364849"/>
               </a:tblGrid>
-              <a:tr h="187452">
+              <a:tr h="251841">
                 <a:tc>
                   <a:txBody>
                     <a:bodyPr/>
@@ -4281,7 +4281,7 @@
                   </a:tcPr>
                 </a:tc>
               </a:tr>
-              <a:tr h="187452">
+              <a:tr h="485394">
                 <a:tc>
                   <a:txBody>
                     <a:bodyPr wrap="square"/>
@@ -4663,7 +4663,7 @@
                   </a:tcPr>
                 </a:tc>
               </a:tr>
-              <a:tr h="187452">
+              <a:tr h="485394">
                 <a:tc>
                   <a:txBody>
                     <a:bodyPr wrap="square"/>
@@ -5045,7 +5045,7 @@
                   </a:tcPr>
                 </a:tc>
               </a:tr>
-              <a:tr h="187452">
+              <a:tr h="485394">
                 <a:tc>
                   <a:txBody>
                     <a:bodyPr wrap="square"/>
@@ -5439,7 +5439,7 @@
         </p:nvSpPr>
         <p:spPr>
           <a:xfrm>
-            <a:off x="438912" y="2375082"/>
+            <a:off x="438912" y="2588442"/>
             <a:ext cx="118872" cy="73700"/>
           </a:xfrm>
           <a:prstGeom prst="rect">
@@ -5470,7 +5470,7 @@
         </p:nvSpPr>
         <p:spPr>
           <a:xfrm>
-            <a:off x="454365" y="2391724"/>
+            <a:off x="454365" y="2605084"/>
             <a:ext cx="52303" cy="7726"/>
           </a:xfrm>
           <a:prstGeom prst="rect">
@@ -5500,7 +5500,7 @@
         </p:nvSpPr>
         <p:spPr>
           <a:xfrm>
-            <a:off x="454365" y="2407178"/>
+            <a:off x="454365" y="2620538"/>
             <a:ext cx="87965" cy="7726"/>
           </a:xfrm>
           <a:prstGeom prst="rect">
@@ -5530,7 +5530,7 @@
         </p:nvSpPr>
         <p:spPr>
           <a:xfrm>
-            <a:off x="454365" y="2422631"/>
+            <a:off x="454365" y="2635991"/>
             <a:ext cx="39227" cy="7726"/>
           </a:xfrm>
           <a:prstGeom prst="rect">
@@ -5560,7 +5560,7 @@
         </p:nvSpPr>
         <p:spPr>
           <a:xfrm>
-            <a:off x="490026" y="2448783"/>
+            <a:off x="490026" y="2662143"/>
             <a:ext cx="16642" cy="21396"/>
           </a:xfrm>
           <a:prstGeom prst="rect">
@@ -5590,7 +5590,7 @@
         </p:nvSpPr>
         <p:spPr>
           <a:xfrm>
-            <a:off x="467441" y="2470180"/>
+            <a:off x="467441" y="2683540"/>
             <a:ext cx="61813" cy="10698"/>
           </a:xfrm>
           <a:prstGeom prst="rect">
@@ -5620,7 +5620,7 @@
         </p:nvSpPr>
         <p:spPr>
           <a:xfrm>
-            <a:off x="438912" y="2557780"/>
+            <a:off x="438912" y="3069082"/>
             <a:ext cx="118872" cy="118872"/>
           </a:xfrm>
           <a:prstGeom prst="gear9">
@@ -5650,7 +5650,7 @@
         </p:nvSpPr>
         <p:spPr>
           <a:xfrm>
-            <a:off x="477545" y="2596413"/>
+            <a:off x="477545" y="3107715"/>
             <a:ext cx="41605" cy="41605"/>
           </a:xfrm>
           <a:prstGeom prst="ellipse">
@@ -5680,7 +5680,7 @@
         </p:nvSpPr>
         <p:spPr>
           <a:xfrm rot="20006097">
-            <a:off x="451831" y="2780002"/>
+            <a:off x="451831" y="3589246"/>
             <a:ext cx="93032" cy="7726"/>
           </a:xfrm>
           <a:prstGeom prst="rect">
@@ -5710,7 +5710,7 @@
         </p:nvSpPr>
         <p:spPr>
           <a:xfrm rot="1593903">
-            <a:off x="451831" y="2821607"/>
+            <a:off x="451831" y="3630851"/>
             <a:ext cx="93032" cy="7726"/>
           </a:xfrm>
           <a:prstGeom prst="rect">
@@ -5740,7 +5740,7 @@
         </p:nvSpPr>
         <p:spPr>
           <a:xfrm>
-            <a:off x="438912" y="2786837"/>
+            <a:off x="438912" y="3596081"/>
             <a:ext cx="35661" cy="35661"/>
           </a:xfrm>
           <a:prstGeom prst="ellipse">
@@ -5770,7 +5770,7 @@
         </p:nvSpPr>
         <p:spPr>
           <a:xfrm>
-            <a:off x="522122" y="2745232"/>
+            <a:off x="522122" y="3554476"/>
             <a:ext cx="35661" cy="35661"/>
           </a:xfrm>
           <a:prstGeom prst="ellipse">
@@ -5800,7 +5800,7 @@
         </p:nvSpPr>
         <p:spPr>
           <a:xfrm>
-            <a:off x="522122" y="2828442"/>
+            <a:off x="522122" y="3637686"/>
             <a:ext cx="35661" cy="35661"/>
           </a:xfrm>
           <a:prstGeom prst="ellipse">
@@ -5830,7 +5830,7 @@
         </p:nvSpPr>
         <p:spPr>
           <a:xfrm>
-            <a:off x="384048" y="3044698"/>
+            <a:off x="384048" y="4002913"/>
             <a:ext cx="4169713" cy="146304"/>
           </a:xfrm>
           <a:prstGeom prst="rect">
@@ -5865,7 +5865,7 @@
         </p:nvSpPr>
         <p:spPr>
           <a:xfrm>
-            <a:off x="384048" y="3201035"/>
+            <a:off x="384048" y="4159249"/>
             <a:ext cx="4169713" cy="128016"/>
           </a:xfrm>
           <a:prstGeom prst="rect">
@@ -5901,8 +5901,8 @@
           <p:nvPr/>
         </p:nvGraphicFramePr>
         <p:xfrm>
-          <a:off x="384048" y="3372104"/>
-          <a:ext cx="4169706" cy="562356"/>
+          <a:off x="384048" y="4330319"/>
+          <a:ext cx="4169706" cy="1222629"/>
         </p:xfrm>
         <a:graphic>
           <a:graphicData uri="http://schemas.openxmlformats.org/drawingml/2006/table">
@@ -5921,7 +5921,7 @@
                 <a:gridCol w="364849"/>
                 <a:gridCol w="364849"/>
               </a:tblGrid>
-              <a:tr h="187452">
+              <a:tr h="251841">
                 <a:tc>
                   <a:txBody>
                     <a:bodyPr/>
@@ -6245,7 +6245,7 @@
                   </a:tcPr>
                 </a:tc>
               </a:tr>
-              <a:tr h="187452">
+              <a:tr h="485394">
                 <a:tc>
                   <a:txBody>
                     <a:bodyPr wrap="square"/>
@@ -6588,7 +6588,7 @@
                   </a:tcPr>
                 </a:tc>
               </a:tr>
-              <a:tr h="187452">
+              <a:tr h="485394">
                 <a:tc>
                   <a:txBody>
                     <a:bodyPr wrap="square"/>
@@ -6962,7 +6962,7 @@
         </p:nvSpPr>
         <p:spPr>
           <a:xfrm>
-            <a:off x="441907" y="3637804"/>
+            <a:off x="441907" y="4809379"/>
             <a:ext cx="27958" cy="27958"/>
           </a:xfrm>
           <a:prstGeom prst="ellipse">
@@ -6993,7 +6993,7 @@
         </p:nvSpPr>
         <p:spPr>
           <a:xfrm>
-            <a:off x="438912" y="3663980"/>
+            <a:off x="438912" y="4835555"/>
             <a:ext cx="33949" cy="39940"/>
           </a:xfrm>
           <a:prstGeom prst="round2SameRect">
@@ -7027,7 +7027,7 @@
         </p:nvSpPr>
         <p:spPr>
           <a:xfrm>
-            <a:off x="520363" y="3637804"/>
+            <a:off x="520363" y="4809379"/>
             <a:ext cx="27958" cy="27958"/>
           </a:xfrm>
           <a:prstGeom prst="ellipse">
@@ -7058,7 +7058,7 @@
         </p:nvSpPr>
         <p:spPr>
           <a:xfrm>
-            <a:off x="517367" y="3663980"/>
+            <a:off x="517367" y="4835555"/>
             <a:ext cx="33949" cy="39940"/>
           </a:xfrm>
           <a:prstGeom prst="round2SameRect">
@@ -7092,7 +7092,7 @@
         </p:nvSpPr>
         <p:spPr>
           <a:xfrm>
-            <a:off x="473979" y="3651498"/>
+            <a:off x="473979" y="4823073"/>
             <a:ext cx="48737" cy="55869"/>
           </a:xfrm>
           <a:prstGeom prst="round2SameRect">
@@ -7125,7 +7125,7 @@
         </p:nvSpPr>
         <p:spPr>
           <a:xfrm>
-            <a:off x="477545" y="3619997"/>
+            <a:off x="477545" y="4791572"/>
             <a:ext cx="41605" cy="41605"/>
           </a:xfrm>
           <a:prstGeom prst="ellipse">
@@ -7155,7 +7155,7 @@
         </p:nvSpPr>
         <p:spPr>
           <a:xfrm>
-            <a:off x="481705" y="3624158"/>
+            <a:off x="481705" y="4795733"/>
             <a:ext cx="33284" cy="33284"/>
           </a:xfrm>
           <a:prstGeom prst="ellipse">
@@ -7186,7 +7186,7 @@
         </p:nvSpPr>
         <p:spPr>
           <a:xfrm>
-            <a:off x="478139" y="3655659"/>
+            <a:off x="478139" y="4827234"/>
             <a:ext cx="40416" cy="47548"/>
           </a:xfrm>
           <a:prstGeom prst="round2SameRect">
@@ -7220,7 +7220,7 @@
         </p:nvSpPr>
         <p:spPr>
           <a:xfrm>
-            <a:off x="438912" y="3781298"/>
+            <a:off x="438912" y="5250815"/>
             <a:ext cx="118872" cy="118872"/>
           </a:xfrm>
           <a:prstGeom prst="donut">
@@ -7252,7 +7252,7 @@
         </p:nvSpPr>
         <p:spPr>
           <a:xfrm>
-            <a:off x="468629" y="3811015"/>
+            <a:off x="468629" y="5280533"/>
             <a:ext cx="59436" cy="59436"/>
           </a:xfrm>
           <a:prstGeom prst="donut">
@@ -7284,7 +7284,7 @@
         </p:nvSpPr>
         <p:spPr>
           <a:xfrm>
-            <a:off x="486460" y="3828846"/>
+            <a:off x="486460" y="5298363"/>
             <a:ext cx="23774" cy="23774"/>
           </a:xfrm>
           <a:prstGeom prst="ellipse">
@@ -7413,7 +7413,7 @@
         </p:nvGraphicFramePr>
         <p:xfrm>
           <a:off x="4718353" y="1821180"/>
-          <a:ext cx="7089565" cy="4945380"/>
+          <a:ext cx="7089564" cy="4945380"/>
         </p:xfrm>
         <a:graphic>
           <a:graphicData uri="http://schemas.openxmlformats.org/drawingml/2006/table">
@@ -7422,14 +7422,14 @@
                 <a:tableStyleId>{2D5ABB26-0587-4C30-8999-92F81FD0307C}</a:tableStyleId>
               </a:tblPr>
               <a:tblGrid>
-                <a:gridCol w="309523"/>
-                <a:gridCol w="1437074"/>
-                <a:gridCol w="773809"/>
-                <a:gridCol w="405328"/>
-                <a:gridCol w="736961"/>
-                <a:gridCol w="1142290"/>
-                <a:gridCol w="1142290"/>
-                <a:gridCol w="1142290"/>
+                <a:gridCol w="387986"/>
+                <a:gridCol w="1199230"/>
+                <a:gridCol w="917058"/>
+                <a:gridCol w="493800"/>
+                <a:gridCol w="705429"/>
+                <a:gridCol w="1128687"/>
+                <a:gridCol w="1128687"/>
+                <a:gridCol w="1128687"/>
               </a:tblGrid>
               <a:tr h="256032">
                 <a:tc>
@@ -7439,7 +7439,7 @@
                     <a:p>
                       <a:pPr algn="l"/>
                       <a:r>
-                        <a:rPr sz="750" b="1" i="0" lang="pt-BR">
+                        <a:rPr sz="650" b="1" i="0" lang="pt-BR">
                           <a:solidFill>
                             <a:srgbClr val="757575"/>
                           </a:solidFill>
@@ -7476,7 +7476,7 @@
                     <a:p>
                       <a:pPr algn="l"/>
                       <a:r>
-                        <a:rPr sz="750" b="1" i="0" lang="pt-BR">
+                        <a:rPr sz="650" b="1" i="0" lang="pt-BR">
                           <a:solidFill>
                             <a:srgbClr val="757575"/>
                           </a:solidFill>
@@ -7513,7 +7513,7 @@
                     <a:p>
                       <a:pPr algn="l"/>
                       <a:r>
-                        <a:rPr sz="750" b="1" i="0" lang="pt-BR">
+                        <a:rPr sz="650" b="1" i="0" lang="pt-BR">
                           <a:solidFill>
                             <a:srgbClr val="757575"/>
                           </a:solidFill>
@@ -7550,7 +7550,7 @@
                     <a:p>
                       <a:pPr algn="l"/>
                       <a:r>
-                        <a:rPr sz="750" b="1" i="0" lang="pt-BR">
+                        <a:rPr sz="650" b="1" i="0" lang="pt-BR">
                           <a:solidFill>
                             <a:srgbClr val="757575"/>
                           </a:solidFill>
@@ -7587,7 +7587,7 @@
                     <a:p>
                       <a:pPr algn="ctr"/>
                       <a:r>
-                        <a:rPr sz="750" b="1" i="0" lang="pt-BR">
+                        <a:rPr sz="650" b="1" i="0" lang="pt-BR">
                           <a:solidFill>
                             <a:srgbClr val="757575"/>
                           </a:solidFill>
@@ -7624,7 +7624,7 @@
                     <a:p>
                       <a:pPr algn="l"/>
                       <a:r>
-                        <a:rPr sz="750" b="1" i="0" lang="pt-BR">
+                        <a:rPr sz="650" b="1" i="0" lang="pt-BR">
                           <a:solidFill>
                             <a:srgbClr val="757575"/>
                           </a:solidFill>
@@ -7661,7 +7661,7 @@
                     <a:p>
                       <a:pPr algn="l"/>
                       <a:r>
-                        <a:rPr sz="750" b="1" i="0" lang="pt-BR">
+                        <a:rPr sz="650" b="1" i="0" lang="pt-BR">
                           <a:solidFill>
                             <a:srgbClr val="757575"/>
                           </a:solidFill>
@@ -7698,7 +7698,7 @@
                     <a:p>
                       <a:pPr algn="l"/>
                       <a:r>
-                        <a:rPr sz="750" b="1" i="0" lang="pt-BR">
+                        <a:rPr sz="650" b="1" i="0" lang="pt-BR">
                           <a:solidFill>
                             <a:srgbClr val="757575"/>
                           </a:solidFill>
@@ -7729,10 +7729,10 @@
                   </a:tcPr>
                 </a:tc>
               </a:tr>
-              <a:tr h="944118">
-                <a:tc>
-                  <a:txBody>
-                    <a:bodyPr wrap="square"/>
+              <a:tr h="883158">
+                <a:tc>
+                  <a:txBody>
+                    <a:bodyPr wrap="none"/>
                     <a:lstStyle/>
                     <a:p>
                       <a:pPr algn="l"/>
@@ -8109,10 +8109,10 @@
                   </a:tcPr>
                 </a:tc>
               </a:tr>
-              <a:tr h="822198">
-                <a:tc>
-                  <a:txBody>
-                    <a:bodyPr wrap="square"/>
+              <a:tr h="761238">
+                <a:tc>
+                  <a:txBody>
+                    <a:bodyPr wrap="none"/>
                     <a:lstStyle/>
                     <a:p>
                       <a:pPr algn="l"/>
@@ -8424,10 +8424,10 @@
                   </a:tcPr>
                 </a:tc>
               </a:tr>
-              <a:tr h="822198">
-                <a:tc>
-                  <a:txBody>
-                    <a:bodyPr wrap="square"/>
+              <a:tr h="761238">
+                <a:tc>
+                  <a:txBody>
+                    <a:bodyPr wrap="none"/>
                     <a:lstStyle/>
                     <a:p>
                       <a:pPr algn="l"/>
@@ -8748,10 +8748,10 @@
                   </a:tcPr>
                 </a:tc>
               </a:tr>
-              <a:tr h="578358">
-                <a:tc>
-                  <a:txBody>
-                    <a:bodyPr wrap="square"/>
+              <a:tr h="517398">
+                <a:tc>
+                  <a:txBody>
+                    <a:bodyPr wrap="none"/>
                     <a:lstStyle/>
                     <a:p>
                       <a:pPr algn="l"/>
@@ -9054,10 +9054,10 @@
                   </a:tcPr>
                 </a:tc>
               </a:tr>
-              <a:tr h="822198">
-                <a:tc>
-                  <a:txBody>
-                    <a:bodyPr wrap="square"/>
+              <a:tr h="883158">
+                <a:tc>
+                  <a:txBody>
+                    <a:bodyPr wrap="none"/>
                     <a:lstStyle/>
                     <a:p>
                       <a:pPr algn="l"/>
@@ -9415,10 +9415,10 @@
                   </a:tcPr>
                 </a:tc>
               </a:tr>
-              <a:tr h="700278">
-                <a:tc>
-                  <a:txBody>
-                    <a:bodyPr wrap="square"/>
+              <a:tr h="883158">
+                <a:tc>
+                  <a:txBody>
+                    <a:bodyPr wrap="none"/>
                     <a:lstStyle/>
                     <a:p>
                       <a:pPr algn="l"/>
@@ -9733,7 +9733,7 @@
         </p:nvSpPr>
         <p:spPr>
           <a:xfrm>
-            <a:off x="4799963" y="2820162"/>
+            <a:off x="4839194" y="2759202"/>
             <a:ext cx="146304" cy="146304"/>
           </a:xfrm>
           <a:prstGeom prst="ellipse">
@@ -9772,7 +9772,7 @@
         </p:nvSpPr>
         <p:spPr>
           <a:xfrm>
-            <a:off x="4708523" y="3642360"/>
+            <a:off x="4747754" y="3520440"/>
             <a:ext cx="146304" cy="146304"/>
           </a:xfrm>
           <a:prstGeom prst="ellipse">
@@ -9811,7 +9811,7 @@
         </p:nvSpPr>
         <p:spPr>
           <a:xfrm>
-            <a:off x="4891403" y="3642360"/>
+            <a:off x="4930634" y="3520440"/>
             <a:ext cx="146304" cy="146304"/>
           </a:xfrm>
           <a:prstGeom prst="ellipse">
@@ -9850,7 +9850,7 @@
         </p:nvSpPr>
         <p:spPr>
           <a:xfrm>
-            <a:off x="4799963" y="4464558"/>
+            <a:off x="4839194" y="4281678"/>
             <a:ext cx="146304" cy="146304"/>
           </a:xfrm>
           <a:prstGeom prst="ellipse">
@@ -9889,7 +9889,7 @@
         </p:nvSpPr>
         <p:spPr>
           <a:xfrm>
-            <a:off x="4799963" y="5042916"/>
+            <a:off x="4839194" y="4799076"/>
             <a:ext cx="146304" cy="146304"/>
           </a:xfrm>
           <a:prstGeom prst="ellipse">

--- a/output/260925__Status_frente2_resultados.pptx
+++ b/output/260925__Status_frente2_resultados.pptx
@@ -3800,7 +3800,7 @@
                       </a:r>
                     </a:p>
                   </a:txBody>
-                  <a:tcPr marL="109728" marR="109728" marT="45720" marB="45720" anchor="ctr">
+                  <a:tcPr marL="365760" marR="365760" marT="45720" marB="45720" anchor="ctr">
                     <a:lnL w="9525" cap="flat" cmpd="sng" algn="ctr">
                       <a:noFill/>
                     </a:lnL>
@@ -3827,7 +3827,7 @@
                       <a:r>
                         <a:rPr sz="750" b="0" i="0" lang="pt-BR">
                           <a:solidFill>
-                            <a:srgbClr val="CFE8DD"/>
+                            <a:srgbClr val="9FD4B8"/>
                           </a:solidFill>
                           <a:latin typeface="Arial"/>
                         </a:rPr>
@@ -3860,14 +3860,217 @@
       </p:graphicFrame>
       <p:sp>
         <p:nvSpPr>
-          <p:cNvPr id="15" name="TextBox 14"/>
-          <p:cNvSpPr txBox="1"/>
+          <p:cNvPr id="15" name="Rectangle 14"/>
+          <p:cNvSpPr/>
+          <p:nvPr/>
+        </p:nvSpPr>
+        <p:spPr>
+          <a:xfrm>
+            <a:off x="493776" y="1610868"/>
+            <a:ext cx="47548" cy="73152"/>
+          </a:xfrm>
+          <a:prstGeom prst="rect">
+            <a:avLst/>
+          </a:prstGeom>
+          <a:solidFill>
+            <a:srgbClr val="9FD4B8"/>
+          </a:solidFill>
+          <a:ln>
+            <a:noFill/>
+          </a:ln>
+          <a:effectLst/>
+        </p:spPr>
+        <p:txBody>
+          <a:bodyPr rtlCol="0" anchor="ctr" wrap="square"/>
+          <a:lstStyle/>
+          <a:p>
+            <a:pPr algn="ctr"/>
+          </a:p>
+        </p:txBody>
+      </p:sp>
+      <p:sp>
+        <p:nvSpPr>
+          <p:cNvPr id="16" name="Rectangle 15"/>
+          <p:cNvSpPr/>
+          <p:nvPr/>
+        </p:nvSpPr>
+        <p:spPr>
+          <a:xfrm>
+            <a:off x="561441" y="1559661"/>
+            <a:ext cx="47548" cy="124358"/>
+          </a:xfrm>
+          <a:prstGeom prst="rect">
+            <a:avLst/>
+          </a:prstGeom>
+          <a:solidFill>
+            <a:srgbClr val="9FD4B8"/>
+          </a:solidFill>
+          <a:ln>
+            <a:noFill/>
+          </a:ln>
+          <a:effectLst/>
+        </p:spPr>
+        <p:txBody>
+          <a:bodyPr rtlCol="0" anchor="ctr" wrap="square"/>
+          <a:lstStyle/>
+          <a:p>
+            <a:pPr algn="ctr"/>
+          </a:p>
+        </p:txBody>
+      </p:sp>
+      <p:sp>
+        <p:nvSpPr>
+          <p:cNvPr id="17" name="Rectangle 16"/>
+          <p:cNvSpPr/>
+          <p:nvPr/>
+        </p:nvSpPr>
+        <p:spPr>
+          <a:xfrm>
+            <a:off x="629107" y="1501140"/>
+            <a:ext cx="47548" cy="182880"/>
+          </a:xfrm>
+          <a:prstGeom prst="rect">
+            <a:avLst/>
+          </a:prstGeom>
+          <a:solidFill>
+            <a:srgbClr val="9FD4B8"/>
+          </a:solidFill>
+          <a:ln>
+            <a:noFill/>
+          </a:ln>
+          <a:effectLst/>
+        </p:spPr>
+        <p:txBody>
+          <a:bodyPr rtlCol="0" anchor="ctr" wrap="square"/>
+          <a:lstStyle/>
+          <a:p>
+            <a:pPr algn="ctr"/>
+          </a:p>
+        </p:txBody>
+      </p:sp>
+      <p:sp>
+        <p:nvSpPr>
+          <p:cNvPr id="18" name="Rounded Rectangle 17"/>
+          <p:cNvSpPr/>
           <p:nvPr/>
         </p:nvSpPr>
         <p:spPr>
           <a:xfrm>
             <a:off x="384048" y="1821180"/>
-            <a:ext cx="4169713" cy="146304"/>
+            <a:ext cx="4169713" cy="409702"/>
+          </a:xfrm>
+          <a:prstGeom prst="roundRect">
+            <a:avLst>
+              <a:gd name="adj" fmla="val 12000"/>
+            </a:avLst>
+          </a:prstGeom>
+          <a:solidFill>
+            <a:srgbClr val="E9ECF4"/>
+          </a:solidFill>
+          <a:ln>
+            <a:noFill/>
+          </a:ln>
+          <a:effectLst/>
+        </p:spPr>
+        <p:txBody>
+          <a:bodyPr rtlCol="0" anchor="ctr" lIns="0" rIns="0" tIns="0" bIns="0"/>
+          <a:lstStyle/>
+          <a:p>
+            <a:pPr algn="ctr"/>
+          </a:p>
+        </p:txBody>
+      </p:sp>
+      <p:sp>
+        <p:nvSpPr>
+          <p:cNvPr id="19" name="Freeform 18"/>
+          <p:cNvSpPr/>
+          <p:nvPr/>
+        </p:nvSpPr>
+        <p:spPr>
+          <a:xfrm>
+            <a:off x="530352" y="1916303"/>
+            <a:ext cx="219456" cy="120700"/>
+          </a:xfrm>
+          <a:custGeom>
+            <a:avLst/>
+            <a:gdLst/>
+            <a:ahLst/>
+            <a:cxnLst/>
+            <a:rect l="l" t="t" r="r" b="b"/>
+            <a:pathLst>
+              <a:path w="219456" h="120700">
+                <a:moveTo>
+                  <a:pt x="0" y="0"/>
+                </a:moveTo>
+                <a:lnTo>
+                  <a:pt x="219456" y="0"/>
+                </a:lnTo>
+                <a:lnTo>
+                  <a:pt x="142646" y="120700"/>
+                </a:lnTo>
+                <a:lnTo>
+                  <a:pt x="76809" y="120700"/>
+                </a:lnTo>
+                <a:close/>
+              </a:path>
+            </a:pathLst>
+          </a:custGeom>
+          <a:solidFill>
+            <a:srgbClr val="1F4E3D"/>
+          </a:solidFill>
+          <a:ln>
+            <a:noFill/>
+          </a:ln>
+          <a:effectLst/>
+        </p:spPr>
+        <p:txBody>
+          <a:bodyPr rtlCol="0" anchor="ctr"/>
+          <a:lstStyle/>
+          <a:p>
+            <a:pPr algn="ctr"/>
+          </a:p>
+        </p:txBody>
+      </p:sp>
+      <p:sp>
+        <p:nvSpPr>
+          <p:cNvPr id="20" name="Rectangle 19"/>
+          <p:cNvSpPr/>
+          <p:nvPr/>
+        </p:nvSpPr>
+        <p:spPr>
+          <a:xfrm>
+            <a:off x="625595" y="2037003"/>
+            <a:ext cx="28968" cy="61447"/>
+          </a:xfrm>
+          <a:prstGeom prst="rect">
+            <a:avLst/>
+          </a:prstGeom>
+          <a:solidFill>
+            <a:srgbClr val="1F4E3D"/>
+          </a:solidFill>
+          <a:ln>
+            <a:noFill/>
+          </a:ln>
+          <a:effectLst/>
+        </p:spPr>
+        <p:txBody>
+          <a:bodyPr rtlCol="0" anchor="ctr" lIns="0" rIns="0" tIns="0" bIns="0"/>
+          <a:lstStyle/>
+          <a:p>
+            <a:pPr algn="ctr"/>
+          </a:p>
+        </p:txBody>
+      </p:sp>
+      <p:sp>
+        <p:nvSpPr>
+          <p:cNvPr id="21" name="TextBox 20"/>
+          <p:cNvSpPr txBox="1"/>
+          <p:nvPr/>
+        </p:nvSpPr>
+        <p:spPr>
+          <a:xfrm>
+            <a:off x="877824" y="1894332"/>
+            <a:ext cx="3566209" cy="147193"/>
           </a:xfrm>
           <a:prstGeom prst="rect">
             <a:avLst/>
@@ -3895,14 +4098,14 @@
       </p:sp>
       <p:sp>
         <p:nvSpPr>
-          <p:cNvPr id="16" name="TextBox 15"/>
+          <p:cNvPr id="22" name="TextBox 21"/>
           <p:cNvSpPr txBox="1"/>
           <p:nvPr/>
         </p:nvSpPr>
         <p:spPr>
           <a:xfrm>
-            <a:off x="384048" y="1977517"/>
-            <a:ext cx="4169713" cy="128016"/>
+            <a:off x="877824" y="2041525"/>
+            <a:ext cx="3566209" cy="116205"/>
           </a:xfrm>
           <a:prstGeom prst="rect">
             <a:avLst/>
@@ -3930,14 +4133,14 @@
       </p:sp>
       <p:graphicFrame>
         <p:nvGraphicFramePr>
-          <p:cNvPr id="17" name="Table 16"/>
+          <p:cNvPr id="23" name="Table 22"/>
           <p:cNvGraphicFramePr>
             <a:graphicFrameLocks noGrp="1"/>
           </p:cNvGraphicFramePr>
           <p:nvPr/>
         </p:nvGraphicFramePr>
         <p:xfrm>
-          <a:off x="384048" y="2148586"/>
+          <a:off x="384048" y="2322322"/>
           <a:ext cx="4169706" cy="1708023"/>
         </p:xfrm>
         <a:graphic>
@@ -4276,7 +4479,7 @@
                       </a:solidFill>
                     </a:lnB>
                     <a:solidFill>
-                      <a:srgbClr val="CFE8DD"/>
+                      <a:srgbClr val="DDE1EC"/>
                     </a:solidFill>
                   </a:tcPr>
                 </a:tc>
@@ -4425,7 +4628,7 @@
                       <a:r>
                         <a:rPr sz="800" b="1" i="0" lang="pt-BR">
                           <a:solidFill>
-                            <a:srgbClr val="9C6500"/>
+                            <a:srgbClr val="616300"/>
                           </a:solidFill>
                           <a:latin typeface="Arial"/>
                         </a:rPr>
@@ -4453,7 +4656,7 @@
                       </a:solidFill>
                     </a:lnB>
                     <a:solidFill>
-                      <a:srgbClr val="FFEB9C"/>
+                      <a:srgbClr val="E9ECAE"/>
                     </a:solidFill>
                   </a:tcPr>
                 </a:tc>
@@ -4466,7 +4669,7 @@
                       <a:r>
                         <a:rPr sz="800" b="1" i="0" lang="pt-BR">
                           <a:solidFill>
-                            <a:srgbClr val="9C6500"/>
+                            <a:srgbClr val="616300"/>
                           </a:solidFill>
                           <a:latin typeface="Arial"/>
                         </a:rPr>
@@ -4494,7 +4697,7 @@
                       </a:solidFill>
                     </a:lnB>
                     <a:solidFill>
-                      <a:srgbClr val="FFEB9C"/>
+                      <a:srgbClr val="E9ECAE"/>
                     </a:solidFill>
                   </a:tcPr>
                 </a:tc>
@@ -4507,7 +4710,7 @@
                       <a:r>
                         <a:rPr sz="800" b="1" i="0" lang="pt-BR">
                           <a:solidFill>
-                            <a:srgbClr val="9C6500"/>
+                            <a:srgbClr val="5A6300"/>
                           </a:solidFill>
                           <a:latin typeface="Arial"/>
                         </a:rPr>
@@ -4535,7 +4738,7 @@
                       </a:solidFill>
                     </a:lnB>
                     <a:solidFill>
-                      <a:srgbClr val="FFEB9C"/>
+                      <a:srgbClr val="E6ECB1"/>
                     </a:solidFill>
                   </a:tcPr>
                 </a:tc>
@@ -4548,7 +4751,7 @@
                       <a:r>
                         <a:rPr sz="800" b="1" i="0" lang="pt-BR">
                           <a:solidFill>
-                            <a:srgbClr val="9C6500"/>
+                            <a:srgbClr val="536300"/>
                           </a:solidFill>
                           <a:latin typeface="Arial"/>
                         </a:rPr>
@@ -4576,7 +4779,7 @@
                       </a:solidFill>
                     </a:lnB>
                     <a:solidFill>
-                      <a:srgbClr val="FFEB9C"/>
+                      <a:srgbClr val="E4ECB3"/>
                     </a:solidFill>
                   </a:tcPr>
                 </a:tc>
@@ -4589,7 +4792,7 @@
                       <a:r>
                         <a:rPr sz="800" b="1" i="0" lang="pt-BR">
                           <a:solidFill>
-                            <a:srgbClr val="006100"/>
+                            <a:srgbClr val="146100"/>
                           </a:solidFill>
                           <a:latin typeface="Arial"/>
                         </a:rPr>
@@ -4617,7 +4820,7 @@
                       </a:solidFill>
                     </a:lnB>
                     <a:solidFill>
-                      <a:srgbClr val="C6EFCE"/>
+                      <a:srgbClr val="CDEEC7"/>
                     </a:solidFill>
                   </a:tcPr>
                 </a:tc>
@@ -4807,7 +5010,7 @@
                       <a:r>
                         <a:rPr sz="800" b="1" i="0" lang="pt-BR">
                           <a:solidFill>
-                            <a:srgbClr val="9C0006"/>
+                            <a:srgbClr val="226100"/>
                           </a:solidFill>
                           <a:latin typeface="Arial"/>
                         </a:rPr>
@@ -4835,7 +5038,7 @@
                       </a:solidFill>
                     </a:lnB>
                     <a:solidFill>
-                      <a:srgbClr val="FFC7CE"/>
+                      <a:srgbClr val="D2EEC2"/>
                     </a:solidFill>
                   </a:tcPr>
                 </a:tc>
@@ -4848,7 +5051,7 @@
                       <a:r>
                         <a:rPr sz="800" b="1" i="0" lang="pt-BR">
                           <a:solidFill>
-                            <a:srgbClr val="9C0006"/>
+                            <a:srgbClr val="9C2803"/>
                           </a:solidFill>
                           <a:latin typeface="Arial"/>
                         </a:rPr>
@@ -4876,7 +5079,7 @@
                       </a:solidFill>
                     </a:lnB>
                     <a:solidFill>
-                      <a:srgbClr val="FFC7CE"/>
+                      <a:srgbClr val="FFD5BA"/>
                     </a:solidFill>
                   </a:tcPr>
                 </a:tc>
@@ -4889,7 +5092,7 @@
                       <a:r>
                         <a:rPr sz="800" b="1" i="0" lang="pt-BR">
                           <a:solidFill>
-                            <a:srgbClr val="9C0006"/>
+                            <a:srgbClr val="9C3E02"/>
                           </a:solidFill>
                           <a:latin typeface="Arial"/>
                         </a:rPr>
@@ -4917,7 +5120,7 @@
                       </a:solidFill>
                     </a:lnB>
                     <a:solidFill>
-                      <a:srgbClr val="FFC7CE"/>
+                      <a:srgbClr val="FFDDAE"/>
                     </a:solidFill>
                   </a:tcPr>
                 </a:tc>
@@ -4930,7 +5133,7 @@
                       <a:r>
                         <a:rPr sz="800" b="1" i="0" lang="pt-BR">
                           <a:solidFill>
-                            <a:srgbClr val="9C0006"/>
+                            <a:srgbClr val="8A6400"/>
                           </a:solidFill>
                           <a:latin typeface="Arial"/>
                         </a:rPr>
@@ -4958,7 +5161,7 @@
                       </a:solidFill>
                     </a:lnB>
                     <a:solidFill>
-                      <a:srgbClr val="FFC7CE"/>
+                      <a:srgbClr val="F8EBA1"/>
                     </a:solidFill>
                   </a:tcPr>
                 </a:tc>
@@ -4971,7 +5174,7 @@
                       <a:r>
                         <a:rPr sz="800" b="1" i="0" lang="pt-BR">
                           <a:solidFill>
-                            <a:srgbClr val="9C6500"/>
+                            <a:srgbClr val="006100"/>
                           </a:solidFill>
                           <a:latin typeface="Arial"/>
                         </a:rPr>
@@ -4999,7 +5202,7 @@
                       </a:solidFill>
                     </a:lnB>
                     <a:solidFill>
-                      <a:srgbClr val="FFEB9C"/>
+                      <a:srgbClr val="C6EFCE"/>
                     </a:solidFill>
                   </a:tcPr>
                 </a:tc>
@@ -5012,7 +5215,7 @@
                       <a:r>
                         <a:rPr sz="800" b="1" i="0" lang="pt-BR">
                           <a:solidFill>
-                            <a:srgbClr val="9C0006"/>
+                            <a:srgbClr val="146100"/>
                           </a:solidFill>
                           <a:latin typeface="Arial"/>
                         </a:rPr>
@@ -5040,7 +5243,7 @@
                       </a:solidFill>
                     </a:lnB>
                     <a:solidFill>
-                      <a:srgbClr val="FFC7CE"/>
+                      <a:srgbClr val="CDEEC7"/>
                     </a:solidFill>
                   </a:tcPr>
                 </a:tc>
@@ -5189,7 +5392,7 @@
                       <a:r>
                         <a:rPr sz="800" b="1" i="0" lang="pt-BR">
                           <a:solidFill>
-                            <a:srgbClr val="9C0006"/>
+                            <a:srgbClr val="9C3502"/>
                           </a:solidFill>
                           <a:latin typeface="Arial"/>
                         </a:rPr>
@@ -5217,7 +5420,7 @@
                       </a:solidFill>
                     </a:lnB>
                     <a:solidFill>
-                      <a:srgbClr val="FFC7CE"/>
+                      <a:srgbClr val="FFDAB3"/>
                     </a:solidFill>
                   </a:tcPr>
                 </a:tc>
@@ -5230,7 +5433,7 @@
                       <a:r>
                         <a:rPr sz="800" b="1" i="0" lang="pt-BR">
                           <a:solidFill>
-                            <a:srgbClr val="9C0006"/>
+                            <a:srgbClr val="9C3103"/>
                           </a:solidFill>
                           <a:latin typeface="Arial"/>
                         </a:rPr>
@@ -5258,7 +5461,7 @@
                       </a:solidFill>
                     </a:lnB>
                     <a:solidFill>
-                      <a:srgbClr val="FFC7CE"/>
+                      <a:srgbClr val="FFD8B5"/>
                     </a:solidFill>
                   </a:tcPr>
                 </a:tc>
@@ -5271,7 +5474,7 @@
                       <a:r>
                         <a:rPr sz="800" b="1" i="0" lang="pt-BR">
                           <a:solidFill>
-                            <a:srgbClr val="9C0006"/>
+                            <a:srgbClr val="9C3A02"/>
                           </a:solidFill>
                           <a:latin typeface="Arial"/>
                         </a:rPr>
@@ -5299,7 +5502,7 @@
                       </a:solidFill>
                     </a:lnB>
                     <a:solidFill>
-                      <a:srgbClr val="FFC7CE"/>
+                      <a:srgbClr val="FFDBB1"/>
                     </a:solidFill>
                   </a:tcPr>
                 </a:tc>
@@ -5312,7 +5515,7 @@
                       <a:r>
                         <a:rPr sz="800" b="1" i="0" lang="pt-BR">
                           <a:solidFill>
-                            <a:srgbClr val="9C0006"/>
+                            <a:srgbClr val="9C4301"/>
                           </a:solidFill>
                           <a:latin typeface="Arial"/>
                         </a:rPr>
@@ -5340,7 +5543,7 @@
                       </a:solidFill>
                     </a:lnB>
                     <a:solidFill>
-                      <a:srgbClr val="FFC7CE"/>
+                      <a:srgbClr val="FFDFAC"/>
                     </a:solidFill>
                   </a:tcPr>
                 </a:tc>
@@ -5353,7 +5556,7 @@
                       <a:r>
                         <a:rPr sz="800" b="1" i="0" lang="pt-BR">
                           <a:solidFill>
-                            <a:srgbClr val="9C6500"/>
+                            <a:srgbClr val="756400"/>
                           </a:solidFill>
                           <a:latin typeface="Arial"/>
                         </a:rPr>
@@ -5381,7 +5584,7 @@
                       </a:solidFill>
                     </a:lnB>
                     <a:solidFill>
-                      <a:srgbClr val="FFEB9C"/>
+                      <a:srgbClr val="F1EBA8"/>
                     </a:solidFill>
                   </a:tcPr>
                 </a:tc>
@@ -5394,7 +5597,7 @@
                       <a:r>
                         <a:rPr sz="800" b="1" i="0" lang="pt-BR">
                           <a:solidFill>
-                            <a:srgbClr val="9C6500"/>
+                            <a:srgbClr val="006100"/>
                           </a:solidFill>
                           <a:latin typeface="Arial"/>
                         </a:rPr>
@@ -5422,7 +5625,7 @@
                       </a:solidFill>
                     </a:lnB>
                     <a:solidFill>
-                      <a:srgbClr val="FFEB9C"/>
+                      <a:srgbClr val="C6EFCE"/>
                     </a:solidFill>
                   </a:tcPr>
                 </a:tc>
@@ -5433,13 +5636,13 @@
       </p:graphicFrame>
       <p:sp>
         <p:nvSpPr>
-          <p:cNvPr id="18" name="Rectangle 17"/>
+          <p:cNvPr id="24" name="Rectangle 23"/>
           <p:cNvSpPr/>
           <p:nvPr/>
         </p:nvSpPr>
         <p:spPr>
           <a:xfrm>
-            <a:off x="438912" y="2588442"/>
+            <a:off x="438912" y="2762178"/>
             <a:ext cx="118872" cy="73700"/>
           </a:xfrm>
           <a:prstGeom prst="rect">
@@ -5448,7 +5651,7 @@
           <a:noFill/>
           <a:ln w="8255" cap="rnd">
             <a:solidFill>
-              <a:srgbClr val="3F7C0E"/>
+              <a:srgbClr val="1A1A1A"/>
             </a:solidFill>
             <a:round/>
           </a:ln>
@@ -5464,20 +5667,20 @@
       </p:sp>
       <p:sp>
         <p:nvSpPr>
-          <p:cNvPr id="19" name="Rectangle 18"/>
+          <p:cNvPr id="25" name="Rectangle 24"/>
           <p:cNvSpPr/>
           <p:nvPr/>
         </p:nvSpPr>
         <p:spPr>
           <a:xfrm>
-            <a:off x="454365" y="2605084"/>
+            <a:off x="454365" y="2778820"/>
             <a:ext cx="52303" cy="7726"/>
           </a:xfrm>
           <a:prstGeom prst="rect">
             <a:avLst/>
           </a:prstGeom>
           <a:solidFill>
-            <a:srgbClr val="3F7C0E"/>
+            <a:srgbClr val="1A1A1A"/>
           </a:solidFill>
           <a:ln>
             <a:noFill/>
@@ -5494,20 +5697,20 @@
       </p:sp>
       <p:sp>
         <p:nvSpPr>
-          <p:cNvPr id="20" name="Rectangle 19"/>
+          <p:cNvPr id="26" name="Rectangle 25"/>
           <p:cNvSpPr/>
           <p:nvPr/>
         </p:nvSpPr>
         <p:spPr>
           <a:xfrm>
-            <a:off x="454365" y="2620538"/>
+            <a:off x="454365" y="2794274"/>
             <a:ext cx="87965" cy="7726"/>
           </a:xfrm>
           <a:prstGeom prst="rect">
             <a:avLst/>
           </a:prstGeom>
           <a:solidFill>
-            <a:srgbClr val="3F7C0E"/>
+            <a:srgbClr val="1A1A1A"/>
           </a:solidFill>
           <a:ln>
             <a:noFill/>
@@ -5524,20 +5727,20 @@
       </p:sp>
       <p:sp>
         <p:nvSpPr>
-          <p:cNvPr id="21" name="Rectangle 20"/>
+          <p:cNvPr id="27" name="Rectangle 26"/>
           <p:cNvSpPr/>
           <p:nvPr/>
         </p:nvSpPr>
         <p:spPr>
           <a:xfrm>
-            <a:off x="454365" y="2635991"/>
+            <a:off x="454365" y="2809727"/>
             <a:ext cx="39227" cy="7726"/>
           </a:xfrm>
           <a:prstGeom prst="rect">
             <a:avLst/>
           </a:prstGeom>
           <a:solidFill>
-            <a:srgbClr val="3F7C0E"/>
+            <a:srgbClr val="1A1A1A"/>
           </a:solidFill>
           <a:ln>
             <a:noFill/>
@@ -5554,20 +5757,20 @@
       </p:sp>
       <p:sp>
         <p:nvSpPr>
-          <p:cNvPr id="22" name="Rectangle 21"/>
+          <p:cNvPr id="28" name="Rectangle 27"/>
           <p:cNvSpPr/>
           <p:nvPr/>
         </p:nvSpPr>
         <p:spPr>
           <a:xfrm>
-            <a:off x="490026" y="2662143"/>
+            <a:off x="490026" y="2835879"/>
             <a:ext cx="16642" cy="21396"/>
           </a:xfrm>
           <a:prstGeom prst="rect">
             <a:avLst/>
           </a:prstGeom>
           <a:solidFill>
-            <a:srgbClr val="3F7C0E"/>
+            <a:srgbClr val="1A1A1A"/>
           </a:solidFill>
           <a:ln>
             <a:noFill/>
@@ -5584,20 +5787,20 @@
       </p:sp>
       <p:sp>
         <p:nvSpPr>
-          <p:cNvPr id="23" name="Rectangle 22"/>
+          <p:cNvPr id="29" name="Rectangle 28"/>
           <p:cNvSpPr/>
           <p:nvPr/>
         </p:nvSpPr>
         <p:spPr>
           <a:xfrm>
-            <a:off x="467441" y="2683540"/>
+            <a:off x="467441" y="2857276"/>
             <a:ext cx="61813" cy="10698"/>
           </a:xfrm>
           <a:prstGeom prst="rect">
             <a:avLst/>
           </a:prstGeom>
           <a:solidFill>
-            <a:srgbClr val="3F7C0E"/>
+            <a:srgbClr val="1A1A1A"/>
           </a:solidFill>
           <a:ln>
             <a:noFill/>
@@ -5614,20 +5817,20 @@
       </p:sp>
       <p:sp>
         <p:nvSpPr>
-          <p:cNvPr id="24" name="Gear 9 23"/>
+          <p:cNvPr id="30" name="Gear 9 29"/>
           <p:cNvSpPr/>
           <p:nvPr/>
         </p:nvSpPr>
         <p:spPr>
           <a:xfrm>
-            <a:off x="438912" y="3069082"/>
+            <a:off x="438912" y="3242818"/>
             <a:ext cx="118872" cy="118872"/>
           </a:xfrm>
           <a:prstGeom prst="gear9">
             <a:avLst/>
           </a:prstGeom>
           <a:solidFill>
-            <a:srgbClr val="3F7C0E"/>
+            <a:srgbClr val="2F5BA8"/>
           </a:solidFill>
           <a:ln>
             <a:noFill/>
@@ -5644,13 +5847,13 @@
       </p:sp>
       <p:sp>
         <p:nvSpPr>
-          <p:cNvPr id="25" name="Oval 24"/>
+          <p:cNvPr id="31" name="Oval 30"/>
           <p:cNvSpPr/>
           <p:nvPr/>
         </p:nvSpPr>
         <p:spPr>
           <a:xfrm>
-            <a:off x="477545" y="3107715"/>
+            <a:off x="477545" y="3281451"/>
             <a:ext cx="41605" cy="41605"/>
           </a:xfrm>
           <a:prstGeom prst="ellipse">
@@ -5674,20 +5877,20 @@
       </p:sp>
       <p:sp>
         <p:nvSpPr>
-          <p:cNvPr id="26" name="Rectangle 25"/>
+          <p:cNvPr id="32" name="Rectangle 31"/>
           <p:cNvSpPr/>
           <p:nvPr/>
         </p:nvSpPr>
         <p:spPr>
           <a:xfrm rot="20006097">
-            <a:off x="451831" y="3589246"/>
+            <a:off x="451831" y="3762982"/>
             <a:ext cx="93032" cy="7726"/>
           </a:xfrm>
           <a:prstGeom prst="rect">
             <a:avLst/>
           </a:prstGeom>
           <a:solidFill>
-            <a:srgbClr val="3F7C0E"/>
+            <a:srgbClr val="2F5BA8"/>
           </a:solidFill>
           <a:ln>
             <a:noFill/>
@@ -5704,20 +5907,20 @@
       </p:sp>
       <p:sp>
         <p:nvSpPr>
-          <p:cNvPr id="27" name="Rectangle 26"/>
+          <p:cNvPr id="33" name="Rectangle 32"/>
           <p:cNvSpPr/>
           <p:nvPr/>
         </p:nvSpPr>
         <p:spPr>
           <a:xfrm rot="1593903">
-            <a:off x="451831" y="3630851"/>
+            <a:off x="451831" y="3804587"/>
             <a:ext cx="93032" cy="7726"/>
           </a:xfrm>
           <a:prstGeom prst="rect">
             <a:avLst/>
           </a:prstGeom>
           <a:solidFill>
-            <a:srgbClr val="3F7C0E"/>
+            <a:srgbClr val="2F5BA8"/>
           </a:solidFill>
           <a:ln>
             <a:noFill/>
@@ -5734,20 +5937,20 @@
       </p:sp>
       <p:sp>
         <p:nvSpPr>
-          <p:cNvPr id="28" name="Oval 27"/>
+          <p:cNvPr id="34" name="Oval 33"/>
           <p:cNvSpPr/>
           <p:nvPr/>
         </p:nvSpPr>
         <p:spPr>
           <a:xfrm>
-            <a:off x="438912" y="3596081"/>
+            <a:off x="438912" y="3769817"/>
             <a:ext cx="35661" cy="35661"/>
           </a:xfrm>
           <a:prstGeom prst="ellipse">
             <a:avLst/>
           </a:prstGeom>
           <a:solidFill>
-            <a:srgbClr val="3F7C0E"/>
+            <a:srgbClr val="2F5BA8"/>
           </a:solidFill>
           <a:ln>
             <a:noFill/>
@@ -5764,20 +5967,20 @@
       </p:sp>
       <p:sp>
         <p:nvSpPr>
-          <p:cNvPr id="29" name="Oval 28"/>
+          <p:cNvPr id="35" name="Oval 34"/>
           <p:cNvSpPr/>
           <p:nvPr/>
         </p:nvSpPr>
         <p:spPr>
           <a:xfrm>
-            <a:off x="522122" y="3554476"/>
+            <a:off x="522122" y="3728212"/>
             <a:ext cx="35661" cy="35661"/>
           </a:xfrm>
           <a:prstGeom prst="ellipse">
             <a:avLst/>
           </a:prstGeom>
           <a:solidFill>
-            <a:srgbClr val="3F7C0E"/>
+            <a:srgbClr val="2F5BA8"/>
           </a:solidFill>
           <a:ln>
             <a:noFill/>
@@ -5794,20 +5997,20 @@
       </p:sp>
       <p:sp>
         <p:nvSpPr>
-          <p:cNvPr id="30" name="Oval 29"/>
+          <p:cNvPr id="36" name="Oval 35"/>
           <p:cNvSpPr/>
           <p:nvPr/>
         </p:nvSpPr>
         <p:spPr>
           <a:xfrm>
-            <a:off x="522122" y="3637686"/>
+            <a:off x="522122" y="3811422"/>
             <a:ext cx="35661" cy="35661"/>
           </a:xfrm>
           <a:prstGeom prst="ellipse">
             <a:avLst/>
           </a:prstGeom>
           <a:solidFill>
-            <a:srgbClr val="3F7C0E"/>
+            <a:srgbClr val="2F5BA8"/>
           </a:solidFill>
           <a:ln>
             <a:noFill/>
@@ -5824,14 +6027,136 @@
       </p:sp>
       <p:sp>
         <p:nvSpPr>
-          <p:cNvPr id="31" name="TextBox 30"/>
+          <p:cNvPr id="37" name="Rounded Rectangle 36"/>
+          <p:cNvSpPr/>
+          <p:nvPr/>
+        </p:nvSpPr>
+        <p:spPr>
+          <a:xfrm>
+            <a:off x="384048" y="4176649"/>
+            <a:ext cx="4169713" cy="409702"/>
+          </a:xfrm>
+          <a:prstGeom prst="roundRect">
+            <a:avLst>
+              <a:gd name="adj" fmla="val 12000"/>
+            </a:avLst>
+          </a:prstGeom>
+          <a:solidFill>
+            <a:srgbClr val="E9ECF4"/>
+          </a:solidFill>
+          <a:ln>
+            <a:noFill/>
+          </a:ln>
+          <a:effectLst/>
+        </p:spPr>
+        <p:txBody>
+          <a:bodyPr rtlCol="0" anchor="ctr" lIns="0" rIns="0" tIns="0" bIns="0"/>
+          <a:lstStyle/>
+          <a:p>
+            <a:pPr algn="ctr"/>
+          </a:p>
+        </p:txBody>
+      </p:sp>
+      <p:sp>
+        <p:nvSpPr>
+          <p:cNvPr id="38" name="Rectangle 37"/>
+          <p:cNvSpPr/>
+          <p:nvPr/>
+        </p:nvSpPr>
+        <p:spPr>
+          <a:xfrm>
+            <a:off x="530352" y="4403445"/>
+            <a:ext cx="57058" cy="87782"/>
+          </a:xfrm>
+          <a:prstGeom prst="rect">
+            <a:avLst/>
+          </a:prstGeom>
+          <a:solidFill>
+            <a:srgbClr val="1F4E3D"/>
+          </a:solidFill>
+          <a:ln>
+            <a:noFill/>
+          </a:ln>
+          <a:effectLst/>
+        </p:spPr>
+        <p:txBody>
+          <a:bodyPr rtlCol="0" anchor="ctr" wrap="square"/>
+          <a:lstStyle/>
+          <a:p>
+            <a:pPr algn="ctr"/>
+          </a:p>
+        </p:txBody>
+      </p:sp>
+      <p:sp>
+        <p:nvSpPr>
+          <p:cNvPr id="39" name="Rectangle 38"/>
+          <p:cNvSpPr/>
+          <p:nvPr/>
+        </p:nvSpPr>
+        <p:spPr>
+          <a:xfrm>
+            <a:off x="611550" y="4341997"/>
+            <a:ext cx="57058" cy="149230"/>
+          </a:xfrm>
+          <a:prstGeom prst="rect">
+            <a:avLst/>
+          </a:prstGeom>
+          <a:solidFill>
+            <a:srgbClr val="1F4E3D"/>
+          </a:solidFill>
+          <a:ln>
+            <a:noFill/>
+          </a:ln>
+          <a:effectLst/>
+        </p:spPr>
+        <p:txBody>
+          <a:bodyPr rtlCol="0" anchor="ctr" wrap="square"/>
+          <a:lstStyle/>
+          <a:p>
+            <a:pPr algn="ctr"/>
+          </a:p>
+        </p:txBody>
+      </p:sp>
+      <p:sp>
+        <p:nvSpPr>
+          <p:cNvPr id="40" name="Rectangle 39"/>
+          <p:cNvSpPr/>
+          <p:nvPr/>
+        </p:nvSpPr>
+        <p:spPr>
+          <a:xfrm>
+            <a:off x="692749" y="4271772"/>
+            <a:ext cx="57058" cy="219456"/>
+          </a:xfrm>
+          <a:prstGeom prst="rect">
+            <a:avLst/>
+          </a:prstGeom>
+          <a:solidFill>
+            <a:srgbClr val="1F4E3D"/>
+          </a:solidFill>
+          <a:ln>
+            <a:noFill/>
+          </a:ln>
+          <a:effectLst/>
+        </p:spPr>
+        <p:txBody>
+          <a:bodyPr rtlCol="0" anchor="ctr" wrap="square"/>
+          <a:lstStyle/>
+          <a:p>
+            <a:pPr algn="ctr"/>
+          </a:p>
+        </p:txBody>
+      </p:sp>
+      <p:sp>
+        <p:nvSpPr>
+          <p:cNvPr id="41" name="TextBox 40"/>
           <p:cNvSpPr txBox="1"/>
           <p:nvPr/>
         </p:nvSpPr>
         <p:spPr>
           <a:xfrm>
-            <a:off x="384048" y="4002913"/>
-            <a:ext cx="4169713" cy="146304"/>
+            <a:off x="877824" y="4249801"/>
+            <a:ext cx="3566209" cy="147193"/>
           </a:xfrm>
           <a:prstGeom prst="rect">
             <a:avLst/>
@@ -5859,14 +6184,14 @@
       </p:sp>
       <p:sp>
         <p:nvSpPr>
-          <p:cNvPr id="32" name="TextBox 31"/>
+          <p:cNvPr id="42" name="TextBox 41"/>
           <p:cNvSpPr txBox="1"/>
           <p:nvPr/>
         </p:nvSpPr>
         <p:spPr>
           <a:xfrm>
-            <a:off x="384048" y="4159249"/>
-            <a:ext cx="4169713" cy="128016"/>
+            <a:off x="877824" y="4396994"/>
+            <a:ext cx="3566209" cy="116205"/>
           </a:xfrm>
           <a:prstGeom prst="rect">
             <a:avLst/>
@@ -5894,14 +6219,14 @@
       </p:sp>
       <p:graphicFrame>
         <p:nvGraphicFramePr>
-          <p:cNvPr id="33" name="Table 32"/>
+          <p:cNvPr id="43" name="Table 42"/>
           <p:cNvGraphicFramePr>
             <a:graphicFrameLocks noGrp="1"/>
           </p:cNvGraphicFramePr>
           <p:nvPr/>
         </p:nvGraphicFramePr>
         <p:xfrm>
-          <a:off x="384048" y="4330319"/>
+          <a:off x="384048" y="4677791"/>
           <a:ext cx="4169706" cy="1222629"/>
         </p:xfrm>
         <a:graphic>
@@ -6240,7 +6565,7 @@
                       </a:solidFill>
                     </a:lnB>
                     <a:solidFill>
-                      <a:srgbClr val="CFE8DD"/>
+                      <a:srgbClr val="DDE1EC"/>
                     </a:solidFill>
                   </a:tcPr>
                 </a:tc>
@@ -6956,13 +7281,13 @@
       </p:graphicFrame>
       <p:sp>
         <p:nvSpPr>
-          <p:cNvPr id="34" name="Oval 33"/>
+          <p:cNvPr id="44" name="Oval 43"/>
           <p:cNvSpPr/>
           <p:nvPr/>
         </p:nvSpPr>
         <p:spPr>
           <a:xfrm>
-            <a:off x="441907" y="4809379"/>
+            <a:off x="441907" y="5156851"/>
             <a:ext cx="27958" cy="27958"/>
           </a:xfrm>
           <a:prstGeom prst="ellipse">
@@ -6971,7 +7296,7 @@
           <a:noFill/>
           <a:ln w="7594" cap="rnd">
             <a:solidFill>
-              <a:srgbClr val="3F7C0E"/>
+              <a:srgbClr val="E06C3C"/>
             </a:solidFill>
             <a:round/>
           </a:ln>
@@ -6987,13 +7312,13 @@
       </p:sp>
       <p:sp>
         <p:nvSpPr>
-          <p:cNvPr id="35" name="Round Same Side Corner Rectangle 34"/>
+          <p:cNvPr id="45" name="Round Same Side Corner Rectangle 44"/>
           <p:cNvSpPr/>
           <p:nvPr/>
         </p:nvSpPr>
         <p:spPr>
           <a:xfrm>
-            <a:off x="438912" y="4835555"/>
+            <a:off x="438912" y="5183027"/>
             <a:ext cx="33949" cy="39940"/>
           </a:xfrm>
           <a:prstGeom prst="round2SameRect">
@@ -7005,7 +7330,7 @@
           <a:noFill/>
           <a:ln w="7594" cap="rnd">
             <a:solidFill>
-              <a:srgbClr val="3F7C0E"/>
+              <a:srgbClr val="E06C3C"/>
             </a:solidFill>
             <a:round/>
           </a:ln>
@@ -7021,13 +7346,13 @@
       </p:sp>
       <p:sp>
         <p:nvSpPr>
-          <p:cNvPr id="36" name="Oval 35"/>
+          <p:cNvPr id="46" name="Oval 45"/>
           <p:cNvSpPr/>
           <p:nvPr/>
         </p:nvSpPr>
         <p:spPr>
           <a:xfrm>
-            <a:off x="520363" y="4809379"/>
+            <a:off x="520363" y="5156851"/>
             <a:ext cx="27958" cy="27958"/>
           </a:xfrm>
           <a:prstGeom prst="ellipse">
@@ -7036,7 +7361,7 @@
           <a:noFill/>
           <a:ln w="7594" cap="rnd">
             <a:solidFill>
-              <a:srgbClr val="3F7C0E"/>
+              <a:srgbClr val="E06C3C"/>
             </a:solidFill>
             <a:round/>
           </a:ln>
@@ -7052,13 +7377,13 @@
       </p:sp>
       <p:sp>
         <p:nvSpPr>
-          <p:cNvPr id="37" name="Round Same Side Corner Rectangle 36"/>
+          <p:cNvPr id="47" name="Round Same Side Corner Rectangle 46"/>
           <p:cNvSpPr/>
           <p:nvPr/>
         </p:nvSpPr>
         <p:spPr>
           <a:xfrm>
-            <a:off x="517367" y="4835555"/>
+            <a:off x="517367" y="5183027"/>
             <a:ext cx="33949" cy="39940"/>
           </a:xfrm>
           <a:prstGeom prst="round2SameRect">
@@ -7070,7 +7395,7 @@
           <a:noFill/>
           <a:ln w="7594" cap="rnd">
             <a:solidFill>
-              <a:srgbClr val="3F7C0E"/>
+              <a:srgbClr val="E06C3C"/>
             </a:solidFill>
             <a:round/>
           </a:ln>
@@ -7086,13 +7411,13 @@
       </p:sp>
       <p:sp>
         <p:nvSpPr>
-          <p:cNvPr id="38" name="Round Same Side Corner Rectangle 37"/>
+          <p:cNvPr id="48" name="Round Same Side Corner Rectangle 47"/>
           <p:cNvSpPr/>
           <p:nvPr/>
         </p:nvSpPr>
         <p:spPr>
           <a:xfrm>
-            <a:off x="473979" y="4823073"/>
+            <a:off x="473979" y="5170545"/>
             <a:ext cx="48737" cy="55869"/>
           </a:xfrm>
           <a:prstGeom prst="round2SameRect">
@@ -7119,13 +7444,13 @@
       </p:sp>
       <p:sp>
         <p:nvSpPr>
-          <p:cNvPr id="39" name="Oval 38"/>
+          <p:cNvPr id="49" name="Oval 48"/>
           <p:cNvSpPr/>
           <p:nvPr/>
         </p:nvSpPr>
         <p:spPr>
           <a:xfrm>
-            <a:off x="477545" y="4791572"/>
+            <a:off x="477545" y="5139044"/>
             <a:ext cx="41605" cy="41605"/>
           </a:xfrm>
           <a:prstGeom prst="ellipse">
@@ -7149,13 +7474,13 @@
       </p:sp>
       <p:sp>
         <p:nvSpPr>
-          <p:cNvPr id="40" name="Oval 39"/>
+          <p:cNvPr id="50" name="Oval 49"/>
           <p:cNvSpPr/>
           <p:nvPr/>
         </p:nvSpPr>
         <p:spPr>
           <a:xfrm>
-            <a:off x="481705" y="4795733"/>
+            <a:off x="481705" y="5143205"/>
             <a:ext cx="33284" cy="33284"/>
           </a:xfrm>
           <a:prstGeom prst="ellipse">
@@ -7164,7 +7489,7 @@
           <a:noFill/>
           <a:ln w="7594" cap="rnd">
             <a:solidFill>
-              <a:srgbClr val="3F7C0E"/>
+              <a:srgbClr val="E06C3C"/>
             </a:solidFill>
             <a:round/>
           </a:ln>
@@ -7180,13 +7505,13 @@
       </p:sp>
       <p:sp>
         <p:nvSpPr>
-          <p:cNvPr id="41" name="Round Same Side Corner Rectangle 40"/>
+          <p:cNvPr id="51" name="Round Same Side Corner Rectangle 50"/>
           <p:cNvSpPr/>
           <p:nvPr/>
         </p:nvSpPr>
         <p:spPr>
           <a:xfrm>
-            <a:off x="478139" y="4827234"/>
+            <a:off x="478139" y="5174706"/>
             <a:ext cx="40416" cy="47548"/>
           </a:xfrm>
           <a:prstGeom prst="round2SameRect">
@@ -7198,7 +7523,7 @@
           <a:noFill/>
           <a:ln w="7594" cap="rnd">
             <a:solidFill>
-              <a:srgbClr val="3F7C0E"/>
+              <a:srgbClr val="E06C3C"/>
             </a:solidFill>
             <a:round/>
           </a:ln>
@@ -7214,13 +7539,13 @@
       </p:sp>
       <p:sp>
         <p:nvSpPr>
-          <p:cNvPr id="42" name="Donut 41"/>
+          <p:cNvPr id="52" name="Donut 51"/>
           <p:cNvSpPr/>
           <p:nvPr/>
         </p:nvSpPr>
         <p:spPr>
           <a:xfrm>
-            <a:off x="438912" y="5250815"/>
+            <a:off x="438912" y="5598287"/>
             <a:ext cx="118872" cy="118872"/>
           </a:xfrm>
           <a:prstGeom prst="donut">
@@ -7229,7 +7554,7 @@
             </a:avLst>
           </a:prstGeom>
           <a:solidFill>
-            <a:srgbClr val="3F7C0E"/>
+            <a:srgbClr val="2F8F5B"/>
           </a:solidFill>
           <a:ln>
             <a:noFill/>
@@ -7246,13 +7571,13 @@
       </p:sp>
       <p:sp>
         <p:nvSpPr>
-          <p:cNvPr id="43" name="Donut 42"/>
+          <p:cNvPr id="53" name="Donut 52"/>
           <p:cNvSpPr/>
           <p:nvPr/>
         </p:nvSpPr>
         <p:spPr>
           <a:xfrm>
-            <a:off x="468629" y="5280533"/>
+            <a:off x="468629" y="5628005"/>
             <a:ext cx="59436" cy="59436"/>
           </a:xfrm>
           <a:prstGeom prst="donut">
@@ -7261,7 +7586,7 @@
             </a:avLst>
           </a:prstGeom>
           <a:solidFill>
-            <a:srgbClr val="3F7C0E"/>
+            <a:srgbClr val="2F8F5B"/>
           </a:solidFill>
           <a:ln>
             <a:noFill/>
@@ -7278,20 +7603,20 @@
       </p:sp>
       <p:sp>
         <p:nvSpPr>
-          <p:cNvPr id="44" name="Oval 43"/>
+          <p:cNvPr id="54" name="Oval 53"/>
           <p:cNvSpPr/>
           <p:nvPr/>
         </p:nvSpPr>
         <p:spPr>
           <a:xfrm>
-            <a:off x="486460" y="5298363"/>
+            <a:off x="486460" y="5645835"/>
             <a:ext cx="23774" cy="23774"/>
           </a:xfrm>
           <a:prstGeom prst="ellipse">
             <a:avLst/>
           </a:prstGeom>
           <a:solidFill>
-            <a:srgbClr val="3F7C0E"/>
+            <a:srgbClr val="2F8F5B"/>
           </a:solidFill>
           <a:ln>
             <a:noFill/>
@@ -7308,7 +7633,7 @@
       </p:sp>
       <p:sp>
         <p:nvSpPr>
-          <p:cNvPr id="45" name="TextBox 44"/>
+          <p:cNvPr id="55" name="TextBox 54"/>
           <p:cNvSpPr txBox="1"/>
           <p:nvPr/>
         </p:nvSpPr>
@@ -7343,7 +7668,7 @@
       </p:sp>
       <p:graphicFrame>
         <p:nvGraphicFramePr>
-          <p:cNvPr id="46" name="Table 45"/>
+          <p:cNvPr id="56" name="Table 55"/>
           <p:cNvGraphicFramePr>
             <a:graphicFrameLocks noGrp="1"/>
           </p:cNvGraphicFramePr>
@@ -7380,7 +7705,7 @@
                       </a:r>
                     </a:p>
                   </a:txBody>
-                  <a:tcPr marL="109728" marR="109728" marT="45720" marB="45720" anchor="ctr">
+                  <a:tcPr marL="365760" marR="365760" marT="45720" marB="45720" anchor="ctr">
                     <a:lnL w="9525" cap="flat" cmpd="sng" algn="ctr">
                       <a:noFill/>
                     </a:lnL>
@@ -7403,9 +7728,189 @@
           </a:graphicData>
         </a:graphic>
       </p:graphicFrame>
+      <p:sp>
+        <p:nvSpPr>
+          <p:cNvPr id="57" name="Oval 56"/>
+          <p:cNvSpPr/>
+          <p:nvPr/>
+        </p:nvSpPr>
+        <p:spPr>
+          <a:xfrm>
+            <a:off x="4828081" y="1523085"/>
+            <a:ext cx="32918" cy="32918"/>
+          </a:xfrm>
+          <a:prstGeom prst="ellipse">
+            <a:avLst/>
+          </a:prstGeom>
+          <a:solidFill>
+            <a:srgbClr val="9FD4B8"/>
+          </a:solidFill>
+          <a:ln>
+            <a:noFill/>
+          </a:ln>
+          <a:effectLst/>
+        </p:spPr>
+        <p:txBody>
+          <a:bodyPr rtlCol="0" anchor="ctr" lIns="0" rIns="0" tIns="0" bIns="0"/>
+          <a:lstStyle/>
+          <a:p>
+            <a:pPr algn="ctr"/>
+          </a:p>
+        </p:txBody>
+      </p:sp>
+      <p:sp>
+        <p:nvSpPr>
+          <p:cNvPr id="58" name="Rectangle 57"/>
+          <p:cNvSpPr/>
+          <p:nvPr/>
+        </p:nvSpPr>
+        <p:spPr>
+          <a:xfrm>
+            <a:off x="4877459" y="1528023"/>
+            <a:ext cx="113385" cy="23042"/>
+          </a:xfrm>
+          <a:prstGeom prst="rect">
+            <a:avLst/>
+          </a:prstGeom>
+          <a:solidFill>
+            <a:srgbClr val="9FD4B8"/>
+          </a:solidFill>
+          <a:ln>
+            <a:noFill/>
+          </a:ln>
+          <a:effectLst/>
+        </p:spPr>
+        <p:txBody>
+          <a:bodyPr rtlCol="0" anchor="ctr" lIns="0" rIns="0" tIns="0" bIns="0"/>
+          <a:lstStyle/>
+          <a:p>
+            <a:pPr algn="ctr"/>
+          </a:p>
+        </p:txBody>
+      </p:sp>
+      <p:sp>
+        <p:nvSpPr>
+          <p:cNvPr id="59" name="Oval 58"/>
+          <p:cNvSpPr/>
+          <p:nvPr/>
+        </p:nvSpPr>
+        <p:spPr>
+          <a:xfrm>
+            <a:off x="4828081" y="1581607"/>
+            <a:ext cx="32918" cy="32918"/>
+          </a:xfrm>
+          <a:prstGeom prst="ellipse">
+            <a:avLst/>
+          </a:prstGeom>
+          <a:solidFill>
+            <a:srgbClr val="9FD4B8"/>
+          </a:solidFill>
+          <a:ln>
+            <a:noFill/>
+          </a:ln>
+          <a:effectLst/>
+        </p:spPr>
+        <p:txBody>
+          <a:bodyPr rtlCol="0" anchor="ctr" lIns="0" rIns="0" tIns="0" bIns="0"/>
+          <a:lstStyle/>
+          <a:p>
+            <a:pPr algn="ctr"/>
+          </a:p>
+        </p:txBody>
+      </p:sp>
+      <p:sp>
+        <p:nvSpPr>
+          <p:cNvPr id="60" name="Rectangle 59"/>
+          <p:cNvSpPr/>
+          <p:nvPr/>
+        </p:nvSpPr>
+        <p:spPr>
+          <a:xfrm>
+            <a:off x="4877459" y="1586544"/>
+            <a:ext cx="113385" cy="23042"/>
+          </a:xfrm>
+          <a:prstGeom prst="rect">
+            <a:avLst/>
+          </a:prstGeom>
+          <a:solidFill>
+            <a:srgbClr val="9FD4B8"/>
+          </a:solidFill>
+          <a:ln>
+            <a:noFill/>
+          </a:ln>
+          <a:effectLst/>
+        </p:spPr>
+        <p:txBody>
+          <a:bodyPr rtlCol="0" anchor="ctr" lIns="0" rIns="0" tIns="0" bIns="0"/>
+          <a:lstStyle/>
+          <a:p>
+            <a:pPr algn="ctr"/>
+          </a:p>
+        </p:txBody>
+      </p:sp>
+      <p:sp>
+        <p:nvSpPr>
+          <p:cNvPr id="61" name="Oval 60"/>
+          <p:cNvSpPr/>
+          <p:nvPr/>
+        </p:nvSpPr>
+        <p:spPr>
+          <a:xfrm>
+            <a:off x="4828081" y="1640128"/>
+            <a:ext cx="32918" cy="32918"/>
+          </a:xfrm>
+          <a:prstGeom prst="ellipse">
+            <a:avLst/>
+          </a:prstGeom>
+          <a:solidFill>
+            <a:srgbClr val="9FD4B8"/>
+          </a:solidFill>
+          <a:ln>
+            <a:noFill/>
+          </a:ln>
+          <a:effectLst/>
+        </p:spPr>
+        <p:txBody>
+          <a:bodyPr rtlCol="0" anchor="ctr" lIns="0" rIns="0" tIns="0" bIns="0"/>
+          <a:lstStyle/>
+          <a:p>
+            <a:pPr algn="ctr"/>
+          </a:p>
+        </p:txBody>
+      </p:sp>
+      <p:sp>
+        <p:nvSpPr>
+          <p:cNvPr id="62" name="Rectangle 61"/>
+          <p:cNvSpPr/>
+          <p:nvPr/>
+        </p:nvSpPr>
+        <p:spPr>
+          <a:xfrm>
+            <a:off x="4877459" y="1645066"/>
+            <a:ext cx="113385" cy="23042"/>
+          </a:xfrm>
+          <a:prstGeom prst="rect">
+            <a:avLst/>
+          </a:prstGeom>
+          <a:solidFill>
+            <a:srgbClr val="9FD4B8"/>
+          </a:solidFill>
+          <a:ln>
+            <a:noFill/>
+          </a:ln>
+          <a:effectLst/>
+        </p:spPr>
+        <p:txBody>
+          <a:bodyPr rtlCol="0" anchor="ctr" lIns="0" rIns="0" tIns="0" bIns="0"/>
+          <a:lstStyle/>
+          <a:p>
+            <a:pPr algn="ctr"/>
+          </a:p>
+        </p:txBody>
+      </p:sp>
       <p:graphicFrame>
         <p:nvGraphicFramePr>
-          <p:cNvPr id="47" name="Table 46"/>
+          <p:cNvPr id="63" name="Table 62"/>
           <p:cNvGraphicFramePr>
             <a:graphicFrameLocks noGrp="1"/>
           </p:cNvGraphicFramePr>
@@ -9727,7 +10232,7 @@
       </p:graphicFrame>
       <p:sp>
         <p:nvSpPr>
-          <p:cNvPr id="48" name="Oval 47"/>
+          <p:cNvPr id="64" name="Oval 63"/>
           <p:cNvSpPr/>
           <p:nvPr/>
         </p:nvSpPr>
@@ -9766,7 +10271,7 @@
       </p:sp>
       <p:sp>
         <p:nvSpPr>
-          <p:cNvPr id="49" name="Oval 48"/>
+          <p:cNvPr id="65" name="Oval 64"/>
           <p:cNvSpPr/>
           <p:nvPr/>
         </p:nvSpPr>
@@ -9805,7 +10310,7 @@
       </p:sp>
       <p:sp>
         <p:nvSpPr>
-          <p:cNvPr id="50" name="Oval 49"/>
+          <p:cNvPr id="66" name="Oval 65"/>
           <p:cNvSpPr/>
           <p:nvPr/>
         </p:nvSpPr>
@@ -9844,7 +10349,7 @@
       </p:sp>
       <p:sp>
         <p:nvSpPr>
-          <p:cNvPr id="51" name="Oval 50"/>
+          <p:cNvPr id="67" name="Oval 66"/>
           <p:cNvSpPr/>
           <p:nvPr/>
         </p:nvSpPr>
@@ -9883,7 +10388,7 @@
       </p:sp>
       <p:sp>
         <p:nvSpPr>
-          <p:cNvPr id="52" name="Oval 51"/>
+          <p:cNvPr id="68" name="Oval 67"/>
           <p:cNvSpPr/>
           <p:nvPr/>
         </p:nvSpPr>

--- a/output/260925__Status_frente2_resultados.pptx
+++ b/output/260925__Status_frente2_resultados.pptx
@@ -4525,7 +4525,7 @@
                       </a:r>
                     </a:p>
                   </a:txBody>
-                  <a:tcPr marL="219456" marR="219456" marT="36576" marB="36576" anchor="ctr">
+                  <a:tcPr marL="256032" marR="256032" marT="36576" marB="36576" anchor="ctr">
                     <a:lnL w="6350" cap="flat" cmpd="sng" algn="ctr">
                       <a:noFill/>
                     </a:lnL>
@@ -4628,7 +4628,7 @@
                       <a:r>
                         <a:rPr sz="800" b="1" i="0" lang="pt-BR">
                           <a:solidFill>
-                            <a:srgbClr val="616300"/>
+                            <a:srgbClr val="787C12"/>
                           </a:solidFill>
                           <a:latin typeface="Arial"/>
                         </a:rPr>
@@ -4656,7 +4656,7 @@
                       </a:solidFill>
                     </a:lnB>
                     <a:solidFill>
-                      <a:srgbClr val="E9ECAE"/>
+                      <a:srgbClr val="E9E9CA"/>
                     </a:solidFill>
                   </a:tcPr>
                 </a:tc>
@@ -4669,7 +4669,7 @@
                       <a:r>
                         <a:rPr sz="800" b="1" i="0" lang="pt-BR">
                           <a:solidFill>
-                            <a:srgbClr val="616300"/>
+                            <a:srgbClr val="787C12"/>
                           </a:solidFill>
                           <a:latin typeface="Arial"/>
                         </a:rPr>
@@ -4697,7 +4697,7 @@
                       </a:solidFill>
                     </a:lnB>
                     <a:solidFill>
-                      <a:srgbClr val="E9ECAE"/>
+                      <a:srgbClr val="E9E9CA"/>
                     </a:solidFill>
                   </a:tcPr>
                 </a:tc>
@@ -4710,7 +4710,7 @@
                       <a:r>
                         <a:rPr sz="800" b="1" i="0" lang="pt-BR">
                           <a:solidFill>
-                            <a:srgbClr val="5A6300"/>
+                            <a:srgbClr val="737C15"/>
                           </a:solidFill>
                           <a:latin typeface="Arial"/>
                         </a:rPr>
@@ -4738,7 +4738,7 @@
                       </a:solidFill>
                     </a:lnB>
                     <a:solidFill>
-                      <a:srgbClr val="E6ECB1"/>
+                      <a:srgbClr val="E8E9CB"/>
                     </a:solidFill>
                   </a:tcPr>
                 </a:tc>
@@ -4751,7 +4751,7 @@
                       <a:r>
                         <a:rPr sz="800" b="1" i="0" lang="pt-BR">
                           <a:solidFill>
-                            <a:srgbClr val="536300"/>
+                            <a:srgbClr val="6E7C17"/>
                           </a:solidFill>
                           <a:latin typeface="Arial"/>
                         </a:rPr>
@@ -4779,7 +4779,7 @@
                       </a:solidFill>
                     </a:lnB>
                     <a:solidFill>
-                      <a:srgbClr val="E4ECB3"/>
+                      <a:srgbClr val="E6E9CB"/>
                     </a:solidFill>
                   </a:tcPr>
                 </a:tc>
@@ -4792,7 +4792,7 @@
                       <a:r>
                         <a:rPr sz="800" b="1" i="0" lang="pt-BR">
                           <a:solidFill>
-                            <a:srgbClr val="146100"/>
+                            <a:srgbClr val="3E7C2B"/>
                           </a:solidFill>
                           <a:latin typeface="Arial"/>
                         </a:rPr>
@@ -4820,7 +4820,7 @@
                       </a:solidFill>
                     </a:lnB>
                     <a:solidFill>
-                      <a:srgbClr val="CDEEC7"/>
+                      <a:srgbClr val="D8E9CF"/>
                     </a:solidFill>
                   </a:tcPr>
                 </a:tc>
@@ -4833,7 +4833,7 @@
                       <a:r>
                         <a:rPr sz="800" b="1" i="0" lang="pt-BR">
                           <a:solidFill>
-                            <a:srgbClr val="006100"/>
+                            <a:srgbClr val="2E7D32"/>
                           </a:solidFill>
                           <a:latin typeface="Arial"/>
                         </a:rPr>
@@ -4861,7 +4861,7 @@
                       </a:solidFill>
                     </a:lnB>
                     <a:solidFill>
-                      <a:srgbClr val="C6EFCE"/>
+                      <a:srgbClr val="D4E9D1"/>
                     </a:solidFill>
                   </a:tcPr>
                 </a:tc>
@@ -4907,7 +4907,7 @@
                       </a:r>
                     </a:p>
                   </a:txBody>
-                  <a:tcPr marL="219456" marR="219456" marT="36576" marB="36576" anchor="ctr">
+                  <a:tcPr marL="256032" marR="256032" marT="36576" marB="36576" anchor="ctr">
                     <a:lnL w="6350" cap="flat" cmpd="sng" algn="ctr">
                       <a:noFill/>
                     </a:lnL>
@@ -5010,7 +5010,7 @@
                       <a:r>
                         <a:rPr sz="800" b="1" i="0" lang="pt-BR">
                           <a:solidFill>
-                            <a:srgbClr val="226100"/>
+                            <a:srgbClr val="487C26"/>
                           </a:solidFill>
                           <a:latin typeface="Arial"/>
                         </a:rPr>
@@ -5038,7 +5038,7 @@
                       </a:solidFill>
                     </a:lnB>
                     <a:solidFill>
-                      <a:srgbClr val="D2EEC2"/>
+                      <a:srgbClr val="DBE9CE"/>
                     </a:solidFill>
                   </a:tcPr>
                 </a:tc>
@@ -5051,7 +5051,7 @@
                       <a:r>
                         <a:rPr sz="800" b="1" i="0" lang="pt-BR">
                           <a:solidFill>
-                            <a:srgbClr val="9C2803"/>
+                            <a:srgbClr val="AC4A21"/>
                           </a:solidFill>
                           <a:latin typeface="Arial"/>
                         </a:rPr>
@@ -5079,7 +5079,7 @@
                       </a:solidFill>
                     </a:lnB>
                     <a:solidFill>
-                      <a:srgbClr val="FFD5BA"/>
+                      <a:srgbClr val="F6D6C9"/>
                     </a:solidFill>
                   </a:tcPr>
                 </a:tc>
@@ -5092,7 +5092,7 @@
                       <a:r>
                         <a:rPr sz="800" b="1" i="0" lang="pt-BR">
                           <a:solidFill>
-                            <a:srgbClr val="9C3E02"/>
+                            <a:srgbClr val="A95D14"/>
                           </a:solidFill>
                           <a:latin typeface="Arial"/>
                         </a:rPr>
@@ -5120,7 +5120,7 @@
                       </a:solidFill>
                     </a:lnB>
                     <a:solidFill>
-                      <a:srgbClr val="FFDDAE"/>
+                      <a:srgbClr val="F6DDC8"/>
                     </a:solidFill>
                   </a:tcPr>
                 </a:tc>
@@ -5133,7 +5133,7 @@
                       <a:r>
                         <a:rPr sz="800" b="1" i="0" lang="pt-BR">
                           <a:solidFill>
-                            <a:srgbClr val="8A6400"/>
+                            <a:srgbClr val="987C05"/>
                           </a:solidFill>
                           <a:latin typeface="Arial"/>
                         </a:rPr>
@@ -5161,7 +5161,7 @@
                       </a:solidFill>
                     </a:lnB>
                     <a:solidFill>
-                      <a:srgbClr val="F8EBA1"/>
+                      <a:srgbClr val="F3E9C8"/>
                     </a:solidFill>
                   </a:tcPr>
                 </a:tc>
@@ -5174,7 +5174,7 @@
                       <a:r>
                         <a:rPr sz="800" b="1" i="0" lang="pt-BR">
                           <a:solidFill>
-                            <a:srgbClr val="006100"/>
+                            <a:srgbClr val="2E7D32"/>
                           </a:solidFill>
                           <a:latin typeface="Arial"/>
                         </a:rPr>
@@ -5202,7 +5202,7 @@
                       </a:solidFill>
                     </a:lnB>
                     <a:solidFill>
-                      <a:srgbClr val="C6EFCE"/>
+                      <a:srgbClr val="D4E9D1"/>
                     </a:solidFill>
                   </a:tcPr>
                 </a:tc>
@@ -5215,7 +5215,7 @@
                       <a:r>
                         <a:rPr sz="800" b="1" i="0" lang="pt-BR">
                           <a:solidFill>
-                            <a:srgbClr val="146100"/>
+                            <a:srgbClr val="3E7C2B"/>
                           </a:solidFill>
                           <a:latin typeface="Arial"/>
                         </a:rPr>
@@ -5243,7 +5243,7 @@
                       </a:solidFill>
                     </a:lnB>
                     <a:solidFill>
-                      <a:srgbClr val="CDEEC7"/>
+                      <a:srgbClr val="D8E9CF"/>
                     </a:solidFill>
                   </a:tcPr>
                 </a:tc>
@@ -5289,7 +5289,7 @@
                       </a:r>
                     </a:p>
                   </a:txBody>
-                  <a:tcPr marL="219456" marR="219456" marT="36576" marB="36576" anchor="ctr">
+                  <a:tcPr marL="256032" marR="256032" marT="36576" marB="36576" anchor="ctr">
                     <a:lnL w="6350" cap="flat" cmpd="sng" algn="ctr">
                       <a:noFill/>
                     </a:lnL>
@@ -5392,7 +5392,7 @@
                       <a:r>
                         <a:rPr sz="800" b="1" i="0" lang="pt-BR">
                           <a:solidFill>
-                            <a:srgbClr val="9C3502"/>
+                            <a:srgbClr val="AA5519"/>
                           </a:solidFill>
                           <a:latin typeface="Arial"/>
                         </a:rPr>
@@ -5420,7 +5420,7 @@
                       </a:solidFill>
                     </a:lnB>
                     <a:solidFill>
-                      <a:srgbClr val="FFDAB3"/>
+                      <a:srgbClr val="F6DAC8"/>
                     </a:solidFill>
                   </a:tcPr>
                 </a:tc>
@@ -5433,7 +5433,7 @@
                       <a:r>
                         <a:rPr sz="800" b="1" i="0" lang="pt-BR">
                           <a:solidFill>
-                            <a:srgbClr val="9C3103"/>
+                            <a:srgbClr val="AB521C"/>
                           </a:solidFill>
                           <a:latin typeface="Arial"/>
                         </a:rPr>
@@ -5461,7 +5461,7 @@
                       </a:solidFill>
                     </a:lnB>
                     <a:solidFill>
-                      <a:srgbClr val="FFD8B5"/>
+                      <a:srgbClr val="F6D9C9"/>
                     </a:solidFill>
                   </a:tcPr>
                 </a:tc>
@@ -5474,7 +5474,7 @@
                       <a:r>
                         <a:rPr sz="800" b="1" i="0" lang="pt-BR">
                           <a:solidFill>
-                            <a:srgbClr val="9C3A02"/>
+                            <a:srgbClr val="AA5917"/>
                           </a:solidFill>
                           <a:latin typeface="Arial"/>
                         </a:rPr>
@@ -5502,7 +5502,7 @@
                       </a:solidFill>
                     </a:lnB>
                     <a:solidFill>
-                      <a:srgbClr val="FFDBB1"/>
+                      <a:srgbClr val="F6DCC8"/>
                     </a:solidFill>
                   </a:tcPr>
                 </a:tc>
@@ -5515,7 +5515,7 @@
                       <a:r>
                         <a:rPr sz="800" b="1" i="0" lang="pt-BR">
                           <a:solidFill>
-                            <a:srgbClr val="9C4301"/>
+                            <a:srgbClr val="A96012"/>
                           </a:solidFill>
                           <a:latin typeface="Arial"/>
                         </a:rPr>
@@ -5543,7 +5543,7 @@
                       </a:solidFill>
                     </a:lnB>
                     <a:solidFill>
-                      <a:srgbClr val="FFDFAC"/>
+                      <a:srgbClr val="F6DFC8"/>
                     </a:solidFill>
                   </a:tcPr>
                 </a:tc>
@@ -5556,7 +5556,7 @@
                       <a:r>
                         <a:rPr sz="800" b="1" i="0" lang="pt-BR">
                           <a:solidFill>
-                            <a:srgbClr val="756400"/>
+                            <a:srgbClr val="887C0C"/>
                           </a:solidFill>
                           <a:latin typeface="Arial"/>
                         </a:rPr>
@@ -5584,7 +5584,7 @@
                       </a:solidFill>
                     </a:lnB>
                     <a:solidFill>
-                      <a:srgbClr val="F1EBA8"/>
+                      <a:srgbClr val="EEE9C9"/>
                     </a:solidFill>
                   </a:tcPr>
                 </a:tc>
@@ -5597,7 +5597,7 @@
                       <a:r>
                         <a:rPr sz="800" b="1" i="0" lang="pt-BR">
                           <a:solidFill>
-                            <a:srgbClr val="006100"/>
+                            <a:srgbClr val="2E7D32"/>
                           </a:solidFill>
                           <a:latin typeface="Arial"/>
                         </a:rPr>
@@ -5625,7 +5625,7 @@
                       </a:solidFill>
                     </a:lnB>
                     <a:solidFill>
-                      <a:srgbClr val="C6EFCE"/>
+                      <a:srgbClr val="D4E9D1"/>
                     </a:solidFill>
                   </a:tcPr>
                 </a:tc>
@@ -5642,14 +5642,14 @@
         </p:nvSpPr>
         <p:spPr>
           <a:xfrm>
-            <a:off x="438912" y="2762178"/>
-            <a:ext cx="118872" cy="73700"/>
+            <a:off x="438912" y="2745353"/>
+            <a:ext cx="155448" cy="96377"/>
           </a:xfrm>
           <a:prstGeom prst="rect">
             <a:avLst/>
           </a:prstGeom>
           <a:noFill/>
-          <a:ln w="8255" cap="rnd">
+          <a:ln w="10795" cap="rnd">
             <a:solidFill>
               <a:srgbClr val="1A1A1A"/>
             </a:solidFill>
@@ -5673,8 +5673,8 @@
         </p:nvSpPr>
         <p:spPr>
           <a:xfrm>
-            <a:off x="454365" y="2778820"/>
-            <a:ext cx="52303" cy="7726"/>
+            <a:off x="459120" y="2767116"/>
+            <a:ext cx="68397" cy="10104"/>
           </a:xfrm>
           <a:prstGeom prst="rect">
             <a:avLst/>
@@ -5703,8 +5703,8 @@
         </p:nvSpPr>
         <p:spPr>
           <a:xfrm>
-            <a:off x="454365" y="2794274"/>
-            <a:ext cx="87965" cy="7726"/>
+            <a:off x="459120" y="2787324"/>
+            <a:ext cx="115031" cy="10104"/>
           </a:xfrm>
           <a:prstGeom prst="rect">
             <a:avLst/>
@@ -5733,8 +5733,8 @@
         </p:nvSpPr>
         <p:spPr>
           <a:xfrm>
-            <a:off x="454365" y="2809727"/>
-            <a:ext cx="39227" cy="7726"/>
+            <a:off x="459120" y="2807533"/>
+            <a:ext cx="51297" cy="10104"/>
           </a:xfrm>
           <a:prstGeom prst="rect">
             <a:avLst/>
@@ -5763,8 +5763,8 @@
         </p:nvSpPr>
         <p:spPr>
           <a:xfrm>
-            <a:off x="490026" y="2835879"/>
-            <a:ext cx="16642" cy="21396"/>
+            <a:off x="505754" y="2841731"/>
+            <a:ext cx="21762" cy="27980"/>
           </a:xfrm>
           <a:prstGeom prst="rect">
             <a:avLst/>
@@ -5793,8 +5793,8 @@
         </p:nvSpPr>
         <p:spPr>
           <a:xfrm>
-            <a:off x="467441" y="2857276"/>
-            <a:ext cx="61813" cy="10698"/>
+            <a:off x="476219" y="2869712"/>
+            <a:ext cx="80832" cy="13990"/>
           </a:xfrm>
           <a:prstGeom prst="rect">
             <a:avLst/>
@@ -5817,16 +5817,16 @@
       </p:sp>
       <p:sp>
         <p:nvSpPr>
-          <p:cNvPr id="30" name="Gear 9 29"/>
+          <p:cNvPr id="30" name="Oval 29"/>
           <p:cNvSpPr/>
           <p:nvPr/>
         </p:nvSpPr>
         <p:spPr>
           <a:xfrm>
-            <a:off x="438912" y="3242818"/>
-            <a:ext cx="118872" cy="118872"/>
+            <a:off x="438912" y="3224530"/>
+            <a:ext cx="155448" cy="155448"/>
           </a:xfrm>
-          <a:prstGeom prst="gear9">
+          <a:prstGeom prst="ellipse">
             <a:avLst/>
           </a:prstGeom>
           <a:solidFill>
@@ -5838,7 +5838,7 @@
           <a:effectLst/>
         </p:spPr>
         <p:txBody>
-          <a:bodyPr rtlCol="0" anchor="ctr" wrap="square"/>
+          <a:bodyPr rtlCol="0" anchor="ctr" lIns="0" rIns="0" tIns="0" bIns="0"/>
           <a:lstStyle/>
           <a:p>
             <a:pPr algn="ctr"/>
@@ -5847,14 +5847,136 @@
       </p:sp>
       <p:sp>
         <p:nvSpPr>
-          <p:cNvPr id="31" name="Oval 30"/>
+          <p:cNvPr id="31" name="Rounded Rectangle 30"/>
           <p:cNvSpPr/>
           <p:nvPr/>
         </p:nvSpPr>
         <p:spPr>
           <a:xfrm>
-            <a:off x="477545" y="3281451"/>
-            <a:ext cx="41605" cy="41605"/>
+            <a:off x="476219" y="3254376"/>
+            <a:ext cx="80832" cy="66283"/>
+          </a:xfrm>
+          <a:prstGeom prst="roundRect">
+            <a:avLst>
+              <a:gd name="adj" fmla="val 35000"/>
+            </a:avLst>
+          </a:prstGeom>
+          <a:solidFill>
+            <a:srgbClr val="FFFFFF"/>
+          </a:solidFill>
+          <a:ln>
+            <a:noFill/>
+          </a:ln>
+          <a:effectLst/>
+        </p:spPr>
+        <p:txBody>
+          <a:bodyPr rtlCol="0" anchor="ctr" lIns="0" rIns="0" tIns="0" bIns="0"/>
+          <a:lstStyle/>
+          <a:p>
+            <a:pPr algn="ctr"/>
+          </a:p>
+        </p:txBody>
+      </p:sp>
+      <p:sp>
+        <p:nvSpPr>
+          <p:cNvPr id="32" name="Oval 31"/>
+          <p:cNvSpPr/>
+          <p:nvPr/>
+        </p:nvSpPr>
+        <p:spPr>
+          <a:xfrm>
+            <a:off x="485515" y="3276605"/>
+            <a:ext cx="20208" cy="20208"/>
+          </a:xfrm>
+          <a:prstGeom prst="ellipse">
+            <a:avLst/>
+          </a:prstGeom>
+          <a:solidFill>
+            <a:srgbClr val="2F5BA8"/>
+          </a:solidFill>
+          <a:ln>
+            <a:noFill/>
+          </a:ln>
+          <a:effectLst/>
+        </p:spPr>
+        <p:txBody>
+          <a:bodyPr rtlCol="0" anchor="ctr" lIns="0" rIns="0" tIns="0" bIns="0"/>
+          <a:lstStyle/>
+          <a:p>
+            <a:pPr algn="ctr"/>
+          </a:p>
+        </p:txBody>
+      </p:sp>
+      <p:sp>
+        <p:nvSpPr>
+          <p:cNvPr id="33" name="Oval 32"/>
+          <p:cNvSpPr/>
+          <p:nvPr/>
+        </p:nvSpPr>
+        <p:spPr>
+          <a:xfrm>
+            <a:off x="527548" y="3276605"/>
+            <a:ext cx="20208" cy="20208"/>
+          </a:xfrm>
+          <a:prstGeom prst="ellipse">
+            <a:avLst/>
+          </a:prstGeom>
+          <a:solidFill>
+            <a:srgbClr val="2F5BA8"/>
+          </a:solidFill>
+          <a:ln>
+            <a:noFill/>
+          </a:ln>
+          <a:effectLst/>
+        </p:spPr>
+        <p:txBody>
+          <a:bodyPr rtlCol="0" anchor="ctr" lIns="0" rIns="0" tIns="0" bIns="0"/>
+          <a:lstStyle/>
+          <a:p>
+            <a:pPr algn="ctr"/>
+          </a:p>
+        </p:txBody>
+      </p:sp>
+      <p:sp>
+        <p:nvSpPr>
+          <p:cNvPr id="34" name="Rectangle 33"/>
+          <p:cNvSpPr/>
+          <p:nvPr/>
+        </p:nvSpPr>
+        <p:spPr>
+          <a:xfrm>
+            <a:off x="511195" y="3233856"/>
+            <a:ext cx="10881" cy="20208"/>
+          </a:xfrm>
+          <a:prstGeom prst="rect">
+            <a:avLst/>
+          </a:prstGeom>
+          <a:solidFill>
+            <a:srgbClr val="FFFFFF"/>
+          </a:solidFill>
+          <a:ln>
+            <a:noFill/>
+          </a:ln>
+          <a:effectLst/>
+        </p:spPr>
+        <p:txBody>
+          <a:bodyPr rtlCol="0" anchor="ctr" lIns="0" rIns="0" tIns="0" bIns="0"/>
+          <a:lstStyle/>
+          <a:p>
+            <a:pPr algn="ctr"/>
+          </a:p>
+        </p:txBody>
+      </p:sp>
+      <p:sp>
+        <p:nvSpPr>
+          <p:cNvPr id="35" name="Oval 34"/>
+          <p:cNvSpPr/>
+          <p:nvPr/>
+        </p:nvSpPr>
+        <p:spPr>
+          <a:xfrm>
+            <a:off x="507309" y="3226861"/>
+            <a:ext cx="18653" cy="18653"/>
           </a:xfrm>
           <a:prstGeom prst="ellipse">
             <a:avLst/>
@@ -5868,7 +5990,7 @@
           <a:effectLst/>
         </p:spPr>
         <p:txBody>
-          <a:bodyPr rtlCol="0" anchor="ctr" wrap="square"/>
+          <a:bodyPr rtlCol="0" anchor="ctr" lIns="0" rIns="0" tIns="0" bIns="0"/>
           <a:lstStyle/>
           <a:p>
             <a:pPr algn="ctr"/>
@@ -5877,74 +5999,14 @@
       </p:sp>
       <p:sp>
         <p:nvSpPr>
-          <p:cNvPr id="32" name="Rectangle 31"/>
+          <p:cNvPr id="36" name="Oval 35"/>
           <p:cNvSpPr/>
           <p:nvPr/>
         </p:nvSpPr>
         <p:spPr>
-          <a:xfrm rot="20006097">
-            <a:off x="451831" y="3762982"/>
-            <a:ext cx="93032" cy="7726"/>
-          </a:xfrm>
-          <a:prstGeom prst="rect">
-            <a:avLst/>
-          </a:prstGeom>
-          <a:solidFill>
-            <a:srgbClr val="2F5BA8"/>
-          </a:solidFill>
-          <a:ln>
-            <a:noFill/>
-          </a:ln>
-          <a:effectLst/>
-        </p:spPr>
-        <p:txBody>
-          <a:bodyPr rtlCol="0" anchor="ctr" wrap="square"/>
-          <a:lstStyle/>
-          <a:p>
-            <a:pPr algn="ctr"/>
-          </a:p>
-        </p:txBody>
-      </p:sp>
-      <p:sp>
-        <p:nvSpPr>
-          <p:cNvPr id="33" name="Rectangle 32"/>
-          <p:cNvSpPr/>
-          <p:nvPr/>
-        </p:nvSpPr>
-        <p:spPr>
-          <a:xfrm rot="1593903">
-            <a:off x="451831" y="3804587"/>
-            <a:ext cx="93032" cy="7726"/>
-          </a:xfrm>
-          <a:prstGeom prst="rect">
-            <a:avLst/>
-          </a:prstGeom>
-          <a:solidFill>
-            <a:srgbClr val="2F5BA8"/>
-          </a:solidFill>
-          <a:ln>
-            <a:noFill/>
-          </a:ln>
-          <a:effectLst/>
-        </p:spPr>
-        <p:txBody>
-          <a:bodyPr rtlCol="0" anchor="ctr" wrap="square"/>
-          <a:lstStyle/>
-          <a:p>
-            <a:pPr algn="ctr"/>
-          </a:p>
-        </p:txBody>
-      </p:sp>
-      <p:sp>
-        <p:nvSpPr>
-          <p:cNvPr id="34" name="Oval 33"/>
-          <p:cNvSpPr/>
-          <p:nvPr/>
-        </p:nvSpPr>
-        <p:spPr>
           <a:xfrm>
-            <a:off x="438912" y="3769817"/>
-            <a:ext cx="35661" cy="35661"/>
+            <a:off x="438912" y="3709924"/>
+            <a:ext cx="155448" cy="155448"/>
           </a:xfrm>
           <a:prstGeom prst="ellipse">
             <a:avLst/>
@@ -5958,7 +6020,7 @@
           <a:effectLst/>
         </p:spPr>
         <p:txBody>
-          <a:bodyPr rtlCol="0" anchor="ctr" wrap="square"/>
+          <a:bodyPr rtlCol="0" anchor="ctr" lIns="0" rIns="0" tIns="0" bIns="0"/>
           <a:lstStyle/>
           <a:p>
             <a:pPr algn="ctr"/>
@@ -5967,14 +6029,94 @@
       </p:sp>
       <p:sp>
         <p:nvSpPr>
-          <p:cNvPr id="35" name="Oval 34"/>
+          <p:cNvPr id="37" name="Rounded Rectangle 36"/>
           <p:cNvSpPr/>
           <p:nvPr/>
         </p:nvSpPr>
         <p:spPr>
           <a:xfrm>
-            <a:off x="522122" y="3728212"/>
-            <a:ext cx="35661" cy="35661"/>
+            <a:off x="470001" y="3741262"/>
+            <a:ext cx="93268" cy="68397"/>
+          </a:xfrm>
+          <a:prstGeom prst="roundRect">
+            <a:avLst>
+              <a:gd name="adj" fmla="val 35000"/>
+            </a:avLst>
+          </a:prstGeom>
+          <a:solidFill>
+            <a:srgbClr val="FFFFFF"/>
+          </a:solidFill>
+          <a:ln>
+            <a:noFill/>
+          </a:ln>
+          <a:effectLst/>
+        </p:spPr>
+        <p:txBody>
+          <a:bodyPr rtlCol="0" anchor="ctr" lIns="0" rIns="0" tIns="0" bIns="0"/>
+          <a:lstStyle/>
+          <a:p>
+            <a:pPr algn="ctr"/>
+          </a:p>
+        </p:txBody>
+      </p:sp>
+      <p:sp>
+        <p:nvSpPr>
+          <p:cNvPr id="38" name="Freeform 37"/>
+          <p:cNvSpPr/>
+          <p:nvPr/>
+        </p:nvSpPr>
+        <p:spPr>
+          <a:xfrm>
+            <a:off x="479328" y="3808104"/>
+            <a:ext cx="24250" cy="23318"/>
+          </a:xfrm>
+          <a:custGeom>
+            <a:avLst/>
+            <a:gdLst/>
+            <a:ahLst/>
+            <a:cxnLst/>
+            <a:rect l="l" t="t" r="r" b="b"/>
+            <a:pathLst>
+              <a:path w="24250" h="23318">
+                <a:moveTo>
+                  <a:pt x="9327" y="0"/>
+                </a:moveTo>
+                <a:lnTo>
+                  <a:pt x="0" y="23318"/>
+                </a:lnTo>
+                <a:lnTo>
+                  <a:pt x="24250" y="0"/>
+                </a:lnTo>
+                <a:close/>
+              </a:path>
+            </a:pathLst>
+          </a:custGeom>
+          <a:solidFill>
+            <a:srgbClr val="FFFFFF"/>
+          </a:solidFill>
+          <a:ln>
+            <a:noFill/>
+          </a:ln>
+          <a:effectLst/>
+        </p:spPr>
+        <p:txBody>
+          <a:bodyPr rtlCol="0" anchor="ctr"/>
+          <a:lstStyle/>
+          <a:p>
+            <a:pPr algn="ctr"/>
+          </a:p>
+        </p:txBody>
+      </p:sp>
+      <p:sp>
+        <p:nvSpPr>
+          <p:cNvPr id="39" name="Oval 38"/>
+          <p:cNvSpPr/>
+          <p:nvPr/>
+        </p:nvSpPr>
+        <p:spPr>
+          <a:xfrm>
+            <a:off x="491142" y="3768621"/>
+            <a:ext cx="13679" cy="13679"/>
           </a:xfrm>
           <a:prstGeom prst="ellipse">
             <a:avLst/>
@@ -5988,7 +6130,7 @@
           <a:effectLst/>
         </p:spPr>
         <p:txBody>
-          <a:bodyPr rtlCol="0" anchor="ctr" wrap="square"/>
+          <a:bodyPr rtlCol="0" anchor="ctr" lIns="0" rIns="0" tIns="0" bIns="0"/>
           <a:lstStyle/>
           <a:p>
             <a:pPr algn="ctr"/>
@@ -5997,14 +6139,14 @@
       </p:sp>
       <p:sp>
         <p:nvSpPr>
-          <p:cNvPr id="36" name="Oval 35"/>
+          <p:cNvPr id="40" name="Oval 39"/>
           <p:cNvSpPr/>
           <p:nvPr/>
         </p:nvSpPr>
         <p:spPr>
           <a:xfrm>
-            <a:off x="522122" y="3811422"/>
-            <a:ext cx="35661" cy="35661"/>
+            <a:off x="509796" y="3768621"/>
+            <a:ext cx="13679" cy="13679"/>
           </a:xfrm>
           <a:prstGeom prst="ellipse">
             <a:avLst/>
@@ -6018,7 +6160,7 @@
           <a:effectLst/>
         </p:spPr>
         <p:txBody>
-          <a:bodyPr rtlCol="0" anchor="ctr" wrap="square"/>
+          <a:bodyPr rtlCol="0" anchor="ctr" lIns="0" rIns="0" tIns="0" bIns="0"/>
           <a:lstStyle/>
           <a:p>
             <a:pPr algn="ctr"/>
@@ -6027,7 +6169,37 @@
       </p:sp>
       <p:sp>
         <p:nvSpPr>
-          <p:cNvPr id="37" name="Rounded Rectangle 36"/>
+          <p:cNvPr id="41" name="Oval 40"/>
+          <p:cNvSpPr/>
+          <p:nvPr/>
+        </p:nvSpPr>
+        <p:spPr>
+          <a:xfrm>
+            <a:off x="528450" y="3768621"/>
+            <a:ext cx="13679" cy="13679"/>
+          </a:xfrm>
+          <a:prstGeom prst="ellipse">
+            <a:avLst/>
+          </a:prstGeom>
+          <a:solidFill>
+            <a:srgbClr val="2F5BA8"/>
+          </a:solidFill>
+          <a:ln>
+            <a:noFill/>
+          </a:ln>
+          <a:effectLst/>
+        </p:spPr>
+        <p:txBody>
+          <a:bodyPr rtlCol="0" anchor="ctr" lIns="0" rIns="0" tIns="0" bIns="0"/>
+          <a:lstStyle/>
+          <a:p>
+            <a:pPr algn="ctr"/>
+          </a:p>
+        </p:txBody>
+      </p:sp>
+      <p:sp>
+        <p:nvSpPr>
+          <p:cNvPr id="42" name="Rounded Rectangle 41"/>
           <p:cNvSpPr/>
           <p:nvPr/>
         </p:nvSpPr>
@@ -6059,7 +6231,7 @@
       </p:sp>
       <p:sp>
         <p:nvSpPr>
-          <p:cNvPr id="38" name="Rectangle 37"/>
+          <p:cNvPr id="43" name="Rectangle 42"/>
           <p:cNvSpPr/>
           <p:nvPr/>
         </p:nvSpPr>
@@ -6089,7 +6261,7 @@
       </p:sp>
       <p:sp>
         <p:nvSpPr>
-          <p:cNvPr id="39" name="Rectangle 38"/>
+          <p:cNvPr id="44" name="Rectangle 43"/>
           <p:cNvSpPr/>
           <p:nvPr/>
         </p:nvSpPr>
@@ -6119,7 +6291,7 @@
       </p:sp>
       <p:sp>
         <p:nvSpPr>
-          <p:cNvPr id="40" name="Rectangle 39"/>
+          <p:cNvPr id="45" name="Rectangle 44"/>
           <p:cNvSpPr/>
           <p:nvPr/>
         </p:nvSpPr>
@@ -6149,7 +6321,7 @@
       </p:sp>
       <p:sp>
         <p:nvSpPr>
-          <p:cNvPr id="41" name="TextBox 40"/>
+          <p:cNvPr id="46" name="TextBox 45"/>
           <p:cNvSpPr txBox="1"/>
           <p:nvPr/>
         </p:nvSpPr>
@@ -6184,7 +6356,7 @@
       </p:sp>
       <p:sp>
         <p:nvSpPr>
-          <p:cNvPr id="42" name="TextBox 41"/>
+          <p:cNvPr id="47" name="TextBox 46"/>
           <p:cNvSpPr txBox="1"/>
           <p:nvPr/>
         </p:nvSpPr>
@@ -6219,7 +6391,7 @@
       </p:sp>
       <p:graphicFrame>
         <p:nvGraphicFramePr>
-          <p:cNvPr id="43" name="Table 42"/>
+          <p:cNvPr id="48" name="Table 47"/>
           <p:cNvGraphicFramePr>
             <a:graphicFrameLocks noGrp="1"/>
           </p:cNvGraphicFramePr>
@@ -6592,7 +6764,7 @@
                       </a:r>
                     </a:p>
                   </a:txBody>
-                  <a:tcPr marL="219456" marR="219456" marT="36576" marB="36576" anchor="ctr">
+                  <a:tcPr marL="256032" marR="256032" marT="36576" marB="36576" anchor="ctr">
                     <a:lnL w="6350" cap="flat" cmpd="sng" algn="ctr">
                       <a:noFill/>
                     </a:lnL>
@@ -6880,7 +7052,7 @@
                       <a:r>
                         <a:rPr sz="800" b="1" i="0" lang="pt-BR">
                           <a:solidFill>
-                            <a:srgbClr val="9C0006"/>
+                            <a:srgbClr val="B02A37"/>
                           </a:solidFill>
                           <a:latin typeface="Arial"/>
                         </a:rPr>
@@ -6908,7 +7080,7 @@
                       </a:solidFill>
                     </a:lnB>
                     <a:solidFill>
-                      <a:srgbClr val="FFC7CE"/>
+                      <a:srgbClr val="F6C9CB"/>
                     </a:solidFill>
                   </a:tcPr>
                 </a:tc>
@@ -6954,7 +7126,7 @@
                       </a:r>
                     </a:p>
                   </a:txBody>
-                  <a:tcPr marL="219456" marR="219456" marT="36576" marB="36576" anchor="ctr">
+                  <a:tcPr marL="256032" marR="256032" marT="36576" marB="36576" anchor="ctr">
                     <a:lnL w="6350" cap="flat" cmpd="sng" algn="ctr">
                       <a:noFill/>
                     </a:lnL>
@@ -7242,7 +7414,7 @@
                       <a:r>
                         <a:rPr sz="800" b="1" i="0" lang="pt-BR">
                           <a:solidFill>
-                            <a:srgbClr val="9C0006"/>
+                            <a:srgbClr val="B02A37"/>
                           </a:solidFill>
                           <a:latin typeface="Arial"/>
                         </a:rPr>
@@ -7270,7 +7442,7 @@
                       </a:solidFill>
                     </a:lnB>
                     <a:solidFill>
-                      <a:srgbClr val="FFC7CE"/>
+                      <a:srgbClr val="F6C9CB"/>
                     </a:solidFill>
                   </a:tcPr>
                 </a:tc>
@@ -7281,24 +7453,23 @@
       </p:graphicFrame>
       <p:sp>
         <p:nvSpPr>
-          <p:cNvPr id="44" name="Oval 43"/>
+          <p:cNvPr id="49" name="Oval 48"/>
           <p:cNvSpPr/>
           <p:nvPr/>
         </p:nvSpPr>
         <p:spPr>
           <a:xfrm>
-            <a:off x="441907" y="5156851"/>
-            <a:ext cx="27958" cy="27958"/>
+            <a:off x="442829" y="5152089"/>
+            <a:ext cx="36561" cy="36561"/>
           </a:xfrm>
           <a:prstGeom prst="ellipse">
             <a:avLst/>
           </a:prstGeom>
-          <a:noFill/>
-          <a:ln w="7594" cap="rnd">
-            <a:solidFill>
-              <a:srgbClr val="E06C3C"/>
-            </a:solidFill>
-            <a:round/>
+          <a:solidFill>
+            <a:srgbClr val="E06C3C"/>
+          </a:solidFill>
+          <a:ln>
+            <a:noFill/>
           </a:ln>
           <a:effectLst/>
         </p:spPr>
@@ -7312,14 +7483,14 @@
       </p:sp>
       <p:sp>
         <p:nvSpPr>
-          <p:cNvPr id="45" name="Round Same Side Corner Rectangle 44"/>
+          <p:cNvPr id="50" name="Round Same Side Corner Rectangle 49"/>
           <p:cNvSpPr/>
           <p:nvPr/>
         </p:nvSpPr>
         <p:spPr>
           <a:xfrm>
-            <a:off x="438912" y="5183027"/>
-            <a:ext cx="33949" cy="39940"/>
+            <a:off x="438912" y="5186319"/>
+            <a:ext cx="44395" cy="52230"/>
           </a:xfrm>
           <a:prstGeom prst="round2SameRect">
             <a:avLst>
@@ -7327,12 +7498,11 @@
               <a:gd name="adj2" fmla="val 0"/>
             </a:avLst>
           </a:prstGeom>
-          <a:noFill/>
-          <a:ln w="7594" cap="rnd">
-            <a:solidFill>
-              <a:srgbClr val="E06C3C"/>
-            </a:solidFill>
-            <a:round/>
+          <a:solidFill>
+            <a:srgbClr val="E06C3C"/>
+          </a:solidFill>
+          <a:ln>
+            <a:noFill/>
           </a:ln>
           <a:effectLst/>
         </p:spPr>
@@ -7346,24 +7516,23 @@
       </p:sp>
       <p:sp>
         <p:nvSpPr>
-          <p:cNvPr id="46" name="Oval 45"/>
+          <p:cNvPr id="51" name="Oval 50"/>
           <p:cNvSpPr/>
           <p:nvPr/>
         </p:nvSpPr>
         <p:spPr>
           <a:xfrm>
-            <a:off x="520363" y="5156851"/>
-            <a:ext cx="27958" cy="27958"/>
+            <a:off x="545424" y="5152089"/>
+            <a:ext cx="36561" cy="36561"/>
           </a:xfrm>
           <a:prstGeom prst="ellipse">
             <a:avLst/>
           </a:prstGeom>
-          <a:noFill/>
-          <a:ln w="7594" cap="rnd">
-            <a:solidFill>
-              <a:srgbClr val="E06C3C"/>
-            </a:solidFill>
-            <a:round/>
+          <a:solidFill>
+            <a:srgbClr val="E06C3C"/>
+          </a:solidFill>
+          <a:ln>
+            <a:noFill/>
           </a:ln>
           <a:effectLst/>
         </p:spPr>
@@ -7377,14 +7546,14 @@
       </p:sp>
       <p:sp>
         <p:nvSpPr>
-          <p:cNvPr id="47" name="Round Same Side Corner Rectangle 46"/>
+          <p:cNvPr id="52" name="Round Same Side Corner Rectangle 51"/>
           <p:cNvSpPr/>
           <p:nvPr/>
         </p:nvSpPr>
         <p:spPr>
           <a:xfrm>
-            <a:off x="517367" y="5183027"/>
-            <a:ext cx="33949" cy="39940"/>
+            <a:off x="541507" y="5186319"/>
+            <a:ext cx="44395" cy="52230"/>
           </a:xfrm>
           <a:prstGeom prst="round2SameRect">
             <a:avLst>
@@ -7392,12 +7561,11 @@
               <a:gd name="adj2" fmla="val 0"/>
             </a:avLst>
           </a:prstGeom>
-          <a:noFill/>
-          <a:ln w="7594" cap="rnd">
-            <a:solidFill>
-              <a:srgbClr val="E06C3C"/>
-            </a:solidFill>
-            <a:round/>
+          <a:solidFill>
+            <a:srgbClr val="E06C3C"/>
+          </a:solidFill>
+          <a:ln>
+            <a:noFill/>
           </a:ln>
           <a:effectLst/>
         </p:spPr>
@@ -7411,14 +7579,14 @@
       </p:sp>
       <p:sp>
         <p:nvSpPr>
-          <p:cNvPr id="48" name="Round Same Side Corner Rectangle 47"/>
+          <p:cNvPr id="53" name="Round Same Side Corner Rectangle 52"/>
           <p:cNvSpPr/>
           <p:nvPr/>
         </p:nvSpPr>
         <p:spPr>
           <a:xfrm>
-            <a:off x="473979" y="5170545"/>
-            <a:ext cx="48737" cy="55869"/>
+            <a:off x="483214" y="5168442"/>
+            <a:ext cx="66842" cy="76169"/>
           </a:xfrm>
           <a:prstGeom prst="round2SameRect">
             <a:avLst>
@@ -7444,14 +7612,14 @@
       </p:sp>
       <p:sp>
         <p:nvSpPr>
-          <p:cNvPr id="49" name="Oval 48"/>
+          <p:cNvPr id="54" name="Oval 53"/>
           <p:cNvSpPr/>
           <p:nvPr/>
         </p:nvSpPr>
         <p:spPr>
           <a:xfrm>
-            <a:off x="477545" y="5139044"/>
-            <a:ext cx="41605" cy="41605"/>
+            <a:off x="487878" y="5127249"/>
+            <a:ext cx="57515" cy="57515"/>
           </a:xfrm>
           <a:prstGeom prst="ellipse">
             <a:avLst/>
@@ -7474,24 +7642,23 @@
       </p:sp>
       <p:sp>
         <p:nvSpPr>
-          <p:cNvPr id="50" name="Oval 49"/>
+          <p:cNvPr id="55" name="Oval 54"/>
           <p:cNvSpPr/>
           <p:nvPr/>
         </p:nvSpPr>
         <p:spPr>
           <a:xfrm>
-            <a:off x="481705" y="5143205"/>
-            <a:ext cx="33284" cy="33284"/>
+            <a:off x="494873" y="5134244"/>
+            <a:ext cx="43525" cy="43525"/>
           </a:xfrm>
           <a:prstGeom prst="ellipse">
             <a:avLst/>
           </a:prstGeom>
-          <a:noFill/>
-          <a:ln w="7594" cap="rnd">
-            <a:solidFill>
-              <a:srgbClr val="E06C3C"/>
-            </a:solidFill>
-            <a:round/>
+          <a:solidFill>
+            <a:srgbClr val="E06C3C"/>
+          </a:solidFill>
+          <a:ln>
+            <a:noFill/>
           </a:ln>
           <a:effectLst/>
         </p:spPr>
@@ -7505,14 +7672,14 @@
       </p:sp>
       <p:sp>
         <p:nvSpPr>
-          <p:cNvPr id="51" name="Round Same Side Corner Rectangle 50"/>
+          <p:cNvPr id="56" name="Round Same Side Corner Rectangle 55"/>
           <p:cNvSpPr/>
           <p:nvPr/>
         </p:nvSpPr>
         <p:spPr>
           <a:xfrm>
-            <a:off x="478139" y="5174706"/>
-            <a:ext cx="40416" cy="47548"/>
+            <a:off x="490209" y="5175437"/>
+            <a:ext cx="52852" cy="62179"/>
           </a:xfrm>
           <a:prstGeom prst="round2SameRect">
             <a:avLst>
@@ -7520,12 +7687,11 @@
               <a:gd name="adj2" fmla="val 0"/>
             </a:avLst>
           </a:prstGeom>
-          <a:noFill/>
-          <a:ln w="7594" cap="rnd">
-            <a:solidFill>
-              <a:srgbClr val="E06C3C"/>
-            </a:solidFill>
-            <a:round/>
+          <a:solidFill>
+            <a:srgbClr val="E06C3C"/>
+          </a:solidFill>
+          <a:ln>
+            <a:noFill/>
           </a:ln>
           <a:effectLst/>
         </p:spPr>
@@ -7539,14 +7705,14 @@
       </p:sp>
       <p:sp>
         <p:nvSpPr>
-          <p:cNvPr id="52" name="Donut 51"/>
+          <p:cNvPr id="57" name="Donut 56"/>
           <p:cNvSpPr/>
           <p:nvPr/>
         </p:nvSpPr>
         <p:spPr>
           <a:xfrm>
-            <a:off x="438912" y="5598287"/>
-            <a:ext cx="118872" cy="118872"/>
+            <a:off x="438912" y="5579999"/>
+            <a:ext cx="155448" cy="155448"/>
           </a:xfrm>
           <a:prstGeom prst="donut">
             <a:avLst>
@@ -7571,14 +7737,14 @@
       </p:sp>
       <p:sp>
         <p:nvSpPr>
-          <p:cNvPr id="53" name="Donut 52"/>
+          <p:cNvPr id="58" name="Donut 57"/>
           <p:cNvSpPr/>
           <p:nvPr/>
         </p:nvSpPr>
         <p:spPr>
           <a:xfrm>
-            <a:off x="468629" y="5628005"/>
-            <a:ext cx="59436" cy="59436"/>
+            <a:off x="477773" y="5618861"/>
+            <a:ext cx="77724" cy="77724"/>
           </a:xfrm>
           <a:prstGeom prst="donut">
             <a:avLst>
@@ -7603,14 +7769,14 @@
       </p:sp>
       <p:sp>
         <p:nvSpPr>
-          <p:cNvPr id="54" name="Oval 53"/>
+          <p:cNvPr id="59" name="Oval 58"/>
           <p:cNvSpPr/>
           <p:nvPr/>
         </p:nvSpPr>
         <p:spPr>
           <a:xfrm>
-            <a:off x="486460" y="5645835"/>
-            <a:ext cx="23774" cy="23774"/>
+            <a:off x="501091" y="5642178"/>
+            <a:ext cx="31089" cy="31089"/>
           </a:xfrm>
           <a:prstGeom prst="ellipse">
             <a:avLst/>
@@ -7633,7 +7799,7 @@
       </p:sp>
       <p:sp>
         <p:nvSpPr>
-          <p:cNvPr id="55" name="TextBox 54"/>
+          <p:cNvPr id="60" name="TextBox 59"/>
           <p:cNvSpPr txBox="1"/>
           <p:nvPr/>
         </p:nvSpPr>
@@ -7668,7 +7834,7 @@
       </p:sp>
       <p:graphicFrame>
         <p:nvGraphicFramePr>
-          <p:cNvPr id="56" name="Table 55"/>
+          <p:cNvPr id="61" name="Table 60"/>
           <p:cNvGraphicFramePr>
             <a:graphicFrameLocks noGrp="1"/>
           </p:cNvGraphicFramePr>
@@ -7730,7 +7896,7 @@
       </p:graphicFrame>
       <p:sp>
         <p:nvSpPr>
-          <p:cNvPr id="57" name="Oval 56"/>
+          <p:cNvPr id="62" name="Oval 61"/>
           <p:cNvSpPr/>
           <p:nvPr/>
         </p:nvSpPr>
@@ -7760,7 +7926,7 @@
       </p:sp>
       <p:sp>
         <p:nvSpPr>
-          <p:cNvPr id="58" name="Rectangle 57"/>
+          <p:cNvPr id="63" name="Rectangle 62"/>
           <p:cNvSpPr/>
           <p:nvPr/>
         </p:nvSpPr>
@@ -7790,7 +7956,7 @@
       </p:sp>
       <p:sp>
         <p:nvSpPr>
-          <p:cNvPr id="59" name="Oval 58"/>
+          <p:cNvPr id="64" name="Oval 63"/>
           <p:cNvSpPr/>
           <p:nvPr/>
         </p:nvSpPr>
@@ -7820,7 +7986,7 @@
       </p:sp>
       <p:sp>
         <p:nvSpPr>
-          <p:cNvPr id="60" name="Rectangle 59"/>
+          <p:cNvPr id="65" name="Rectangle 64"/>
           <p:cNvSpPr/>
           <p:nvPr/>
         </p:nvSpPr>
@@ -7850,7 +8016,7 @@
       </p:sp>
       <p:sp>
         <p:nvSpPr>
-          <p:cNvPr id="61" name="Oval 60"/>
+          <p:cNvPr id="66" name="Oval 65"/>
           <p:cNvSpPr/>
           <p:nvPr/>
         </p:nvSpPr>
@@ -7880,7 +8046,7 @@
       </p:sp>
       <p:sp>
         <p:nvSpPr>
-          <p:cNvPr id="62" name="Rectangle 61"/>
+          <p:cNvPr id="67" name="Rectangle 66"/>
           <p:cNvSpPr/>
           <p:nvPr/>
         </p:nvSpPr>
@@ -7910,7 +8076,7 @@
       </p:sp>
       <p:graphicFrame>
         <p:nvGraphicFramePr>
-          <p:cNvPr id="63" name="Table 62"/>
+          <p:cNvPr id="68" name="Table 67"/>
           <p:cNvGraphicFramePr>
             <a:graphicFrameLocks noGrp="1"/>
           </p:cNvGraphicFramePr>
@@ -10232,7 +10398,7 @@
       </p:graphicFrame>
       <p:sp>
         <p:nvSpPr>
-          <p:cNvPr id="64" name="Oval 63"/>
+          <p:cNvPr id="69" name="Oval 68"/>
           <p:cNvSpPr/>
           <p:nvPr/>
         </p:nvSpPr>
@@ -10271,7 +10437,7 @@
       </p:sp>
       <p:sp>
         <p:nvSpPr>
-          <p:cNvPr id="65" name="Oval 64"/>
+          <p:cNvPr id="70" name="Oval 69"/>
           <p:cNvSpPr/>
           <p:nvPr/>
         </p:nvSpPr>
@@ -10310,7 +10476,7 @@
       </p:sp>
       <p:sp>
         <p:nvSpPr>
-          <p:cNvPr id="66" name="Oval 65"/>
+          <p:cNvPr id="71" name="Oval 70"/>
           <p:cNvSpPr/>
           <p:nvPr/>
         </p:nvSpPr>
@@ -10349,7 +10515,7 @@
       </p:sp>
       <p:sp>
         <p:nvSpPr>
-          <p:cNvPr id="67" name="Oval 66"/>
+          <p:cNvPr id="72" name="Oval 71"/>
           <p:cNvSpPr/>
           <p:nvPr/>
         </p:nvSpPr>
@@ -10388,7 +10554,7 @@
       </p:sp>
       <p:sp>
         <p:nvSpPr>
-          <p:cNvPr id="68" name="Oval 67"/>
+          <p:cNvPr id="73" name="Oval 72"/>
           <p:cNvSpPr/>
           <p:nvPr/>
         </p:nvSpPr>

--- a/output/260925__Status_frente2_resultados.pptx
+++ b/output/260925__Status_frente2_resultados.pptx
@@ -6,6 +6,7 @@
   </p:sldMasterIdLst>
   <p:sldIdLst>
     <p:sldId id="256" r:id="rId7"/>
+    <p:sldId id="257" r:id="rId8"/>
   </p:sldIdLst>
   <p:sldSz cx="12191969" cy="6858000" type="screen4x3"/>
   <p:notesSz cx="6858000" cy="9144000"/>
@@ -10599,6 +10600,7610 @@
 </p:sld>
 </file>
 
+<file path=ppt/slides/slide2.xml><?xml version="1.0" encoding="utf-8"?>
+<p:sld xmlns:a="http://schemas.openxmlformats.org/drawingml/2006/main" xmlns:p="http://schemas.openxmlformats.org/presentationml/2006/main" xmlns:r="http://schemas.openxmlformats.org/officeDocument/2006/relationships">
+  <p:cSld>
+    <p:spTree>
+      <p:nvGrpSpPr>
+        <p:cNvPr id="1" name=""/>
+        <p:cNvGrpSpPr/>
+        <p:nvPr/>
+      </p:nvGrpSpPr>
+      <p:grpSpPr/>
+      <p:sp>
+        <p:nvSpPr>
+          <p:cNvPr id="2" name="Rectangle 1"/>
+          <p:cNvSpPr/>
+          <p:nvPr/>
+        </p:nvSpPr>
+        <p:spPr>
+          <a:xfrm>
+            <a:off x="0" y="0"/>
+            <a:ext cx="12191969" cy="6858000"/>
+          </a:xfrm>
+          <a:prstGeom prst="rect">
+            <a:avLst/>
+          </a:prstGeom>
+          <a:solidFill>
+            <a:srgbClr val="FFFFFF"/>
+          </a:solidFill>
+          <a:ln>
+            <a:noFill/>
+          </a:ln>
+          <a:effectLst/>
+        </p:spPr>
+        <p:txBody>
+          <a:bodyPr rtlCol="0" anchor="ctr" lIns="0" rIns="0" tIns="0" bIns="0"/>
+          <a:lstStyle/>
+          <a:p>
+            <a:pPr algn="ctr"/>
+          </a:p>
+        </p:txBody>
+      </p:sp>
+      <p:graphicFrame>
+        <p:nvGraphicFramePr>
+          <p:cNvPr id="3" name="Table 2"/>
+          <p:cNvGraphicFramePr>
+            <a:graphicFrameLocks noGrp="1"/>
+          </p:cNvGraphicFramePr>
+          <p:nvPr/>
+        </p:nvGraphicFramePr>
+        <p:xfrm>
+          <a:off x="384048" y="237744"/>
+          <a:ext cx="11423873" cy="739902"/>
+        </p:xfrm>
+        <a:graphic>
+          <a:graphicData uri="http://schemas.openxmlformats.org/drawingml/2006/table">
+            <a:tbl>
+              <a:tblPr>
+                <a:tableStyleId>{2D5ABB26-0587-4C30-8999-92F81FD0307C}</a:tableStyleId>
+              </a:tblPr>
+              <a:tblGrid>
+                <a:gridCol w="68580"/>
+                <a:gridCol w="7606253"/>
+                <a:gridCol w="1417320"/>
+                <a:gridCol w="2331720"/>
+              </a:tblGrid>
+              <a:tr h="739902">
+                <a:tc>
+                  <a:txBody>
+                    <a:bodyPr/>
+                    <a:lstStyle/>
+                    <a:p/>
+                  </a:txBody>
+                  <a:tcPr>
+                    <a:lnL w="9525" cap="flat" cmpd="sng" algn="ctr">
+                      <a:noFill/>
+                    </a:lnL>
+                    <a:lnR w="9525" cap="flat" cmpd="sng" algn="ctr">
+                      <a:noFill/>
+                    </a:lnR>
+                    <a:lnT w="9525" cap="flat" cmpd="sng" algn="ctr">
+                      <a:noFill/>
+                    </a:lnT>
+                    <a:lnB w="9525" cap="flat" cmpd="sng" algn="ctr">
+                      <a:noFill/>
+                    </a:lnB>
+                    <a:solidFill>
+                      <a:srgbClr val="78DE1F"/>
+                    </a:solidFill>
+                  </a:tcPr>
+                </a:tc>
+                <a:tc>
+                  <a:txBody>
+                    <a:bodyPr wrap="square"/>
+                    <a:lstStyle/>
+                    <a:p>
+                      <a:pPr algn="l"/>
+                      <a:r>
+                        <a:rPr sz="1400" b="1" i="0" lang="pt-BR">
+                          <a:solidFill>
+                            <a:srgbClr val="1A1A1A"/>
+                          </a:solidFill>
+                          <a:latin typeface="Arial"/>
+                        </a:rPr>
+                        <a:t>Tratamento, priorização e alocação de leads (2/2)</a:t>
+                      </a:r>
+                    </a:p>
+                    <a:p>
+                      <a:pPr>
+                        <a:spcBef>
+                          <a:spcPts val="300"/>
+                        </a:spcBef>
+                      </a:pPr>
+                      <a:r>
+                        <a:rPr sz="950" b="0" i="0" lang="pt-BR">
+                          <a:solidFill>
+                            <a:srgbClr val="6B6B6B"/>
+                          </a:solidFill>
+                          <a:latin typeface="Arial"/>
+                        </a:rPr>
+                        <a:t>Melhorar </a:t>
+                      </a:r>
+                      <a:r>
+                        <a:rPr sz="950" b="1" i="0" lang="pt-BR">
+                          <a:solidFill>
+                            <a:srgbClr val="6B6B6B"/>
+                          </a:solidFill>
+                          <a:latin typeface="Arial"/>
+                        </a:rPr>
+                        <a:t>a experiência dos clientes em prospecção</a:t>
+                      </a:r>
+                      <a:r>
+                        <a:rPr sz="950" b="0" i="0" lang="pt-BR">
+                          <a:solidFill>
+                            <a:srgbClr val="6B6B6B"/>
+                          </a:solidFill>
+                          <a:latin typeface="Arial"/>
+                        </a:rPr>
+                        <a:t>, o entendimento de suas necessidades, </a:t>
+                      </a:r>
+                      <a:r>
+                        <a:rPr sz="950" b="1" i="0" lang="pt-BR">
+                          <a:solidFill>
+                            <a:srgbClr val="6B6B6B"/>
+                          </a:solidFill>
+                          <a:latin typeface="Arial"/>
+                        </a:rPr>
+                        <a:t>a priorização dos leads com maior potencial de conversão</a:t>
+                      </a:r>
+                      <a:r>
+                        <a:rPr sz="950" b="0" i="0" lang="pt-BR">
+                          <a:solidFill>
+                            <a:srgbClr val="6B6B6B"/>
+                          </a:solidFill>
+                          <a:latin typeface="Arial"/>
+                        </a:rPr>
+                        <a:t> e </a:t>
+                      </a:r>
+                      <a:r>
+                        <a:rPr sz="950" b="1" i="0" lang="pt-BR">
+                          <a:solidFill>
+                            <a:srgbClr val="6B6B6B"/>
+                          </a:solidFill>
+                          <a:latin typeface="Arial"/>
+                        </a:rPr>
+                        <a:t>a alocação às estruturas de vendas com maior chance de conversão</a:t>
+                      </a:r>
+                      <a:r>
+                        <a:rPr sz="950" b="0" i="0" lang="pt-BR">
+                          <a:solidFill>
+                            <a:srgbClr val="6B6B6B"/>
+                          </a:solidFill>
+                          <a:latin typeface="Arial"/>
+                        </a:rPr>
+                        <a:t>.</a:t>
+                      </a:r>
+                    </a:p>
+                  </a:txBody>
+                  <a:tcPr marL="548640" marR="64008" marT="91440" marB="91440" anchor="t">
+                    <a:lnL w="9525" cap="flat" cmpd="sng" algn="ctr">
+                      <a:noFill/>
+                    </a:lnL>
+                    <a:lnR w="9525" cap="flat" cmpd="sng" algn="ctr">
+                      <a:noFill/>
+                    </a:lnR>
+                    <a:lnT w="9525" cap="flat" cmpd="sng" algn="ctr">
+                      <a:noFill/>
+                    </a:lnT>
+                    <a:lnB w="9525" cap="flat" cmpd="sng" algn="ctr">
+                      <a:noFill/>
+                    </a:lnB>
+                    <a:solidFill>
+                      <a:srgbClr val="F7F7F7"/>
+                    </a:solidFill>
+                  </a:tcPr>
+                </a:tc>
+                <a:tc>
+                  <a:txBody>
+                    <a:bodyPr wrap="square"/>
+                    <a:lstStyle/>
+                    <a:p>
+                      <a:pPr algn="l"/>
+                      <a:r>
+                        <a:rPr sz="750" b="1" i="0" lang="pt-BR">
+                          <a:solidFill>
+                            <a:srgbClr val="757575"/>
+                          </a:solidFill>
+                          <a:latin typeface="Arial"/>
+                        </a:rPr>
+                        <a:t>LÍDER(ES)</a:t>
+                      </a:r>
+                    </a:p>
+                    <a:p>
+                      <a:pPr>
+                        <a:spcBef>
+                          <a:spcPts val="200"/>
+                        </a:spcBef>
+                      </a:pPr>
+                      <a:r>
+                        <a:rPr sz="950" b="0" i="0" lang="pt-BR">
+                          <a:solidFill>
+                            <a:srgbClr val="333333"/>
+                          </a:solidFill>
+                          <a:latin typeface="Arial"/>
+                        </a:rPr>
+                        <a:t>João Azevedo</a:t>
+                      </a:r>
+                    </a:p>
+                  </a:txBody>
+                  <a:tcPr marL="64008" marR="64008" marT="91440" marB="91440" anchor="t">
+                    <a:lnL w="9525" cap="flat" cmpd="sng" algn="ctr">
+                      <a:noFill/>
+                    </a:lnL>
+                    <a:lnR w="9525" cap="flat" cmpd="sng" algn="ctr">
+                      <a:noFill/>
+                    </a:lnR>
+                    <a:lnT w="9525" cap="flat" cmpd="sng" algn="ctr">
+                      <a:noFill/>
+                    </a:lnT>
+                    <a:lnB w="9525" cap="flat" cmpd="sng" algn="ctr">
+                      <a:noFill/>
+                    </a:lnB>
+                    <a:solidFill>
+                      <a:srgbClr val="F7F7F7"/>
+                    </a:solidFill>
+                  </a:tcPr>
+                </a:tc>
+                <a:tc>
+                  <a:txBody>
+                    <a:bodyPr wrap="square"/>
+                    <a:lstStyle/>
+                    <a:p>
+                      <a:pPr algn="l"/>
+                      <a:r>
+                        <a:rPr sz="750" b="1" i="0" lang="pt-BR">
+                          <a:solidFill>
+                            <a:srgbClr val="757575"/>
+                          </a:solidFill>
+                          <a:latin typeface="Arial"/>
+                        </a:rPr>
+                        <a:t>TIME DE TRABALHO</a:t>
+                      </a:r>
+                    </a:p>
+                    <a:p>
+                      <a:pPr>
+                        <a:spcBef>
+                          <a:spcPts val="200"/>
+                        </a:spcBef>
+                      </a:pPr>
+                      <a:r>
+                        <a:rPr sz="950" b="0" i="0" lang="pt-BR">
+                          <a:solidFill>
+                            <a:srgbClr val="333333"/>
+                          </a:solidFill>
+                          <a:latin typeface="Arial"/>
+                        </a:rPr>
+                        <a:t>Priscila Martins, Yure Cangussu, Thais Pimenta, Luma Gomes</a:t>
+                      </a:r>
+                    </a:p>
+                  </a:txBody>
+                  <a:tcPr marL="64008" marR="64008" marT="91440" marB="91440" anchor="t">
+                    <a:lnL w="9525" cap="flat" cmpd="sng" algn="ctr">
+                      <a:noFill/>
+                    </a:lnL>
+                    <a:lnR w="9525" cap="flat" cmpd="sng" algn="ctr">
+                      <a:noFill/>
+                    </a:lnR>
+                    <a:lnT w="9525" cap="flat" cmpd="sng" algn="ctr">
+                      <a:noFill/>
+                    </a:lnT>
+                    <a:lnB w="9525" cap="flat" cmpd="sng" algn="ctr">
+                      <a:noFill/>
+                    </a:lnB>
+                    <a:solidFill>
+                      <a:srgbClr val="F7F7F7"/>
+                    </a:solidFill>
+                  </a:tcPr>
+                </a:tc>
+              </a:tr>
+            </a:tbl>
+          </a:graphicData>
+        </a:graphic>
+      </p:graphicFrame>
+      <p:sp>
+        <p:nvSpPr>
+          <p:cNvPr id="4" name="Oval 3"/>
+          <p:cNvSpPr/>
+          <p:nvPr/>
+        </p:nvSpPr>
+        <p:spPr>
+          <a:xfrm>
+            <a:off x="598932" y="309626"/>
+            <a:ext cx="256032" cy="256032"/>
+          </a:xfrm>
+          <a:prstGeom prst="ellipse">
+            <a:avLst/>
+          </a:prstGeom>
+          <a:solidFill>
+            <a:srgbClr val="78DE1F"/>
+          </a:solidFill>
+          <a:ln>
+            <a:noFill/>
+          </a:ln>
+          <a:effectLst/>
+        </p:spPr>
+        <p:txBody>
+          <a:bodyPr rtlCol="0" anchor="ctr" lIns="0" rIns="0" tIns="0" bIns="0"/>
+          <a:lstStyle/>
+          <a:p>
+            <a:pPr algn="ctr"/>
+          </a:p>
+        </p:txBody>
+      </p:sp>
+      <p:sp>
+        <p:nvSpPr>
+          <p:cNvPr id="5" name="TextBox 4"/>
+          <p:cNvSpPr txBox="1"/>
+          <p:nvPr/>
+        </p:nvSpPr>
+        <p:spPr>
+          <a:xfrm>
+            <a:off x="598932" y="350773"/>
+            <a:ext cx="256032" cy="182880"/>
+          </a:xfrm>
+          <a:prstGeom prst="rect">
+            <a:avLst/>
+          </a:prstGeom>
+          <a:noFill/>
+        </p:spPr>
+        <p:txBody>
+          <a:bodyPr wrap="square" lIns="0" rIns="0" tIns="0" bIns="0" anchor="t">
+            <a:spAutoFit/>
+          </a:bodyPr>
+          <a:lstStyle/>
+          <a:p>
+            <a:pPr algn="ctr"/>
+            <a:r>
+              <a:rPr sz="1100" b="1" i="0" lang="pt-BR">
+                <a:solidFill>
+                  <a:srgbClr val="1A1A1A"/>
+                </a:solidFill>
+                <a:latin typeface="Arial"/>
+              </a:rPr>
+              <a:t>2</a:t>
+            </a:r>
+          </a:p>
+        </p:txBody>
+      </p:sp>
+      <p:sp>
+        <p:nvSpPr>
+          <p:cNvPr id="6" name="TextBox 5"/>
+          <p:cNvSpPr txBox="1"/>
+          <p:nvPr/>
+        </p:nvSpPr>
+        <p:spPr>
+          <a:xfrm>
+            <a:off x="384048" y="1078230"/>
+            <a:ext cx="2183755" cy="194310"/>
+          </a:xfrm>
+          <a:prstGeom prst="rect">
+            <a:avLst/>
+          </a:prstGeom>
+          <a:noFill/>
+        </p:spPr>
+        <p:txBody>
+          <a:bodyPr wrap="square" lIns="0" rIns="0" tIns="0" bIns="0" anchor="t">
+            <a:spAutoFit/>
+          </a:bodyPr>
+          <a:lstStyle/>
+          <a:p>
+            <a:pPr algn="l"/>
+            <a:r>
+              <a:rPr sz="900" b="0" i="0" lang="pt-BR">
+                <a:solidFill>
+                  <a:srgbClr val="333333"/>
+                </a:solidFill>
+                <a:latin typeface="Arial"/>
+              </a:rPr>
+              <a:t/>
+            </a:r>
+            <a:r>
+              <a:rPr sz="900" b="0" i="0" lang="pt-BR">
+                <a:solidFill>
+                  <a:srgbClr val="4A4A4A"/>
+                </a:solidFill>
+                <a:latin typeface="Arial"/>
+              </a:rPr>
+              <a:t>1. Planejamento integrado mkt | vendas</a:t>
+            </a:r>
+          </a:p>
+        </p:txBody>
+      </p:sp>
+      <p:sp>
+        <p:nvSpPr>
+          <p:cNvPr id="7" name="TextBox 6"/>
+          <p:cNvSpPr txBox="1"/>
+          <p:nvPr/>
+        </p:nvSpPr>
+        <p:spPr>
+          <a:xfrm>
+            <a:off x="2785905" y="1078230"/>
+            <a:ext cx="2558578" cy="194310"/>
+          </a:xfrm>
+          <a:prstGeom prst="rect">
+            <a:avLst/>
+          </a:prstGeom>
+          <a:noFill/>
+        </p:spPr>
+        <p:txBody>
+          <a:bodyPr wrap="square" lIns="0" rIns="0" tIns="0" bIns="0" anchor="t">
+            <a:spAutoFit/>
+          </a:bodyPr>
+          <a:lstStyle/>
+          <a:p>
+            <a:pPr algn="l"/>
+            <a:r>
+              <a:rPr sz="900" b="0" i="0" lang="pt-BR">
+                <a:solidFill>
+                  <a:srgbClr val="333333"/>
+                </a:solidFill>
+                <a:latin typeface="Arial"/>
+              </a:rPr>
+              <a:t/>
+            </a:r>
+            <a:r>
+              <a:rPr sz="900" b="1" i="0" lang="pt-BR">
+                <a:solidFill>
+                  <a:srgbClr val="3F7C0E"/>
+                </a:solidFill>
+                <a:latin typeface="Arial"/>
+              </a:rPr>
+              <a:t>2. Tratamento, priorização e alocação de leads</a:t>
+            </a:r>
+          </a:p>
+        </p:txBody>
+      </p:sp>
+      <p:sp>
+        <p:nvSpPr>
+          <p:cNvPr id="8" name="Rectangle 7"/>
+          <p:cNvSpPr/>
+          <p:nvPr/>
+        </p:nvSpPr>
+        <p:spPr>
+          <a:xfrm>
+            <a:off x="2785905" y="1263396"/>
+            <a:ext cx="2522002" cy="23774"/>
+          </a:xfrm>
+          <a:prstGeom prst="rect">
+            <a:avLst/>
+          </a:prstGeom>
+          <a:solidFill>
+            <a:srgbClr val="78DE1F"/>
+          </a:solidFill>
+          <a:ln>
+            <a:noFill/>
+          </a:ln>
+          <a:effectLst/>
+        </p:spPr>
+        <p:txBody>
+          <a:bodyPr rtlCol="0" anchor="ctr" lIns="0" rIns="0" tIns="0" bIns="0"/>
+          <a:lstStyle/>
+          <a:p>
+            <a:pPr algn="ctr"/>
+          </a:p>
+        </p:txBody>
+      </p:sp>
+      <p:sp>
+        <p:nvSpPr>
+          <p:cNvPr id="9" name="TextBox 8"/>
+          <p:cNvSpPr txBox="1"/>
+          <p:nvPr/>
+        </p:nvSpPr>
+        <p:spPr>
+          <a:xfrm>
+            <a:off x="5562586" y="1078230"/>
+            <a:ext cx="1689836" cy="194310"/>
+          </a:xfrm>
+          <a:prstGeom prst="rect">
+            <a:avLst/>
+          </a:prstGeom>
+          <a:noFill/>
+        </p:spPr>
+        <p:txBody>
+          <a:bodyPr wrap="square" lIns="0" rIns="0" tIns="0" bIns="0" anchor="t">
+            <a:spAutoFit/>
+          </a:bodyPr>
+          <a:lstStyle/>
+          <a:p>
+            <a:pPr algn="l"/>
+            <a:r>
+              <a:rPr sz="900" b="0" i="0" lang="pt-BR">
+                <a:solidFill>
+                  <a:srgbClr val="333333"/>
+                </a:solidFill>
+                <a:latin typeface="Arial"/>
+              </a:rPr>
+              <a:t/>
+            </a:r>
+            <a:r>
+              <a:rPr sz="900" b="0" i="0" lang="pt-BR">
+                <a:solidFill>
+                  <a:srgbClr val="4A4A4A"/>
+                </a:solidFill>
+                <a:latin typeface="Arial"/>
+              </a:rPr>
+              <a:t>3. Atendimento agêntico (Liza)</a:t>
+            </a:r>
+          </a:p>
+        </p:txBody>
+      </p:sp>
+      <p:sp>
+        <p:nvSpPr>
+          <p:cNvPr id="10" name="TextBox 9"/>
+          <p:cNvSpPr txBox="1"/>
+          <p:nvPr/>
+        </p:nvSpPr>
+        <p:spPr>
+          <a:xfrm>
+            <a:off x="7470524" y="1078230"/>
+            <a:ext cx="1543934" cy="194310"/>
+          </a:xfrm>
+          <a:prstGeom prst="rect">
+            <a:avLst/>
+          </a:prstGeom>
+          <a:noFill/>
+        </p:spPr>
+        <p:txBody>
+          <a:bodyPr wrap="square" lIns="0" rIns="0" tIns="0" bIns="0" anchor="t">
+            <a:spAutoFit/>
+          </a:bodyPr>
+          <a:lstStyle/>
+          <a:p>
+            <a:pPr algn="l"/>
+            <a:r>
+              <a:rPr sz="900" b="0" i="0" lang="pt-BR">
+                <a:solidFill>
+                  <a:srgbClr val="333333"/>
+                </a:solidFill>
+                <a:latin typeface="Arial"/>
+              </a:rPr>
+              <a:t/>
+            </a:r>
+            <a:r>
+              <a:rPr sz="900" b="0" i="0" lang="pt-BR">
+                <a:solidFill>
+                  <a:srgbClr val="4A4A4A"/>
+                </a:solidFill>
+                <a:latin typeface="Arial"/>
+              </a:rPr>
+              <a:t>4. Atendimento pela Central</a:t>
+            </a:r>
+          </a:p>
+        </p:txBody>
+      </p:sp>
+      <p:sp>
+        <p:nvSpPr>
+          <p:cNvPr id="11" name="TextBox 10"/>
+          <p:cNvSpPr txBox="1"/>
+          <p:nvPr/>
+        </p:nvSpPr>
+        <p:spPr>
+          <a:xfrm>
+            <a:off x="9232560" y="1078230"/>
+            <a:ext cx="1283508" cy="194310"/>
+          </a:xfrm>
+          <a:prstGeom prst="rect">
+            <a:avLst/>
+          </a:prstGeom>
+          <a:noFill/>
+        </p:spPr>
+        <p:txBody>
+          <a:bodyPr wrap="square" lIns="0" rIns="0" tIns="0" bIns="0" anchor="t">
+            <a:spAutoFit/>
+          </a:bodyPr>
+          <a:lstStyle/>
+          <a:p>
+            <a:pPr algn="l"/>
+            <a:r>
+              <a:rPr sz="900" b="0" i="0" lang="pt-BR">
+                <a:solidFill>
+                  <a:srgbClr val="333333"/>
+                </a:solidFill>
+                <a:latin typeface="Arial"/>
+              </a:rPr>
+              <a:t/>
+            </a:r>
+            <a:r>
+              <a:rPr sz="900" b="0" i="0" lang="pt-BR">
+                <a:solidFill>
+                  <a:srgbClr val="4A4A4A"/>
+                </a:solidFill>
+                <a:latin typeface="Arial"/>
+              </a:rPr>
+              <a:t>5. Atendimento em loja</a:t>
+            </a:r>
+          </a:p>
+        </p:txBody>
+      </p:sp>
+      <p:sp>
+        <p:nvSpPr>
+          <p:cNvPr id="12" name="TextBox 11"/>
+          <p:cNvSpPr txBox="1"/>
+          <p:nvPr/>
+        </p:nvSpPr>
+        <p:spPr>
+          <a:xfrm>
+            <a:off x="10734171" y="1078230"/>
+            <a:ext cx="1110326" cy="194310"/>
+          </a:xfrm>
+          <a:prstGeom prst="rect">
+            <a:avLst/>
+          </a:prstGeom>
+          <a:noFill/>
+        </p:spPr>
+        <p:txBody>
+          <a:bodyPr wrap="square" lIns="0" rIns="0" tIns="0" bIns="0" anchor="t">
+            <a:spAutoFit/>
+          </a:bodyPr>
+          <a:lstStyle/>
+          <a:p>
+            <a:pPr algn="l"/>
+            <a:r>
+              <a:rPr sz="900" b="0" i="0" lang="pt-BR">
+                <a:solidFill>
+                  <a:srgbClr val="333333"/>
+                </a:solidFill>
+                <a:latin typeface="Arial"/>
+              </a:rPr>
+              <a:t/>
+            </a:r>
+            <a:r>
+              <a:rPr sz="900" b="0" i="0" lang="pt-BR">
+                <a:solidFill>
+                  <a:srgbClr val="4A4A4A"/>
+                </a:solidFill>
+                <a:latin typeface="Arial"/>
+              </a:rPr>
+              <a:t>6. Geração de leads</a:t>
+            </a:r>
+          </a:p>
+        </p:txBody>
+      </p:sp>
+      <p:cxnSp>
+        <p:nvCxnSpPr>
+          <p:cNvPr id="13" name="Connector 12"/>
+          <p:cNvCxnSpPr/>
+          <p:nvPr/>
+        </p:nvCxnSpPr>
+        <p:spPr>
+          <a:xfrm>
+            <a:off x="384048" y="1327404"/>
+            <a:ext cx="11423873" cy="0"/>
+          </a:xfrm>
+          <a:prstGeom prst="line">
+            <a:avLst/>
+          </a:prstGeom>
+          <a:ln w="9525">
+            <a:solidFill>
+              <a:srgbClr val="E2E2E2"/>
+            </a:solidFill>
+          </a:ln>
+          <a:effectLst/>
+        </p:spPr>
+      </p:cxnSp>
+      <p:graphicFrame>
+        <p:nvGraphicFramePr>
+          <p:cNvPr id="14" name="Table 13"/>
+          <p:cNvGraphicFramePr>
+            <a:graphicFrameLocks noGrp="1"/>
+          </p:cNvGraphicFramePr>
+          <p:nvPr/>
+        </p:nvGraphicFramePr>
+        <p:xfrm>
+          <a:off x="384048" y="1455420"/>
+          <a:ext cx="4169713" cy="274320"/>
+        </p:xfrm>
+        <a:graphic>
+          <a:graphicData uri="http://schemas.openxmlformats.org/drawingml/2006/table">
+            <a:tbl>
+              <a:tblPr>
+                <a:tableStyleId>{2D5ABB26-0587-4C30-8999-92F81FD0307C}</a:tableStyleId>
+              </a:tblPr>
+              <a:tblGrid>
+                <a:gridCol w="4169713"/>
+              </a:tblGrid>
+              <a:tr h="274320">
+                <a:tc>
+                  <a:txBody>
+                    <a:bodyPr wrap="square"/>
+                    <a:lstStyle/>
+                    <a:p>
+                      <a:pPr algn="ctr"/>
+                      <a:r>
+                        <a:rPr sz="1050" b="1" i="0" lang="pt-BR">
+                          <a:solidFill>
+                            <a:srgbClr val="FFFFFF"/>
+                          </a:solidFill>
+                          <a:latin typeface="Arial"/>
+                        </a:rPr>
+                        <a:t>Resultados-chave</a:t>
+                      </a:r>
+                    </a:p>
+                  </a:txBody>
+                  <a:tcPr marL="109728" marR="109728" marT="45720" marB="45720" anchor="ctr">
+                    <a:lnL w="9525" cap="flat" cmpd="sng" algn="ctr">
+                      <a:noFill/>
+                    </a:lnL>
+                    <a:lnR w="9525" cap="flat" cmpd="sng" algn="ctr">
+                      <a:noFill/>
+                    </a:lnR>
+                    <a:lnT w="9525" cap="flat" cmpd="sng" algn="ctr">
+                      <a:noFill/>
+                    </a:lnT>
+                    <a:lnB w="9525" cap="flat" cmpd="sng" algn="ctr">
+                      <a:noFill/>
+                    </a:lnB>
+                    <a:solidFill>
+                      <a:srgbClr val="1A1A1A"/>
+                    </a:solidFill>
+                  </a:tcPr>
+                </a:tc>
+              </a:tr>
+            </a:tbl>
+          </a:graphicData>
+        </a:graphic>
+      </p:graphicFrame>
+      <p:graphicFrame>
+        <p:nvGraphicFramePr>
+          <p:cNvPr id="15" name="Table 14"/>
+          <p:cNvGraphicFramePr>
+            <a:graphicFrameLocks noGrp="1"/>
+          </p:cNvGraphicFramePr>
+          <p:nvPr/>
+        </p:nvGraphicFramePr>
+        <p:xfrm>
+          <a:off x="640080" y="1857756"/>
+          <a:ext cx="3913681" cy="1177671"/>
+        </p:xfrm>
+        <a:graphic>
+          <a:graphicData uri="http://schemas.openxmlformats.org/drawingml/2006/table">
+            <a:tbl>
+              <a:tblPr>
+                <a:tableStyleId>{2D5ABB26-0587-4C30-8999-92F81FD0307C}</a:tableStyleId>
+              </a:tblPr>
+              <a:tblGrid>
+                <a:gridCol w="1213241"/>
+                <a:gridCol w="337555"/>
+                <a:gridCol w="337555"/>
+                <a:gridCol w="337555"/>
+                <a:gridCol w="337555"/>
+                <a:gridCol w="337555"/>
+                <a:gridCol w="337555"/>
+                <a:gridCol w="337555"/>
+                <a:gridCol w="337555"/>
+              </a:tblGrid>
+              <a:tr h="215265">
+                <a:tc>
+                  <a:txBody>
+                    <a:bodyPr wrap="square"/>
+                    <a:lstStyle/>
+                    <a:p>
+                      <a:pPr algn="l"/>
+                      <a:r>
+                        <a:rPr sz="750" b="1" i="0" lang="pt-BR">
+                          <a:solidFill>
+                            <a:srgbClr val="757575"/>
+                          </a:solidFill>
+                          <a:latin typeface="Arial"/>
+                        </a:rPr>
+                        <a:t>2026</a:t>
+                      </a:r>
+                    </a:p>
+                  </a:txBody>
+                  <a:tcPr marL="54864" marR="54864" marT="45720" marB="45720" anchor="ctr">
+                    <a:lnL w="6350" cap="flat" cmpd="sng" algn="ctr">
+                      <a:noFill/>
+                    </a:lnL>
+                    <a:lnR w="6350" cap="flat" cmpd="sng" algn="ctr">
+                      <a:noFill/>
+                    </a:lnR>
+                    <a:lnT w="6350" cap="flat" cmpd="sng" algn="ctr">
+                      <a:noFill/>
+                    </a:lnT>
+                    <a:lnB w="6350" cap="flat" cmpd="sng" algn="ctr">
+                      <a:solidFill>
+                        <a:srgbClr val="D5D5D5"/>
+                      </a:solidFill>
+                    </a:lnB>
+                    <a:solidFill>
+                      <a:srgbClr val="F7F7F7"/>
+                    </a:solidFill>
+                  </a:tcPr>
+                </a:tc>
+                <a:tc>
+                  <a:txBody>
+                    <a:bodyPr wrap="square"/>
+                    <a:lstStyle/>
+                    <a:p>
+                      <a:pPr algn="ctr"/>
+                      <a:r>
+                        <a:rPr sz="750" b="1" i="0" lang="pt-BR">
+                          <a:solidFill>
+                            <a:srgbClr val="757575"/>
+                          </a:solidFill>
+                          <a:latin typeface="Arial"/>
+                        </a:rPr>
+                        <a:t>fev</a:t>
+                      </a:r>
+                    </a:p>
+                  </a:txBody>
+                  <a:tcPr marL="18288" marR="18288" marT="45720" marB="45720" anchor="ctr">
+                    <a:lnL w="6350" cap="flat" cmpd="sng" algn="ctr">
+                      <a:noFill/>
+                    </a:lnL>
+                    <a:lnR w="6350" cap="flat" cmpd="sng" algn="ctr">
+                      <a:noFill/>
+                    </a:lnR>
+                    <a:lnT w="6350" cap="flat" cmpd="sng" algn="ctr">
+                      <a:noFill/>
+                    </a:lnT>
+                    <a:lnB w="6350" cap="flat" cmpd="sng" algn="ctr">
+                      <a:solidFill>
+                        <a:srgbClr val="D5D5D5"/>
+                      </a:solidFill>
+                    </a:lnB>
+                    <a:solidFill>
+                      <a:srgbClr val="F7F7F7"/>
+                    </a:solidFill>
+                  </a:tcPr>
+                </a:tc>
+                <a:tc>
+                  <a:txBody>
+                    <a:bodyPr wrap="square"/>
+                    <a:lstStyle/>
+                    <a:p>
+                      <a:pPr algn="ctr"/>
+                      <a:r>
+                        <a:rPr sz="750" b="1" i="0" lang="pt-BR">
+                          <a:solidFill>
+                            <a:srgbClr val="757575"/>
+                          </a:solidFill>
+                          <a:latin typeface="Arial"/>
+                        </a:rPr>
+                        <a:t>mar</a:t>
+                      </a:r>
+                    </a:p>
+                  </a:txBody>
+                  <a:tcPr marL="18288" marR="18288" marT="45720" marB="45720" anchor="ctr">
+                    <a:lnL w="6350" cap="flat" cmpd="sng" algn="ctr">
+                      <a:noFill/>
+                    </a:lnL>
+                    <a:lnR w="6350" cap="flat" cmpd="sng" algn="ctr">
+                      <a:noFill/>
+                    </a:lnR>
+                    <a:lnT w="6350" cap="flat" cmpd="sng" algn="ctr">
+                      <a:noFill/>
+                    </a:lnT>
+                    <a:lnB w="6350" cap="flat" cmpd="sng" algn="ctr">
+                      <a:solidFill>
+                        <a:srgbClr val="D5D5D5"/>
+                      </a:solidFill>
+                    </a:lnB>
+                    <a:solidFill>
+                      <a:srgbClr val="F7F7F7"/>
+                    </a:solidFill>
+                  </a:tcPr>
+                </a:tc>
+                <a:tc>
+                  <a:txBody>
+                    <a:bodyPr wrap="square"/>
+                    <a:lstStyle/>
+                    <a:p>
+                      <a:pPr algn="ctr"/>
+                      <a:r>
+                        <a:rPr sz="750" b="1" i="0" lang="pt-BR">
+                          <a:solidFill>
+                            <a:srgbClr val="757575"/>
+                          </a:solidFill>
+                          <a:latin typeface="Arial"/>
+                        </a:rPr>
+                        <a:t>abr</a:t>
+                      </a:r>
+                    </a:p>
+                  </a:txBody>
+                  <a:tcPr marL="18288" marR="18288" marT="45720" marB="45720" anchor="ctr">
+                    <a:lnL w="6350" cap="flat" cmpd="sng" algn="ctr">
+                      <a:noFill/>
+                    </a:lnL>
+                    <a:lnR w="6350" cap="flat" cmpd="sng" algn="ctr">
+                      <a:noFill/>
+                    </a:lnR>
+                    <a:lnT w="6350" cap="flat" cmpd="sng" algn="ctr">
+                      <a:noFill/>
+                    </a:lnT>
+                    <a:lnB w="6350" cap="flat" cmpd="sng" algn="ctr">
+                      <a:solidFill>
+                        <a:srgbClr val="D5D5D5"/>
+                      </a:solidFill>
+                    </a:lnB>
+                    <a:solidFill>
+                      <a:srgbClr val="F7F7F7"/>
+                    </a:solidFill>
+                  </a:tcPr>
+                </a:tc>
+                <a:tc>
+                  <a:txBody>
+                    <a:bodyPr wrap="square"/>
+                    <a:lstStyle/>
+                    <a:p>
+                      <a:pPr algn="ctr"/>
+                      <a:r>
+                        <a:rPr sz="750" b="1" i="0" lang="pt-BR">
+                          <a:solidFill>
+                            <a:srgbClr val="757575"/>
+                          </a:solidFill>
+                          <a:latin typeface="Arial"/>
+                        </a:rPr>
+                        <a:t>mai</a:t>
+                      </a:r>
+                    </a:p>
+                  </a:txBody>
+                  <a:tcPr marL="18288" marR="18288" marT="45720" marB="45720" anchor="ctr">
+                    <a:lnL w="6350" cap="flat" cmpd="sng" algn="ctr">
+                      <a:noFill/>
+                    </a:lnL>
+                    <a:lnR w="6350" cap="flat" cmpd="sng" algn="ctr">
+                      <a:noFill/>
+                    </a:lnR>
+                    <a:lnT w="6350" cap="flat" cmpd="sng" algn="ctr">
+                      <a:noFill/>
+                    </a:lnT>
+                    <a:lnB w="6350" cap="flat" cmpd="sng" algn="ctr">
+                      <a:solidFill>
+                        <a:srgbClr val="D5D5D5"/>
+                      </a:solidFill>
+                    </a:lnB>
+                    <a:solidFill>
+                      <a:srgbClr val="F7F7F7"/>
+                    </a:solidFill>
+                  </a:tcPr>
+                </a:tc>
+                <a:tc>
+                  <a:txBody>
+                    <a:bodyPr wrap="square"/>
+                    <a:lstStyle/>
+                    <a:p>
+                      <a:pPr algn="ctr"/>
+                      <a:r>
+                        <a:rPr sz="750" b="1" i="0" lang="pt-BR">
+                          <a:solidFill>
+                            <a:srgbClr val="757575"/>
+                          </a:solidFill>
+                          <a:latin typeface="Arial"/>
+                        </a:rPr>
+                        <a:t>jun</a:t>
+                      </a:r>
+                    </a:p>
+                  </a:txBody>
+                  <a:tcPr marL="18288" marR="18288" marT="45720" marB="45720" anchor="ctr">
+                    <a:lnL w="6350" cap="flat" cmpd="sng" algn="ctr">
+                      <a:noFill/>
+                    </a:lnL>
+                    <a:lnR w="6350" cap="flat" cmpd="sng" algn="ctr">
+                      <a:noFill/>
+                    </a:lnR>
+                    <a:lnT w="6350" cap="flat" cmpd="sng" algn="ctr">
+                      <a:noFill/>
+                    </a:lnT>
+                    <a:lnB w="6350" cap="flat" cmpd="sng" algn="ctr">
+                      <a:solidFill>
+                        <a:srgbClr val="D5D5D5"/>
+                      </a:solidFill>
+                    </a:lnB>
+                    <a:solidFill>
+                      <a:srgbClr val="F7F7F7"/>
+                    </a:solidFill>
+                  </a:tcPr>
+                </a:tc>
+                <a:tc>
+                  <a:txBody>
+                    <a:bodyPr wrap="square"/>
+                    <a:lstStyle/>
+                    <a:p>
+                      <a:pPr algn="ctr"/>
+                      <a:r>
+                        <a:rPr sz="750" b="1" i="0" lang="pt-BR">
+                          <a:solidFill>
+                            <a:srgbClr val="757575"/>
+                          </a:solidFill>
+                          <a:latin typeface="Arial"/>
+                        </a:rPr>
+                        <a:t>jul</a:t>
+                      </a:r>
+                    </a:p>
+                  </a:txBody>
+                  <a:tcPr marL="18288" marR="18288" marT="45720" marB="45720" anchor="ctr">
+                    <a:lnL w="6350" cap="flat" cmpd="sng" algn="ctr">
+                      <a:noFill/>
+                    </a:lnL>
+                    <a:lnR w="6350" cap="flat" cmpd="sng" algn="ctr">
+                      <a:noFill/>
+                    </a:lnR>
+                    <a:lnT w="6350" cap="flat" cmpd="sng" algn="ctr">
+                      <a:noFill/>
+                    </a:lnT>
+                    <a:lnB w="6350" cap="flat" cmpd="sng" algn="ctr">
+                      <a:solidFill>
+                        <a:srgbClr val="D5D5D5"/>
+                      </a:solidFill>
+                    </a:lnB>
+                    <a:solidFill>
+                      <a:srgbClr val="F7F7F7"/>
+                    </a:solidFill>
+                  </a:tcPr>
+                </a:tc>
+                <a:tc>
+                  <a:txBody>
+                    <a:bodyPr wrap="square"/>
+                    <a:lstStyle/>
+                    <a:p>
+                      <a:pPr algn="ctr"/>
+                      <a:r>
+                        <a:rPr sz="750" b="1" i="0" lang="pt-BR">
+                          <a:solidFill>
+                            <a:srgbClr val="757575"/>
+                          </a:solidFill>
+                          <a:latin typeface="Arial"/>
+                        </a:rPr>
+                        <a:t>ago</a:t>
+                      </a:r>
+                    </a:p>
+                  </a:txBody>
+                  <a:tcPr marL="18288" marR="18288" marT="45720" marB="45720" anchor="ctr">
+                    <a:lnL w="6350" cap="flat" cmpd="sng" algn="ctr">
+                      <a:noFill/>
+                    </a:lnL>
+                    <a:lnR w="6350" cap="flat" cmpd="sng" algn="ctr">
+                      <a:noFill/>
+                    </a:lnR>
+                    <a:lnT w="6350" cap="flat" cmpd="sng" algn="ctr">
+                      <a:noFill/>
+                    </a:lnT>
+                    <a:lnB w="6350" cap="flat" cmpd="sng" algn="ctr">
+                      <a:solidFill>
+                        <a:srgbClr val="D5D5D5"/>
+                      </a:solidFill>
+                    </a:lnB>
+                    <a:solidFill>
+                      <a:srgbClr val="F7F7F7"/>
+                    </a:solidFill>
+                  </a:tcPr>
+                </a:tc>
+                <a:tc>
+                  <a:txBody>
+                    <a:bodyPr wrap="square"/>
+                    <a:lstStyle/>
+                    <a:p>
+                      <a:pPr algn="ctr"/>
+                      <a:r>
+                        <a:rPr sz="750" b="1" i="0" lang="pt-BR">
+                          <a:solidFill>
+                            <a:srgbClr val="757575"/>
+                          </a:solidFill>
+                          <a:latin typeface="Arial"/>
+                        </a:rPr>
+                        <a:t>set</a:t>
+                      </a:r>
+                    </a:p>
+                  </a:txBody>
+                  <a:tcPr marL="18288" marR="18288" marT="45720" marB="45720" anchor="ctr">
+                    <a:lnL w="6350" cap="flat" cmpd="sng" algn="ctr">
+                      <a:noFill/>
+                    </a:lnL>
+                    <a:lnR w="6350" cap="flat" cmpd="sng" algn="ctr">
+                      <a:noFill/>
+                    </a:lnR>
+                    <a:lnT w="6350" cap="flat" cmpd="sng" algn="ctr">
+                      <a:noFill/>
+                    </a:lnT>
+                    <a:lnB w="6350" cap="flat" cmpd="sng" algn="ctr">
+                      <a:solidFill>
+                        <a:srgbClr val="D5D5D5"/>
+                      </a:solidFill>
+                    </a:lnB>
+                    <a:solidFill>
+                      <a:srgbClr val="F7F7F7"/>
+                    </a:solidFill>
+                  </a:tcPr>
+                </a:tc>
+              </a:tr>
+              <a:tr h="178689">
+                <a:tc>
+                  <a:txBody>
+                    <a:bodyPr wrap="square"/>
+                    <a:lstStyle/>
+                    <a:p>
+                      <a:pPr algn="l"/>
+                      <a:r>
+                        <a:rPr sz="750" b="0" i="0" lang="pt-BR">
+                          <a:solidFill>
+                            <a:srgbClr val="333333"/>
+                          </a:solidFill>
+                          <a:latin typeface="Arial"/>
+                        </a:rPr>
+                        <a:t>% alocado certo</a:t>
+                      </a:r>
+                    </a:p>
+                  </a:txBody>
+                  <a:tcPr marL="54864" marR="54864" marT="45720" marB="45720" anchor="ctr">
+                    <a:lnL w="6350" cap="flat" cmpd="sng" algn="ctr">
+                      <a:noFill/>
+                    </a:lnL>
+                    <a:lnR w="6350" cap="flat" cmpd="sng" algn="ctr">
+                      <a:noFill/>
+                    </a:lnR>
+                    <a:lnT w="6350" cap="flat" cmpd="sng" algn="ctr">
+                      <a:noFill/>
+                    </a:lnT>
+                    <a:lnB w="6350" cap="flat" cmpd="sng" algn="ctr">
+                      <a:solidFill>
+                        <a:srgbClr val="ECECEC"/>
+                      </a:solidFill>
+                    </a:lnB>
+                    <a:solidFill>
+                      <a:srgbClr val="FFFFFF"/>
+                    </a:solidFill>
+                  </a:tcPr>
+                </a:tc>
+                <a:tc>
+                  <a:txBody>
+                    <a:bodyPr wrap="square"/>
+                    <a:lstStyle/>
+                    <a:p>
+                      <a:pPr algn="ctr"/>
+                      <a:r>
+                        <a:rPr sz="750" b="0" i="0" lang="pt-BR">
+                          <a:solidFill>
+                            <a:srgbClr val="333333"/>
+                          </a:solidFill>
+                          <a:latin typeface="Arial"/>
+                        </a:rPr>
+                        <a:t>43%</a:t>
+                      </a:r>
+                    </a:p>
+                  </a:txBody>
+                  <a:tcPr marL="18288" marR="18288" marT="45720" marB="45720" anchor="ctr">
+                    <a:lnL w="6350" cap="flat" cmpd="sng" algn="ctr">
+                      <a:noFill/>
+                    </a:lnL>
+                    <a:lnR w="6350" cap="flat" cmpd="sng" algn="ctr">
+                      <a:noFill/>
+                    </a:lnR>
+                    <a:lnT w="6350" cap="flat" cmpd="sng" algn="ctr">
+                      <a:noFill/>
+                    </a:lnT>
+                    <a:lnB w="6350" cap="flat" cmpd="sng" algn="ctr">
+                      <a:solidFill>
+                        <a:srgbClr val="ECECEC"/>
+                      </a:solidFill>
+                    </a:lnB>
+                    <a:solidFill>
+                      <a:srgbClr val="FFFFFF"/>
+                    </a:solidFill>
+                  </a:tcPr>
+                </a:tc>
+                <a:tc>
+                  <a:txBody>
+                    <a:bodyPr wrap="square"/>
+                    <a:lstStyle/>
+                    <a:p>
+                      <a:pPr algn="ctr"/>
+                      <a:r>
+                        <a:rPr sz="750" b="0" i="0" lang="pt-BR">
+                          <a:solidFill>
+                            <a:srgbClr val="333333"/>
+                          </a:solidFill>
+                          <a:latin typeface="Arial"/>
+                        </a:rPr>
+                        <a:t>48%</a:t>
+                      </a:r>
+                    </a:p>
+                  </a:txBody>
+                  <a:tcPr marL="18288" marR="18288" marT="45720" marB="45720" anchor="ctr">
+                    <a:lnL w="6350" cap="flat" cmpd="sng" algn="ctr">
+                      <a:noFill/>
+                    </a:lnL>
+                    <a:lnR w="6350" cap="flat" cmpd="sng" algn="ctr">
+                      <a:noFill/>
+                    </a:lnR>
+                    <a:lnT w="6350" cap="flat" cmpd="sng" algn="ctr">
+                      <a:noFill/>
+                    </a:lnT>
+                    <a:lnB w="6350" cap="flat" cmpd="sng" algn="ctr">
+                      <a:solidFill>
+                        <a:srgbClr val="ECECEC"/>
+                      </a:solidFill>
+                    </a:lnB>
+                    <a:solidFill>
+                      <a:srgbClr val="FFFFFF"/>
+                    </a:solidFill>
+                  </a:tcPr>
+                </a:tc>
+                <a:tc>
+                  <a:txBody>
+                    <a:bodyPr wrap="square"/>
+                    <a:lstStyle/>
+                    <a:p>
+                      <a:pPr algn="ctr"/>
+                      <a:r>
+                        <a:rPr sz="750" b="0" i="0" lang="pt-BR">
+                          <a:solidFill>
+                            <a:srgbClr val="333333"/>
+                          </a:solidFill>
+                          <a:latin typeface="Arial"/>
+                        </a:rPr>
+                        <a:t>49%</a:t>
+                      </a:r>
+                    </a:p>
+                  </a:txBody>
+                  <a:tcPr marL="18288" marR="18288" marT="45720" marB="45720" anchor="ctr">
+                    <a:lnL w="6350" cap="flat" cmpd="sng" algn="ctr">
+                      <a:noFill/>
+                    </a:lnL>
+                    <a:lnR w="6350" cap="flat" cmpd="sng" algn="ctr">
+                      <a:noFill/>
+                    </a:lnR>
+                    <a:lnT w="6350" cap="flat" cmpd="sng" algn="ctr">
+                      <a:noFill/>
+                    </a:lnT>
+                    <a:lnB w="6350" cap="flat" cmpd="sng" algn="ctr">
+                      <a:solidFill>
+                        <a:srgbClr val="ECECEC"/>
+                      </a:solidFill>
+                    </a:lnB>
+                    <a:solidFill>
+                      <a:srgbClr val="FFFFFF"/>
+                    </a:solidFill>
+                  </a:tcPr>
+                </a:tc>
+                <a:tc>
+                  <a:txBody>
+                    <a:bodyPr wrap="square"/>
+                    <a:lstStyle/>
+                    <a:p>
+                      <a:pPr algn="ctr"/>
+                      <a:r>
+                        <a:rPr sz="750" b="0" i="0" lang="pt-BR">
+                          <a:solidFill>
+                            <a:srgbClr val="333333"/>
+                          </a:solidFill>
+                          <a:latin typeface="Arial"/>
+                        </a:rPr>
+                        <a:t>47%</a:t>
+                      </a:r>
+                    </a:p>
+                  </a:txBody>
+                  <a:tcPr marL="18288" marR="18288" marT="45720" marB="45720" anchor="ctr">
+                    <a:lnL w="6350" cap="flat" cmpd="sng" algn="ctr">
+                      <a:noFill/>
+                    </a:lnL>
+                    <a:lnR w="6350" cap="flat" cmpd="sng" algn="ctr">
+                      <a:noFill/>
+                    </a:lnR>
+                    <a:lnT w="6350" cap="flat" cmpd="sng" algn="ctr">
+                      <a:noFill/>
+                    </a:lnT>
+                    <a:lnB w="6350" cap="flat" cmpd="sng" algn="ctr">
+                      <a:solidFill>
+                        <a:srgbClr val="ECECEC"/>
+                      </a:solidFill>
+                    </a:lnB>
+                    <a:solidFill>
+                      <a:srgbClr val="FFFFFF"/>
+                    </a:solidFill>
+                  </a:tcPr>
+                </a:tc>
+                <a:tc>
+                  <a:txBody>
+                    <a:bodyPr wrap="square"/>
+                    <a:lstStyle/>
+                    <a:p>
+                      <a:pPr algn="ctr"/>
+                      <a:r>
+                        <a:rPr sz="750" b="0" i="0" lang="pt-BR">
+                          <a:solidFill>
+                            <a:srgbClr val="333333"/>
+                          </a:solidFill>
+                          <a:latin typeface="Arial"/>
+                        </a:rPr>
+                        <a:t>47%</a:t>
+                      </a:r>
+                    </a:p>
+                  </a:txBody>
+                  <a:tcPr marL="18288" marR="18288" marT="45720" marB="45720" anchor="ctr">
+                    <a:lnL w="6350" cap="flat" cmpd="sng" algn="ctr">
+                      <a:noFill/>
+                    </a:lnL>
+                    <a:lnR w="6350" cap="flat" cmpd="sng" algn="ctr">
+                      <a:noFill/>
+                    </a:lnR>
+                    <a:lnT w="6350" cap="flat" cmpd="sng" algn="ctr">
+                      <a:noFill/>
+                    </a:lnT>
+                    <a:lnB w="6350" cap="flat" cmpd="sng" algn="ctr">
+                      <a:solidFill>
+                        <a:srgbClr val="ECECEC"/>
+                      </a:solidFill>
+                    </a:lnB>
+                    <a:solidFill>
+                      <a:srgbClr val="FFFFFF"/>
+                    </a:solidFill>
+                  </a:tcPr>
+                </a:tc>
+                <a:tc>
+                  <a:txBody>
+                    <a:bodyPr wrap="square"/>
+                    <a:lstStyle/>
+                    <a:p>
+                      <a:pPr algn="ctr"/>
+                      <a:r>
+                        <a:rPr sz="750" b="0" i="0" lang="pt-BR">
+                          <a:solidFill>
+                            <a:srgbClr val="333333"/>
+                          </a:solidFill>
+                          <a:latin typeface="Arial"/>
+                        </a:rPr>
+                        <a:t>49%</a:t>
+                      </a:r>
+                    </a:p>
+                  </a:txBody>
+                  <a:tcPr marL="18288" marR="18288" marT="45720" marB="45720" anchor="ctr">
+                    <a:lnL w="6350" cap="flat" cmpd="sng" algn="ctr">
+                      <a:noFill/>
+                    </a:lnL>
+                    <a:lnR w="6350" cap="flat" cmpd="sng" algn="ctr">
+                      <a:noFill/>
+                    </a:lnR>
+                    <a:lnT w="6350" cap="flat" cmpd="sng" algn="ctr">
+                      <a:noFill/>
+                    </a:lnT>
+                    <a:lnB w="6350" cap="flat" cmpd="sng" algn="ctr">
+                      <a:solidFill>
+                        <a:srgbClr val="ECECEC"/>
+                      </a:solidFill>
+                    </a:lnB>
+                    <a:solidFill>
+                      <a:srgbClr val="FFFFFF"/>
+                    </a:solidFill>
+                  </a:tcPr>
+                </a:tc>
+                <a:tc>
+                  <a:txBody>
+                    <a:bodyPr wrap="square"/>
+                    <a:lstStyle/>
+                    <a:p>
+                      <a:pPr algn="ctr"/>
+                      <a:r>
+                        <a:rPr sz="750" b="0" i="0" lang="pt-BR">
+                          <a:solidFill>
+                            <a:srgbClr val="333333"/>
+                          </a:solidFill>
+                          <a:latin typeface="Arial"/>
+                        </a:rPr>
+                        <a:t>46%</a:t>
+                      </a:r>
+                    </a:p>
+                  </a:txBody>
+                  <a:tcPr marL="18288" marR="18288" marT="45720" marB="45720" anchor="ctr">
+                    <a:lnL w="6350" cap="flat" cmpd="sng" algn="ctr">
+                      <a:noFill/>
+                    </a:lnL>
+                    <a:lnR w="6350" cap="flat" cmpd="sng" algn="ctr">
+                      <a:noFill/>
+                    </a:lnR>
+                    <a:lnT w="6350" cap="flat" cmpd="sng" algn="ctr">
+                      <a:noFill/>
+                    </a:lnT>
+                    <a:lnB w="6350" cap="flat" cmpd="sng" algn="ctr">
+                      <a:solidFill>
+                        <a:srgbClr val="ECECEC"/>
+                      </a:solidFill>
+                    </a:lnB>
+                    <a:solidFill>
+                      <a:srgbClr val="FFFFFF"/>
+                    </a:solidFill>
+                  </a:tcPr>
+                </a:tc>
+                <a:tc>
+                  <a:txBody>
+                    <a:bodyPr wrap="square"/>
+                    <a:lstStyle/>
+                    <a:p>
+                      <a:pPr algn="ctr"/>
+                      <a:r>
+                        <a:rPr sz="750" b="0" i="0" lang="pt-BR">
+                          <a:solidFill>
+                            <a:srgbClr val="333333"/>
+                          </a:solidFill>
+                          <a:latin typeface="Arial"/>
+                        </a:rPr>
+                        <a:t>53%</a:t>
+                      </a:r>
+                    </a:p>
+                  </a:txBody>
+                  <a:tcPr marL="18288" marR="18288" marT="45720" marB="45720" anchor="ctr">
+                    <a:lnL w="6350" cap="flat" cmpd="sng" algn="ctr">
+                      <a:noFill/>
+                    </a:lnL>
+                    <a:lnR w="6350" cap="flat" cmpd="sng" algn="ctr">
+                      <a:noFill/>
+                    </a:lnR>
+                    <a:lnT w="6350" cap="flat" cmpd="sng" algn="ctr">
+                      <a:noFill/>
+                    </a:lnT>
+                    <a:lnB w="6350" cap="flat" cmpd="sng" algn="ctr">
+                      <a:solidFill>
+                        <a:srgbClr val="ECECEC"/>
+                      </a:solidFill>
+                    </a:lnB>
+                    <a:solidFill>
+                      <a:srgbClr val="FFFFFF"/>
+                    </a:solidFill>
+                  </a:tcPr>
+                </a:tc>
+              </a:tr>
+              <a:tr h="178689">
+                <a:tc>
+                  <a:txBody>
+                    <a:bodyPr wrap="square"/>
+                    <a:lstStyle/>
+                    <a:p>
+                      <a:pPr algn="l"/>
+                      <a:r>
+                        <a:rPr sz="750" b="0" i="0" lang="pt-BR">
+                          <a:solidFill>
+                            <a:srgbClr val="333333"/>
+                          </a:solidFill>
+                          <a:latin typeface="Arial"/>
+                        </a:rPr>
+                        <a:t>% alocado errado</a:t>
+                      </a:r>
+                    </a:p>
+                  </a:txBody>
+                  <a:tcPr marL="54864" marR="54864" marT="45720" marB="45720" anchor="ctr">
+                    <a:lnL w="6350" cap="flat" cmpd="sng" algn="ctr">
+                      <a:noFill/>
+                    </a:lnL>
+                    <a:lnR w="6350" cap="flat" cmpd="sng" algn="ctr">
+                      <a:noFill/>
+                    </a:lnR>
+                    <a:lnT w="6350" cap="flat" cmpd="sng" algn="ctr">
+                      <a:noFill/>
+                    </a:lnT>
+                    <a:lnB w="6350" cap="flat" cmpd="sng" algn="ctr">
+                      <a:solidFill>
+                        <a:srgbClr val="ECECEC"/>
+                      </a:solidFill>
+                    </a:lnB>
+                    <a:solidFill>
+                      <a:srgbClr val="FFFFFF"/>
+                    </a:solidFill>
+                  </a:tcPr>
+                </a:tc>
+                <a:tc>
+                  <a:txBody>
+                    <a:bodyPr wrap="square"/>
+                    <a:lstStyle/>
+                    <a:p>
+                      <a:pPr algn="ctr"/>
+                      <a:r>
+                        <a:rPr sz="750" b="0" i="0" lang="pt-BR">
+                          <a:solidFill>
+                            <a:srgbClr val="333333"/>
+                          </a:solidFill>
+                          <a:latin typeface="Arial"/>
+                        </a:rPr>
+                        <a:t>57%</a:t>
+                      </a:r>
+                    </a:p>
+                  </a:txBody>
+                  <a:tcPr marL="18288" marR="18288" marT="45720" marB="45720" anchor="ctr">
+                    <a:lnL w="6350" cap="flat" cmpd="sng" algn="ctr">
+                      <a:noFill/>
+                    </a:lnL>
+                    <a:lnR w="6350" cap="flat" cmpd="sng" algn="ctr">
+                      <a:noFill/>
+                    </a:lnR>
+                    <a:lnT w="6350" cap="flat" cmpd="sng" algn="ctr">
+                      <a:noFill/>
+                    </a:lnT>
+                    <a:lnB w="6350" cap="flat" cmpd="sng" algn="ctr">
+                      <a:solidFill>
+                        <a:srgbClr val="ECECEC"/>
+                      </a:solidFill>
+                    </a:lnB>
+                    <a:solidFill>
+                      <a:srgbClr val="FFFFFF"/>
+                    </a:solidFill>
+                  </a:tcPr>
+                </a:tc>
+                <a:tc>
+                  <a:txBody>
+                    <a:bodyPr wrap="square"/>
+                    <a:lstStyle/>
+                    <a:p>
+                      <a:pPr algn="ctr"/>
+                      <a:r>
+                        <a:rPr sz="750" b="0" i="0" lang="pt-BR">
+                          <a:solidFill>
+                            <a:srgbClr val="333333"/>
+                          </a:solidFill>
+                          <a:latin typeface="Arial"/>
+                        </a:rPr>
+                        <a:t>52%</a:t>
+                      </a:r>
+                    </a:p>
+                  </a:txBody>
+                  <a:tcPr marL="18288" marR="18288" marT="45720" marB="45720" anchor="ctr">
+                    <a:lnL w="6350" cap="flat" cmpd="sng" algn="ctr">
+                      <a:noFill/>
+                    </a:lnL>
+                    <a:lnR w="6350" cap="flat" cmpd="sng" algn="ctr">
+                      <a:noFill/>
+                    </a:lnR>
+                    <a:lnT w="6350" cap="flat" cmpd="sng" algn="ctr">
+                      <a:noFill/>
+                    </a:lnT>
+                    <a:lnB w="6350" cap="flat" cmpd="sng" algn="ctr">
+                      <a:solidFill>
+                        <a:srgbClr val="ECECEC"/>
+                      </a:solidFill>
+                    </a:lnB>
+                    <a:solidFill>
+                      <a:srgbClr val="FFFFFF"/>
+                    </a:solidFill>
+                  </a:tcPr>
+                </a:tc>
+                <a:tc>
+                  <a:txBody>
+                    <a:bodyPr wrap="square"/>
+                    <a:lstStyle/>
+                    <a:p>
+                      <a:pPr algn="ctr"/>
+                      <a:r>
+                        <a:rPr sz="750" b="0" i="0" lang="pt-BR">
+                          <a:solidFill>
+                            <a:srgbClr val="333333"/>
+                          </a:solidFill>
+                          <a:latin typeface="Arial"/>
+                        </a:rPr>
+                        <a:t>51%</a:t>
+                      </a:r>
+                    </a:p>
+                  </a:txBody>
+                  <a:tcPr marL="18288" marR="18288" marT="45720" marB="45720" anchor="ctr">
+                    <a:lnL w="6350" cap="flat" cmpd="sng" algn="ctr">
+                      <a:noFill/>
+                    </a:lnL>
+                    <a:lnR w="6350" cap="flat" cmpd="sng" algn="ctr">
+                      <a:noFill/>
+                    </a:lnR>
+                    <a:lnT w="6350" cap="flat" cmpd="sng" algn="ctr">
+                      <a:noFill/>
+                    </a:lnT>
+                    <a:lnB w="6350" cap="flat" cmpd="sng" algn="ctr">
+                      <a:solidFill>
+                        <a:srgbClr val="ECECEC"/>
+                      </a:solidFill>
+                    </a:lnB>
+                    <a:solidFill>
+                      <a:srgbClr val="FFFFFF"/>
+                    </a:solidFill>
+                  </a:tcPr>
+                </a:tc>
+                <a:tc>
+                  <a:txBody>
+                    <a:bodyPr wrap="square"/>
+                    <a:lstStyle/>
+                    <a:p>
+                      <a:pPr algn="ctr"/>
+                      <a:r>
+                        <a:rPr sz="750" b="0" i="0" lang="pt-BR">
+                          <a:solidFill>
+                            <a:srgbClr val="333333"/>
+                          </a:solidFill>
+                          <a:latin typeface="Arial"/>
+                        </a:rPr>
+                        <a:t>53%</a:t>
+                      </a:r>
+                    </a:p>
+                  </a:txBody>
+                  <a:tcPr marL="18288" marR="18288" marT="45720" marB="45720" anchor="ctr">
+                    <a:lnL w="6350" cap="flat" cmpd="sng" algn="ctr">
+                      <a:noFill/>
+                    </a:lnL>
+                    <a:lnR w="6350" cap="flat" cmpd="sng" algn="ctr">
+                      <a:noFill/>
+                    </a:lnR>
+                    <a:lnT w="6350" cap="flat" cmpd="sng" algn="ctr">
+                      <a:noFill/>
+                    </a:lnT>
+                    <a:lnB w="6350" cap="flat" cmpd="sng" algn="ctr">
+                      <a:solidFill>
+                        <a:srgbClr val="ECECEC"/>
+                      </a:solidFill>
+                    </a:lnB>
+                    <a:solidFill>
+                      <a:srgbClr val="FFFFFF"/>
+                    </a:solidFill>
+                  </a:tcPr>
+                </a:tc>
+                <a:tc>
+                  <a:txBody>
+                    <a:bodyPr wrap="square"/>
+                    <a:lstStyle/>
+                    <a:p>
+                      <a:pPr algn="ctr"/>
+                      <a:r>
+                        <a:rPr sz="750" b="0" i="0" lang="pt-BR">
+                          <a:solidFill>
+                            <a:srgbClr val="333333"/>
+                          </a:solidFill>
+                          <a:latin typeface="Arial"/>
+                        </a:rPr>
+                        <a:t>53%</a:t>
+                      </a:r>
+                    </a:p>
+                  </a:txBody>
+                  <a:tcPr marL="18288" marR="18288" marT="45720" marB="45720" anchor="ctr">
+                    <a:lnL w="6350" cap="flat" cmpd="sng" algn="ctr">
+                      <a:noFill/>
+                    </a:lnL>
+                    <a:lnR w="6350" cap="flat" cmpd="sng" algn="ctr">
+                      <a:noFill/>
+                    </a:lnR>
+                    <a:lnT w="6350" cap="flat" cmpd="sng" algn="ctr">
+                      <a:noFill/>
+                    </a:lnT>
+                    <a:lnB w="6350" cap="flat" cmpd="sng" algn="ctr">
+                      <a:solidFill>
+                        <a:srgbClr val="ECECEC"/>
+                      </a:solidFill>
+                    </a:lnB>
+                    <a:solidFill>
+                      <a:srgbClr val="FFFFFF"/>
+                    </a:solidFill>
+                  </a:tcPr>
+                </a:tc>
+                <a:tc>
+                  <a:txBody>
+                    <a:bodyPr wrap="square"/>
+                    <a:lstStyle/>
+                    <a:p>
+                      <a:pPr algn="ctr"/>
+                      <a:r>
+                        <a:rPr sz="750" b="0" i="0" lang="pt-BR">
+                          <a:solidFill>
+                            <a:srgbClr val="333333"/>
+                          </a:solidFill>
+                          <a:latin typeface="Arial"/>
+                        </a:rPr>
+                        <a:t>51%</a:t>
+                      </a:r>
+                    </a:p>
+                  </a:txBody>
+                  <a:tcPr marL="18288" marR="18288" marT="45720" marB="45720" anchor="ctr">
+                    <a:lnL w="6350" cap="flat" cmpd="sng" algn="ctr">
+                      <a:noFill/>
+                    </a:lnL>
+                    <a:lnR w="6350" cap="flat" cmpd="sng" algn="ctr">
+                      <a:noFill/>
+                    </a:lnR>
+                    <a:lnT w="6350" cap="flat" cmpd="sng" algn="ctr">
+                      <a:noFill/>
+                    </a:lnT>
+                    <a:lnB w="6350" cap="flat" cmpd="sng" algn="ctr">
+                      <a:solidFill>
+                        <a:srgbClr val="ECECEC"/>
+                      </a:solidFill>
+                    </a:lnB>
+                    <a:solidFill>
+                      <a:srgbClr val="FFFFFF"/>
+                    </a:solidFill>
+                  </a:tcPr>
+                </a:tc>
+                <a:tc>
+                  <a:txBody>
+                    <a:bodyPr wrap="square"/>
+                    <a:lstStyle/>
+                    <a:p>
+                      <a:pPr algn="ctr"/>
+                      <a:r>
+                        <a:rPr sz="750" b="0" i="0" lang="pt-BR">
+                          <a:solidFill>
+                            <a:srgbClr val="333333"/>
+                          </a:solidFill>
+                          <a:latin typeface="Arial"/>
+                        </a:rPr>
+                        <a:t>54%</a:t>
+                      </a:r>
+                    </a:p>
+                  </a:txBody>
+                  <a:tcPr marL="18288" marR="18288" marT="45720" marB="45720" anchor="ctr">
+                    <a:lnL w="6350" cap="flat" cmpd="sng" algn="ctr">
+                      <a:noFill/>
+                    </a:lnL>
+                    <a:lnR w="6350" cap="flat" cmpd="sng" algn="ctr">
+                      <a:noFill/>
+                    </a:lnR>
+                    <a:lnT w="6350" cap="flat" cmpd="sng" algn="ctr">
+                      <a:noFill/>
+                    </a:lnT>
+                    <a:lnB w="6350" cap="flat" cmpd="sng" algn="ctr">
+                      <a:solidFill>
+                        <a:srgbClr val="ECECEC"/>
+                      </a:solidFill>
+                    </a:lnB>
+                    <a:solidFill>
+                      <a:srgbClr val="FFFFFF"/>
+                    </a:solidFill>
+                  </a:tcPr>
+                </a:tc>
+                <a:tc>
+                  <a:txBody>
+                    <a:bodyPr wrap="square"/>
+                    <a:lstStyle/>
+                    <a:p>
+                      <a:pPr algn="ctr"/>
+                      <a:r>
+                        <a:rPr sz="750" b="0" i="0" lang="pt-BR">
+                          <a:solidFill>
+                            <a:srgbClr val="333333"/>
+                          </a:solidFill>
+                          <a:latin typeface="Arial"/>
+                        </a:rPr>
+                        <a:t>47%</a:t>
+                      </a:r>
+                    </a:p>
+                  </a:txBody>
+                  <a:tcPr marL="18288" marR="18288" marT="45720" marB="45720" anchor="ctr">
+                    <a:lnL w="6350" cap="flat" cmpd="sng" algn="ctr">
+                      <a:noFill/>
+                    </a:lnL>
+                    <a:lnR w="6350" cap="flat" cmpd="sng" algn="ctr">
+                      <a:noFill/>
+                    </a:lnR>
+                    <a:lnT w="6350" cap="flat" cmpd="sng" algn="ctr">
+                      <a:noFill/>
+                    </a:lnT>
+                    <a:lnB w="6350" cap="flat" cmpd="sng" algn="ctr">
+                      <a:solidFill>
+                        <a:srgbClr val="ECECEC"/>
+                      </a:solidFill>
+                    </a:lnB>
+                    <a:solidFill>
+                      <a:srgbClr val="FFFFFF"/>
+                    </a:solidFill>
+                  </a:tcPr>
+                </a:tc>
+              </a:tr>
+              <a:tr h="302514">
+                <a:tc>
+                  <a:txBody>
+                    <a:bodyPr wrap="square"/>
+                    <a:lstStyle/>
+                    <a:p>
+                      <a:pPr algn="l"/>
+                      <a:r>
+                        <a:rPr sz="750" b="0" i="0" lang="pt-BR">
+                          <a:solidFill>
+                            <a:srgbClr val="333333"/>
+                          </a:solidFill>
+                          <a:latin typeface="Arial"/>
+                        </a:rPr>
+                        <a:t>% conv. média - alocado certo</a:t>
+                      </a:r>
+                    </a:p>
+                  </a:txBody>
+                  <a:tcPr marL="54864" marR="54864" marT="45720" marB="45720" anchor="ctr">
+                    <a:lnL w="6350" cap="flat" cmpd="sng" algn="ctr">
+                      <a:noFill/>
+                    </a:lnL>
+                    <a:lnR w="6350" cap="flat" cmpd="sng" algn="ctr">
+                      <a:noFill/>
+                    </a:lnR>
+                    <a:lnT w="6350" cap="flat" cmpd="sng" algn="ctr">
+                      <a:noFill/>
+                    </a:lnT>
+                    <a:lnB w="6350" cap="flat" cmpd="sng" algn="ctr">
+                      <a:solidFill>
+                        <a:srgbClr val="ECECEC"/>
+                      </a:solidFill>
+                    </a:lnB>
+                    <a:solidFill>
+                      <a:srgbClr val="FFFFFF"/>
+                    </a:solidFill>
+                  </a:tcPr>
+                </a:tc>
+                <a:tc>
+                  <a:txBody>
+                    <a:bodyPr wrap="square"/>
+                    <a:lstStyle/>
+                    <a:p>
+                      <a:pPr algn="ctr"/>
+                      <a:r>
+                        <a:rPr sz="750" b="1" i="0" lang="pt-BR">
+                          <a:solidFill>
+                            <a:srgbClr val="2E7D32"/>
+                          </a:solidFill>
+                          <a:latin typeface="Arial"/>
+                        </a:rPr>
+                        <a:t>0,74%</a:t>
+                      </a:r>
+                    </a:p>
+                  </a:txBody>
+                  <a:tcPr marL="18288" marR="18288" marT="45720" marB="45720" anchor="ctr">
+                    <a:lnL w="12700" cap="flat" cmpd="sng" algn="ctr">
+                      <a:solidFill>
+                        <a:srgbClr val="FFFFFF"/>
+                      </a:solidFill>
+                    </a:lnL>
+                    <a:lnR w="12700" cap="flat" cmpd="sng" algn="ctr">
+                      <a:solidFill>
+                        <a:srgbClr val="FFFFFF"/>
+                      </a:solidFill>
+                    </a:lnR>
+                    <a:lnT w="12700" cap="flat" cmpd="sng" algn="ctr">
+                      <a:noFill/>
+                    </a:lnT>
+                    <a:lnB w="12700" cap="flat" cmpd="sng" algn="ctr">
+                      <a:solidFill>
+                        <a:srgbClr val="ECECEC"/>
+                      </a:solidFill>
+                    </a:lnB>
+                    <a:solidFill>
+                      <a:srgbClr val="D4E9D1"/>
+                    </a:solidFill>
+                  </a:tcPr>
+                </a:tc>
+                <a:tc>
+                  <a:txBody>
+                    <a:bodyPr wrap="square"/>
+                    <a:lstStyle/>
+                    <a:p>
+                      <a:pPr algn="ctr"/>
+                      <a:r>
+                        <a:rPr sz="750" b="1" i="0" lang="pt-BR">
+                          <a:solidFill>
+                            <a:srgbClr val="737C15"/>
+                          </a:solidFill>
+                          <a:latin typeface="Arial"/>
+                        </a:rPr>
+                        <a:t>0,63%</a:t>
+                      </a:r>
+                    </a:p>
+                  </a:txBody>
+                  <a:tcPr marL="18288" marR="18288" marT="45720" marB="45720" anchor="ctr">
+                    <a:lnL w="12700" cap="flat" cmpd="sng" algn="ctr">
+                      <a:solidFill>
+                        <a:srgbClr val="FFFFFF"/>
+                      </a:solidFill>
+                    </a:lnL>
+                    <a:lnR w="12700" cap="flat" cmpd="sng" algn="ctr">
+                      <a:solidFill>
+                        <a:srgbClr val="FFFFFF"/>
+                      </a:solidFill>
+                    </a:lnR>
+                    <a:lnT w="12700" cap="flat" cmpd="sng" algn="ctr">
+                      <a:noFill/>
+                    </a:lnT>
+                    <a:lnB w="12700" cap="flat" cmpd="sng" algn="ctr">
+                      <a:solidFill>
+                        <a:srgbClr val="ECECEC"/>
+                      </a:solidFill>
+                    </a:lnB>
+                    <a:solidFill>
+                      <a:srgbClr val="E8E9CB"/>
+                    </a:solidFill>
+                  </a:tcPr>
+                </a:tc>
+                <a:tc>
+                  <a:txBody>
+                    <a:bodyPr wrap="square"/>
+                    <a:lstStyle/>
+                    <a:p>
+                      <a:pPr algn="ctr"/>
+                      <a:r>
+                        <a:rPr sz="750" b="1" i="0" lang="pt-BR">
+                          <a:solidFill>
+                            <a:srgbClr val="A57C00"/>
+                          </a:solidFill>
+                          <a:latin typeface="Arial"/>
+                        </a:rPr>
+                        <a:t>0,55%</a:t>
+                      </a:r>
+                    </a:p>
+                  </a:txBody>
+                  <a:tcPr marL="18288" marR="18288" marT="45720" marB="45720" anchor="ctr">
+                    <a:lnL w="12700" cap="flat" cmpd="sng" algn="ctr">
+                      <a:solidFill>
+                        <a:srgbClr val="FFFFFF"/>
+                      </a:solidFill>
+                    </a:lnL>
+                    <a:lnR w="12700" cap="flat" cmpd="sng" algn="ctr">
+                      <a:solidFill>
+                        <a:srgbClr val="FFFFFF"/>
+                      </a:solidFill>
+                    </a:lnR>
+                    <a:lnT w="12700" cap="flat" cmpd="sng" algn="ctr">
+                      <a:noFill/>
+                    </a:lnT>
+                    <a:lnB w="12700" cap="flat" cmpd="sng" algn="ctr">
+                      <a:solidFill>
+                        <a:srgbClr val="ECECEC"/>
+                      </a:solidFill>
+                    </a:lnB>
+                    <a:solidFill>
+                      <a:srgbClr val="F7EAC7"/>
+                    </a:solidFill>
+                  </a:tcPr>
+                </a:tc>
+                <a:tc>
+                  <a:txBody>
+                    <a:bodyPr wrap="square"/>
+                    <a:lstStyle/>
+                    <a:p>
+                      <a:pPr algn="ctr"/>
+                      <a:r>
+                        <a:rPr sz="750" b="1" i="0" lang="pt-BR">
+                          <a:solidFill>
+                            <a:srgbClr val="A8660E"/>
+                          </a:solidFill>
+                          <a:latin typeface="Arial"/>
+                        </a:rPr>
+                        <a:t>0,50%</a:t>
+                      </a:r>
+                    </a:p>
+                  </a:txBody>
+                  <a:tcPr marL="18288" marR="18288" marT="45720" marB="45720" anchor="ctr">
+                    <a:lnL w="12700" cap="flat" cmpd="sng" algn="ctr">
+                      <a:solidFill>
+                        <a:srgbClr val="FFFFFF"/>
+                      </a:solidFill>
+                    </a:lnL>
+                    <a:lnR w="12700" cap="flat" cmpd="sng" algn="ctr">
+                      <a:solidFill>
+                        <a:srgbClr val="FFFFFF"/>
+                      </a:solidFill>
+                    </a:lnR>
+                    <a:lnT w="12700" cap="flat" cmpd="sng" algn="ctr">
+                      <a:noFill/>
+                    </a:lnT>
+                    <a:lnB w="12700" cap="flat" cmpd="sng" algn="ctr">
+                      <a:solidFill>
+                        <a:srgbClr val="ECECEC"/>
+                      </a:solidFill>
+                    </a:lnB>
+                    <a:solidFill>
+                      <a:srgbClr val="F6E1C8"/>
+                    </a:solidFill>
+                  </a:tcPr>
+                </a:tc>
+                <a:tc>
+                  <a:txBody>
+                    <a:bodyPr wrap="square"/>
+                    <a:lstStyle/>
+                    <a:p>
+                      <a:pPr algn="ctr"/>
+                      <a:r>
+                        <a:rPr sz="750" b="1" i="0" lang="pt-BR">
+                          <a:solidFill>
+                            <a:srgbClr val="737C15"/>
+                          </a:solidFill>
+                          <a:latin typeface="Arial"/>
+                        </a:rPr>
+                        <a:t>0,63%</a:t>
+                      </a:r>
+                    </a:p>
+                  </a:txBody>
+                  <a:tcPr marL="18288" marR="18288" marT="45720" marB="45720" anchor="ctr">
+                    <a:lnL w="12700" cap="flat" cmpd="sng" algn="ctr">
+                      <a:solidFill>
+                        <a:srgbClr val="FFFFFF"/>
+                      </a:solidFill>
+                    </a:lnL>
+                    <a:lnR w="12700" cap="flat" cmpd="sng" algn="ctr">
+                      <a:solidFill>
+                        <a:srgbClr val="FFFFFF"/>
+                      </a:solidFill>
+                    </a:lnR>
+                    <a:lnT w="12700" cap="flat" cmpd="sng" algn="ctr">
+                      <a:noFill/>
+                    </a:lnT>
+                    <a:lnB w="12700" cap="flat" cmpd="sng" algn="ctr">
+                      <a:solidFill>
+                        <a:srgbClr val="ECECEC"/>
+                      </a:solidFill>
+                    </a:lnB>
+                    <a:solidFill>
+                      <a:srgbClr val="E8E9CB"/>
+                    </a:solidFill>
+                  </a:tcPr>
+                </a:tc>
+                <a:tc>
+                  <a:txBody>
+                    <a:bodyPr wrap="square"/>
+                    <a:lstStyle/>
+                    <a:p>
+                      <a:pPr algn="ctr"/>
+                      <a:r>
+                        <a:rPr sz="750" b="1" i="0" lang="pt-BR">
+                          <a:solidFill>
+                            <a:srgbClr val="A76F08"/>
+                          </a:solidFill>
+                          <a:latin typeface="Arial"/>
+                        </a:rPr>
+                        <a:t>0,52%</a:t>
+                      </a:r>
+                    </a:p>
+                  </a:txBody>
+                  <a:tcPr marL="18288" marR="18288" marT="45720" marB="45720" anchor="ctr">
+                    <a:lnL w="12700" cap="flat" cmpd="sng" algn="ctr">
+                      <a:solidFill>
+                        <a:srgbClr val="FFFFFF"/>
+                      </a:solidFill>
+                    </a:lnL>
+                    <a:lnR w="12700" cap="flat" cmpd="sng" algn="ctr">
+                      <a:solidFill>
+                        <a:srgbClr val="FFFFFF"/>
+                      </a:solidFill>
+                    </a:lnR>
+                    <a:lnT w="12700" cap="flat" cmpd="sng" algn="ctr">
+                      <a:noFill/>
+                    </a:lnT>
+                    <a:lnB w="12700" cap="flat" cmpd="sng" algn="ctr">
+                      <a:solidFill>
+                        <a:srgbClr val="ECECEC"/>
+                      </a:solidFill>
+                    </a:lnB>
+                    <a:solidFill>
+                      <a:srgbClr val="F6E4C7"/>
+                    </a:solidFill>
+                  </a:tcPr>
+                </a:tc>
+                <a:tc>
+                  <a:txBody>
+                    <a:bodyPr wrap="square"/>
+                    <a:lstStyle/>
+                    <a:p>
+                      <a:pPr algn="ctr"/>
+                      <a:r>
+                        <a:rPr sz="750" b="1" i="0" lang="pt-BR">
+                          <a:solidFill>
+                            <a:srgbClr val="AB501C"/>
+                          </a:solidFill>
+                          <a:latin typeface="Arial"/>
+                        </a:rPr>
+                        <a:t>0,45%</a:t>
+                      </a:r>
+                    </a:p>
+                  </a:txBody>
+                  <a:tcPr marL="18288" marR="18288" marT="45720" marB="45720" anchor="ctr">
+                    <a:lnL w="12700" cap="flat" cmpd="sng" algn="ctr">
+                      <a:solidFill>
+                        <a:srgbClr val="FFFFFF"/>
+                      </a:solidFill>
+                    </a:lnL>
+                    <a:lnR w="12700" cap="flat" cmpd="sng" algn="ctr">
+                      <a:solidFill>
+                        <a:srgbClr val="FFFFFF"/>
+                      </a:solidFill>
+                    </a:lnR>
+                    <a:lnT w="12700" cap="flat" cmpd="sng" algn="ctr">
+                      <a:noFill/>
+                    </a:lnT>
+                    <a:lnB w="12700" cap="flat" cmpd="sng" algn="ctr">
+                      <a:solidFill>
+                        <a:srgbClr val="ECECEC"/>
+                      </a:solidFill>
+                    </a:lnB>
+                    <a:solidFill>
+                      <a:srgbClr val="F6D8C9"/>
+                    </a:solidFill>
+                  </a:tcPr>
+                </a:tc>
+                <a:tc>
+                  <a:txBody>
+                    <a:bodyPr wrap="square"/>
+                    <a:lstStyle/>
+                    <a:p>
+                      <a:pPr algn="ctr"/>
+                      <a:r>
+                        <a:rPr sz="750" b="1" i="0" lang="pt-BR">
+                          <a:solidFill>
+                            <a:srgbClr val="B02A37"/>
+                          </a:solidFill>
+                          <a:latin typeface="Arial"/>
+                        </a:rPr>
+                        <a:t>0,36%</a:t>
+                      </a:r>
+                    </a:p>
+                  </a:txBody>
+                  <a:tcPr marL="18288" marR="18288" marT="45720" marB="45720" anchor="ctr">
+                    <a:lnL w="12700" cap="flat" cmpd="sng" algn="ctr">
+                      <a:solidFill>
+                        <a:srgbClr val="FFFFFF"/>
+                      </a:solidFill>
+                    </a:lnL>
+                    <a:lnR w="12700" cap="flat" cmpd="sng" algn="ctr">
+                      <a:solidFill>
+                        <a:srgbClr val="FFFFFF"/>
+                      </a:solidFill>
+                    </a:lnR>
+                    <a:lnT w="12700" cap="flat" cmpd="sng" algn="ctr">
+                      <a:noFill/>
+                    </a:lnT>
+                    <a:lnB w="12700" cap="flat" cmpd="sng" algn="ctr">
+                      <a:solidFill>
+                        <a:srgbClr val="ECECEC"/>
+                      </a:solidFill>
+                    </a:lnB>
+                    <a:solidFill>
+                      <a:srgbClr val="F6C9CB"/>
+                    </a:solidFill>
+                  </a:tcPr>
+                </a:tc>
+              </a:tr>
+              <a:tr h="302514">
+                <a:tc>
+                  <a:txBody>
+                    <a:bodyPr wrap="square"/>
+                    <a:lstStyle/>
+                    <a:p>
+                      <a:pPr algn="l"/>
+                      <a:r>
+                        <a:rPr sz="750" b="0" i="0" lang="pt-BR">
+                          <a:solidFill>
+                            <a:srgbClr val="333333"/>
+                          </a:solidFill>
+                          <a:latin typeface="Arial"/>
+                        </a:rPr>
+                        <a:t>% conv. média - alocado errado</a:t>
+                      </a:r>
+                    </a:p>
+                  </a:txBody>
+                  <a:tcPr marL="54864" marR="54864" marT="45720" marB="45720" anchor="ctr">
+                    <a:lnL w="6350" cap="flat" cmpd="sng" algn="ctr">
+                      <a:noFill/>
+                    </a:lnL>
+                    <a:lnR w="6350" cap="flat" cmpd="sng" algn="ctr">
+                      <a:noFill/>
+                    </a:lnR>
+                    <a:lnT w="6350" cap="flat" cmpd="sng" algn="ctr">
+                      <a:noFill/>
+                    </a:lnT>
+                    <a:lnB w="6350" cap="flat" cmpd="sng" algn="ctr">
+                      <a:solidFill>
+                        <a:srgbClr val="D5D5D5"/>
+                      </a:solidFill>
+                    </a:lnB>
+                    <a:solidFill>
+                      <a:srgbClr val="FFFFFF"/>
+                    </a:solidFill>
+                  </a:tcPr>
+                </a:tc>
+                <a:tc>
+                  <a:txBody>
+                    <a:bodyPr wrap="square"/>
+                    <a:lstStyle/>
+                    <a:p>
+                      <a:pPr algn="ctr"/>
+                      <a:r>
+                        <a:rPr sz="750" b="1" i="0" lang="pt-BR">
+                          <a:solidFill>
+                            <a:srgbClr val="9A7C04"/>
+                          </a:solidFill>
+                          <a:latin typeface="Arial"/>
+                        </a:rPr>
+                        <a:t>0,41%</a:t>
+                      </a:r>
+                    </a:p>
+                  </a:txBody>
+                  <a:tcPr marL="18288" marR="18288" marT="45720" marB="45720" anchor="ctr">
+                    <a:lnL w="12700" cap="flat" cmpd="sng" algn="ctr">
+                      <a:solidFill>
+                        <a:srgbClr val="FFFFFF"/>
+                      </a:solidFill>
+                    </a:lnL>
+                    <a:lnR w="12700" cap="flat" cmpd="sng" algn="ctr">
+                      <a:solidFill>
+                        <a:srgbClr val="FFFFFF"/>
+                      </a:solidFill>
+                    </a:lnR>
+                    <a:lnT w="12700" cap="flat" cmpd="sng" algn="ctr">
+                      <a:noFill/>
+                    </a:lnT>
+                    <a:lnB w="12700" cap="flat" cmpd="sng" algn="ctr">
+                      <a:solidFill>
+                        <a:srgbClr val="D5D5D5"/>
+                      </a:solidFill>
+                    </a:lnB>
+                    <a:solidFill>
+                      <a:srgbClr val="F3E9C8"/>
+                    </a:solidFill>
+                  </a:tcPr>
+                </a:tc>
+                <a:tc>
+                  <a:txBody>
+                    <a:bodyPr wrap="square"/>
+                    <a:lstStyle/>
+                    <a:p>
+                      <a:pPr algn="ctr"/>
+                      <a:r>
+                        <a:rPr sz="750" b="1" i="0" lang="pt-BR">
+                          <a:solidFill>
+                            <a:srgbClr val="2E7D32"/>
+                          </a:solidFill>
+                          <a:latin typeface="Arial"/>
+                        </a:rPr>
+                        <a:t>0,50%</a:t>
+                      </a:r>
+                    </a:p>
+                  </a:txBody>
+                  <a:tcPr marL="18288" marR="18288" marT="45720" marB="45720" anchor="ctr">
+                    <a:lnL w="12700" cap="flat" cmpd="sng" algn="ctr">
+                      <a:solidFill>
+                        <a:srgbClr val="FFFFFF"/>
+                      </a:solidFill>
+                    </a:lnL>
+                    <a:lnR w="12700" cap="flat" cmpd="sng" algn="ctr">
+                      <a:solidFill>
+                        <a:srgbClr val="FFFFFF"/>
+                      </a:solidFill>
+                    </a:lnR>
+                    <a:lnT w="12700" cap="flat" cmpd="sng" algn="ctr">
+                      <a:noFill/>
+                    </a:lnT>
+                    <a:lnB w="12700" cap="flat" cmpd="sng" algn="ctr">
+                      <a:solidFill>
+                        <a:srgbClr val="D5D5D5"/>
+                      </a:solidFill>
+                    </a:lnB>
+                    <a:solidFill>
+                      <a:srgbClr val="D4E9D1"/>
+                    </a:solidFill>
+                  </a:tcPr>
+                </a:tc>
+                <a:tc>
+                  <a:txBody>
+                    <a:bodyPr wrap="square"/>
+                    <a:lstStyle/>
+                    <a:p>
+                      <a:pPr algn="ctr"/>
+                      <a:r>
+                        <a:rPr sz="750" b="1" i="0" lang="pt-BR">
+                          <a:solidFill>
+                            <a:srgbClr val="467C27"/>
+                          </a:solidFill>
+                          <a:latin typeface="Arial"/>
+                        </a:rPr>
+                        <a:t>0,48%</a:t>
+                      </a:r>
+                    </a:p>
+                  </a:txBody>
+                  <a:tcPr marL="18288" marR="18288" marT="45720" marB="45720" anchor="ctr">
+                    <a:lnL w="12700" cap="flat" cmpd="sng" algn="ctr">
+                      <a:solidFill>
+                        <a:srgbClr val="FFFFFF"/>
+                      </a:solidFill>
+                    </a:lnL>
+                    <a:lnR w="12700" cap="flat" cmpd="sng" algn="ctr">
+                      <a:solidFill>
+                        <a:srgbClr val="FFFFFF"/>
+                      </a:solidFill>
+                    </a:lnR>
+                    <a:lnT w="12700" cap="flat" cmpd="sng" algn="ctr">
+                      <a:noFill/>
+                    </a:lnT>
+                    <a:lnB w="12700" cap="flat" cmpd="sng" algn="ctr">
+                      <a:solidFill>
+                        <a:srgbClr val="D5D5D5"/>
+                      </a:solidFill>
+                    </a:lnB>
+                    <a:solidFill>
+                      <a:srgbClr val="DBE9CF"/>
+                    </a:solidFill>
+                  </a:tcPr>
+                </a:tc>
+                <a:tc>
+                  <a:txBody>
+                    <a:bodyPr wrap="square"/>
+                    <a:lstStyle/>
+                    <a:p>
+                      <a:pPr algn="ctr"/>
+                      <a:r>
+                        <a:rPr sz="750" b="1" i="0" lang="pt-BR">
+                          <a:solidFill>
+                            <a:srgbClr val="B02A37"/>
+                          </a:solidFill>
+                          <a:latin typeface="Arial"/>
+                        </a:rPr>
+                        <a:t>0,30%</a:t>
+                      </a:r>
+                    </a:p>
+                  </a:txBody>
+                  <a:tcPr marL="18288" marR="18288" marT="45720" marB="45720" anchor="ctr">
+                    <a:lnL w="12700" cap="flat" cmpd="sng" algn="ctr">
+                      <a:solidFill>
+                        <a:srgbClr val="FFFFFF"/>
+                      </a:solidFill>
+                    </a:lnL>
+                    <a:lnR w="12700" cap="flat" cmpd="sng" algn="ctr">
+                      <a:solidFill>
+                        <a:srgbClr val="FFFFFF"/>
+                      </a:solidFill>
+                    </a:lnR>
+                    <a:lnT w="12700" cap="flat" cmpd="sng" algn="ctr">
+                      <a:noFill/>
+                    </a:lnT>
+                    <a:lnB w="12700" cap="flat" cmpd="sng" algn="ctr">
+                      <a:solidFill>
+                        <a:srgbClr val="D5D5D5"/>
+                      </a:solidFill>
+                    </a:lnB>
+                    <a:solidFill>
+                      <a:srgbClr val="F6C9CB"/>
+                    </a:solidFill>
+                  </a:tcPr>
+                </a:tc>
+                <a:tc>
+                  <a:txBody>
+                    <a:bodyPr wrap="square"/>
+                    <a:lstStyle/>
+                    <a:p>
+                      <a:pPr algn="ctr"/>
+                      <a:r>
+                        <a:rPr sz="750" b="1" i="0" lang="pt-BR">
+                          <a:solidFill>
+                            <a:srgbClr val="A86B0A"/>
+                          </a:solidFill>
+                          <a:latin typeface="Arial"/>
+                        </a:rPr>
+                        <a:t>0,38%</a:t>
+                      </a:r>
+                    </a:p>
+                  </a:txBody>
+                  <a:tcPr marL="18288" marR="18288" marT="45720" marB="45720" anchor="ctr">
+                    <a:lnL w="12700" cap="flat" cmpd="sng" algn="ctr">
+                      <a:solidFill>
+                        <a:srgbClr val="FFFFFF"/>
+                      </a:solidFill>
+                    </a:lnL>
+                    <a:lnR w="12700" cap="flat" cmpd="sng" algn="ctr">
+                      <a:solidFill>
+                        <a:srgbClr val="FFFFFF"/>
+                      </a:solidFill>
+                    </a:lnR>
+                    <a:lnT w="12700" cap="flat" cmpd="sng" algn="ctr">
+                      <a:noFill/>
+                    </a:lnT>
+                    <a:lnB w="12700" cap="flat" cmpd="sng" algn="ctr">
+                      <a:solidFill>
+                        <a:srgbClr val="D5D5D5"/>
+                      </a:solidFill>
+                    </a:lnB>
+                    <a:solidFill>
+                      <a:srgbClr val="F6E3C7"/>
+                    </a:solidFill>
+                  </a:tcPr>
+                </a:tc>
+                <a:tc>
+                  <a:txBody>
+                    <a:bodyPr wrap="square"/>
+                    <a:lstStyle/>
+                    <a:p>
+                      <a:pPr algn="ctr"/>
+                      <a:r>
+                        <a:rPr sz="750" b="1" i="0" lang="pt-BR">
+                          <a:solidFill>
+                            <a:srgbClr val="AC4A20"/>
+                          </a:solidFill>
+                          <a:latin typeface="Arial"/>
+                        </a:rPr>
+                        <a:t>0,34%</a:t>
+                      </a:r>
+                    </a:p>
+                  </a:txBody>
+                  <a:tcPr marL="18288" marR="18288" marT="45720" marB="45720" anchor="ctr">
+                    <a:lnL w="12700" cap="flat" cmpd="sng" algn="ctr">
+                      <a:solidFill>
+                        <a:srgbClr val="FFFFFF"/>
+                      </a:solidFill>
+                    </a:lnL>
+                    <a:lnR w="12700" cap="flat" cmpd="sng" algn="ctr">
+                      <a:solidFill>
+                        <a:srgbClr val="FFFFFF"/>
+                      </a:solidFill>
+                    </a:lnR>
+                    <a:lnT w="12700" cap="flat" cmpd="sng" algn="ctr">
+                      <a:noFill/>
+                    </a:lnT>
+                    <a:lnB w="12700" cap="flat" cmpd="sng" algn="ctr">
+                      <a:solidFill>
+                        <a:srgbClr val="D5D5D5"/>
+                      </a:solidFill>
+                    </a:lnB>
+                    <a:solidFill>
+                      <a:srgbClr val="F6D6C9"/>
+                    </a:solidFill>
+                  </a:tcPr>
+                </a:tc>
+                <a:tc>
+                  <a:txBody>
+                    <a:bodyPr wrap="square"/>
+                    <a:lstStyle/>
+                    <a:p>
+                      <a:pPr algn="ctr"/>
+                      <a:r>
+                        <a:rPr sz="750" b="1" i="0" lang="pt-BR">
+                          <a:solidFill>
+                            <a:srgbClr val="A86B0A"/>
+                          </a:solidFill>
+                          <a:latin typeface="Arial"/>
+                        </a:rPr>
+                        <a:t>0,38%</a:t>
+                      </a:r>
+                    </a:p>
+                  </a:txBody>
+                  <a:tcPr marL="18288" marR="18288" marT="45720" marB="45720" anchor="ctr">
+                    <a:lnL w="12700" cap="flat" cmpd="sng" algn="ctr">
+                      <a:solidFill>
+                        <a:srgbClr val="FFFFFF"/>
+                      </a:solidFill>
+                    </a:lnL>
+                    <a:lnR w="12700" cap="flat" cmpd="sng" algn="ctr">
+                      <a:solidFill>
+                        <a:srgbClr val="FFFFFF"/>
+                      </a:solidFill>
+                    </a:lnR>
+                    <a:lnT w="12700" cap="flat" cmpd="sng" algn="ctr">
+                      <a:noFill/>
+                    </a:lnT>
+                    <a:lnB w="12700" cap="flat" cmpd="sng" algn="ctr">
+                      <a:solidFill>
+                        <a:srgbClr val="D5D5D5"/>
+                      </a:solidFill>
+                    </a:lnB>
+                    <a:solidFill>
+                      <a:srgbClr val="F6E3C7"/>
+                    </a:solidFill>
+                  </a:tcPr>
+                </a:tc>
+                <a:tc>
+                  <a:txBody>
+                    <a:bodyPr wrap="square"/>
+                    <a:lstStyle/>
+                    <a:p>
+                      <a:pPr algn="ctr"/>
+                      <a:r>
+                        <a:rPr sz="750" b="1" i="0" lang="pt-BR">
+                          <a:solidFill>
+                            <a:srgbClr val="AC4A20"/>
+                          </a:solidFill>
+                          <a:latin typeface="Arial"/>
+                        </a:rPr>
+                        <a:t>0,34%</a:t>
+                      </a:r>
+                    </a:p>
+                  </a:txBody>
+                  <a:tcPr marL="18288" marR="18288" marT="45720" marB="45720" anchor="ctr">
+                    <a:lnL w="12700" cap="flat" cmpd="sng" algn="ctr">
+                      <a:solidFill>
+                        <a:srgbClr val="FFFFFF"/>
+                      </a:solidFill>
+                    </a:lnL>
+                    <a:lnR w="12700" cap="flat" cmpd="sng" algn="ctr">
+                      <a:solidFill>
+                        <a:srgbClr val="FFFFFF"/>
+                      </a:solidFill>
+                    </a:lnR>
+                    <a:lnT w="12700" cap="flat" cmpd="sng" algn="ctr">
+                      <a:noFill/>
+                    </a:lnT>
+                    <a:lnB w="12700" cap="flat" cmpd="sng" algn="ctr">
+                      <a:solidFill>
+                        <a:srgbClr val="D5D5D5"/>
+                      </a:solidFill>
+                    </a:lnB>
+                    <a:solidFill>
+                      <a:srgbClr val="F6D6C9"/>
+                    </a:solidFill>
+                  </a:tcPr>
+                </a:tc>
+              </a:tr>
+            </a:tbl>
+          </a:graphicData>
+        </a:graphic>
+      </p:graphicFrame>
+      <p:sp>
+        <p:nvSpPr>
+          <p:cNvPr id="16" name="Rounded Rectangle 15"/>
+          <p:cNvSpPr/>
+          <p:nvPr/>
+        </p:nvSpPr>
+        <p:spPr>
+          <a:xfrm>
+            <a:off x="384048" y="1876044"/>
+            <a:ext cx="201168" cy="1141095"/>
+          </a:xfrm>
+          <a:prstGeom prst="roundRect">
+            <a:avLst>
+              <a:gd name="adj" fmla="val 8814"/>
+            </a:avLst>
+          </a:prstGeom>
+          <a:solidFill>
+            <a:srgbClr val="1F4E3D"/>
+          </a:solidFill>
+          <a:ln>
+            <a:noFill/>
+          </a:ln>
+          <a:effectLst/>
+        </p:spPr>
+        <p:txBody>
+          <a:bodyPr rtlCol="0" anchor="ctr" lIns="0" rIns="0" tIns="0" bIns="0" wrap="square" vert="vert270"/>
+          <a:lstStyle/>
+          <a:p>
+            <a:pPr algn="ctr"/>
+            <a:r>
+              <a:rPr sz="750" b="1" i="0" lang="pt-BR">
+                <a:solidFill>
+                  <a:srgbClr val="FFFFFF"/>
+                </a:solidFill>
+                <a:latin typeface="Arial"/>
+              </a:rPr>
+              <a:t>Lojas Piloto</a:t>
+            </a:r>
+          </a:p>
+        </p:txBody>
+      </p:sp>
+      <p:sp>
+        <p:nvSpPr>
+          <p:cNvPr id="17" name="Oval 16"/>
+          <p:cNvSpPr/>
+          <p:nvPr/>
+        </p:nvSpPr>
+        <p:spPr>
+          <a:xfrm>
+            <a:off x="393192" y="3081146"/>
+            <a:ext cx="182880" cy="182880"/>
+          </a:xfrm>
+          <a:prstGeom prst="ellipse">
+            <a:avLst/>
+          </a:prstGeom>
+          <a:solidFill>
+            <a:srgbClr val="78DE1F"/>
+          </a:solidFill>
+          <a:ln>
+            <a:noFill/>
+          </a:ln>
+          <a:effectLst/>
+        </p:spPr>
+        <p:txBody>
+          <a:bodyPr rtlCol="0" anchor="ctr" lIns="0" rIns="0" tIns="0" bIns="0" wrap="none"/>
+          <a:lstStyle/>
+          <a:p>
+            <a:pPr algn="ctr"/>
+            <a:r>
+              <a:rPr sz="650" b="1" i="0" lang="pt-BR">
+                <a:solidFill>
+                  <a:srgbClr val="1A1A1A"/>
+                </a:solidFill>
+                <a:latin typeface="Arial"/>
+              </a:rPr>
+              <a:t>A</a:t>
+            </a:r>
+          </a:p>
+        </p:txBody>
+      </p:sp>
+      <p:graphicFrame>
+        <p:nvGraphicFramePr>
+          <p:cNvPr id="18" name="Table 17"/>
+          <p:cNvGraphicFramePr>
+            <a:graphicFrameLocks noGrp="1"/>
+          </p:cNvGraphicFramePr>
+          <p:nvPr/>
+        </p:nvGraphicFramePr>
+        <p:xfrm>
+          <a:off x="640080" y="3428619"/>
+          <a:ext cx="3913681" cy="1177671"/>
+        </p:xfrm>
+        <a:graphic>
+          <a:graphicData uri="http://schemas.openxmlformats.org/drawingml/2006/table">
+            <a:tbl>
+              <a:tblPr>
+                <a:tableStyleId>{2D5ABB26-0587-4C30-8999-92F81FD0307C}</a:tableStyleId>
+              </a:tblPr>
+              <a:tblGrid>
+                <a:gridCol w="1213241"/>
+                <a:gridCol w="337555"/>
+                <a:gridCol w="337555"/>
+                <a:gridCol w="337555"/>
+                <a:gridCol w="337555"/>
+                <a:gridCol w="337555"/>
+                <a:gridCol w="337555"/>
+                <a:gridCol w="337555"/>
+                <a:gridCol w="337555"/>
+              </a:tblGrid>
+              <a:tr h="215265">
+                <a:tc>
+                  <a:txBody>
+                    <a:bodyPr wrap="square"/>
+                    <a:lstStyle/>
+                    <a:p>
+                      <a:pPr algn="l"/>
+                      <a:r>
+                        <a:rPr sz="750" b="1" i="0" lang="pt-BR">
+                          <a:solidFill>
+                            <a:srgbClr val="757575"/>
+                          </a:solidFill>
+                          <a:latin typeface="Arial"/>
+                        </a:rPr>
+                        <a:t>2026</a:t>
+                      </a:r>
+                    </a:p>
+                  </a:txBody>
+                  <a:tcPr marL="54864" marR="54864" marT="45720" marB="45720" anchor="ctr">
+                    <a:lnL w="6350" cap="flat" cmpd="sng" algn="ctr">
+                      <a:noFill/>
+                    </a:lnL>
+                    <a:lnR w="6350" cap="flat" cmpd="sng" algn="ctr">
+                      <a:noFill/>
+                    </a:lnR>
+                    <a:lnT w="6350" cap="flat" cmpd="sng" algn="ctr">
+                      <a:noFill/>
+                    </a:lnT>
+                    <a:lnB w="6350" cap="flat" cmpd="sng" algn="ctr">
+                      <a:solidFill>
+                        <a:srgbClr val="D5D5D5"/>
+                      </a:solidFill>
+                    </a:lnB>
+                    <a:solidFill>
+                      <a:srgbClr val="F7F7F7"/>
+                    </a:solidFill>
+                  </a:tcPr>
+                </a:tc>
+                <a:tc>
+                  <a:txBody>
+                    <a:bodyPr wrap="square"/>
+                    <a:lstStyle/>
+                    <a:p>
+                      <a:pPr algn="ctr"/>
+                      <a:r>
+                        <a:rPr sz="750" b="1" i="0" lang="pt-BR">
+                          <a:solidFill>
+                            <a:srgbClr val="757575"/>
+                          </a:solidFill>
+                          <a:latin typeface="Arial"/>
+                        </a:rPr>
+                        <a:t>fev</a:t>
+                      </a:r>
+                    </a:p>
+                  </a:txBody>
+                  <a:tcPr marL="18288" marR="18288" marT="45720" marB="45720" anchor="ctr">
+                    <a:lnL w="6350" cap="flat" cmpd="sng" algn="ctr">
+                      <a:noFill/>
+                    </a:lnL>
+                    <a:lnR w="6350" cap="flat" cmpd="sng" algn="ctr">
+                      <a:noFill/>
+                    </a:lnR>
+                    <a:lnT w="6350" cap="flat" cmpd="sng" algn="ctr">
+                      <a:noFill/>
+                    </a:lnT>
+                    <a:lnB w="6350" cap="flat" cmpd="sng" algn="ctr">
+                      <a:solidFill>
+                        <a:srgbClr val="D5D5D5"/>
+                      </a:solidFill>
+                    </a:lnB>
+                    <a:solidFill>
+                      <a:srgbClr val="F7F7F7"/>
+                    </a:solidFill>
+                  </a:tcPr>
+                </a:tc>
+                <a:tc>
+                  <a:txBody>
+                    <a:bodyPr wrap="square"/>
+                    <a:lstStyle/>
+                    <a:p>
+                      <a:pPr algn="ctr"/>
+                      <a:r>
+                        <a:rPr sz="750" b="1" i="0" lang="pt-BR">
+                          <a:solidFill>
+                            <a:srgbClr val="757575"/>
+                          </a:solidFill>
+                          <a:latin typeface="Arial"/>
+                        </a:rPr>
+                        <a:t>mar</a:t>
+                      </a:r>
+                    </a:p>
+                  </a:txBody>
+                  <a:tcPr marL="18288" marR="18288" marT="45720" marB="45720" anchor="ctr">
+                    <a:lnL w="6350" cap="flat" cmpd="sng" algn="ctr">
+                      <a:noFill/>
+                    </a:lnL>
+                    <a:lnR w="6350" cap="flat" cmpd="sng" algn="ctr">
+                      <a:noFill/>
+                    </a:lnR>
+                    <a:lnT w="6350" cap="flat" cmpd="sng" algn="ctr">
+                      <a:noFill/>
+                    </a:lnT>
+                    <a:lnB w="6350" cap="flat" cmpd="sng" algn="ctr">
+                      <a:solidFill>
+                        <a:srgbClr val="D5D5D5"/>
+                      </a:solidFill>
+                    </a:lnB>
+                    <a:solidFill>
+                      <a:srgbClr val="F7F7F7"/>
+                    </a:solidFill>
+                  </a:tcPr>
+                </a:tc>
+                <a:tc>
+                  <a:txBody>
+                    <a:bodyPr wrap="square"/>
+                    <a:lstStyle/>
+                    <a:p>
+                      <a:pPr algn="ctr"/>
+                      <a:r>
+                        <a:rPr sz="750" b="1" i="0" lang="pt-BR">
+                          <a:solidFill>
+                            <a:srgbClr val="757575"/>
+                          </a:solidFill>
+                          <a:latin typeface="Arial"/>
+                        </a:rPr>
+                        <a:t>abr</a:t>
+                      </a:r>
+                    </a:p>
+                  </a:txBody>
+                  <a:tcPr marL="18288" marR="18288" marT="45720" marB="45720" anchor="ctr">
+                    <a:lnL w="6350" cap="flat" cmpd="sng" algn="ctr">
+                      <a:noFill/>
+                    </a:lnL>
+                    <a:lnR w="6350" cap="flat" cmpd="sng" algn="ctr">
+                      <a:noFill/>
+                    </a:lnR>
+                    <a:lnT w="6350" cap="flat" cmpd="sng" algn="ctr">
+                      <a:noFill/>
+                    </a:lnT>
+                    <a:lnB w="6350" cap="flat" cmpd="sng" algn="ctr">
+                      <a:solidFill>
+                        <a:srgbClr val="D5D5D5"/>
+                      </a:solidFill>
+                    </a:lnB>
+                    <a:solidFill>
+                      <a:srgbClr val="F7F7F7"/>
+                    </a:solidFill>
+                  </a:tcPr>
+                </a:tc>
+                <a:tc>
+                  <a:txBody>
+                    <a:bodyPr wrap="square"/>
+                    <a:lstStyle/>
+                    <a:p>
+                      <a:pPr algn="ctr"/>
+                      <a:r>
+                        <a:rPr sz="750" b="1" i="0" lang="pt-BR">
+                          <a:solidFill>
+                            <a:srgbClr val="757575"/>
+                          </a:solidFill>
+                          <a:latin typeface="Arial"/>
+                        </a:rPr>
+                        <a:t>mai</a:t>
+                      </a:r>
+                    </a:p>
+                  </a:txBody>
+                  <a:tcPr marL="18288" marR="18288" marT="45720" marB="45720" anchor="ctr">
+                    <a:lnL w="6350" cap="flat" cmpd="sng" algn="ctr">
+                      <a:noFill/>
+                    </a:lnL>
+                    <a:lnR w="6350" cap="flat" cmpd="sng" algn="ctr">
+                      <a:noFill/>
+                    </a:lnR>
+                    <a:lnT w="6350" cap="flat" cmpd="sng" algn="ctr">
+                      <a:noFill/>
+                    </a:lnT>
+                    <a:lnB w="6350" cap="flat" cmpd="sng" algn="ctr">
+                      <a:solidFill>
+                        <a:srgbClr val="D5D5D5"/>
+                      </a:solidFill>
+                    </a:lnB>
+                    <a:solidFill>
+                      <a:srgbClr val="F7F7F7"/>
+                    </a:solidFill>
+                  </a:tcPr>
+                </a:tc>
+                <a:tc>
+                  <a:txBody>
+                    <a:bodyPr wrap="square"/>
+                    <a:lstStyle/>
+                    <a:p>
+                      <a:pPr algn="ctr"/>
+                      <a:r>
+                        <a:rPr sz="750" b="1" i="0" lang="pt-BR">
+                          <a:solidFill>
+                            <a:srgbClr val="757575"/>
+                          </a:solidFill>
+                          <a:latin typeface="Arial"/>
+                        </a:rPr>
+                        <a:t>jun</a:t>
+                      </a:r>
+                    </a:p>
+                  </a:txBody>
+                  <a:tcPr marL="18288" marR="18288" marT="45720" marB="45720" anchor="ctr">
+                    <a:lnL w="6350" cap="flat" cmpd="sng" algn="ctr">
+                      <a:noFill/>
+                    </a:lnL>
+                    <a:lnR w="6350" cap="flat" cmpd="sng" algn="ctr">
+                      <a:noFill/>
+                    </a:lnR>
+                    <a:lnT w="6350" cap="flat" cmpd="sng" algn="ctr">
+                      <a:noFill/>
+                    </a:lnT>
+                    <a:lnB w="6350" cap="flat" cmpd="sng" algn="ctr">
+                      <a:solidFill>
+                        <a:srgbClr val="D5D5D5"/>
+                      </a:solidFill>
+                    </a:lnB>
+                    <a:solidFill>
+                      <a:srgbClr val="F7F7F7"/>
+                    </a:solidFill>
+                  </a:tcPr>
+                </a:tc>
+                <a:tc>
+                  <a:txBody>
+                    <a:bodyPr wrap="square"/>
+                    <a:lstStyle/>
+                    <a:p>
+                      <a:pPr algn="ctr"/>
+                      <a:r>
+                        <a:rPr sz="750" b="1" i="0" lang="pt-BR">
+                          <a:solidFill>
+                            <a:srgbClr val="757575"/>
+                          </a:solidFill>
+                          <a:latin typeface="Arial"/>
+                        </a:rPr>
+                        <a:t>jul</a:t>
+                      </a:r>
+                    </a:p>
+                  </a:txBody>
+                  <a:tcPr marL="18288" marR="18288" marT="45720" marB="45720" anchor="ctr">
+                    <a:lnL w="6350" cap="flat" cmpd="sng" algn="ctr">
+                      <a:noFill/>
+                    </a:lnL>
+                    <a:lnR w="6350" cap="flat" cmpd="sng" algn="ctr">
+                      <a:noFill/>
+                    </a:lnR>
+                    <a:lnT w="6350" cap="flat" cmpd="sng" algn="ctr">
+                      <a:noFill/>
+                    </a:lnT>
+                    <a:lnB w="6350" cap="flat" cmpd="sng" algn="ctr">
+                      <a:solidFill>
+                        <a:srgbClr val="D5D5D5"/>
+                      </a:solidFill>
+                    </a:lnB>
+                    <a:solidFill>
+                      <a:srgbClr val="F7F7F7"/>
+                    </a:solidFill>
+                  </a:tcPr>
+                </a:tc>
+                <a:tc>
+                  <a:txBody>
+                    <a:bodyPr wrap="square"/>
+                    <a:lstStyle/>
+                    <a:p>
+                      <a:pPr algn="ctr"/>
+                      <a:r>
+                        <a:rPr sz="750" b="1" i="0" lang="pt-BR">
+                          <a:solidFill>
+                            <a:srgbClr val="757575"/>
+                          </a:solidFill>
+                          <a:latin typeface="Arial"/>
+                        </a:rPr>
+                        <a:t>ago</a:t>
+                      </a:r>
+                    </a:p>
+                  </a:txBody>
+                  <a:tcPr marL="18288" marR="18288" marT="45720" marB="45720" anchor="ctr">
+                    <a:lnL w="6350" cap="flat" cmpd="sng" algn="ctr">
+                      <a:noFill/>
+                    </a:lnL>
+                    <a:lnR w="6350" cap="flat" cmpd="sng" algn="ctr">
+                      <a:noFill/>
+                    </a:lnR>
+                    <a:lnT w="6350" cap="flat" cmpd="sng" algn="ctr">
+                      <a:noFill/>
+                    </a:lnT>
+                    <a:lnB w="6350" cap="flat" cmpd="sng" algn="ctr">
+                      <a:solidFill>
+                        <a:srgbClr val="D5D5D5"/>
+                      </a:solidFill>
+                    </a:lnB>
+                    <a:solidFill>
+                      <a:srgbClr val="F7F7F7"/>
+                    </a:solidFill>
+                  </a:tcPr>
+                </a:tc>
+                <a:tc>
+                  <a:txBody>
+                    <a:bodyPr wrap="square"/>
+                    <a:lstStyle/>
+                    <a:p>
+                      <a:pPr algn="ctr"/>
+                      <a:r>
+                        <a:rPr sz="750" b="1" i="0" lang="pt-BR">
+                          <a:solidFill>
+                            <a:srgbClr val="757575"/>
+                          </a:solidFill>
+                          <a:latin typeface="Arial"/>
+                        </a:rPr>
+                        <a:t>set</a:t>
+                      </a:r>
+                    </a:p>
+                  </a:txBody>
+                  <a:tcPr marL="18288" marR="18288" marT="45720" marB="45720" anchor="ctr">
+                    <a:lnL w="6350" cap="flat" cmpd="sng" algn="ctr">
+                      <a:noFill/>
+                    </a:lnL>
+                    <a:lnR w="6350" cap="flat" cmpd="sng" algn="ctr">
+                      <a:noFill/>
+                    </a:lnR>
+                    <a:lnT w="6350" cap="flat" cmpd="sng" algn="ctr">
+                      <a:noFill/>
+                    </a:lnT>
+                    <a:lnB w="6350" cap="flat" cmpd="sng" algn="ctr">
+                      <a:solidFill>
+                        <a:srgbClr val="D5D5D5"/>
+                      </a:solidFill>
+                    </a:lnB>
+                    <a:solidFill>
+                      <a:srgbClr val="F7F7F7"/>
+                    </a:solidFill>
+                  </a:tcPr>
+                </a:tc>
+              </a:tr>
+              <a:tr h="178689">
+                <a:tc>
+                  <a:txBody>
+                    <a:bodyPr wrap="square"/>
+                    <a:lstStyle/>
+                    <a:p>
+                      <a:pPr algn="l"/>
+                      <a:r>
+                        <a:rPr sz="750" b="0" i="0" lang="pt-BR">
+                          <a:solidFill>
+                            <a:srgbClr val="333333"/>
+                          </a:solidFill>
+                          <a:latin typeface="Arial"/>
+                        </a:rPr>
+                        <a:t>% alocado certo</a:t>
+                      </a:r>
+                    </a:p>
+                  </a:txBody>
+                  <a:tcPr marL="54864" marR="54864" marT="45720" marB="45720" anchor="ctr">
+                    <a:lnL w="6350" cap="flat" cmpd="sng" algn="ctr">
+                      <a:noFill/>
+                    </a:lnL>
+                    <a:lnR w="6350" cap="flat" cmpd="sng" algn="ctr">
+                      <a:noFill/>
+                    </a:lnR>
+                    <a:lnT w="6350" cap="flat" cmpd="sng" algn="ctr">
+                      <a:noFill/>
+                    </a:lnT>
+                    <a:lnB w="6350" cap="flat" cmpd="sng" algn="ctr">
+                      <a:solidFill>
+                        <a:srgbClr val="ECECEC"/>
+                      </a:solidFill>
+                    </a:lnB>
+                    <a:solidFill>
+                      <a:srgbClr val="FFFFFF"/>
+                    </a:solidFill>
+                  </a:tcPr>
+                </a:tc>
+                <a:tc>
+                  <a:txBody>
+                    <a:bodyPr wrap="square"/>
+                    <a:lstStyle/>
+                    <a:p>
+                      <a:pPr algn="ctr"/>
+                      <a:r>
+                        <a:rPr sz="750" b="0" i="0" lang="pt-BR">
+                          <a:solidFill>
+                            <a:srgbClr val="333333"/>
+                          </a:solidFill>
+                          <a:latin typeface="Arial"/>
+                        </a:rPr>
+                        <a:t>33%</a:t>
+                      </a:r>
+                    </a:p>
+                  </a:txBody>
+                  <a:tcPr marL="18288" marR="18288" marT="45720" marB="45720" anchor="ctr">
+                    <a:lnL w="6350" cap="flat" cmpd="sng" algn="ctr">
+                      <a:noFill/>
+                    </a:lnL>
+                    <a:lnR w="6350" cap="flat" cmpd="sng" algn="ctr">
+                      <a:noFill/>
+                    </a:lnR>
+                    <a:lnT w="6350" cap="flat" cmpd="sng" algn="ctr">
+                      <a:noFill/>
+                    </a:lnT>
+                    <a:lnB w="6350" cap="flat" cmpd="sng" algn="ctr">
+                      <a:solidFill>
+                        <a:srgbClr val="ECECEC"/>
+                      </a:solidFill>
+                    </a:lnB>
+                    <a:solidFill>
+                      <a:srgbClr val="FFFFFF"/>
+                    </a:solidFill>
+                  </a:tcPr>
+                </a:tc>
+                <a:tc>
+                  <a:txBody>
+                    <a:bodyPr wrap="square"/>
+                    <a:lstStyle/>
+                    <a:p>
+                      <a:pPr algn="ctr"/>
+                      <a:r>
+                        <a:rPr sz="750" b="0" i="0" lang="pt-BR">
+                          <a:solidFill>
+                            <a:srgbClr val="333333"/>
+                          </a:solidFill>
+                          <a:latin typeface="Arial"/>
+                        </a:rPr>
+                        <a:t>35%</a:t>
+                      </a:r>
+                    </a:p>
+                  </a:txBody>
+                  <a:tcPr marL="18288" marR="18288" marT="45720" marB="45720" anchor="ctr">
+                    <a:lnL w="6350" cap="flat" cmpd="sng" algn="ctr">
+                      <a:noFill/>
+                    </a:lnL>
+                    <a:lnR w="6350" cap="flat" cmpd="sng" algn="ctr">
+                      <a:noFill/>
+                    </a:lnR>
+                    <a:lnT w="6350" cap="flat" cmpd="sng" algn="ctr">
+                      <a:noFill/>
+                    </a:lnT>
+                    <a:lnB w="6350" cap="flat" cmpd="sng" algn="ctr">
+                      <a:solidFill>
+                        <a:srgbClr val="ECECEC"/>
+                      </a:solidFill>
+                    </a:lnB>
+                    <a:solidFill>
+                      <a:srgbClr val="FFFFFF"/>
+                    </a:solidFill>
+                  </a:tcPr>
+                </a:tc>
+                <a:tc>
+                  <a:txBody>
+                    <a:bodyPr wrap="square"/>
+                    <a:lstStyle/>
+                    <a:p>
+                      <a:pPr algn="ctr"/>
+                      <a:r>
+                        <a:rPr sz="750" b="0" i="0" lang="pt-BR">
+                          <a:solidFill>
+                            <a:srgbClr val="333333"/>
+                          </a:solidFill>
+                          <a:latin typeface="Arial"/>
+                        </a:rPr>
+                        <a:t>31%</a:t>
+                      </a:r>
+                    </a:p>
+                  </a:txBody>
+                  <a:tcPr marL="18288" marR="18288" marT="45720" marB="45720" anchor="ctr">
+                    <a:lnL w="6350" cap="flat" cmpd="sng" algn="ctr">
+                      <a:noFill/>
+                    </a:lnL>
+                    <a:lnR w="6350" cap="flat" cmpd="sng" algn="ctr">
+                      <a:noFill/>
+                    </a:lnR>
+                    <a:lnT w="6350" cap="flat" cmpd="sng" algn="ctr">
+                      <a:noFill/>
+                    </a:lnT>
+                    <a:lnB w="6350" cap="flat" cmpd="sng" algn="ctr">
+                      <a:solidFill>
+                        <a:srgbClr val="ECECEC"/>
+                      </a:solidFill>
+                    </a:lnB>
+                    <a:solidFill>
+                      <a:srgbClr val="FFFFFF"/>
+                    </a:solidFill>
+                  </a:tcPr>
+                </a:tc>
+                <a:tc>
+                  <a:txBody>
+                    <a:bodyPr wrap="square"/>
+                    <a:lstStyle/>
+                    <a:p>
+                      <a:pPr algn="ctr"/>
+                      <a:r>
+                        <a:rPr sz="750" b="0" i="0" lang="pt-BR">
+                          <a:solidFill>
+                            <a:srgbClr val="333333"/>
+                          </a:solidFill>
+                          <a:latin typeface="Arial"/>
+                        </a:rPr>
+                        <a:t>30%</a:t>
+                      </a:r>
+                    </a:p>
+                  </a:txBody>
+                  <a:tcPr marL="18288" marR="18288" marT="45720" marB="45720" anchor="ctr">
+                    <a:lnL w="6350" cap="flat" cmpd="sng" algn="ctr">
+                      <a:noFill/>
+                    </a:lnL>
+                    <a:lnR w="6350" cap="flat" cmpd="sng" algn="ctr">
+                      <a:noFill/>
+                    </a:lnR>
+                    <a:lnT w="6350" cap="flat" cmpd="sng" algn="ctr">
+                      <a:noFill/>
+                    </a:lnT>
+                    <a:lnB w="6350" cap="flat" cmpd="sng" algn="ctr">
+                      <a:solidFill>
+                        <a:srgbClr val="ECECEC"/>
+                      </a:solidFill>
+                    </a:lnB>
+                    <a:solidFill>
+                      <a:srgbClr val="FFFFFF"/>
+                    </a:solidFill>
+                  </a:tcPr>
+                </a:tc>
+                <a:tc>
+                  <a:txBody>
+                    <a:bodyPr wrap="square"/>
+                    <a:lstStyle/>
+                    <a:p>
+                      <a:pPr algn="ctr"/>
+                      <a:r>
+                        <a:rPr sz="750" b="0" i="0" lang="pt-BR">
+                          <a:solidFill>
+                            <a:srgbClr val="333333"/>
+                          </a:solidFill>
+                          <a:latin typeface="Arial"/>
+                        </a:rPr>
+                        <a:t>33%</a:t>
+                      </a:r>
+                    </a:p>
+                  </a:txBody>
+                  <a:tcPr marL="18288" marR="18288" marT="45720" marB="45720" anchor="ctr">
+                    <a:lnL w="6350" cap="flat" cmpd="sng" algn="ctr">
+                      <a:noFill/>
+                    </a:lnL>
+                    <a:lnR w="6350" cap="flat" cmpd="sng" algn="ctr">
+                      <a:noFill/>
+                    </a:lnR>
+                    <a:lnT w="6350" cap="flat" cmpd="sng" algn="ctr">
+                      <a:noFill/>
+                    </a:lnT>
+                    <a:lnB w="6350" cap="flat" cmpd="sng" algn="ctr">
+                      <a:solidFill>
+                        <a:srgbClr val="ECECEC"/>
+                      </a:solidFill>
+                    </a:lnB>
+                    <a:solidFill>
+                      <a:srgbClr val="FFFFFF"/>
+                    </a:solidFill>
+                  </a:tcPr>
+                </a:tc>
+                <a:tc>
+                  <a:txBody>
+                    <a:bodyPr wrap="square"/>
+                    <a:lstStyle/>
+                    <a:p>
+                      <a:pPr algn="ctr"/>
+                      <a:r>
+                        <a:rPr sz="750" b="0" i="0" lang="pt-BR">
+                          <a:solidFill>
+                            <a:srgbClr val="333333"/>
+                          </a:solidFill>
+                          <a:latin typeface="Arial"/>
+                        </a:rPr>
+                        <a:t>36%</a:t>
+                      </a:r>
+                    </a:p>
+                  </a:txBody>
+                  <a:tcPr marL="18288" marR="18288" marT="45720" marB="45720" anchor="ctr">
+                    <a:lnL w="6350" cap="flat" cmpd="sng" algn="ctr">
+                      <a:noFill/>
+                    </a:lnL>
+                    <a:lnR w="6350" cap="flat" cmpd="sng" algn="ctr">
+                      <a:noFill/>
+                    </a:lnR>
+                    <a:lnT w="6350" cap="flat" cmpd="sng" algn="ctr">
+                      <a:noFill/>
+                    </a:lnT>
+                    <a:lnB w="6350" cap="flat" cmpd="sng" algn="ctr">
+                      <a:solidFill>
+                        <a:srgbClr val="ECECEC"/>
+                      </a:solidFill>
+                    </a:lnB>
+                    <a:solidFill>
+                      <a:srgbClr val="FFFFFF"/>
+                    </a:solidFill>
+                  </a:tcPr>
+                </a:tc>
+                <a:tc>
+                  <a:txBody>
+                    <a:bodyPr wrap="square"/>
+                    <a:lstStyle/>
+                    <a:p>
+                      <a:pPr algn="ctr"/>
+                      <a:r>
+                        <a:rPr sz="750" b="0" i="0" lang="pt-BR">
+                          <a:solidFill>
+                            <a:srgbClr val="333333"/>
+                          </a:solidFill>
+                          <a:latin typeface="Arial"/>
+                        </a:rPr>
+                        <a:t>30%</a:t>
+                      </a:r>
+                    </a:p>
+                  </a:txBody>
+                  <a:tcPr marL="18288" marR="18288" marT="45720" marB="45720" anchor="ctr">
+                    <a:lnL w="6350" cap="flat" cmpd="sng" algn="ctr">
+                      <a:noFill/>
+                    </a:lnL>
+                    <a:lnR w="6350" cap="flat" cmpd="sng" algn="ctr">
+                      <a:noFill/>
+                    </a:lnR>
+                    <a:lnT w="6350" cap="flat" cmpd="sng" algn="ctr">
+                      <a:noFill/>
+                    </a:lnT>
+                    <a:lnB w="6350" cap="flat" cmpd="sng" algn="ctr">
+                      <a:solidFill>
+                        <a:srgbClr val="ECECEC"/>
+                      </a:solidFill>
+                    </a:lnB>
+                    <a:solidFill>
+                      <a:srgbClr val="FFFFFF"/>
+                    </a:solidFill>
+                  </a:tcPr>
+                </a:tc>
+                <a:tc>
+                  <a:txBody>
+                    <a:bodyPr wrap="square"/>
+                    <a:lstStyle/>
+                    <a:p>
+                      <a:pPr algn="ctr"/>
+                      <a:r>
+                        <a:rPr sz="750" b="0" i="0" lang="pt-BR">
+                          <a:solidFill>
+                            <a:srgbClr val="333333"/>
+                          </a:solidFill>
+                          <a:latin typeface="Arial"/>
+                        </a:rPr>
+                        <a:t>36%</a:t>
+                      </a:r>
+                    </a:p>
+                  </a:txBody>
+                  <a:tcPr marL="18288" marR="18288" marT="45720" marB="45720" anchor="ctr">
+                    <a:lnL w="6350" cap="flat" cmpd="sng" algn="ctr">
+                      <a:noFill/>
+                    </a:lnL>
+                    <a:lnR w="6350" cap="flat" cmpd="sng" algn="ctr">
+                      <a:noFill/>
+                    </a:lnR>
+                    <a:lnT w="6350" cap="flat" cmpd="sng" algn="ctr">
+                      <a:noFill/>
+                    </a:lnT>
+                    <a:lnB w="6350" cap="flat" cmpd="sng" algn="ctr">
+                      <a:solidFill>
+                        <a:srgbClr val="ECECEC"/>
+                      </a:solidFill>
+                    </a:lnB>
+                    <a:solidFill>
+                      <a:srgbClr val="FFFFFF"/>
+                    </a:solidFill>
+                  </a:tcPr>
+                </a:tc>
+              </a:tr>
+              <a:tr h="178689">
+                <a:tc>
+                  <a:txBody>
+                    <a:bodyPr wrap="square"/>
+                    <a:lstStyle/>
+                    <a:p>
+                      <a:pPr algn="l"/>
+                      <a:r>
+                        <a:rPr sz="750" b="0" i="0" lang="pt-BR">
+                          <a:solidFill>
+                            <a:srgbClr val="333333"/>
+                          </a:solidFill>
+                          <a:latin typeface="Arial"/>
+                        </a:rPr>
+                        <a:t>% alocado errado</a:t>
+                      </a:r>
+                    </a:p>
+                  </a:txBody>
+                  <a:tcPr marL="54864" marR="54864" marT="45720" marB="45720" anchor="ctr">
+                    <a:lnL w="6350" cap="flat" cmpd="sng" algn="ctr">
+                      <a:noFill/>
+                    </a:lnL>
+                    <a:lnR w="6350" cap="flat" cmpd="sng" algn="ctr">
+                      <a:noFill/>
+                    </a:lnR>
+                    <a:lnT w="6350" cap="flat" cmpd="sng" algn="ctr">
+                      <a:noFill/>
+                    </a:lnT>
+                    <a:lnB w="6350" cap="flat" cmpd="sng" algn="ctr">
+                      <a:solidFill>
+                        <a:srgbClr val="ECECEC"/>
+                      </a:solidFill>
+                    </a:lnB>
+                    <a:solidFill>
+                      <a:srgbClr val="FFFFFF"/>
+                    </a:solidFill>
+                  </a:tcPr>
+                </a:tc>
+                <a:tc>
+                  <a:txBody>
+                    <a:bodyPr wrap="square"/>
+                    <a:lstStyle/>
+                    <a:p>
+                      <a:pPr algn="ctr"/>
+                      <a:r>
+                        <a:rPr sz="750" b="0" i="0" lang="pt-BR">
+                          <a:solidFill>
+                            <a:srgbClr val="333333"/>
+                          </a:solidFill>
+                          <a:latin typeface="Arial"/>
+                        </a:rPr>
+                        <a:t>67%</a:t>
+                      </a:r>
+                    </a:p>
+                  </a:txBody>
+                  <a:tcPr marL="18288" marR="18288" marT="45720" marB="45720" anchor="ctr">
+                    <a:lnL w="6350" cap="flat" cmpd="sng" algn="ctr">
+                      <a:noFill/>
+                    </a:lnL>
+                    <a:lnR w="6350" cap="flat" cmpd="sng" algn="ctr">
+                      <a:noFill/>
+                    </a:lnR>
+                    <a:lnT w="6350" cap="flat" cmpd="sng" algn="ctr">
+                      <a:noFill/>
+                    </a:lnT>
+                    <a:lnB w="6350" cap="flat" cmpd="sng" algn="ctr">
+                      <a:solidFill>
+                        <a:srgbClr val="ECECEC"/>
+                      </a:solidFill>
+                    </a:lnB>
+                    <a:solidFill>
+                      <a:srgbClr val="FFFFFF"/>
+                    </a:solidFill>
+                  </a:tcPr>
+                </a:tc>
+                <a:tc>
+                  <a:txBody>
+                    <a:bodyPr wrap="square"/>
+                    <a:lstStyle/>
+                    <a:p>
+                      <a:pPr algn="ctr"/>
+                      <a:r>
+                        <a:rPr sz="750" b="0" i="0" lang="pt-BR">
+                          <a:solidFill>
+                            <a:srgbClr val="333333"/>
+                          </a:solidFill>
+                          <a:latin typeface="Arial"/>
+                        </a:rPr>
+                        <a:t>65%</a:t>
+                      </a:r>
+                    </a:p>
+                  </a:txBody>
+                  <a:tcPr marL="18288" marR="18288" marT="45720" marB="45720" anchor="ctr">
+                    <a:lnL w="6350" cap="flat" cmpd="sng" algn="ctr">
+                      <a:noFill/>
+                    </a:lnL>
+                    <a:lnR w="6350" cap="flat" cmpd="sng" algn="ctr">
+                      <a:noFill/>
+                    </a:lnR>
+                    <a:lnT w="6350" cap="flat" cmpd="sng" algn="ctr">
+                      <a:noFill/>
+                    </a:lnT>
+                    <a:lnB w="6350" cap="flat" cmpd="sng" algn="ctr">
+                      <a:solidFill>
+                        <a:srgbClr val="ECECEC"/>
+                      </a:solidFill>
+                    </a:lnB>
+                    <a:solidFill>
+                      <a:srgbClr val="FFFFFF"/>
+                    </a:solidFill>
+                  </a:tcPr>
+                </a:tc>
+                <a:tc>
+                  <a:txBody>
+                    <a:bodyPr wrap="square"/>
+                    <a:lstStyle/>
+                    <a:p>
+                      <a:pPr algn="ctr"/>
+                      <a:r>
+                        <a:rPr sz="750" b="0" i="0" lang="pt-BR">
+                          <a:solidFill>
+                            <a:srgbClr val="333333"/>
+                          </a:solidFill>
+                          <a:latin typeface="Arial"/>
+                        </a:rPr>
+                        <a:t>69%</a:t>
+                      </a:r>
+                    </a:p>
+                  </a:txBody>
+                  <a:tcPr marL="18288" marR="18288" marT="45720" marB="45720" anchor="ctr">
+                    <a:lnL w="6350" cap="flat" cmpd="sng" algn="ctr">
+                      <a:noFill/>
+                    </a:lnL>
+                    <a:lnR w="6350" cap="flat" cmpd="sng" algn="ctr">
+                      <a:noFill/>
+                    </a:lnR>
+                    <a:lnT w="6350" cap="flat" cmpd="sng" algn="ctr">
+                      <a:noFill/>
+                    </a:lnT>
+                    <a:lnB w="6350" cap="flat" cmpd="sng" algn="ctr">
+                      <a:solidFill>
+                        <a:srgbClr val="ECECEC"/>
+                      </a:solidFill>
+                    </a:lnB>
+                    <a:solidFill>
+                      <a:srgbClr val="FFFFFF"/>
+                    </a:solidFill>
+                  </a:tcPr>
+                </a:tc>
+                <a:tc>
+                  <a:txBody>
+                    <a:bodyPr wrap="square"/>
+                    <a:lstStyle/>
+                    <a:p>
+                      <a:pPr algn="ctr"/>
+                      <a:r>
+                        <a:rPr sz="750" b="0" i="0" lang="pt-BR">
+                          <a:solidFill>
+                            <a:srgbClr val="333333"/>
+                          </a:solidFill>
+                          <a:latin typeface="Arial"/>
+                        </a:rPr>
+                        <a:t>70%</a:t>
+                      </a:r>
+                    </a:p>
+                  </a:txBody>
+                  <a:tcPr marL="18288" marR="18288" marT="45720" marB="45720" anchor="ctr">
+                    <a:lnL w="6350" cap="flat" cmpd="sng" algn="ctr">
+                      <a:noFill/>
+                    </a:lnL>
+                    <a:lnR w="6350" cap="flat" cmpd="sng" algn="ctr">
+                      <a:noFill/>
+                    </a:lnR>
+                    <a:lnT w="6350" cap="flat" cmpd="sng" algn="ctr">
+                      <a:noFill/>
+                    </a:lnT>
+                    <a:lnB w="6350" cap="flat" cmpd="sng" algn="ctr">
+                      <a:solidFill>
+                        <a:srgbClr val="ECECEC"/>
+                      </a:solidFill>
+                    </a:lnB>
+                    <a:solidFill>
+                      <a:srgbClr val="FFFFFF"/>
+                    </a:solidFill>
+                  </a:tcPr>
+                </a:tc>
+                <a:tc>
+                  <a:txBody>
+                    <a:bodyPr wrap="square"/>
+                    <a:lstStyle/>
+                    <a:p>
+                      <a:pPr algn="ctr"/>
+                      <a:r>
+                        <a:rPr sz="750" b="0" i="0" lang="pt-BR">
+                          <a:solidFill>
+                            <a:srgbClr val="333333"/>
+                          </a:solidFill>
+                          <a:latin typeface="Arial"/>
+                        </a:rPr>
+                        <a:t>67%</a:t>
+                      </a:r>
+                    </a:p>
+                  </a:txBody>
+                  <a:tcPr marL="18288" marR="18288" marT="45720" marB="45720" anchor="ctr">
+                    <a:lnL w="6350" cap="flat" cmpd="sng" algn="ctr">
+                      <a:noFill/>
+                    </a:lnL>
+                    <a:lnR w="6350" cap="flat" cmpd="sng" algn="ctr">
+                      <a:noFill/>
+                    </a:lnR>
+                    <a:lnT w="6350" cap="flat" cmpd="sng" algn="ctr">
+                      <a:noFill/>
+                    </a:lnT>
+                    <a:lnB w="6350" cap="flat" cmpd="sng" algn="ctr">
+                      <a:solidFill>
+                        <a:srgbClr val="ECECEC"/>
+                      </a:solidFill>
+                    </a:lnB>
+                    <a:solidFill>
+                      <a:srgbClr val="FFFFFF"/>
+                    </a:solidFill>
+                  </a:tcPr>
+                </a:tc>
+                <a:tc>
+                  <a:txBody>
+                    <a:bodyPr wrap="square"/>
+                    <a:lstStyle/>
+                    <a:p>
+                      <a:pPr algn="ctr"/>
+                      <a:r>
+                        <a:rPr sz="750" b="0" i="0" lang="pt-BR">
+                          <a:solidFill>
+                            <a:srgbClr val="333333"/>
+                          </a:solidFill>
+                          <a:latin typeface="Arial"/>
+                        </a:rPr>
+                        <a:t>64%</a:t>
+                      </a:r>
+                    </a:p>
+                  </a:txBody>
+                  <a:tcPr marL="18288" marR="18288" marT="45720" marB="45720" anchor="ctr">
+                    <a:lnL w="6350" cap="flat" cmpd="sng" algn="ctr">
+                      <a:noFill/>
+                    </a:lnL>
+                    <a:lnR w="6350" cap="flat" cmpd="sng" algn="ctr">
+                      <a:noFill/>
+                    </a:lnR>
+                    <a:lnT w="6350" cap="flat" cmpd="sng" algn="ctr">
+                      <a:noFill/>
+                    </a:lnT>
+                    <a:lnB w="6350" cap="flat" cmpd="sng" algn="ctr">
+                      <a:solidFill>
+                        <a:srgbClr val="ECECEC"/>
+                      </a:solidFill>
+                    </a:lnB>
+                    <a:solidFill>
+                      <a:srgbClr val="FFFFFF"/>
+                    </a:solidFill>
+                  </a:tcPr>
+                </a:tc>
+                <a:tc>
+                  <a:txBody>
+                    <a:bodyPr wrap="square"/>
+                    <a:lstStyle/>
+                    <a:p>
+                      <a:pPr algn="ctr"/>
+                      <a:r>
+                        <a:rPr sz="750" b="0" i="0" lang="pt-BR">
+                          <a:solidFill>
+                            <a:srgbClr val="333333"/>
+                          </a:solidFill>
+                          <a:latin typeface="Arial"/>
+                        </a:rPr>
+                        <a:t>70%</a:t>
+                      </a:r>
+                    </a:p>
+                  </a:txBody>
+                  <a:tcPr marL="18288" marR="18288" marT="45720" marB="45720" anchor="ctr">
+                    <a:lnL w="6350" cap="flat" cmpd="sng" algn="ctr">
+                      <a:noFill/>
+                    </a:lnL>
+                    <a:lnR w="6350" cap="flat" cmpd="sng" algn="ctr">
+                      <a:noFill/>
+                    </a:lnR>
+                    <a:lnT w="6350" cap="flat" cmpd="sng" algn="ctr">
+                      <a:noFill/>
+                    </a:lnT>
+                    <a:lnB w="6350" cap="flat" cmpd="sng" algn="ctr">
+                      <a:solidFill>
+                        <a:srgbClr val="ECECEC"/>
+                      </a:solidFill>
+                    </a:lnB>
+                    <a:solidFill>
+                      <a:srgbClr val="FFFFFF"/>
+                    </a:solidFill>
+                  </a:tcPr>
+                </a:tc>
+                <a:tc>
+                  <a:txBody>
+                    <a:bodyPr wrap="square"/>
+                    <a:lstStyle/>
+                    <a:p>
+                      <a:pPr algn="ctr"/>
+                      <a:r>
+                        <a:rPr sz="750" b="0" i="0" lang="pt-BR">
+                          <a:solidFill>
+                            <a:srgbClr val="333333"/>
+                          </a:solidFill>
+                          <a:latin typeface="Arial"/>
+                        </a:rPr>
+                        <a:t>64%</a:t>
+                      </a:r>
+                    </a:p>
+                  </a:txBody>
+                  <a:tcPr marL="18288" marR="18288" marT="45720" marB="45720" anchor="ctr">
+                    <a:lnL w="6350" cap="flat" cmpd="sng" algn="ctr">
+                      <a:noFill/>
+                    </a:lnL>
+                    <a:lnR w="6350" cap="flat" cmpd="sng" algn="ctr">
+                      <a:noFill/>
+                    </a:lnR>
+                    <a:lnT w="6350" cap="flat" cmpd="sng" algn="ctr">
+                      <a:noFill/>
+                    </a:lnT>
+                    <a:lnB w="6350" cap="flat" cmpd="sng" algn="ctr">
+                      <a:solidFill>
+                        <a:srgbClr val="ECECEC"/>
+                      </a:solidFill>
+                    </a:lnB>
+                    <a:solidFill>
+                      <a:srgbClr val="FFFFFF"/>
+                    </a:solidFill>
+                  </a:tcPr>
+                </a:tc>
+              </a:tr>
+              <a:tr h="302514">
+                <a:tc>
+                  <a:txBody>
+                    <a:bodyPr wrap="square"/>
+                    <a:lstStyle/>
+                    <a:p>
+                      <a:pPr algn="l"/>
+                      <a:r>
+                        <a:rPr sz="750" b="0" i="0" lang="pt-BR">
+                          <a:solidFill>
+                            <a:srgbClr val="333333"/>
+                          </a:solidFill>
+                          <a:latin typeface="Arial"/>
+                        </a:rPr>
+                        <a:t>% conv. média - alocado certo</a:t>
+                      </a:r>
+                    </a:p>
+                  </a:txBody>
+                  <a:tcPr marL="54864" marR="54864" marT="45720" marB="45720" anchor="ctr">
+                    <a:lnL w="6350" cap="flat" cmpd="sng" algn="ctr">
+                      <a:noFill/>
+                    </a:lnL>
+                    <a:lnR w="6350" cap="flat" cmpd="sng" algn="ctr">
+                      <a:noFill/>
+                    </a:lnR>
+                    <a:lnT w="6350" cap="flat" cmpd="sng" algn="ctr">
+                      <a:noFill/>
+                    </a:lnT>
+                    <a:lnB w="6350" cap="flat" cmpd="sng" algn="ctr">
+                      <a:solidFill>
+                        <a:srgbClr val="ECECEC"/>
+                      </a:solidFill>
+                    </a:lnB>
+                    <a:solidFill>
+                      <a:srgbClr val="FFFFFF"/>
+                    </a:solidFill>
+                  </a:tcPr>
+                </a:tc>
+                <a:tc>
+                  <a:txBody>
+                    <a:bodyPr wrap="square"/>
+                    <a:lstStyle/>
+                    <a:p>
+                      <a:pPr algn="ctr"/>
+                      <a:r>
+                        <a:rPr sz="750" b="1" i="0" lang="pt-BR">
+                          <a:solidFill>
+                            <a:srgbClr val="6A7C19"/>
+                          </a:solidFill>
+                          <a:latin typeface="Arial"/>
+                        </a:rPr>
+                        <a:t>0,60%</a:t>
+                      </a:r>
+                    </a:p>
+                  </a:txBody>
+                  <a:tcPr marL="18288" marR="18288" marT="45720" marB="45720" anchor="ctr">
+                    <a:lnL w="12700" cap="flat" cmpd="sng" algn="ctr">
+                      <a:solidFill>
+                        <a:srgbClr val="FFFFFF"/>
+                      </a:solidFill>
+                    </a:lnL>
+                    <a:lnR w="12700" cap="flat" cmpd="sng" algn="ctr">
+                      <a:solidFill>
+                        <a:srgbClr val="FFFFFF"/>
+                      </a:solidFill>
+                    </a:lnR>
+                    <a:lnT w="12700" cap="flat" cmpd="sng" algn="ctr">
+                      <a:noFill/>
+                    </a:lnT>
+                    <a:lnB w="12700" cap="flat" cmpd="sng" algn="ctr">
+                      <a:solidFill>
+                        <a:srgbClr val="ECECEC"/>
+                      </a:solidFill>
+                    </a:lnB>
+                    <a:solidFill>
+                      <a:srgbClr val="E5E9CC"/>
+                    </a:solidFill>
+                  </a:tcPr>
+                </a:tc>
+                <a:tc>
+                  <a:txBody>
+                    <a:bodyPr wrap="square"/>
+                    <a:lstStyle/>
+                    <a:p>
+                      <a:pPr algn="ctr"/>
+                      <a:r>
+                        <a:rPr sz="750" b="1" i="0" lang="pt-BR">
+                          <a:solidFill>
+                            <a:srgbClr val="2E7D32"/>
+                          </a:solidFill>
+                          <a:latin typeface="Arial"/>
+                        </a:rPr>
+                        <a:t>0,69%</a:t>
+                      </a:r>
+                    </a:p>
+                  </a:txBody>
+                  <a:tcPr marL="18288" marR="18288" marT="45720" marB="45720" anchor="ctr">
+                    <a:lnL w="12700" cap="flat" cmpd="sng" algn="ctr">
+                      <a:solidFill>
+                        <a:srgbClr val="FFFFFF"/>
+                      </a:solidFill>
+                    </a:lnL>
+                    <a:lnR w="12700" cap="flat" cmpd="sng" algn="ctr">
+                      <a:solidFill>
+                        <a:srgbClr val="FFFFFF"/>
+                      </a:solidFill>
+                    </a:lnR>
+                    <a:lnT w="12700" cap="flat" cmpd="sng" algn="ctr">
+                      <a:noFill/>
+                    </a:lnT>
+                    <a:lnB w="12700" cap="flat" cmpd="sng" algn="ctr">
+                      <a:solidFill>
+                        <a:srgbClr val="ECECEC"/>
+                      </a:solidFill>
+                    </a:lnB>
+                    <a:solidFill>
+                      <a:srgbClr val="D4E9D1"/>
+                    </a:solidFill>
+                  </a:tcPr>
+                </a:tc>
+                <a:tc>
+                  <a:txBody>
+                    <a:bodyPr wrap="square"/>
+                    <a:lstStyle/>
+                    <a:p>
+                      <a:pPr algn="ctr"/>
+                      <a:r>
+                        <a:rPr sz="750" b="1" i="0" lang="pt-BR">
+                          <a:solidFill>
+                            <a:srgbClr val="A77206"/>
+                          </a:solidFill>
+                          <a:latin typeface="Arial"/>
+                        </a:rPr>
+                        <a:t>0,49%</a:t>
+                      </a:r>
+                    </a:p>
+                  </a:txBody>
+                  <a:tcPr marL="18288" marR="18288" marT="45720" marB="45720" anchor="ctr">
+                    <a:lnL w="12700" cap="flat" cmpd="sng" algn="ctr">
+                      <a:solidFill>
+                        <a:srgbClr val="FFFFFF"/>
+                      </a:solidFill>
+                    </a:lnL>
+                    <a:lnR w="12700" cap="flat" cmpd="sng" algn="ctr">
+                      <a:solidFill>
+                        <a:srgbClr val="FFFFFF"/>
+                      </a:solidFill>
+                    </a:lnR>
+                    <a:lnT w="12700" cap="flat" cmpd="sng" algn="ctr">
+                      <a:noFill/>
+                    </a:lnT>
+                    <a:lnB w="12700" cap="flat" cmpd="sng" algn="ctr">
+                      <a:solidFill>
+                        <a:srgbClr val="ECECEC"/>
+                      </a:solidFill>
+                    </a:lnB>
+                    <a:solidFill>
+                      <a:srgbClr val="F6E6C7"/>
+                    </a:solidFill>
+                  </a:tcPr>
+                </a:tc>
+                <a:tc>
+                  <a:txBody>
+                    <a:bodyPr wrap="square"/>
+                    <a:lstStyle/>
+                    <a:p>
+                      <a:pPr algn="ctr"/>
+                      <a:r>
+                        <a:rPr sz="750" b="1" i="0" lang="pt-BR">
+                          <a:solidFill>
+                            <a:srgbClr val="987C05"/>
+                          </a:solidFill>
+                          <a:latin typeface="Arial"/>
+                        </a:rPr>
+                        <a:t>0,53%</a:t>
+                      </a:r>
+                    </a:p>
+                  </a:txBody>
+                  <a:tcPr marL="18288" marR="18288" marT="45720" marB="45720" anchor="ctr">
+                    <a:lnL w="12700" cap="flat" cmpd="sng" algn="ctr">
+                      <a:solidFill>
+                        <a:srgbClr val="FFFFFF"/>
+                      </a:solidFill>
+                    </a:lnL>
+                    <a:lnR w="12700" cap="flat" cmpd="sng" algn="ctr">
+                      <a:solidFill>
+                        <a:srgbClr val="FFFFFF"/>
+                      </a:solidFill>
+                    </a:lnR>
+                    <a:lnT w="12700" cap="flat" cmpd="sng" algn="ctr">
+                      <a:noFill/>
+                    </a:lnT>
+                    <a:lnB w="12700" cap="flat" cmpd="sng" algn="ctr">
+                      <a:solidFill>
+                        <a:srgbClr val="ECECEC"/>
+                      </a:solidFill>
+                    </a:lnB>
+                    <a:solidFill>
+                      <a:srgbClr val="F3E9C8"/>
+                    </a:solidFill>
+                  </a:tcPr>
+                </a:tc>
+                <a:tc>
+                  <a:txBody>
+                    <a:bodyPr wrap="square"/>
+                    <a:lstStyle/>
+                    <a:p>
+                      <a:pPr algn="ctr"/>
+                      <a:r>
+                        <a:rPr sz="750" b="1" i="0" lang="pt-BR">
+                          <a:solidFill>
+                            <a:srgbClr val="347C2F"/>
+                          </a:solidFill>
+                          <a:latin typeface="Arial"/>
+                        </a:rPr>
+                        <a:t>0,68%</a:t>
+                      </a:r>
+                    </a:p>
+                  </a:txBody>
+                  <a:tcPr marL="18288" marR="18288" marT="45720" marB="45720" anchor="ctr">
+                    <a:lnL w="12700" cap="flat" cmpd="sng" algn="ctr">
+                      <a:solidFill>
+                        <a:srgbClr val="FFFFFF"/>
+                      </a:solidFill>
+                    </a:lnL>
+                    <a:lnR w="12700" cap="flat" cmpd="sng" algn="ctr">
+                      <a:solidFill>
+                        <a:srgbClr val="FFFFFF"/>
+                      </a:solidFill>
+                    </a:lnR>
+                    <a:lnT w="12700" cap="flat" cmpd="sng" algn="ctr">
+                      <a:noFill/>
+                    </a:lnT>
+                    <a:lnB w="12700" cap="flat" cmpd="sng" algn="ctr">
+                      <a:solidFill>
+                        <a:srgbClr val="ECECEC"/>
+                      </a:solidFill>
+                    </a:lnB>
+                    <a:solidFill>
+                      <a:srgbClr val="D5E9D0"/>
+                    </a:solidFill>
+                  </a:tcPr>
+                </a:tc>
+                <a:tc>
+                  <a:txBody>
+                    <a:bodyPr wrap="square"/>
+                    <a:lstStyle/>
+                    <a:p>
+                      <a:pPr algn="ctr"/>
+                      <a:r>
+                        <a:rPr sz="750" b="1" i="0" lang="pt-BR">
+                          <a:solidFill>
+                            <a:srgbClr val="987C05"/>
+                          </a:solidFill>
+                          <a:latin typeface="Arial"/>
+                        </a:rPr>
+                        <a:t>0,53%</a:t>
+                      </a:r>
+                    </a:p>
+                  </a:txBody>
+                  <a:tcPr marL="18288" marR="18288" marT="45720" marB="45720" anchor="ctr">
+                    <a:lnL w="12700" cap="flat" cmpd="sng" algn="ctr">
+                      <a:solidFill>
+                        <a:srgbClr val="FFFFFF"/>
+                      </a:solidFill>
+                    </a:lnL>
+                    <a:lnR w="12700" cap="flat" cmpd="sng" algn="ctr">
+                      <a:solidFill>
+                        <a:srgbClr val="FFFFFF"/>
+                      </a:solidFill>
+                    </a:lnR>
+                    <a:lnT w="12700" cap="flat" cmpd="sng" algn="ctr">
+                      <a:noFill/>
+                    </a:lnT>
+                    <a:lnB w="12700" cap="flat" cmpd="sng" algn="ctr">
+                      <a:solidFill>
+                        <a:srgbClr val="ECECEC"/>
+                      </a:solidFill>
+                    </a:lnB>
+                    <a:solidFill>
+                      <a:srgbClr val="F3E9C8"/>
+                    </a:solidFill>
+                  </a:tcPr>
+                </a:tc>
+                <a:tc>
+                  <a:txBody>
+                    <a:bodyPr wrap="square"/>
+                    <a:lstStyle/>
+                    <a:p>
+                      <a:pPr algn="ctr"/>
+                      <a:r>
+                        <a:rPr sz="750" b="1" i="0" lang="pt-BR">
+                          <a:solidFill>
+                            <a:srgbClr val="917C08"/>
+                          </a:solidFill>
+                          <a:latin typeface="Arial"/>
+                        </a:rPr>
+                        <a:t>0,54%</a:t>
+                      </a:r>
+                    </a:p>
+                  </a:txBody>
+                  <a:tcPr marL="18288" marR="18288" marT="45720" marB="45720" anchor="ctr">
+                    <a:lnL w="12700" cap="flat" cmpd="sng" algn="ctr">
+                      <a:solidFill>
+                        <a:srgbClr val="FFFFFF"/>
+                      </a:solidFill>
+                    </a:lnL>
+                    <a:lnR w="12700" cap="flat" cmpd="sng" algn="ctr">
+                      <a:solidFill>
+                        <a:srgbClr val="FFFFFF"/>
+                      </a:solidFill>
+                    </a:lnR>
+                    <a:lnT w="12700" cap="flat" cmpd="sng" algn="ctr">
+                      <a:noFill/>
+                    </a:lnT>
+                    <a:lnB w="12700" cap="flat" cmpd="sng" algn="ctr">
+                      <a:solidFill>
+                        <a:srgbClr val="ECECEC"/>
+                      </a:solidFill>
+                    </a:lnB>
+                    <a:solidFill>
+                      <a:srgbClr val="F1E9C8"/>
+                    </a:solidFill>
+                  </a:tcPr>
+                </a:tc>
+                <a:tc>
+                  <a:txBody>
+                    <a:bodyPr wrap="square"/>
+                    <a:lstStyle/>
+                    <a:p>
+                      <a:pPr algn="ctr"/>
+                      <a:r>
+                        <a:rPr sz="750" b="1" i="0" lang="pt-BR">
+                          <a:solidFill>
+                            <a:srgbClr val="B02A37"/>
+                          </a:solidFill>
+                          <a:latin typeface="Arial"/>
+                        </a:rPr>
+                        <a:t>0,33%</a:t>
+                      </a:r>
+                    </a:p>
+                  </a:txBody>
+                  <a:tcPr marL="18288" marR="18288" marT="45720" marB="45720" anchor="ctr">
+                    <a:lnL w="12700" cap="flat" cmpd="sng" algn="ctr">
+                      <a:solidFill>
+                        <a:srgbClr val="FFFFFF"/>
+                      </a:solidFill>
+                    </a:lnL>
+                    <a:lnR w="12700" cap="flat" cmpd="sng" algn="ctr">
+                      <a:solidFill>
+                        <a:srgbClr val="FFFFFF"/>
+                      </a:solidFill>
+                    </a:lnR>
+                    <a:lnT w="12700" cap="flat" cmpd="sng" algn="ctr">
+                      <a:noFill/>
+                    </a:lnT>
+                    <a:lnB w="12700" cap="flat" cmpd="sng" algn="ctr">
+                      <a:solidFill>
+                        <a:srgbClr val="ECECEC"/>
+                      </a:solidFill>
+                    </a:lnB>
+                    <a:solidFill>
+                      <a:srgbClr val="F6C9CB"/>
+                    </a:solidFill>
+                  </a:tcPr>
+                </a:tc>
+              </a:tr>
+              <a:tr h="302514">
+                <a:tc>
+                  <a:txBody>
+                    <a:bodyPr wrap="square"/>
+                    <a:lstStyle/>
+                    <a:p>
+                      <a:pPr algn="l"/>
+                      <a:r>
+                        <a:rPr sz="750" b="0" i="0" lang="pt-BR">
+                          <a:solidFill>
+                            <a:srgbClr val="333333"/>
+                          </a:solidFill>
+                          <a:latin typeface="Arial"/>
+                        </a:rPr>
+                        <a:t>% conv. média - alocado errado</a:t>
+                      </a:r>
+                    </a:p>
+                  </a:txBody>
+                  <a:tcPr marL="54864" marR="54864" marT="45720" marB="45720" anchor="ctr">
+                    <a:lnL w="6350" cap="flat" cmpd="sng" algn="ctr">
+                      <a:noFill/>
+                    </a:lnL>
+                    <a:lnR w="6350" cap="flat" cmpd="sng" algn="ctr">
+                      <a:noFill/>
+                    </a:lnR>
+                    <a:lnT w="6350" cap="flat" cmpd="sng" algn="ctr">
+                      <a:noFill/>
+                    </a:lnT>
+                    <a:lnB w="6350" cap="flat" cmpd="sng" algn="ctr">
+                      <a:solidFill>
+                        <a:srgbClr val="D5D5D5"/>
+                      </a:solidFill>
+                    </a:lnB>
+                    <a:solidFill>
+                      <a:srgbClr val="FFFFFF"/>
+                    </a:solidFill>
+                  </a:tcPr>
+                </a:tc>
+                <a:tc>
+                  <a:txBody>
+                    <a:bodyPr wrap="square"/>
+                    <a:lstStyle/>
+                    <a:p>
+                      <a:pPr algn="ctr"/>
+                      <a:r>
+                        <a:rPr sz="750" b="1" i="0" lang="pt-BR">
+                          <a:solidFill>
+                            <a:srgbClr val="7E7C10"/>
+                          </a:solidFill>
+                          <a:latin typeface="Arial"/>
+                        </a:rPr>
+                        <a:t>0,41%</a:t>
+                      </a:r>
+                    </a:p>
+                  </a:txBody>
+                  <a:tcPr marL="18288" marR="18288" marT="45720" marB="45720" anchor="ctr">
+                    <a:lnL w="12700" cap="flat" cmpd="sng" algn="ctr">
+                      <a:solidFill>
+                        <a:srgbClr val="FFFFFF"/>
+                      </a:solidFill>
+                    </a:lnL>
+                    <a:lnR w="12700" cap="flat" cmpd="sng" algn="ctr">
+                      <a:solidFill>
+                        <a:srgbClr val="FFFFFF"/>
+                      </a:solidFill>
+                    </a:lnR>
+                    <a:lnT w="12700" cap="flat" cmpd="sng" algn="ctr">
+                      <a:noFill/>
+                    </a:lnT>
+                    <a:lnB w="12700" cap="flat" cmpd="sng" algn="ctr">
+                      <a:solidFill>
+                        <a:srgbClr val="D5D5D5"/>
+                      </a:solidFill>
+                    </a:lnB>
+                    <a:solidFill>
+                      <a:srgbClr val="EBE9CA"/>
+                    </a:solidFill>
+                  </a:tcPr>
+                </a:tc>
+                <a:tc>
+                  <a:txBody>
+                    <a:bodyPr wrap="square"/>
+                    <a:lstStyle/>
+                    <a:p>
+                      <a:pPr algn="ctr"/>
+                      <a:r>
+                        <a:rPr sz="750" b="1" i="0" lang="pt-BR">
+                          <a:solidFill>
+                            <a:srgbClr val="2E7D32"/>
+                          </a:solidFill>
+                          <a:latin typeface="Arial"/>
+                        </a:rPr>
+                        <a:t>0,49%</a:t>
+                      </a:r>
+                    </a:p>
+                  </a:txBody>
+                  <a:tcPr marL="18288" marR="18288" marT="45720" marB="45720" anchor="ctr">
+                    <a:lnL w="12700" cap="flat" cmpd="sng" algn="ctr">
+                      <a:solidFill>
+                        <a:srgbClr val="FFFFFF"/>
+                      </a:solidFill>
+                    </a:lnL>
+                    <a:lnR w="12700" cap="flat" cmpd="sng" algn="ctr">
+                      <a:solidFill>
+                        <a:srgbClr val="FFFFFF"/>
+                      </a:solidFill>
+                    </a:lnR>
+                    <a:lnT w="12700" cap="flat" cmpd="sng" algn="ctr">
+                      <a:noFill/>
+                    </a:lnT>
+                    <a:lnB w="12700" cap="flat" cmpd="sng" algn="ctr">
+                      <a:solidFill>
+                        <a:srgbClr val="D5D5D5"/>
+                      </a:solidFill>
+                    </a:lnB>
+                    <a:solidFill>
+                      <a:srgbClr val="D4E9D1"/>
+                    </a:solidFill>
+                  </a:tcPr>
+                </a:tc>
+                <a:tc>
+                  <a:txBody>
+                    <a:bodyPr wrap="square"/>
+                    <a:lstStyle/>
+                    <a:p>
+                      <a:pPr algn="ctr"/>
+                      <a:r>
+                        <a:rPr sz="750" b="1" i="0" lang="pt-BR">
+                          <a:solidFill>
+                            <a:srgbClr val="A96012"/>
+                          </a:solidFill>
+                          <a:latin typeface="Arial"/>
+                        </a:rPr>
+                        <a:t>0,33%</a:t>
+                      </a:r>
+                    </a:p>
+                  </a:txBody>
+                  <a:tcPr marL="18288" marR="18288" marT="45720" marB="45720" anchor="ctr">
+                    <a:lnL w="12700" cap="flat" cmpd="sng" algn="ctr">
+                      <a:solidFill>
+                        <a:srgbClr val="FFFFFF"/>
+                      </a:solidFill>
+                    </a:lnL>
+                    <a:lnR w="12700" cap="flat" cmpd="sng" algn="ctr">
+                      <a:solidFill>
+                        <a:srgbClr val="FFFFFF"/>
+                      </a:solidFill>
+                    </a:lnR>
+                    <a:lnT w="12700" cap="flat" cmpd="sng" algn="ctr">
+                      <a:noFill/>
+                    </a:lnT>
+                    <a:lnB w="12700" cap="flat" cmpd="sng" algn="ctr">
+                      <a:solidFill>
+                        <a:srgbClr val="D5D5D5"/>
+                      </a:solidFill>
+                    </a:lnB>
+                    <a:solidFill>
+                      <a:srgbClr val="F6DFC8"/>
+                    </a:solidFill>
+                  </a:tcPr>
+                </a:tc>
+                <a:tc>
+                  <a:txBody>
+                    <a:bodyPr wrap="square"/>
+                    <a:lstStyle/>
+                    <a:p>
+                      <a:pPr algn="ctr"/>
+                      <a:r>
+                        <a:rPr sz="750" b="1" i="0" lang="pt-BR">
+                          <a:solidFill>
+                            <a:srgbClr val="A8670D"/>
+                          </a:solidFill>
+                          <a:latin typeface="Arial"/>
+                        </a:rPr>
+                        <a:t>0,34%</a:t>
+                      </a:r>
+                    </a:p>
+                  </a:txBody>
+                  <a:tcPr marL="18288" marR="18288" marT="45720" marB="45720" anchor="ctr">
+                    <a:lnL w="12700" cap="flat" cmpd="sng" algn="ctr">
+                      <a:solidFill>
+                        <a:srgbClr val="FFFFFF"/>
+                      </a:solidFill>
+                    </a:lnL>
+                    <a:lnR w="12700" cap="flat" cmpd="sng" algn="ctr">
+                      <a:solidFill>
+                        <a:srgbClr val="FFFFFF"/>
+                      </a:solidFill>
+                    </a:lnR>
+                    <a:lnT w="12700" cap="flat" cmpd="sng" algn="ctr">
+                      <a:noFill/>
+                    </a:lnT>
+                    <a:lnB w="12700" cap="flat" cmpd="sng" algn="ctr">
+                      <a:solidFill>
+                        <a:srgbClr val="D5D5D5"/>
+                      </a:solidFill>
+                    </a:lnB>
+                    <a:solidFill>
+                      <a:srgbClr val="F6E1C8"/>
+                    </a:solidFill>
+                  </a:tcPr>
+                </a:tc>
+                <a:tc>
+                  <a:txBody>
+                    <a:bodyPr wrap="square"/>
+                    <a:lstStyle/>
+                    <a:p>
+                      <a:pPr algn="ctr"/>
+                      <a:r>
+                        <a:rPr sz="750" b="1" i="0" lang="pt-BR">
+                          <a:solidFill>
+                            <a:srgbClr val="877C0C"/>
+                          </a:solidFill>
+                          <a:latin typeface="Arial"/>
+                        </a:rPr>
+                        <a:t>0,40%</a:t>
+                      </a:r>
+                    </a:p>
+                  </a:txBody>
+                  <a:tcPr marL="18288" marR="18288" marT="45720" marB="45720" anchor="ctr">
+                    <a:lnL w="12700" cap="flat" cmpd="sng" algn="ctr">
+                      <a:solidFill>
+                        <a:srgbClr val="FFFFFF"/>
+                      </a:solidFill>
+                    </a:lnL>
+                    <a:lnR w="12700" cap="flat" cmpd="sng" algn="ctr">
+                      <a:solidFill>
+                        <a:srgbClr val="FFFFFF"/>
+                      </a:solidFill>
+                    </a:lnR>
+                    <a:lnT w="12700" cap="flat" cmpd="sng" algn="ctr">
+                      <a:noFill/>
+                    </a:lnT>
+                    <a:lnB w="12700" cap="flat" cmpd="sng" algn="ctr">
+                      <a:solidFill>
+                        <a:srgbClr val="D5D5D5"/>
+                      </a:solidFill>
+                    </a:lnB>
+                    <a:solidFill>
+                      <a:srgbClr val="EEE9C9"/>
+                    </a:solidFill>
+                  </a:tcPr>
+                </a:tc>
+                <a:tc>
+                  <a:txBody>
+                    <a:bodyPr wrap="square"/>
+                    <a:lstStyle/>
+                    <a:p>
+                      <a:pPr algn="ctr"/>
+                      <a:r>
+                        <a:rPr sz="750" b="1" i="0" lang="pt-BR">
+                          <a:solidFill>
+                            <a:srgbClr val="567C21"/>
+                          </a:solidFill>
+                          <a:latin typeface="Arial"/>
+                        </a:rPr>
+                        <a:t>0,45%</a:t>
+                      </a:r>
+                    </a:p>
+                  </a:txBody>
+                  <a:tcPr marL="18288" marR="18288" marT="45720" marB="45720" anchor="ctr">
+                    <a:lnL w="12700" cap="flat" cmpd="sng" algn="ctr">
+                      <a:solidFill>
+                        <a:srgbClr val="FFFFFF"/>
+                      </a:solidFill>
+                    </a:lnL>
+                    <a:lnR w="12700" cap="flat" cmpd="sng" algn="ctr">
+                      <a:solidFill>
+                        <a:srgbClr val="FFFFFF"/>
+                      </a:solidFill>
+                    </a:lnR>
+                    <a:lnT w="12700" cap="flat" cmpd="sng" algn="ctr">
+                      <a:noFill/>
+                    </a:lnT>
+                    <a:lnB w="12700" cap="flat" cmpd="sng" algn="ctr">
+                      <a:solidFill>
+                        <a:srgbClr val="D5D5D5"/>
+                      </a:solidFill>
+                    </a:lnB>
+                    <a:solidFill>
+                      <a:srgbClr val="DFE9CD"/>
+                    </a:solidFill>
+                  </a:tcPr>
+                </a:tc>
+                <a:tc>
+                  <a:txBody>
+                    <a:bodyPr wrap="square"/>
+                    <a:lstStyle/>
+                    <a:p>
+                      <a:pPr algn="ctr"/>
+                      <a:r>
+                        <a:rPr sz="750" b="1" i="0" lang="pt-BR">
+                          <a:solidFill>
+                            <a:srgbClr val="927C08"/>
+                          </a:solidFill>
+                          <a:latin typeface="Arial"/>
+                        </a:rPr>
+                        <a:t>0,39%</a:t>
+                      </a:r>
+                    </a:p>
+                  </a:txBody>
+                  <a:tcPr marL="18288" marR="18288" marT="45720" marB="45720" anchor="ctr">
+                    <a:lnL w="12700" cap="flat" cmpd="sng" algn="ctr">
+                      <a:solidFill>
+                        <a:srgbClr val="FFFFFF"/>
+                      </a:solidFill>
+                    </a:lnL>
+                    <a:lnR w="12700" cap="flat" cmpd="sng" algn="ctr">
+                      <a:solidFill>
+                        <a:srgbClr val="FFFFFF"/>
+                      </a:solidFill>
+                    </a:lnR>
+                    <a:lnT w="12700" cap="flat" cmpd="sng" algn="ctr">
+                      <a:noFill/>
+                    </a:lnT>
+                    <a:lnB w="12700" cap="flat" cmpd="sng" algn="ctr">
+                      <a:solidFill>
+                        <a:srgbClr val="D5D5D5"/>
+                      </a:solidFill>
+                    </a:lnB>
+                    <a:solidFill>
+                      <a:srgbClr val="F1E9C8"/>
+                    </a:solidFill>
+                  </a:tcPr>
+                </a:tc>
+                <a:tc>
+                  <a:txBody>
+                    <a:bodyPr wrap="square"/>
+                    <a:lstStyle/>
+                    <a:p>
+                      <a:pPr algn="ctr"/>
+                      <a:r>
+                        <a:rPr sz="750" b="1" i="0" lang="pt-BR">
+                          <a:solidFill>
+                            <a:srgbClr val="B02A37"/>
+                          </a:solidFill>
+                          <a:latin typeface="Arial"/>
+                        </a:rPr>
+                        <a:t>0,25%</a:t>
+                      </a:r>
+                    </a:p>
+                  </a:txBody>
+                  <a:tcPr marL="18288" marR="18288" marT="45720" marB="45720" anchor="ctr">
+                    <a:lnL w="12700" cap="flat" cmpd="sng" algn="ctr">
+                      <a:solidFill>
+                        <a:srgbClr val="FFFFFF"/>
+                      </a:solidFill>
+                    </a:lnL>
+                    <a:lnR w="12700" cap="flat" cmpd="sng" algn="ctr">
+                      <a:solidFill>
+                        <a:srgbClr val="FFFFFF"/>
+                      </a:solidFill>
+                    </a:lnR>
+                    <a:lnT w="12700" cap="flat" cmpd="sng" algn="ctr">
+                      <a:noFill/>
+                    </a:lnT>
+                    <a:lnB w="12700" cap="flat" cmpd="sng" algn="ctr">
+                      <a:solidFill>
+                        <a:srgbClr val="D5D5D5"/>
+                      </a:solidFill>
+                    </a:lnB>
+                    <a:solidFill>
+                      <a:srgbClr val="F6C9CB"/>
+                    </a:solidFill>
+                  </a:tcPr>
+                </a:tc>
+              </a:tr>
+            </a:tbl>
+          </a:graphicData>
+        </a:graphic>
+      </p:graphicFrame>
+      <p:sp>
+        <p:nvSpPr>
+          <p:cNvPr id="19" name="Rounded Rectangle 18"/>
+          <p:cNvSpPr/>
+          <p:nvPr/>
+        </p:nvSpPr>
+        <p:spPr>
+          <a:xfrm>
+            <a:off x="384048" y="3446907"/>
+            <a:ext cx="201168" cy="1141095"/>
+          </a:xfrm>
+          <a:prstGeom prst="roundRect">
+            <a:avLst>
+              <a:gd name="adj" fmla="val 8814"/>
+            </a:avLst>
+          </a:prstGeom>
+          <a:solidFill>
+            <a:srgbClr val="1F4E3D"/>
+          </a:solidFill>
+          <a:ln>
+            <a:noFill/>
+          </a:ln>
+          <a:effectLst/>
+        </p:spPr>
+        <p:txBody>
+          <a:bodyPr rtlCol="0" anchor="ctr" lIns="0" rIns="0" tIns="0" bIns="0" wrap="square" vert="vert270"/>
+          <a:lstStyle/>
+          <a:p>
+            <a:pPr algn="ctr"/>
+            <a:r>
+              <a:rPr sz="750" b="1" i="0" lang="pt-BR">
+                <a:solidFill>
+                  <a:srgbClr val="FFFFFF"/>
+                </a:solidFill>
+                <a:latin typeface="Arial"/>
+              </a:rPr>
+              <a:t>Lojas Restantes</a:t>
+            </a:r>
+          </a:p>
+        </p:txBody>
+      </p:sp>
+      <p:sp>
+        <p:nvSpPr>
+          <p:cNvPr id="20" name="Oval 19"/>
+          <p:cNvSpPr/>
+          <p:nvPr/>
+        </p:nvSpPr>
+        <p:spPr>
+          <a:xfrm>
+            <a:off x="393192" y="4652009"/>
+            <a:ext cx="182880" cy="182880"/>
+          </a:xfrm>
+          <a:prstGeom prst="ellipse">
+            <a:avLst/>
+          </a:prstGeom>
+          <a:solidFill>
+            <a:srgbClr val="78DE1F"/>
+          </a:solidFill>
+          <a:ln>
+            <a:noFill/>
+          </a:ln>
+          <a:effectLst/>
+        </p:spPr>
+        <p:txBody>
+          <a:bodyPr rtlCol="0" anchor="ctr" lIns="0" rIns="0" tIns="0" bIns="0" wrap="none"/>
+          <a:lstStyle/>
+          <a:p>
+            <a:pPr algn="ctr"/>
+            <a:r>
+              <a:rPr sz="650" b="1" i="0" lang="pt-BR">
+                <a:solidFill>
+                  <a:srgbClr val="1A1A1A"/>
+                </a:solidFill>
+                <a:latin typeface="Arial"/>
+              </a:rPr>
+              <a:t>B</a:t>
+            </a:r>
+          </a:p>
+        </p:txBody>
+      </p:sp>
+      <p:sp>
+        <p:nvSpPr>
+          <p:cNvPr id="21" name="TextBox 20"/>
+          <p:cNvSpPr txBox="1"/>
+          <p:nvPr/>
+        </p:nvSpPr>
+        <p:spPr>
+          <a:xfrm>
+            <a:off x="384048" y="6549644"/>
+            <a:ext cx="4169713" cy="216915"/>
+          </a:xfrm>
+          <a:prstGeom prst="rect">
+            <a:avLst/>
+          </a:prstGeom>
+          <a:noFill/>
+        </p:spPr>
+        <p:txBody>
+          <a:bodyPr wrap="square" lIns="0" rIns="0" tIns="0" bIns="0" anchor="t">
+            <a:spAutoFit/>
+          </a:bodyPr>
+          <a:lstStyle/>
+          <a:p>
+            <a:pPr algn="l"/>
+            <a:r>
+              <a:rPr sz="700" b="0" i="0" lang="pt-BR">
+                <a:solidFill>
+                  <a:srgbClr val="757575"/>
+                </a:solidFill>
+                <a:latin typeface="Arial"/>
+              </a:rPr>
+              <a:t>Nota: considera vendas que aconteceram em até 7 dias pós geração do lead; *Inclui somente leads gerados até dia 7 de Set; Fonte: base de vendas faturadas e base de funil dos leads</a:t>
+            </a:r>
+          </a:p>
+        </p:txBody>
+      </p:sp>
+      <p:graphicFrame>
+        <p:nvGraphicFramePr>
+          <p:cNvPr id="22" name="Table 21"/>
+          <p:cNvGraphicFramePr>
+            <a:graphicFrameLocks noGrp="1"/>
+          </p:cNvGraphicFramePr>
+          <p:nvPr/>
+        </p:nvGraphicFramePr>
+        <p:xfrm>
+          <a:off x="4718353" y="1455420"/>
+          <a:ext cx="7089567" cy="274320"/>
+        </p:xfrm>
+        <a:graphic>
+          <a:graphicData uri="http://schemas.openxmlformats.org/drawingml/2006/table">
+            <a:tbl>
+              <a:tblPr>
+                <a:tableStyleId>{2D5ABB26-0587-4C30-8999-92F81FD0307C}</a:tableStyleId>
+              </a:tblPr>
+              <a:tblGrid>
+                <a:gridCol w="7089567"/>
+              </a:tblGrid>
+              <a:tr h="274320">
+                <a:tc>
+                  <a:txBody>
+                    <a:bodyPr wrap="square"/>
+                    <a:lstStyle/>
+                    <a:p>
+                      <a:pPr algn="ctr"/>
+                      <a:r>
+                        <a:rPr sz="1050" b="1" i="0" lang="pt-BR">
+                          <a:solidFill>
+                            <a:srgbClr val="FFFFFF"/>
+                          </a:solidFill>
+                          <a:latin typeface="Arial"/>
+                        </a:rPr>
+                        <a:t>Status das frentes em andamento</a:t>
+                      </a:r>
+                    </a:p>
+                  </a:txBody>
+                  <a:tcPr marL="109728" marR="109728" marT="45720" marB="45720" anchor="ctr">
+                    <a:lnL w="9525" cap="flat" cmpd="sng" algn="ctr">
+                      <a:noFill/>
+                    </a:lnL>
+                    <a:lnR w="9525" cap="flat" cmpd="sng" algn="ctr">
+                      <a:noFill/>
+                    </a:lnR>
+                    <a:lnT w="9525" cap="flat" cmpd="sng" algn="ctr">
+                      <a:noFill/>
+                    </a:lnT>
+                    <a:lnB w="9525" cap="flat" cmpd="sng" algn="ctr">
+                      <a:noFill/>
+                    </a:lnB>
+                    <a:solidFill>
+                      <a:srgbClr val="1A1A1A"/>
+                    </a:solidFill>
+                  </a:tcPr>
+                </a:tc>
+              </a:tr>
+            </a:tbl>
+          </a:graphicData>
+        </a:graphic>
+      </p:graphicFrame>
+      <p:graphicFrame>
+        <p:nvGraphicFramePr>
+          <p:cNvPr id="23" name="Table 22"/>
+          <p:cNvGraphicFramePr>
+            <a:graphicFrameLocks noGrp="1"/>
+          </p:cNvGraphicFramePr>
+          <p:nvPr/>
+        </p:nvGraphicFramePr>
+        <p:xfrm>
+          <a:off x="5029249" y="1821180"/>
+          <a:ext cx="6778668" cy="4945377"/>
+        </p:xfrm>
+        <a:graphic>
+          <a:graphicData uri="http://schemas.openxmlformats.org/drawingml/2006/table">
+            <a:tbl>
+              <a:tblPr>
+                <a:tableStyleId>{2D5ABB26-0587-4C30-8999-92F81FD0307C}</a:tableStyleId>
+              </a:tblPr>
+              <a:tblGrid>
+                <a:gridCol w="370972"/>
+                <a:gridCol w="1146640"/>
+                <a:gridCol w="876843"/>
+                <a:gridCol w="472146"/>
+                <a:gridCol w="674494"/>
+                <a:gridCol w="1079191"/>
+                <a:gridCol w="1079191"/>
+                <a:gridCol w="1079191"/>
+              </a:tblGrid>
+              <a:tr h="256032">
+                <a:tc>
+                  <a:txBody>
+                    <a:bodyPr wrap="square"/>
+                    <a:lstStyle/>
+                    <a:p>
+                      <a:pPr algn="l"/>
+                      <a:r>
+                        <a:rPr sz="650" b="1" i="0" lang="pt-BR">
+                          <a:solidFill>
+                            <a:srgbClr val="757575"/>
+                          </a:solidFill>
+                          <a:latin typeface="Arial"/>
+                        </a:rPr>
+                        <a:t>#</a:t>
+                      </a:r>
+                    </a:p>
+                  </a:txBody>
+                  <a:tcPr marL="64008" marR="64008" marT="45720" marB="45720" anchor="ctr">
+                    <a:lnL w="12700" cap="flat" cmpd="sng" algn="ctr">
+                      <a:noFill/>
+                    </a:lnL>
+                    <a:lnR w="12700" cap="flat" cmpd="sng" algn="ctr">
+                      <a:noFill/>
+                    </a:lnR>
+                    <a:lnT w="12700" cap="flat" cmpd="sng" algn="ctr">
+                      <a:noFill/>
+                    </a:lnT>
+                    <a:lnB w="12700" cap="flat" cmpd="sng" algn="ctr">
+                      <a:solidFill>
+                        <a:srgbClr val="1A1A1A"/>
+                      </a:solidFill>
+                    </a:lnB>
+                    <a:solidFill>
+                      <a:srgbClr val="F7F7F7"/>
+                    </a:solidFill>
+                  </a:tcPr>
+                </a:tc>
+                <a:tc>
+                  <a:txBody>
+                    <a:bodyPr wrap="square"/>
+                    <a:lstStyle/>
+                    <a:p>
+                      <a:pPr algn="l"/>
+                      <a:r>
+                        <a:rPr sz="650" b="1" i="0" lang="pt-BR">
+                          <a:solidFill>
+                            <a:srgbClr val="757575"/>
+                          </a:solidFill>
+                          <a:latin typeface="Arial"/>
+                        </a:rPr>
+                        <a:t>ENTREGÁVEL</a:t>
+                      </a:r>
+                    </a:p>
+                  </a:txBody>
+                  <a:tcPr marL="64008" marR="64008" marT="45720" marB="45720" anchor="ctr">
+                    <a:lnL w="12700" cap="flat" cmpd="sng" algn="ctr">
+                      <a:noFill/>
+                    </a:lnL>
+                    <a:lnR w="12700" cap="flat" cmpd="sng" algn="ctr">
+                      <a:noFill/>
+                    </a:lnR>
+                    <a:lnT w="12700" cap="flat" cmpd="sng" algn="ctr">
+                      <a:noFill/>
+                    </a:lnT>
+                    <a:lnB w="12700" cap="flat" cmpd="sng" algn="ctr">
+                      <a:solidFill>
+                        <a:srgbClr val="1A1A1A"/>
+                      </a:solidFill>
+                    </a:lnB>
+                    <a:solidFill>
+                      <a:srgbClr val="F7F7F7"/>
+                    </a:solidFill>
+                  </a:tcPr>
+                </a:tc>
+                <a:tc>
+                  <a:txBody>
+                    <a:bodyPr wrap="square"/>
+                    <a:lstStyle/>
+                    <a:p>
+                      <a:pPr algn="l"/>
+                      <a:r>
+                        <a:rPr sz="650" b="1" i="0" lang="pt-BR">
+                          <a:solidFill>
+                            <a:srgbClr val="757575"/>
+                          </a:solidFill>
+                          <a:latin typeface="Arial"/>
+                        </a:rPr>
+                        <a:t>RESPONSÁVEL</a:t>
+                      </a:r>
+                    </a:p>
+                  </a:txBody>
+                  <a:tcPr marL="64008" marR="64008" marT="45720" marB="45720" anchor="ctr">
+                    <a:lnL w="12700" cap="flat" cmpd="sng" algn="ctr">
+                      <a:noFill/>
+                    </a:lnL>
+                    <a:lnR w="12700" cap="flat" cmpd="sng" algn="ctr">
+                      <a:noFill/>
+                    </a:lnR>
+                    <a:lnT w="12700" cap="flat" cmpd="sng" algn="ctr">
+                      <a:noFill/>
+                    </a:lnT>
+                    <a:lnB w="12700" cap="flat" cmpd="sng" algn="ctr">
+                      <a:solidFill>
+                        <a:srgbClr val="1A1A1A"/>
+                      </a:solidFill>
+                    </a:lnB>
+                    <a:solidFill>
+                      <a:srgbClr val="F7F7F7"/>
+                    </a:solidFill>
+                  </a:tcPr>
+                </a:tc>
+                <a:tc>
+                  <a:txBody>
+                    <a:bodyPr wrap="square"/>
+                    <a:lstStyle/>
+                    <a:p>
+                      <a:pPr algn="l"/>
+                      <a:r>
+                        <a:rPr sz="650" b="1" i="0" lang="pt-BR">
+                          <a:solidFill>
+                            <a:srgbClr val="757575"/>
+                          </a:solidFill>
+                          <a:latin typeface="Arial"/>
+                        </a:rPr>
+                        <a:t>PRAZO</a:t>
+                      </a:r>
+                    </a:p>
+                  </a:txBody>
+                  <a:tcPr marL="64008" marR="64008" marT="45720" marB="45720" anchor="ctr">
+                    <a:lnL w="12700" cap="flat" cmpd="sng" algn="ctr">
+                      <a:noFill/>
+                    </a:lnL>
+                    <a:lnR w="12700" cap="flat" cmpd="sng" algn="ctr">
+                      <a:noFill/>
+                    </a:lnR>
+                    <a:lnT w="12700" cap="flat" cmpd="sng" algn="ctr">
+                      <a:noFill/>
+                    </a:lnT>
+                    <a:lnB w="12700" cap="flat" cmpd="sng" algn="ctr">
+                      <a:solidFill>
+                        <a:srgbClr val="1A1A1A"/>
+                      </a:solidFill>
+                    </a:lnB>
+                    <a:solidFill>
+                      <a:srgbClr val="F7F7F7"/>
+                    </a:solidFill>
+                  </a:tcPr>
+                </a:tc>
+                <a:tc>
+                  <a:txBody>
+                    <a:bodyPr wrap="square"/>
+                    <a:lstStyle/>
+                    <a:p>
+                      <a:pPr algn="ctr"/>
+                      <a:r>
+                        <a:rPr sz="650" b="1" i="0" lang="pt-BR">
+                          <a:solidFill>
+                            <a:srgbClr val="757575"/>
+                          </a:solidFill>
+                          <a:latin typeface="Arial"/>
+                        </a:rPr>
+                        <a:t>STATUS</a:t>
+                      </a:r>
+                    </a:p>
+                  </a:txBody>
+                  <a:tcPr marL="64008" marR="64008" marT="45720" marB="45720" anchor="ctr">
+                    <a:lnL w="12700" cap="flat" cmpd="sng" algn="ctr">
+                      <a:noFill/>
+                    </a:lnL>
+                    <a:lnR w="12700" cap="flat" cmpd="sng" algn="ctr">
+                      <a:noFill/>
+                    </a:lnR>
+                    <a:lnT w="12700" cap="flat" cmpd="sng" algn="ctr">
+                      <a:noFill/>
+                    </a:lnT>
+                    <a:lnB w="12700" cap="flat" cmpd="sng" algn="ctr">
+                      <a:solidFill>
+                        <a:srgbClr val="1A1A1A"/>
+                      </a:solidFill>
+                    </a:lnB>
+                    <a:solidFill>
+                      <a:srgbClr val="F7F7F7"/>
+                    </a:solidFill>
+                  </a:tcPr>
+                </a:tc>
+                <a:tc>
+                  <a:txBody>
+                    <a:bodyPr wrap="square"/>
+                    <a:lstStyle/>
+                    <a:p>
+                      <a:pPr algn="l"/>
+                      <a:r>
+                        <a:rPr sz="650" b="1" i="0" lang="pt-BR">
+                          <a:solidFill>
+                            <a:srgbClr val="757575"/>
+                          </a:solidFill>
+                          <a:latin typeface="Arial"/>
+                        </a:rPr>
+                        <a:t>PROGRESSO RECENTE</a:t>
+                      </a:r>
+                    </a:p>
+                  </a:txBody>
+                  <a:tcPr marL="64008" marR="64008" marT="45720" marB="45720" anchor="ctr">
+                    <a:lnL w="12700" cap="flat" cmpd="sng" algn="ctr">
+                      <a:noFill/>
+                    </a:lnL>
+                    <a:lnR w="12700" cap="flat" cmpd="sng" algn="ctr">
+                      <a:noFill/>
+                    </a:lnR>
+                    <a:lnT w="12700" cap="flat" cmpd="sng" algn="ctr">
+                      <a:noFill/>
+                    </a:lnT>
+                    <a:lnB w="12700" cap="flat" cmpd="sng" algn="ctr">
+                      <a:solidFill>
+                        <a:srgbClr val="1A1A1A"/>
+                      </a:solidFill>
+                    </a:lnB>
+                    <a:solidFill>
+                      <a:srgbClr val="F7F7F7"/>
+                    </a:solidFill>
+                  </a:tcPr>
+                </a:tc>
+                <a:tc>
+                  <a:txBody>
+                    <a:bodyPr wrap="square"/>
+                    <a:lstStyle/>
+                    <a:p>
+                      <a:pPr algn="l"/>
+                      <a:r>
+                        <a:rPr sz="650" b="1" i="0" lang="pt-BR">
+                          <a:solidFill>
+                            <a:srgbClr val="757575"/>
+                          </a:solidFill>
+                          <a:latin typeface="Arial"/>
+                        </a:rPr>
+                        <a:t>PRÓXIMOS PASSOS</a:t>
+                      </a:r>
+                    </a:p>
+                  </a:txBody>
+                  <a:tcPr marL="64008" marR="64008" marT="45720" marB="45720" anchor="ctr">
+                    <a:lnL w="12700" cap="flat" cmpd="sng" algn="ctr">
+                      <a:noFill/>
+                    </a:lnL>
+                    <a:lnR w="12700" cap="flat" cmpd="sng" algn="ctr">
+                      <a:noFill/>
+                    </a:lnR>
+                    <a:lnT w="12700" cap="flat" cmpd="sng" algn="ctr">
+                      <a:noFill/>
+                    </a:lnT>
+                    <a:lnB w="12700" cap="flat" cmpd="sng" algn="ctr">
+                      <a:solidFill>
+                        <a:srgbClr val="1A1A1A"/>
+                      </a:solidFill>
+                    </a:lnB>
+                    <a:solidFill>
+                      <a:srgbClr val="F7F7F7"/>
+                    </a:solidFill>
+                  </a:tcPr>
+                </a:tc>
+                <a:tc>
+                  <a:txBody>
+                    <a:bodyPr wrap="square"/>
+                    <a:lstStyle/>
+                    <a:p>
+                      <a:pPr algn="l"/>
+                      <a:r>
+                        <a:rPr sz="650" b="1" i="0" lang="pt-BR">
+                          <a:solidFill>
+                            <a:srgbClr val="757575"/>
+                          </a:solidFill>
+                          <a:latin typeface="Arial"/>
+                        </a:rPr>
+                        <a:t>PONTOS A ESCALAR</a:t>
+                      </a:r>
+                    </a:p>
+                  </a:txBody>
+                  <a:tcPr marL="64008" marR="64008" marT="45720" marB="45720" anchor="ctr">
+                    <a:lnL w="12700" cap="flat" cmpd="sng" algn="ctr">
+                      <a:noFill/>
+                    </a:lnL>
+                    <a:lnR w="12700" cap="flat" cmpd="sng" algn="ctr">
+                      <a:noFill/>
+                    </a:lnR>
+                    <a:lnT w="12700" cap="flat" cmpd="sng" algn="ctr">
+                      <a:noFill/>
+                    </a:lnT>
+                    <a:lnB w="12700" cap="flat" cmpd="sng" algn="ctr">
+                      <a:solidFill>
+                        <a:srgbClr val="1A1A1A"/>
+                      </a:solidFill>
+                    </a:lnB>
+                    <a:solidFill>
+                      <a:srgbClr val="F7F7F7"/>
+                    </a:solidFill>
+                  </a:tcPr>
+                </a:tc>
+              </a:tr>
+              <a:tr h="519113">
+                <a:tc>
+                  <a:txBody>
+                    <a:bodyPr wrap="none"/>
+                    <a:lstStyle/>
+                    <a:p>
+                      <a:pPr algn="l"/>
+                      <a:r>
+                        <a:rPr sz="600" b="1" i="0" lang="pt-BR">
+                          <a:solidFill>
+                            <a:srgbClr val="757575"/>
+                          </a:solidFill>
+                          <a:latin typeface="Arial"/>
+                        </a:rPr>
+                        <a:t>2.4.1</a:t>
+                      </a:r>
+                    </a:p>
+                  </a:txBody>
+                  <a:tcPr marL="64008" marR="64008" marT="45720" marB="45720" anchor="t">
+                    <a:lnL w="6350" cap="flat" cmpd="sng" algn="ctr">
+                      <a:noFill/>
+                    </a:lnL>
+                    <a:lnR w="6350" cap="flat" cmpd="sng" algn="ctr">
+                      <a:noFill/>
+                    </a:lnR>
+                    <a:lnT w="6350" cap="flat" cmpd="sng" algn="ctr">
+                      <a:noFill/>
+                    </a:lnT>
+                    <a:lnB w="6350" cap="flat" cmpd="sng" algn="ctr">
+                      <a:solidFill>
+                        <a:srgbClr val="ECECEC"/>
+                      </a:solidFill>
+                    </a:lnB>
+                    <a:noFill/>
+                  </a:tcPr>
+                </a:tc>
+                <a:tc>
+                  <a:txBody>
+                    <a:bodyPr wrap="square"/>
+                    <a:lstStyle/>
+                    <a:p>
+                      <a:pPr algn="l">
+                        <a:defRPr sz="650">
+                          <a:latin typeface="Arial"/>
+                        </a:defRPr>
+                      </a:pPr>
+                      <a:r>
+                        <a:rPr sz="650" b="0" i="0" lang="pt-BR">
+                          <a:solidFill>
+                            <a:srgbClr val="1A1A1A"/>
+                          </a:solidFill>
+                          <a:latin typeface="Arial"/>
+                        </a:rPr>
+                        <a:t>Modelo simplificado de alocação (v1.0) desenhado</a:t>
+                      </a:r>
+                    </a:p>
+                  </a:txBody>
+                  <a:tcPr marL="64008" marR="64008" marT="36576" marB="36576" anchor="ctr">
+                    <a:lnL w="6350" cap="flat" cmpd="sng" algn="ctr">
+                      <a:noFill/>
+                    </a:lnL>
+                    <a:lnR w="6350" cap="flat" cmpd="sng" algn="ctr">
+                      <a:noFill/>
+                    </a:lnR>
+                    <a:lnT w="6350" cap="flat" cmpd="sng" algn="ctr">
+                      <a:noFill/>
+                    </a:lnT>
+                    <a:lnB w="6350" cap="flat" cmpd="sng" algn="ctr">
+                      <a:solidFill>
+                        <a:srgbClr val="ECECEC"/>
+                      </a:solidFill>
+                    </a:lnB>
+                    <a:noFill/>
+                  </a:tcPr>
+                </a:tc>
+                <a:tc>
+                  <a:txBody>
+                    <a:bodyPr wrap="square"/>
+                    <a:lstStyle/>
+                    <a:p>
+                      <a:pPr algn="l"/>
+                      <a:r>
+                        <a:rPr sz="650" b="0" i="0" lang="pt-BR">
+                          <a:solidFill>
+                            <a:srgbClr val="333333"/>
+                          </a:solidFill>
+                          <a:latin typeface="Arial"/>
+                        </a:rPr>
+                        <a:t>João Azevedo</a:t>
+                      </a:r>
+                    </a:p>
+                  </a:txBody>
+                  <a:tcPr marL="64008" marR="64008" marT="45720" marB="45720" anchor="ctr">
+                    <a:lnL w="6350" cap="flat" cmpd="sng" algn="ctr">
+                      <a:noFill/>
+                    </a:lnL>
+                    <a:lnR w="6350" cap="flat" cmpd="sng" algn="ctr">
+                      <a:noFill/>
+                    </a:lnR>
+                    <a:lnT w="6350" cap="flat" cmpd="sng" algn="ctr">
+                      <a:noFill/>
+                    </a:lnT>
+                    <a:lnB w="6350" cap="flat" cmpd="sng" algn="ctr">
+                      <a:solidFill>
+                        <a:srgbClr val="ECECEC"/>
+                      </a:solidFill>
+                    </a:lnB>
+                    <a:noFill/>
+                  </a:tcPr>
+                </a:tc>
+                <a:tc>
+                  <a:txBody>
+                    <a:bodyPr wrap="square"/>
+                    <a:lstStyle/>
+                    <a:p>
+                      <a:pPr algn="l"/>
+                      <a:r>
+                        <a:rPr sz="650" b="0" i="0" lang="pt-BR">
+                          <a:solidFill>
+                            <a:srgbClr val="333333"/>
+                          </a:solidFill>
+                          <a:latin typeface="Arial"/>
+                        </a:rPr>
+                        <a:t>28/ago</a:t>
+                      </a:r>
+                    </a:p>
+                  </a:txBody>
+                  <a:tcPr marL="64008" marR="64008" marT="45720" marB="45720" anchor="ctr">
+                    <a:lnL w="6350" cap="flat" cmpd="sng" algn="ctr">
+                      <a:noFill/>
+                    </a:lnL>
+                    <a:lnR w="6350" cap="flat" cmpd="sng" algn="ctr">
+                      <a:noFill/>
+                    </a:lnR>
+                    <a:lnT w="6350" cap="flat" cmpd="sng" algn="ctr">
+                      <a:noFill/>
+                    </a:lnT>
+                    <a:lnB w="6350" cap="flat" cmpd="sng" algn="ctr">
+                      <a:solidFill>
+                        <a:srgbClr val="ECECEC"/>
+                      </a:solidFill>
+                    </a:lnB>
+                    <a:noFill/>
+                  </a:tcPr>
+                </a:tc>
+                <a:tc>
+                  <a:txBody>
+                    <a:bodyPr wrap="square"/>
+                    <a:lstStyle/>
+                    <a:p>
+                      <a:pPr algn="ctr"/>
+                      <a:r>
+                        <a:rPr sz="600" b="1" i="0" lang="pt-BR">
+                          <a:solidFill>
+                            <a:srgbClr val="146A3D"/>
+                          </a:solidFill>
+                          <a:latin typeface="Arial"/>
+                        </a:rPr>
+                        <a:t>Concluído</a:t>
+                      </a:r>
+                    </a:p>
+                  </a:txBody>
+                  <a:tcPr marL="36576" marR="36576" marT="45720" marB="45720" anchor="ctr">
+                    <a:lnL w="31750" cap="flat" cmpd="sng" algn="ctr">
+                      <a:solidFill>
+                        <a:srgbClr val="FFFFFF"/>
+                      </a:solidFill>
+                    </a:lnL>
+                    <a:lnR w="31750" cap="flat" cmpd="sng" algn="ctr">
+                      <a:solidFill>
+                        <a:srgbClr val="FFFFFF"/>
+                      </a:solidFill>
+                    </a:lnR>
+                    <a:lnT w="31750" cap="flat" cmpd="sng" algn="ctr">
+                      <a:solidFill>
+                        <a:srgbClr val="FFFFFF"/>
+                      </a:solidFill>
+                    </a:lnT>
+                    <a:lnB w="31750" cap="flat" cmpd="sng" algn="ctr">
+                      <a:solidFill>
+                        <a:srgbClr val="FFFFFF"/>
+                      </a:solidFill>
+                    </a:lnB>
+                    <a:solidFill>
+                      <a:srgbClr val="E6F7EE"/>
+                    </a:solidFill>
+                  </a:tcPr>
+                </a:tc>
+                <a:tc>
+                  <a:txBody>
+                    <a:bodyPr wrap="square"/>
+                    <a:lstStyle/>
+                    <a:p>
+                      <a:pPr algn="l">
+                        <a:defRPr sz="650">
+                          <a:latin typeface="Arial"/>
+                        </a:defRPr>
+                      </a:pPr>
+                      <a:r>
+                        <a:rPr sz="650" b="0" i="0" lang="pt-BR">
+                          <a:solidFill>
+                            <a:srgbClr val="828282"/>
+                          </a:solidFill>
+                          <a:latin typeface="Arial"/>
+                        </a:rPr>
+                        <a:t>N/A</a:t>
+                      </a:r>
+                    </a:p>
+                  </a:txBody>
+                  <a:tcPr marL="64008" marR="64008" marT="36576" marB="36576" anchor="ctr">
+                    <a:lnL w="6350" cap="flat" cmpd="sng" algn="ctr">
+                      <a:noFill/>
+                    </a:lnL>
+                    <a:lnR w="6350" cap="flat" cmpd="sng" algn="ctr">
+                      <a:noFill/>
+                    </a:lnR>
+                    <a:lnT w="6350" cap="flat" cmpd="sng" algn="ctr">
+                      <a:noFill/>
+                    </a:lnT>
+                    <a:lnB w="6350" cap="flat" cmpd="sng" algn="ctr">
+                      <a:solidFill>
+                        <a:srgbClr val="ECECEC"/>
+                      </a:solidFill>
+                    </a:lnB>
+                    <a:noFill/>
+                  </a:tcPr>
+                </a:tc>
+                <a:tc>
+                  <a:txBody>
+                    <a:bodyPr wrap="square"/>
+                    <a:lstStyle/>
+                    <a:p>
+                      <a:pPr algn="l">
+                        <a:defRPr sz="650">
+                          <a:latin typeface="Arial"/>
+                        </a:defRPr>
+                      </a:pPr>
+                      <a:r>
+                        <a:rPr sz="650" b="0" i="0" lang="pt-BR">
+                          <a:solidFill>
+                            <a:srgbClr val="828282"/>
+                          </a:solidFill>
+                          <a:latin typeface="Arial"/>
+                        </a:rPr>
+                        <a:t>N/A</a:t>
+                      </a:r>
+                    </a:p>
+                  </a:txBody>
+                  <a:tcPr marL="64008" marR="64008" marT="36576" marB="36576" anchor="ctr">
+                    <a:lnL w="6350" cap="flat" cmpd="sng" algn="ctr">
+                      <a:noFill/>
+                    </a:lnL>
+                    <a:lnR w="6350" cap="flat" cmpd="sng" algn="ctr">
+                      <a:noFill/>
+                    </a:lnR>
+                    <a:lnT w="6350" cap="flat" cmpd="sng" algn="ctr">
+                      <a:noFill/>
+                    </a:lnT>
+                    <a:lnB w="6350" cap="flat" cmpd="sng" algn="ctr">
+                      <a:solidFill>
+                        <a:srgbClr val="ECECEC"/>
+                      </a:solidFill>
+                    </a:lnB>
+                    <a:noFill/>
+                  </a:tcPr>
+                </a:tc>
+                <a:tc>
+                  <a:txBody>
+                    <a:bodyPr wrap="square"/>
+                    <a:lstStyle/>
+                    <a:p>
+                      <a:pPr algn="l">
+                        <a:defRPr sz="650">
+                          <a:latin typeface="Arial"/>
+                        </a:defRPr>
+                      </a:pPr>
+                      <a:r>
+                        <a:rPr sz="650" b="0" i="0" lang="pt-BR">
+                          <a:solidFill>
+                            <a:srgbClr val="828282"/>
+                          </a:solidFill>
+                          <a:latin typeface="Arial"/>
+                        </a:rPr>
+                        <a:t>N/A</a:t>
+                      </a:r>
+                    </a:p>
+                  </a:txBody>
+                  <a:tcPr marL="64008" marR="64008" marT="36576" marB="36576" anchor="ctr">
+                    <a:lnL w="6350" cap="flat" cmpd="sng" algn="ctr">
+                      <a:noFill/>
+                    </a:lnL>
+                    <a:lnR w="6350" cap="flat" cmpd="sng" algn="ctr">
+                      <a:noFill/>
+                    </a:lnR>
+                    <a:lnT w="6350" cap="flat" cmpd="sng" algn="ctr">
+                      <a:noFill/>
+                    </a:lnT>
+                    <a:lnB w="6350" cap="flat" cmpd="sng" algn="ctr">
+                      <a:solidFill>
+                        <a:srgbClr val="ECECEC"/>
+                      </a:solidFill>
+                    </a:lnB>
+                    <a:noFill/>
+                  </a:tcPr>
+                </a:tc>
+              </a:tr>
+              <a:tr h="421576">
+                <a:tc>
+                  <a:txBody>
+                    <a:bodyPr wrap="none"/>
+                    <a:lstStyle/>
+                    <a:p>
+                      <a:pPr algn="l"/>
+                      <a:r>
+                        <a:rPr sz="600" b="1" i="0" lang="pt-BR">
+                          <a:solidFill>
+                            <a:srgbClr val="757575"/>
+                          </a:solidFill>
+                          <a:latin typeface="Arial"/>
+                        </a:rPr>
+                        <a:t>2.4.2</a:t>
+                      </a:r>
+                    </a:p>
+                  </a:txBody>
+                  <a:tcPr marL="64008" marR="64008" marT="45720" marB="45720" anchor="t">
+                    <a:lnL w="6350" cap="flat" cmpd="sng" algn="ctr">
+                      <a:noFill/>
+                    </a:lnL>
+                    <a:lnR w="6350" cap="flat" cmpd="sng" algn="ctr">
+                      <a:noFill/>
+                    </a:lnR>
+                    <a:lnT w="6350" cap="flat" cmpd="sng" algn="ctr">
+                      <a:noFill/>
+                    </a:lnT>
+                    <a:lnB w="6350" cap="flat" cmpd="sng" algn="ctr">
+                      <a:solidFill>
+                        <a:srgbClr val="ECECEC"/>
+                      </a:solidFill>
+                    </a:lnB>
+                    <a:noFill/>
+                  </a:tcPr>
+                </a:tc>
+                <a:tc>
+                  <a:txBody>
+                    <a:bodyPr wrap="square"/>
+                    <a:lstStyle/>
+                    <a:p>
+                      <a:pPr algn="l">
+                        <a:defRPr sz="650">
+                          <a:latin typeface="Arial"/>
+                        </a:defRPr>
+                      </a:pPr>
+                      <a:r>
+                        <a:rPr sz="650" b="0" i="0" lang="pt-BR">
+                          <a:solidFill>
+                            <a:srgbClr val="1A1A1A"/>
+                          </a:solidFill>
+                          <a:latin typeface="Arial"/>
+                        </a:rPr>
+                        <a:t>Lojas para lançamento do piloto escolhidas</a:t>
+                      </a:r>
+                    </a:p>
+                  </a:txBody>
+                  <a:tcPr marL="64008" marR="64008" marT="36576" marB="36576" anchor="ctr">
+                    <a:lnL w="6350" cap="flat" cmpd="sng" algn="ctr">
+                      <a:noFill/>
+                    </a:lnL>
+                    <a:lnR w="6350" cap="flat" cmpd="sng" algn="ctr">
+                      <a:noFill/>
+                    </a:lnR>
+                    <a:lnT w="6350" cap="flat" cmpd="sng" algn="ctr">
+                      <a:noFill/>
+                    </a:lnT>
+                    <a:lnB w="6350" cap="flat" cmpd="sng" algn="ctr">
+                      <a:solidFill>
+                        <a:srgbClr val="ECECEC"/>
+                      </a:solidFill>
+                    </a:lnB>
+                    <a:noFill/>
+                  </a:tcPr>
+                </a:tc>
+                <a:tc>
+                  <a:txBody>
+                    <a:bodyPr wrap="square"/>
+                    <a:lstStyle/>
+                    <a:p>
+                      <a:pPr algn="l"/>
+                      <a:r>
+                        <a:rPr sz="650" b="0" i="0" lang="pt-BR">
+                          <a:solidFill>
+                            <a:srgbClr val="333333"/>
+                          </a:solidFill>
+                          <a:latin typeface="Arial"/>
+                        </a:rPr>
+                        <a:t>João Azevedo</a:t>
+                      </a:r>
+                    </a:p>
+                  </a:txBody>
+                  <a:tcPr marL="64008" marR="64008" marT="45720" marB="45720" anchor="ctr">
+                    <a:lnL w="6350" cap="flat" cmpd="sng" algn="ctr">
+                      <a:noFill/>
+                    </a:lnL>
+                    <a:lnR w="6350" cap="flat" cmpd="sng" algn="ctr">
+                      <a:noFill/>
+                    </a:lnR>
+                    <a:lnT w="6350" cap="flat" cmpd="sng" algn="ctr">
+                      <a:noFill/>
+                    </a:lnT>
+                    <a:lnB w="6350" cap="flat" cmpd="sng" algn="ctr">
+                      <a:solidFill>
+                        <a:srgbClr val="ECECEC"/>
+                      </a:solidFill>
+                    </a:lnB>
+                    <a:noFill/>
+                  </a:tcPr>
+                </a:tc>
+                <a:tc>
+                  <a:txBody>
+                    <a:bodyPr wrap="square"/>
+                    <a:lstStyle/>
+                    <a:p>
+                      <a:pPr algn="l"/>
+                      <a:r>
+                        <a:rPr sz="650" b="0" i="0" lang="pt-BR">
+                          <a:solidFill>
+                            <a:srgbClr val="333333"/>
+                          </a:solidFill>
+                          <a:latin typeface="Arial"/>
+                        </a:rPr>
+                        <a:t>01/set</a:t>
+                      </a:r>
+                    </a:p>
+                  </a:txBody>
+                  <a:tcPr marL="64008" marR="64008" marT="45720" marB="45720" anchor="ctr">
+                    <a:lnL w="6350" cap="flat" cmpd="sng" algn="ctr">
+                      <a:noFill/>
+                    </a:lnL>
+                    <a:lnR w="6350" cap="flat" cmpd="sng" algn="ctr">
+                      <a:noFill/>
+                    </a:lnR>
+                    <a:lnT w="6350" cap="flat" cmpd="sng" algn="ctr">
+                      <a:noFill/>
+                    </a:lnT>
+                    <a:lnB w="6350" cap="flat" cmpd="sng" algn="ctr">
+                      <a:solidFill>
+                        <a:srgbClr val="ECECEC"/>
+                      </a:solidFill>
+                    </a:lnB>
+                    <a:noFill/>
+                  </a:tcPr>
+                </a:tc>
+                <a:tc>
+                  <a:txBody>
+                    <a:bodyPr wrap="square"/>
+                    <a:lstStyle/>
+                    <a:p>
+                      <a:pPr algn="ctr"/>
+                      <a:r>
+                        <a:rPr sz="600" b="1" i="0" lang="pt-BR">
+                          <a:solidFill>
+                            <a:srgbClr val="146A3D"/>
+                          </a:solidFill>
+                          <a:latin typeface="Arial"/>
+                        </a:rPr>
+                        <a:t>Concluído</a:t>
+                      </a:r>
+                    </a:p>
+                  </a:txBody>
+                  <a:tcPr marL="36576" marR="36576" marT="45720" marB="45720" anchor="ctr">
+                    <a:lnL w="31750" cap="flat" cmpd="sng" algn="ctr">
+                      <a:solidFill>
+                        <a:srgbClr val="FFFFFF"/>
+                      </a:solidFill>
+                    </a:lnL>
+                    <a:lnR w="31750" cap="flat" cmpd="sng" algn="ctr">
+                      <a:solidFill>
+                        <a:srgbClr val="FFFFFF"/>
+                      </a:solidFill>
+                    </a:lnR>
+                    <a:lnT w="31750" cap="flat" cmpd="sng" algn="ctr">
+                      <a:solidFill>
+                        <a:srgbClr val="FFFFFF"/>
+                      </a:solidFill>
+                    </a:lnT>
+                    <a:lnB w="31750" cap="flat" cmpd="sng" algn="ctr">
+                      <a:solidFill>
+                        <a:srgbClr val="FFFFFF"/>
+                      </a:solidFill>
+                    </a:lnB>
+                    <a:solidFill>
+                      <a:srgbClr val="E6F7EE"/>
+                    </a:solidFill>
+                  </a:tcPr>
+                </a:tc>
+                <a:tc>
+                  <a:txBody>
+                    <a:bodyPr wrap="square"/>
+                    <a:lstStyle/>
+                    <a:p>
+                      <a:pPr algn="l">
+                        <a:defRPr sz="650">
+                          <a:latin typeface="Arial"/>
+                        </a:defRPr>
+                      </a:pPr>
+                      <a:r>
+                        <a:rPr sz="650" b="0" i="0" lang="pt-BR">
+                          <a:solidFill>
+                            <a:srgbClr val="828282"/>
+                          </a:solidFill>
+                          <a:latin typeface="Arial"/>
+                        </a:rPr>
+                        <a:t>N/A</a:t>
+                      </a:r>
+                    </a:p>
+                  </a:txBody>
+                  <a:tcPr marL="64008" marR="64008" marT="36576" marB="36576" anchor="ctr">
+                    <a:lnL w="6350" cap="flat" cmpd="sng" algn="ctr">
+                      <a:noFill/>
+                    </a:lnL>
+                    <a:lnR w="6350" cap="flat" cmpd="sng" algn="ctr">
+                      <a:noFill/>
+                    </a:lnR>
+                    <a:lnT w="6350" cap="flat" cmpd="sng" algn="ctr">
+                      <a:noFill/>
+                    </a:lnT>
+                    <a:lnB w="6350" cap="flat" cmpd="sng" algn="ctr">
+                      <a:solidFill>
+                        <a:srgbClr val="ECECEC"/>
+                      </a:solidFill>
+                    </a:lnB>
+                    <a:noFill/>
+                  </a:tcPr>
+                </a:tc>
+                <a:tc>
+                  <a:txBody>
+                    <a:bodyPr wrap="square"/>
+                    <a:lstStyle/>
+                    <a:p>
+                      <a:pPr algn="l">
+                        <a:defRPr sz="650">
+                          <a:latin typeface="Arial"/>
+                        </a:defRPr>
+                      </a:pPr>
+                      <a:r>
+                        <a:rPr sz="650" b="0" i="0" lang="pt-BR">
+                          <a:solidFill>
+                            <a:srgbClr val="828282"/>
+                          </a:solidFill>
+                          <a:latin typeface="Arial"/>
+                        </a:rPr>
+                        <a:t>N/A</a:t>
+                      </a:r>
+                    </a:p>
+                  </a:txBody>
+                  <a:tcPr marL="64008" marR="64008" marT="36576" marB="36576" anchor="ctr">
+                    <a:lnL w="6350" cap="flat" cmpd="sng" algn="ctr">
+                      <a:noFill/>
+                    </a:lnL>
+                    <a:lnR w="6350" cap="flat" cmpd="sng" algn="ctr">
+                      <a:noFill/>
+                    </a:lnR>
+                    <a:lnT w="6350" cap="flat" cmpd="sng" algn="ctr">
+                      <a:noFill/>
+                    </a:lnT>
+                    <a:lnB w="6350" cap="flat" cmpd="sng" algn="ctr">
+                      <a:solidFill>
+                        <a:srgbClr val="ECECEC"/>
+                      </a:solidFill>
+                    </a:lnB>
+                    <a:noFill/>
+                  </a:tcPr>
+                </a:tc>
+                <a:tc>
+                  <a:txBody>
+                    <a:bodyPr wrap="square"/>
+                    <a:lstStyle/>
+                    <a:p>
+                      <a:pPr algn="l">
+                        <a:defRPr sz="650">
+                          <a:latin typeface="Arial"/>
+                        </a:defRPr>
+                      </a:pPr>
+                      <a:r>
+                        <a:rPr sz="650" b="0" i="0" lang="pt-BR">
+                          <a:solidFill>
+                            <a:srgbClr val="828282"/>
+                          </a:solidFill>
+                          <a:latin typeface="Arial"/>
+                        </a:rPr>
+                        <a:t>N/A</a:t>
+                      </a:r>
+                    </a:p>
+                  </a:txBody>
+                  <a:tcPr marL="64008" marR="64008" marT="36576" marB="36576" anchor="ctr">
+                    <a:lnL w="6350" cap="flat" cmpd="sng" algn="ctr">
+                      <a:noFill/>
+                    </a:lnL>
+                    <a:lnR w="6350" cap="flat" cmpd="sng" algn="ctr">
+                      <a:noFill/>
+                    </a:lnR>
+                    <a:lnT w="6350" cap="flat" cmpd="sng" algn="ctr">
+                      <a:noFill/>
+                    </a:lnT>
+                    <a:lnB w="6350" cap="flat" cmpd="sng" algn="ctr">
+                      <a:solidFill>
+                        <a:srgbClr val="ECECEC"/>
+                      </a:solidFill>
+                    </a:lnB>
+                    <a:noFill/>
+                  </a:tcPr>
+                </a:tc>
+              </a:tr>
+              <a:tr h="624776">
+                <a:tc>
+                  <a:txBody>
+                    <a:bodyPr wrap="none"/>
+                    <a:lstStyle/>
+                    <a:p>
+                      <a:pPr algn="l"/>
+                      <a:r>
+                        <a:rPr sz="600" b="1" i="0" lang="pt-BR">
+                          <a:solidFill>
+                            <a:srgbClr val="757575"/>
+                          </a:solidFill>
+                          <a:latin typeface="Arial"/>
+                        </a:rPr>
+                        <a:t>2.4.3</a:t>
+                      </a:r>
+                    </a:p>
+                  </a:txBody>
+                  <a:tcPr marL="64008" marR="64008" marT="45720" marB="45720" anchor="t">
+                    <a:lnL w="6350" cap="flat" cmpd="sng" algn="ctr">
+                      <a:noFill/>
+                    </a:lnL>
+                    <a:lnR w="6350" cap="flat" cmpd="sng" algn="ctr">
+                      <a:noFill/>
+                    </a:lnR>
+                    <a:lnT w="6350" cap="flat" cmpd="sng" algn="ctr">
+                      <a:noFill/>
+                    </a:lnT>
+                    <a:lnB w="6350" cap="flat" cmpd="sng" algn="ctr">
+                      <a:solidFill>
+                        <a:srgbClr val="ECECEC"/>
+                      </a:solidFill>
+                    </a:lnB>
+                    <a:noFill/>
+                  </a:tcPr>
+                </a:tc>
+                <a:tc>
+                  <a:txBody>
+                    <a:bodyPr wrap="square"/>
+                    <a:lstStyle/>
+                    <a:p>
+                      <a:pPr algn="l">
+                        <a:defRPr sz="650">
+                          <a:latin typeface="Arial"/>
+                        </a:defRPr>
+                      </a:pPr>
+                      <a:r>
+                        <a:rPr sz="650" b="0" i="0" lang="pt-BR">
+                          <a:solidFill>
+                            <a:srgbClr val="1A1A1A"/>
+                          </a:solidFill>
+                          <a:latin typeface="Arial"/>
+                        </a:rPr>
+                        <a:t>Modelo simplificado de alocação (v1.0) desenvolvido e lançado em ~70 lojas</a:t>
+                      </a:r>
+                    </a:p>
+                  </a:txBody>
+                  <a:tcPr marL="64008" marR="64008" marT="36576" marB="36576" anchor="ctr">
+                    <a:lnL w="6350" cap="flat" cmpd="sng" algn="ctr">
+                      <a:noFill/>
+                    </a:lnL>
+                    <a:lnR w="6350" cap="flat" cmpd="sng" algn="ctr">
+                      <a:noFill/>
+                    </a:lnR>
+                    <a:lnT w="6350" cap="flat" cmpd="sng" algn="ctr">
+                      <a:noFill/>
+                    </a:lnT>
+                    <a:lnB w="6350" cap="flat" cmpd="sng" algn="ctr">
+                      <a:solidFill>
+                        <a:srgbClr val="ECECEC"/>
+                      </a:solidFill>
+                    </a:lnB>
+                    <a:noFill/>
+                  </a:tcPr>
+                </a:tc>
+                <a:tc>
+                  <a:txBody>
+                    <a:bodyPr wrap="square"/>
+                    <a:lstStyle/>
+                    <a:p>
+                      <a:pPr algn="l"/>
+                      <a:r>
+                        <a:rPr sz="650" b="0" i="0" lang="pt-BR">
+                          <a:solidFill>
+                            <a:srgbClr val="333333"/>
+                          </a:solidFill>
+                          <a:latin typeface="Arial"/>
+                        </a:rPr>
+                        <a:t>Yure Cangussu</a:t>
+                      </a:r>
+                    </a:p>
+                  </a:txBody>
+                  <a:tcPr marL="64008" marR="64008" marT="45720" marB="45720" anchor="ctr">
+                    <a:lnL w="6350" cap="flat" cmpd="sng" algn="ctr">
+                      <a:noFill/>
+                    </a:lnL>
+                    <a:lnR w="6350" cap="flat" cmpd="sng" algn="ctr">
+                      <a:noFill/>
+                    </a:lnR>
+                    <a:lnT w="6350" cap="flat" cmpd="sng" algn="ctr">
+                      <a:noFill/>
+                    </a:lnT>
+                    <a:lnB w="6350" cap="flat" cmpd="sng" algn="ctr">
+                      <a:solidFill>
+                        <a:srgbClr val="ECECEC"/>
+                      </a:solidFill>
+                    </a:lnB>
+                    <a:noFill/>
+                  </a:tcPr>
+                </a:tc>
+                <a:tc>
+                  <a:txBody>
+                    <a:bodyPr wrap="square"/>
+                    <a:lstStyle/>
+                    <a:p>
+                      <a:pPr algn="l"/>
+                      <a:r>
+                        <a:rPr sz="650" b="0" i="0" lang="pt-BR">
+                          <a:solidFill>
+                            <a:srgbClr val="333333"/>
+                          </a:solidFill>
+                          <a:latin typeface="Arial"/>
+                        </a:rPr>
+                        <a:t>01/set</a:t>
+                      </a:r>
+                    </a:p>
+                  </a:txBody>
+                  <a:tcPr marL="64008" marR="64008" marT="45720" marB="45720" anchor="ctr">
+                    <a:lnL w="6350" cap="flat" cmpd="sng" algn="ctr">
+                      <a:noFill/>
+                    </a:lnL>
+                    <a:lnR w="6350" cap="flat" cmpd="sng" algn="ctr">
+                      <a:noFill/>
+                    </a:lnR>
+                    <a:lnT w="6350" cap="flat" cmpd="sng" algn="ctr">
+                      <a:noFill/>
+                    </a:lnT>
+                    <a:lnB w="6350" cap="flat" cmpd="sng" algn="ctr">
+                      <a:solidFill>
+                        <a:srgbClr val="ECECEC"/>
+                      </a:solidFill>
+                    </a:lnB>
+                    <a:noFill/>
+                  </a:tcPr>
+                </a:tc>
+                <a:tc>
+                  <a:txBody>
+                    <a:bodyPr wrap="square"/>
+                    <a:lstStyle/>
+                    <a:p>
+                      <a:pPr algn="ctr"/>
+                      <a:r>
+                        <a:rPr sz="600" b="1" i="0" lang="pt-BR">
+                          <a:solidFill>
+                            <a:srgbClr val="6B5700"/>
+                          </a:solidFill>
+                          <a:latin typeface="Arial"/>
+                        </a:rPr>
+                        <a:t>Em progresso</a:t>
+                      </a:r>
+                    </a:p>
+                  </a:txBody>
+                  <a:tcPr marL="36576" marR="36576" marT="45720" marB="45720" anchor="ctr">
+                    <a:lnL w="31750" cap="flat" cmpd="sng" algn="ctr">
+                      <a:solidFill>
+                        <a:srgbClr val="FFFFFF"/>
+                      </a:solidFill>
+                    </a:lnL>
+                    <a:lnR w="31750" cap="flat" cmpd="sng" algn="ctr">
+                      <a:solidFill>
+                        <a:srgbClr val="FFFFFF"/>
+                      </a:solidFill>
+                    </a:lnR>
+                    <a:lnT w="31750" cap="flat" cmpd="sng" algn="ctr">
+                      <a:solidFill>
+                        <a:srgbClr val="FFFFFF"/>
+                      </a:solidFill>
+                    </a:lnT>
+                    <a:lnB w="31750" cap="flat" cmpd="sng" algn="ctr">
+                      <a:solidFill>
+                        <a:srgbClr val="FFFFFF"/>
+                      </a:solidFill>
+                    </a:lnB>
+                    <a:solidFill>
+                      <a:srgbClr val="FFF8E1"/>
+                    </a:solidFill>
+                  </a:tcPr>
+                </a:tc>
+                <a:tc>
+                  <a:txBody>
+                    <a:bodyPr wrap="square"/>
+                    <a:lstStyle/>
+                    <a:p>
+                      <a:pPr algn="l">
+                        <a:defRPr sz="650">
+                          <a:latin typeface="Arial"/>
+                        </a:defRPr>
+                      </a:pPr>
+                      <a:r>
+                        <a:rPr sz="650" b="0" i="0" lang="pt-BR">
+                          <a:solidFill>
+                            <a:srgbClr val="333333"/>
+                          </a:solidFill>
+                          <a:latin typeface="Arial"/>
+                        </a:rPr>
+                        <a:t>Análise preliminar realizada</a:t>
+                      </a:r>
+                    </a:p>
+                  </a:txBody>
+                  <a:tcPr marL="64008" marR="64008" marT="36576" marB="36576" anchor="ctr">
+                    <a:lnL w="6350" cap="flat" cmpd="sng" algn="ctr">
+                      <a:noFill/>
+                    </a:lnL>
+                    <a:lnR w="6350" cap="flat" cmpd="sng" algn="ctr">
+                      <a:noFill/>
+                    </a:lnR>
+                    <a:lnT w="6350" cap="flat" cmpd="sng" algn="ctr">
+                      <a:noFill/>
+                    </a:lnT>
+                    <a:lnB w="6350" cap="flat" cmpd="sng" algn="ctr">
+                      <a:solidFill>
+                        <a:srgbClr val="ECECEC"/>
+                      </a:solidFill>
+                    </a:lnB>
+                    <a:noFill/>
+                  </a:tcPr>
+                </a:tc>
+                <a:tc>
+                  <a:txBody>
+                    <a:bodyPr wrap="square"/>
+                    <a:lstStyle/>
+                    <a:p>
+                      <a:pPr algn="l">
+                        <a:defRPr sz="650">
+                          <a:latin typeface="Arial"/>
+                        </a:defRPr>
+                      </a:pPr>
+                      <a:r>
+                        <a:rPr sz="650" b="0" i="0" lang="pt-BR">
+                          <a:solidFill>
+                            <a:srgbClr val="333333"/>
+                          </a:solidFill>
+                          <a:latin typeface="Arial"/>
+                        </a:rPr>
+                        <a:t>Ajustar desenvolvimento do piloto (TBC)</a:t>
+                      </a:r>
+                    </a:p>
+                  </a:txBody>
+                  <a:tcPr marL="64008" marR="64008" marT="36576" marB="36576" anchor="ctr">
+                    <a:lnL w="6350" cap="flat" cmpd="sng" algn="ctr">
+                      <a:noFill/>
+                    </a:lnL>
+                    <a:lnR w="6350" cap="flat" cmpd="sng" algn="ctr">
+                      <a:noFill/>
+                    </a:lnR>
+                    <a:lnT w="6350" cap="flat" cmpd="sng" algn="ctr">
+                      <a:noFill/>
+                    </a:lnT>
+                    <a:lnB w="6350" cap="flat" cmpd="sng" algn="ctr">
+                      <a:solidFill>
+                        <a:srgbClr val="ECECEC"/>
+                      </a:solidFill>
+                    </a:lnB>
+                    <a:noFill/>
+                  </a:tcPr>
+                </a:tc>
+                <a:tc>
+                  <a:txBody>
+                    <a:bodyPr wrap="square"/>
+                    <a:lstStyle/>
+                    <a:p>
+                      <a:pPr algn="l">
+                        <a:defRPr sz="650">
+                          <a:latin typeface="Arial"/>
+                        </a:defRPr>
+                      </a:pPr>
+                      <a:r>
+                        <a:rPr sz="650" b="0" i="0" lang="pt-BR">
+                          <a:solidFill>
+                            <a:srgbClr val="828282"/>
+                          </a:solidFill>
+                          <a:latin typeface="Arial"/>
+                        </a:rPr>
+                        <a:t>N/A</a:t>
+                      </a:r>
+                    </a:p>
+                  </a:txBody>
+                  <a:tcPr marL="64008" marR="64008" marT="36576" marB="36576" anchor="ctr">
+                    <a:lnL w="6350" cap="flat" cmpd="sng" algn="ctr">
+                      <a:noFill/>
+                    </a:lnL>
+                    <a:lnR w="6350" cap="flat" cmpd="sng" algn="ctr">
+                      <a:noFill/>
+                    </a:lnR>
+                    <a:lnT w="6350" cap="flat" cmpd="sng" algn="ctr">
+                      <a:noFill/>
+                    </a:lnT>
+                    <a:lnB w="6350" cap="flat" cmpd="sng" algn="ctr">
+                      <a:solidFill>
+                        <a:srgbClr val="ECECEC"/>
+                      </a:solidFill>
+                    </a:lnB>
+                    <a:noFill/>
+                  </a:tcPr>
+                </a:tc>
+              </a:tr>
+              <a:tr h="624776">
+                <a:tc>
+                  <a:txBody>
+                    <a:bodyPr wrap="none"/>
+                    <a:lstStyle/>
+                    <a:p>
+                      <a:pPr algn="l"/>
+                      <a:r>
+                        <a:rPr sz="600" b="1" i="0" lang="pt-BR">
+                          <a:solidFill>
+                            <a:srgbClr val="757575"/>
+                          </a:solidFill>
+                          <a:latin typeface="Arial"/>
+                        </a:rPr>
+                        <a:t>2.4.4</a:t>
+                      </a:r>
+                    </a:p>
+                  </a:txBody>
+                  <a:tcPr marL="64008" marR="64008" marT="45720" marB="45720" anchor="t">
+                    <a:lnL w="6350" cap="flat" cmpd="sng" algn="ctr">
+                      <a:noFill/>
+                    </a:lnL>
+                    <a:lnR w="6350" cap="flat" cmpd="sng" algn="ctr">
+                      <a:noFill/>
+                    </a:lnR>
+                    <a:lnT w="6350" cap="flat" cmpd="sng" algn="ctr">
+                      <a:noFill/>
+                    </a:lnT>
+                    <a:lnB w="6350" cap="flat" cmpd="sng" algn="ctr">
+                      <a:solidFill>
+                        <a:srgbClr val="ECECEC"/>
+                      </a:solidFill>
+                    </a:lnB>
+                    <a:noFill/>
+                  </a:tcPr>
+                </a:tc>
+                <a:tc>
+                  <a:txBody>
+                    <a:bodyPr wrap="square"/>
+                    <a:lstStyle/>
+                    <a:p>
+                      <a:pPr algn="l">
+                        <a:defRPr sz="650">
+                          <a:latin typeface="Arial"/>
+                        </a:defRPr>
+                      </a:pPr>
+                      <a:r>
+                        <a:rPr sz="650" b="0" i="0" lang="pt-BR">
+                          <a:solidFill>
+                            <a:srgbClr val="1A1A1A"/>
+                          </a:solidFill>
+                          <a:latin typeface="Arial"/>
+                        </a:rPr>
+                        <a:t>Riscos mapeados e plano de contingência definido</a:t>
+                      </a:r>
+                    </a:p>
+                  </a:txBody>
+                  <a:tcPr marL="64008" marR="64008" marT="36576" marB="36576" anchor="ctr">
+                    <a:lnL w="6350" cap="flat" cmpd="sng" algn="ctr">
+                      <a:noFill/>
+                    </a:lnL>
+                    <a:lnR w="6350" cap="flat" cmpd="sng" algn="ctr">
+                      <a:noFill/>
+                    </a:lnR>
+                    <a:lnT w="6350" cap="flat" cmpd="sng" algn="ctr">
+                      <a:noFill/>
+                    </a:lnT>
+                    <a:lnB w="6350" cap="flat" cmpd="sng" algn="ctr">
+                      <a:solidFill>
+                        <a:srgbClr val="ECECEC"/>
+                      </a:solidFill>
+                    </a:lnB>
+                    <a:noFill/>
+                  </a:tcPr>
+                </a:tc>
+                <a:tc>
+                  <a:txBody>
+                    <a:bodyPr wrap="square"/>
+                    <a:lstStyle/>
+                    <a:p>
+                      <a:pPr algn="l"/>
+                      <a:r>
+                        <a:rPr sz="650" b="0" i="0" lang="pt-BR">
+                          <a:solidFill>
+                            <a:srgbClr val="333333"/>
+                          </a:solidFill>
+                          <a:latin typeface="Arial"/>
+                        </a:rPr>
+                        <a:t>João Azevedo</a:t>
+                      </a:r>
+                    </a:p>
+                  </a:txBody>
+                  <a:tcPr marL="64008" marR="64008" marT="45720" marB="45720" anchor="ctr">
+                    <a:lnL w="6350" cap="flat" cmpd="sng" algn="ctr">
+                      <a:noFill/>
+                    </a:lnL>
+                    <a:lnR w="6350" cap="flat" cmpd="sng" algn="ctr">
+                      <a:noFill/>
+                    </a:lnR>
+                    <a:lnT w="6350" cap="flat" cmpd="sng" algn="ctr">
+                      <a:noFill/>
+                    </a:lnT>
+                    <a:lnB w="6350" cap="flat" cmpd="sng" algn="ctr">
+                      <a:solidFill>
+                        <a:srgbClr val="ECECEC"/>
+                      </a:solidFill>
+                    </a:lnB>
+                    <a:noFill/>
+                  </a:tcPr>
+                </a:tc>
+                <a:tc>
+                  <a:txBody>
+                    <a:bodyPr wrap="square"/>
+                    <a:lstStyle/>
+                    <a:p>
+                      <a:pPr algn="l"/>
+                      <a:r>
+                        <a:rPr sz="650" b="0" i="0" lang="pt-BR">
+                          <a:solidFill>
+                            <a:srgbClr val="333333"/>
+                          </a:solidFill>
+                          <a:latin typeface="Arial"/>
+                        </a:rPr>
+                        <a:t>11/set</a:t>
+                      </a:r>
+                    </a:p>
+                  </a:txBody>
+                  <a:tcPr marL="64008" marR="64008" marT="45720" marB="45720" anchor="ctr">
+                    <a:lnL w="6350" cap="flat" cmpd="sng" algn="ctr">
+                      <a:noFill/>
+                    </a:lnL>
+                    <a:lnR w="6350" cap="flat" cmpd="sng" algn="ctr">
+                      <a:noFill/>
+                    </a:lnR>
+                    <a:lnT w="6350" cap="flat" cmpd="sng" algn="ctr">
+                      <a:noFill/>
+                    </a:lnT>
+                    <a:lnB w="6350" cap="flat" cmpd="sng" algn="ctr">
+                      <a:solidFill>
+                        <a:srgbClr val="ECECEC"/>
+                      </a:solidFill>
+                    </a:lnB>
+                    <a:noFill/>
+                  </a:tcPr>
+                </a:tc>
+                <a:tc>
+                  <a:txBody>
+                    <a:bodyPr wrap="square"/>
+                    <a:lstStyle/>
+                    <a:p>
+                      <a:pPr algn="ctr"/>
+                      <a:r>
+                        <a:rPr sz="600" b="1" i="0" lang="pt-BR">
+                          <a:solidFill>
+                            <a:srgbClr val="6B5700"/>
+                          </a:solidFill>
+                          <a:latin typeface="Arial"/>
+                        </a:rPr>
+                        <a:t>Em progresso</a:t>
+                      </a:r>
+                    </a:p>
+                  </a:txBody>
+                  <a:tcPr marL="36576" marR="36576" marT="45720" marB="45720" anchor="ctr">
+                    <a:lnL w="31750" cap="flat" cmpd="sng" algn="ctr">
+                      <a:solidFill>
+                        <a:srgbClr val="FFFFFF"/>
+                      </a:solidFill>
+                    </a:lnL>
+                    <a:lnR w="31750" cap="flat" cmpd="sng" algn="ctr">
+                      <a:solidFill>
+                        <a:srgbClr val="FFFFFF"/>
+                      </a:solidFill>
+                    </a:lnR>
+                    <a:lnT w="31750" cap="flat" cmpd="sng" algn="ctr">
+                      <a:solidFill>
+                        <a:srgbClr val="FFFFFF"/>
+                      </a:solidFill>
+                    </a:lnT>
+                    <a:lnB w="31750" cap="flat" cmpd="sng" algn="ctr">
+                      <a:solidFill>
+                        <a:srgbClr val="FFFFFF"/>
+                      </a:solidFill>
+                    </a:lnB>
+                    <a:solidFill>
+                      <a:srgbClr val="FFF8E1"/>
+                    </a:solidFill>
+                  </a:tcPr>
+                </a:tc>
+                <a:tc>
+                  <a:txBody>
+                    <a:bodyPr wrap="square"/>
+                    <a:lstStyle/>
+                    <a:p>
+                      <a:pPr algn="l">
+                        <a:defRPr sz="650">
+                          <a:latin typeface="Arial"/>
+                        </a:defRPr>
+                      </a:pPr>
+                      <a:r>
+                        <a:rPr sz="650" b="0" i="0" lang="pt-BR">
+                          <a:solidFill>
+                            <a:srgbClr val="333333"/>
+                          </a:solidFill>
+                          <a:latin typeface="Arial"/>
+                        </a:rPr>
+                        <a:t>Desenho dos pilotos considerando caps de leads/CV</a:t>
+                      </a:r>
+                    </a:p>
+                  </a:txBody>
+                  <a:tcPr marL="64008" marR="64008" marT="36576" marB="36576" anchor="ctr">
+                    <a:lnL w="6350" cap="flat" cmpd="sng" algn="ctr">
+                      <a:noFill/>
+                    </a:lnL>
+                    <a:lnR w="6350" cap="flat" cmpd="sng" algn="ctr">
+                      <a:noFill/>
+                    </a:lnR>
+                    <a:lnT w="6350" cap="flat" cmpd="sng" algn="ctr">
+                      <a:noFill/>
+                    </a:lnT>
+                    <a:lnB w="6350" cap="flat" cmpd="sng" algn="ctr">
+                      <a:solidFill>
+                        <a:srgbClr val="ECECEC"/>
+                      </a:solidFill>
+                    </a:lnB>
+                    <a:noFill/>
+                  </a:tcPr>
+                </a:tc>
+                <a:tc>
+                  <a:txBody>
+                    <a:bodyPr wrap="square"/>
+                    <a:lstStyle/>
+                    <a:p>
+                      <a:pPr algn="l">
+                        <a:defRPr sz="650">
+                          <a:latin typeface="Arial"/>
+                        </a:defRPr>
+                      </a:pPr>
+                      <a:r>
+                        <a:rPr sz="650" b="0" i="0" lang="pt-BR">
+                          <a:solidFill>
+                            <a:srgbClr val="333333"/>
+                          </a:solidFill>
+                          <a:latin typeface="Arial"/>
+                        </a:rPr>
+                        <a:t>• </a:t>
+                      </a:r>
+                      <a:r>
+                        <a:rPr sz="650" b="0" i="0" lang="pt-BR">
+                          <a:solidFill>
+                            <a:srgbClr val="333333"/>
+                          </a:solidFill>
+                          <a:latin typeface="Arial"/>
+                        </a:rPr>
+                        <a:t>Mapear riscos existentes</a:t>
+                      </a:r>
+                    </a:p>
+                    <a:p>
+                      <a:pPr algn="l">
+                        <a:spcBef>
+                          <a:spcPts val="200"/>
+                        </a:spcBef>
+                        <a:defRPr sz="650">
+                          <a:latin typeface="Arial"/>
+                        </a:defRPr>
+                      </a:pPr>
+                      <a:r>
+                        <a:rPr sz="650" b="0" i="0" lang="pt-BR">
+                          <a:solidFill>
+                            <a:srgbClr val="333333"/>
+                          </a:solidFill>
+                          <a:latin typeface="Arial"/>
+                        </a:rPr>
+                        <a:t>• </a:t>
+                      </a:r>
+                      <a:r>
+                        <a:rPr sz="650" b="0" i="0" lang="pt-BR">
+                          <a:solidFill>
+                            <a:srgbClr val="333333"/>
+                          </a:solidFill>
+                          <a:latin typeface="Arial"/>
+                        </a:rPr>
+                        <a:t>Estruturar planos de mitigação</a:t>
+                      </a:r>
+                    </a:p>
+                  </a:txBody>
+                  <a:tcPr marL="64008" marR="64008" marT="36576" marB="36576" anchor="ctr">
+                    <a:lnL w="6350" cap="flat" cmpd="sng" algn="ctr">
+                      <a:noFill/>
+                    </a:lnL>
+                    <a:lnR w="6350" cap="flat" cmpd="sng" algn="ctr">
+                      <a:noFill/>
+                    </a:lnR>
+                    <a:lnT w="6350" cap="flat" cmpd="sng" algn="ctr">
+                      <a:noFill/>
+                    </a:lnT>
+                    <a:lnB w="6350" cap="flat" cmpd="sng" algn="ctr">
+                      <a:solidFill>
+                        <a:srgbClr val="ECECEC"/>
+                      </a:solidFill>
+                    </a:lnB>
+                    <a:noFill/>
+                  </a:tcPr>
+                </a:tc>
+                <a:tc>
+                  <a:txBody>
+                    <a:bodyPr wrap="square"/>
+                    <a:lstStyle/>
+                    <a:p>
+                      <a:pPr algn="l">
+                        <a:defRPr sz="650">
+                          <a:latin typeface="Arial"/>
+                        </a:defRPr>
+                      </a:pPr>
+                      <a:r>
+                        <a:rPr sz="650" b="0" i="0" lang="pt-BR">
+                          <a:solidFill>
+                            <a:srgbClr val="828282"/>
+                          </a:solidFill>
+                          <a:latin typeface="Arial"/>
+                        </a:rPr>
+                        <a:t>N/A</a:t>
+                      </a:r>
+                    </a:p>
+                  </a:txBody>
+                  <a:tcPr marL="64008" marR="64008" marT="36576" marB="36576" anchor="ctr">
+                    <a:lnL w="6350" cap="flat" cmpd="sng" algn="ctr">
+                      <a:noFill/>
+                    </a:lnL>
+                    <a:lnR w="6350" cap="flat" cmpd="sng" algn="ctr">
+                      <a:noFill/>
+                    </a:lnR>
+                    <a:lnT w="6350" cap="flat" cmpd="sng" algn="ctr">
+                      <a:noFill/>
+                    </a:lnT>
+                    <a:lnB w="6350" cap="flat" cmpd="sng" algn="ctr">
+                      <a:solidFill>
+                        <a:srgbClr val="ECECEC"/>
+                      </a:solidFill>
+                    </a:lnB>
+                    <a:noFill/>
+                  </a:tcPr>
+                </a:tc>
+              </a:tr>
+              <a:tr h="624776">
+                <a:tc>
+                  <a:txBody>
+                    <a:bodyPr wrap="none"/>
+                    <a:lstStyle/>
+                    <a:p>
+                      <a:pPr algn="l"/>
+                      <a:r>
+                        <a:rPr sz="600" b="1" i="0" lang="pt-BR">
+                          <a:solidFill>
+                            <a:srgbClr val="757575"/>
+                          </a:solidFill>
+                          <a:latin typeface="Arial"/>
+                        </a:rPr>
+                        <a:t>2.4.5</a:t>
+                      </a:r>
+                    </a:p>
+                  </a:txBody>
+                  <a:tcPr marL="64008" marR="64008" marT="45720" marB="45720" anchor="t">
+                    <a:lnL w="6350" cap="flat" cmpd="sng" algn="ctr">
+                      <a:noFill/>
+                    </a:lnL>
+                    <a:lnR w="6350" cap="flat" cmpd="sng" algn="ctr">
+                      <a:noFill/>
+                    </a:lnR>
+                    <a:lnT w="6350" cap="flat" cmpd="sng" algn="ctr">
+                      <a:noFill/>
+                    </a:lnT>
+                    <a:lnB w="6350" cap="flat" cmpd="sng" algn="ctr">
+                      <a:solidFill>
+                        <a:srgbClr val="ECECEC"/>
+                      </a:solidFill>
+                    </a:lnB>
+                    <a:noFill/>
+                  </a:tcPr>
+                </a:tc>
+                <a:tc>
+                  <a:txBody>
+                    <a:bodyPr wrap="square"/>
+                    <a:lstStyle/>
+                    <a:p>
+                      <a:pPr algn="l">
+                        <a:defRPr sz="650">
+                          <a:latin typeface="Arial"/>
+                        </a:defRPr>
+                      </a:pPr>
+                      <a:r>
+                        <a:rPr sz="650" b="0" i="0" lang="pt-BR">
+                          <a:solidFill>
+                            <a:srgbClr val="1A1A1A"/>
+                          </a:solidFill>
+                          <a:latin typeface="Arial"/>
+                        </a:rPr>
+                        <a:t>~5 pilotos do modelo robusto desenhados e lançados em 20 lojas em cada</a:t>
+                      </a:r>
+                    </a:p>
+                  </a:txBody>
+                  <a:tcPr marL="64008" marR="64008" marT="36576" marB="36576" anchor="ctr">
+                    <a:lnL w="6350" cap="flat" cmpd="sng" algn="ctr">
+                      <a:noFill/>
+                    </a:lnL>
+                    <a:lnR w="6350" cap="flat" cmpd="sng" algn="ctr">
+                      <a:noFill/>
+                    </a:lnR>
+                    <a:lnT w="6350" cap="flat" cmpd="sng" algn="ctr">
+                      <a:noFill/>
+                    </a:lnT>
+                    <a:lnB w="6350" cap="flat" cmpd="sng" algn="ctr">
+                      <a:solidFill>
+                        <a:srgbClr val="ECECEC"/>
+                      </a:solidFill>
+                    </a:lnB>
+                    <a:noFill/>
+                  </a:tcPr>
+                </a:tc>
+                <a:tc>
+                  <a:txBody>
+                    <a:bodyPr wrap="square"/>
+                    <a:lstStyle/>
+                    <a:p>
+                      <a:pPr algn="l"/>
+                      <a:r>
+                        <a:rPr sz="650" b="0" i="0" lang="pt-BR">
+                          <a:solidFill>
+                            <a:srgbClr val="333333"/>
+                          </a:solidFill>
+                          <a:latin typeface="Arial"/>
+                        </a:rPr>
+                        <a:t>Yure Cangussu e Clarice</a:t>
+                      </a:r>
+                    </a:p>
+                  </a:txBody>
+                  <a:tcPr marL="64008" marR="64008" marT="45720" marB="45720" anchor="ctr">
+                    <a:lnL w="6350" cap="flat" cmpd="sng" algn="ctr">
+                      <a:noFill/>
+                    </a:lnL>
+                    <a:lnR w="6350" cap="flat" cmpd="sng" algn="ctr">
+                      <a:noFill/>
+                    </a:lnR>
+                    <a:lnT w="6350" cap="flat" cmpd="sng" algn="ctr">
+                      <a:noFill/>
+                    </a:lnT>
+                    <a:lnB w="6350" cap="flat" cmpd="sng" algn="ctr">
+                      <a:solidFill>
+                        <a:srgbClr val="ECECEC"/>
+                      </a:solidFill>
+                    </a:lnB>
+                    <a:noFill/>
+                  </a:tcPr>
+                </a:tc>
+                <a:tc>
+                  <a:txBody>
+                    <a:bodyPr wrap="square"/>
+                    <a:lstStyle/>
+                    <a:p>
+                      <a:pPr algn="l"/>
+                      <a:r>
+                        <a:rPr sz="650" b="0" i="0" lang="pt-BR">
+                          <a:solidFill>
+                            <a:srgbClr val="333333"/>
+                          </a:solidFill>
+                          <a:latin typeface="Arial"/>
+                        </a:rPr>
+                        <a:t>18/out</a:t>
+                      </a:r>
+                    </a:p>
+                  </a:txBody>
+                  <a:tcPr marL="64008" marR="64008" marT="45720" marB="45720" anchor="ctr">
+                    <a:lnL w="6350" cap="flat" cmpd="sng" algn="ctr">
+                      <a:noFill/>
+                    </a:lnL>
+                    <a:lnR w="6350" cap="flat" cmpd="sng" algn="ctr">
+                      <a:noFill/>
+                    </a:lnR>
+                    <a:lnT w="6350" cap="flat" cmpd="sng" algn="ctr">
+                      <a:noFill/>
+                    </a:lnT>
+                    <a:lnB w="6350" cap="flat" cmpd="sng" algn="ctr">
+                      <a:solidFill>
+                        <a:srgbClr val="ECECEC"/>
+                      </a:solidFill>
+                    </a:lnB>
+                    <a:noFill/>
+                  </a:tcPr>
+                </a:tc>
+                <a:tc>
+                  <a:txBody>
+                    <a:bodyPr wrap="square"/>
+                    <a:lstStyle/>
+                    <a:p>
+                      <a:pPr algn="ctr"/>
+                      <a:r>
+                        <a:rPr sz="600" b="1" i="0" lang="pt-BR">
+                          <a:solidFill>
+                            <a:srgbClr val="6B5700"/>
+                          </a:solidFill>
+                          <a:latin typeface="Arial"/>
+                        </a:rPr>
+                        <a:t>Em progresso</a:t>
+                      </a:r>
+                    </a:p>
+                  </a:txBody>
+                  <a:tcPr marL="36576" marR="36576" marT="45720" marB="45720" anchor="ctr">
+                    <a:lnL w="31750" cap="flat" cmpd="sng" algn="ctr">
+                      <a:solidFill>
+                        <a:srgbClr val="FFFFFF"/>
+                      </a:solidFill>
+                    </a:lnL>
+                    <a:lnR w="31750" cap="flat" cmpd="sng" algn="ctr">
+                      <a:solidFill>
+                        <a:srgbClr val="FFFFFF"/>
+                      </a:solidFill>
+                    </a:lnR>
+                    <a:lnT w="31750" cap="flat" cmpd="sng" algn="ctr">
+                      <a:solidFill>
+                        <a:srgbClr val="FFFFFF"/>
+                      </a:solidFill>
+                    </a:lnT>
+                    <a:lnB w="31750" cap="flat" cmpd="sng" algn="ctr">
+                      <a:solidFill>
+                        <a:srgbClr val="FFFFFF"/>
+                      </a:solidFill>
+                    </a:lnB>
+                    <a:solidFill>
+                      <a:srgbClr val="FFF8E1"/>
+                    </a:solidFill>
+                  </a:tcPr>
+                </a:tc>
+                <a:tc>
+                  <a:txBody>
+                    <a:bodyPr wrap="square"/>
+                    <a:lstStyle/>
+                    <a:p>
+                      <a:pPr algn="l">
+                        <a:defRPr sz="650">
+                          <a:latin typeface="Arial"/>
+                        </a:defRPr>
+                      </a:pPr>
+                      <a:r>
+                        <a:rPr sz="650" b="0" i="0" lang="pt-BR">
+                          <a:solidFill>
+                            <a:srgbClr val="333333"/>
+                          </a:solidFill>
+                          <a:latin typeface="Arial"/>
+                        </a:rPr>
+                        <a:t>Base estruturada com variáveis disponíveis para avaliar resultado histórico</a:t>
+                      </a:r>
+                    </a:p>
+                  </a:txBody>
+                  <a:tcPr marL="64008" marR="64008" marT="36576" marB="36576" anchor="ctr">
+                    <a:lnL w="6350" cap="flat" cmpd="sng" algn="ctr">
+                      <a:noFill/>
+                    </a:lnL>
+                    <a:lnR w="6350" cap="flat" cmpd="sng" algn="ctr">
+                      <a:noFill/>
+                    </a:lnR>
+                    <a:lnT w="6350" cap="flat" cmpd="sng" algn="ctr">
+                      <a:noFill/>
+                    </a:lnT>
+                    <a:lnB w="6350" cap="flat" cmpd="sng" algn="ctr">
+                      <a:solidFill>
+                        <a:srgbClr val="ECECEC"/>
+                      </a:solidFill>
+                    </a:lnB>
+                    <a:noFill/>
+                  </a:tcPr>
+                </a:tc>
+                <a:tc>
+                  <a:txBody>
+                    <a:bodyPr wrap="square"/>
+                    <a:lstStyle/>
+                    <a:p>
+                      <a:pPr algn="l">
+                        <a:defRPr sz="650">
+                          <a:latin typeface="Arial"/>
+                        </a:defRPr>
+                      </a:pPr>
+                      <a:r>
+                        <a:rPr sz="650" b="0" i="0" lang="pt-BR">
+                          <a:solidFill>
+                            <a:srgbClr val="333333"/>
+                          </a:solidFill>
+                          <a:latin typeface="Arial"/>
+                        </a:rPr>
+                        <a:t>Concluir o desenho dos ~5 pilotos e iniciar o desenvolvimento</a:t>
+                      </a:r>
+                    </a:p>
+                  </a:txBody>
+                  <a:tcPr marL="64008" marR="64008" marT="36576" marB="36576" anchor="ctr">
+                    <a:lnL w="6350" cap="flat" cmpd="sng" algn="ctr">
+                      <a:noFill/>
+                    </a:lnL>
+                    <a:lnR w="6350" cap="flat" cmpd="sng" algn="ctr">
+                      <a:noFill/>
+                    </a:lnR>
+                    <a:lnT w="6350" cap="flat" cmpd="sng" algn="ctr">
+                      <a:noFill/>
+                    </a:lnT>
+                    <a:lnB w="6350" cap="flat" cmpd="sng" algn="ctr">
+                      <a:solidFill>
+                        <a:srgbClr val="ECECEC"/>
+                      </a:solidFill>
+                    </a:lnB>
+                    <a:noFill/>
+                  </a:tcPr>
+                </a:tc>
+                <a:tc>
+                  <a:txBody>
+                    <a:bodyPr wrap="square"/>
+                    <a:lstStyle/>
+                    <a:p>
+                      <a:pPr algn="l">
+                        <a:defRPr sz="650">
+                          <a:latin typeface="Arial"/>
+                        </a:defRPr>
+                      </a:pPr>
+                      <a:r>
+                        <a:rPr sz="650" b="0" i="0" lang="pt-BR">
+                          <a:solidFill>
+                            <a:srgbClr val="828282"/>
+                          </a:solidFill>
+                          <a:latin typeface="Arial"/>
+                        </a:rPr>
+                        <a:t>N/A</a:t>
+                      </a:r>
+                    </a:p>
+                  </a:txBody>
+                  <a:tcPr marL="64008" marR="64008" marT="36576" marB="36576" anchor="ctr">
+                    <a:lnL w="6350" cap="flat" cmpd="sng" algn="ctr">
+                      <a:noFill/>
+                    </a:lnL>
+                    <a:lnR w="6350" cap="flat" cmpd="sng" algn="ctr">
+                      <a:noFill/>
+                    </a:lnR>
+                    <a:lnT w="6350" cap="flat" cmpd="sng" algn="ctr">
+                      <a:noFill/>
+                    </a:lnT>
+                    <a:lnB w="6350" cap="flat" cmpd="sng" algn="ctr">
+                      <a:solidFill>
+                        <a:srgbClr val="ECECEC"/>
+                      </a:solidFill>
+                    </a:lnB>
+                    <a:noFill/>
+                  </a:tcPr>
+                </a:tc>
+              </a:tr>
+              <a:tr h="624776">
+                <a:tc>
+                  <a:txBody>
+                    <a:bodyPr wrap="none"/>
+                    <a:lstStyle/>
+                    <a:p>
+                      <a:pPr algn="l"/>
+                      <a:r>
+                        <a:rPr sz="600" b="1" i="0" lang="pt-BR">
+                          <a:solidFill>
+                            <a:srgbClr val="757575"/>
+                          </a:solidFill>
+                          <a:latin typeface="Arial"/>
+                        </a:rPr>
+                        <a:t>2.4.6</a:t>
+                      </a:r>
+                    </a:p>
+                  </a:txBody>
+                  <a:tcPr marL="64008" marR="64008" marT="45720" marB="45720" anchor="t">
+                    <a:lnL w="6350" cap="flat" cmpd="sng" algn="ctr">
+                      <a:noFill/>
+                    </a:lnL>
+                    <a:lnR w="6350" cap="flat" cmpd="sng" algn="ctr">
+                      <a:noFill/>
+                    </a:lnR>
+                    <a:lnT w="6350" cap="flat" cmpd="sng" algn="ctr">
+                      <a:noFill/>
+                    </a:lnT>
+                    <a:lnB w="6350" cap="flat" cmpd="sng" algn="ctr">
+                      <a:solidFill>
+                        <a:srgbClr val="ECECEC"/>
+                      </a:solidFill>
+                    </a:lnB>
+                    <a:noFill/>
+                  </a:tcPr>
+                </a:tc>
+                <a:tc>
+                  <a:txBody>
+                    <a:bodyPr wrap="square"/>
+                    <a:lstStyle/>
+                    <a:p>
+                      <a:pPr algn="l">
+                        <a:defRPr sz="650">
+                          <a:latin typeface="Arial"/>
+                        </a:defRPr>
+                      </a:pPr>
+                      <a:r>
+                        <a:rPr sz="650" b="0" i="0" lang="pt-BR">
+                          <a:solidFill>
+                            <a:srgbClr val="1A1A1A"/>
+                          </a:solidFill>
+                          <a:latin typeface="Arial"/>
+                        </a:rPr>
+                        <a:t>Escala do piloto de melhor conversão entre os testados para todas as lojas</a:t>
+                      </a:r>
+                    </a:p>
+                  </a:txBody>
+                  <a:tcPr marL="64008" marR="64008" marT="36576" marB="36576" anchor="ctr">
+                    <a:lnL w="6350" cap="flat" cmpd="sng" algn="ctr">
+                      <a:noFill/>
+                    </a:lnL>
+                    <a:lnR w="6350" cap="flat" cmpd="sng" algn="ctr">
+                      <a:noFill/>
+                    </a:lnR>
+                    <a:lnT w="6350" cap="flat" cmpd="sng" algn="ctr">
+                      <a:noFill/>
+                    </a:lnT>
+                    <a:lnB w="6350" cap="flat" cmpd="sng" algn="ctr">
+                      <a:solidFill>
+                        <a:srgbClr val="ECECEC"/>
+                      </a:solidFill>
+                    </a:lnB>
+                    <a:noFill/>
+                  </a:tcPr>
+                </a:tc>
+                <a:tc>
+                  <a:txBody>
+                    <a:bodyPr wrap="square"/>
+                    <a:lstStyle/>
+                    <a:p>
+                      <a:pPr algn="l"/>
+                      <a:r>
+                        <a:rPr sz="650" b="0" i="0" lang="pt-BR">
+                          <a:solidFill>
+                            <a:srgbClr val="333333"/>
+                          </a:solidFill>
+                          <a:latin typeface="Arial"/>
+                        </a:rPr>
+                        <a:t>Yure Cangussu e João Azevedo</a:t>
+                      </a:r>
+                    </a:p>
+                  </a:txBody>
+                  <a:tcPr marL="64008" marR="64008" marT="45720" marB="45720" anchor="ctr">
+                    <a:lnL w="6350" cap="flat" cmpd="sng" algn="ctr">
+                      <a:noFill/>
+                    </a:lnL>
+                    <a:lnR w="6350" cap="flat" cmpd="sng" algn="ctr">
+                      <a:noFill/>
+                    </a:lnR>
+                    <a:lnT w="6350" cap="flat" cmpd="sng" algn="ctr">
+                      <a:noFill/>
+                    </a:lnT>
+                    <a:lnB w="6350" cap="flat" cmpd="sng" algn="ctr">
+                      <a:solidFill>
+                        <a:srgbClr val="ECECEC"/>
+                      </a:solidFill>
+                    </a:lnB>
+                    <a:noFill/>
+                  </a:tcPr>
+                </a:tc>
+                <a:tc>
+                  <a:txBody>
+                    <a:bodyPr wrap="square"/>
+                    <a:lstStyle/>
+                    <a:p>
+                      <a:pPr algn="l"/>
+                      <a:r>
+                        <a:rPr sz="650" b="0" i="0" lang="pt-BR">
+                          <a:solidFill>
+                            <a:srgbClr val="333333"/>
+                          </a:solidFill>
+                          <a:latin typeface="Arial"/>
+                        </a:rPr>
+                        <a:t>13/nov</a:t>
+                      </a:r>
+                    </a:p>
+                  </a:txBody>
+                  <a:tcPr marL="64008" marR="64008" marT="45720" marB="45720" anchor="ctr">
+                    <a:lnL w="6350" cap="flat" cmpd="sng" algn="ctr">
+                      <a:noFill/>
+                    </a:lnL>
+                    <a:lnR w="6350" cap="flat" cmpd="sng" algn="ctr">
+                      <a:noFill/>
+                    </a:lnR>
+                    <a:lnT w="6350" cap="flat" cmpd="sng" algn="ctr">
+                      <a:noFill/>
+                    </a:lnT>
+                    <a:lnB w="6350" cap="flat" cmpd="sng" algn="ctr">
+                      <a:solidFill>
+                        <a:srgbClr val="ECECEC"/>
+                      </a:solidFill>
+                    </a:lnB>
+                    <a:noFill/>
+                  </a:tcPr>
+                </a:tc>
+                <a:tc>
+                  <a:txBody>
+                    <a:bodyPr wrap="square"/>
+                    <a:lstStyle/>
+                    <a:p>
+                      <a:pPr algn="ctr"/>
+                      <a:r>
+                        <a:rPr sz="600" b="1" i="0" lang="pt-BR">
+                          <a:solidFill>
+                            <a:srgbClr val="A30000"/>
+                          </a:solidFill>
+                          <a:latin typeface="Arial"/>
+                        </a:rPr>
+                        <a:t>Não iniciado</a:t>
+                      </a:r>
+                    </a:p>
+                  </a:txBody>
+                  <a:tcPr marL="36576" marR="36576" marT="45720" marB="45720" anchor="ctr">
+                    <a:lnL w="31750" cap="flat" cmpd="sng" algn="ctr">
+                      <a:solidFill>
+                        <a:srgbClr val="FFFFFF"/>
+                      </a:solidFill>
+                    </a:lnL>
+                    <a:lnR w="31750" cap="flat" cmpd="sng" algn="ctr">
+                      <a:solidFill>
+                        <a:srgbClr val="FFFFFF"/>
+                      </a:solidFill>
+                    </a:lnR>
+                    <a:lnT w="31750" cap="flat" cmpd="sng" algn="ctr">
+                      <a:solidFill>
+                        <a:srgbClr val="FFFFFF"/>
+                      </a:solidFill>
+                    </a:lnT>
+                    <a:lnB w="31750" cap="flat" cmpd="sng" algn="ctr">
+                      <a:solidFill>
+                        <a:srgbClr val="FFFFFF"/>
+                      </a:solidFill>
+                    </a:lnB>
+                    <a:solidFill>
+                      <a:srgbClr val="FCEAEA"/>
+                    </a:solidFill>
+                  </a:tcPr>
+                </a:tc>
+                <a:tc>
+                  <a:txBody>
+                    <a:bodyPr wrap="square"/>
+                    <a:lstStyle/>
+                    <a:p>
+                      <a:pPr algn="l">
+                        <a:defRPr sz="650">
+                          <a:latin typeface="Arial"/>
+                        </a:defRPr>
+                      </a:pPr>
+                      <a:r>
+                        <a:rPr sz="650" b="0" i="0" lang="pt-BR">
+                          <a:solidFill>
+                            <a:srgbClr val="828282"/>
+                          </a:solidFill>
+                          <a:latin typeface="Arial"/>
+                        </a:rPr>
+                        <a:t>N/A</a:t>
+                      </a:r>
+                    </a:p>
+                  </a:txBody>
+                  <a:tcPr marL="64008" marR="64008" marT="36576" marB="36576" anchor="ctr">
+                    <a:lnL w="6350" cap="flat" cmpd="sng" algn="ctr">
+                      <a:noFill/>
+                    </a:lnL>
+                    <a:lnR w="6350" cap="flat" cmpd="sng" algn="ctr">
+                      <a:noFill/>
+                    </a:lnR>
+                    <a:lnT w="6350" cap="flat" cmpd="sng" algn="ctr">
+                      <a:noFill/>
+                    </a:lnT>
+                    <a:lnB w="6350" cap="flat" cmpd="sng" algn="ctr">
+                      <a:solidFill>
+                        <a:srgbClr val="ECECEC"/>
+                      </a:solidFill>
+                    </a:lnB>
+                    <a:noFill/>
+                  </a:tcPr>
+                </a:tc>
+                <a:tc>
+                  <a:txBody>
+                    <a:bodyPr wrap="square"/>
+                    <a:lstStyle/>
+                    <a:p>
+                      <a:pPr algn="l">
+                        <a:defRPr sz="650">
+                          <a:latin typeface="Arial"/>
+                        </a:defRPr>
+                      </a:pPr>
+                      <a:r>
+                        <a:rPr sz="650" b="0" i="0" lang="pt-BR">
+                          <a:solidFill>
+                            <a:srgbClr val="828282"/>
+                          </a:solidFill>
+                          <a:latin typeface="Arial"/>
+                        </a:rPr>
+                        <a:t>N/A</a:t>
+                      </a:r>
+                    </a:p>
+                  </a:txBody>
+                  <a:tcPr marL="64008" marR="64008" marT="36576" marB="36576" anchor="ctr">
+                    <a:lnL w="6350" cap="flat" cmpd="sng" algn="ctr">
+                      <a:noFill/>
+                    </a:lnL>
+                    <a:lnR w="6350" cap="flat" cmpd="sng" algn="ctr">
+                      <a:noFill/>
+                    </a:lnR>
+                    <a:lnT w="6350" cap="flat" cmpd="sng" algn="ctr">
+                      <a:noFill/>
+                    </a:lnT>
+                    <a:lnB w="6350" cap="flat" cmpd="sng" algn="ctr">
+                      <a:solidFill>
+                        <a:srgbClr val="ECECEC"/>
+                      </a:solidFill>
+                    </a:lnB>
+                    <a:noFill/>
+                  </a:tcPr>
+                </a:tc>
+                <a:tc>
+                  <a:txBody>
+                    <a:bodyPr wrap="square"/>
+                    <a:lstStyle/>
+                    <a:p>
+                      <a:pPr algn="l">
+                        <a:defRPr sz="650">
+                          <a:latin typeface="Arial"/>
+                        </a:defRPr>
+                      </a:pPr>
+                      <a:r>
+                        <a:rPr sz="650" b="0" i="0" lang="pt-BR">
+                          <a:solidFill>
+                            <a:srgbClr val="828282"/>
+                          </a:solidFill>
+                          <a:latin typeface="Arial"/>
+                        </a:rPr>
+                        <a:t>N/A</a:t>
+                      </a:r>
+                    </a:p>
+                  </a:txBody>
+                  <a:tcPr marL="64008" marR="64008" marT="36576" marB="36576" anchor="ctr">
+                    <a:lnL w="6350" cap="flat" cmpd="sng" algn="ctr">
+                      <a:noFill/>
+                    </a:lnL>
+                    <a:lnR w="6350" cap="flat" cmpd="sng" algn="ctr">
+                      <a:noFill/>
+                    </a:lnR>
+                    <a:lnT w="6350" cap="flat" cmpd="sng" algn="ctr">
+                      <a:noFill/>
+                    </a:lnT>
+                    <a:lnB w="6350" cap="flat" cmpd="sng" algn="ctr">
+                      <a:solidFill>
+                        <a:srgbClr val="ECECEC"/>
+                      </a:solidFill>
+                    </a:lnB>
+                    <a:noFill/>
+                  </a:tcPr>
+                </a:tc>
+              </a:tr>
+              <a:tr h="624776">
+                <a:tc>
+                  <a:txBody>
+                    <a:bodyPr wrap="none"/>
+                    <a:lstStyle/>
+                    <a:p>
+                      <a:pPr algn="l"/>
+                      <a:r>
+                        <a:rPr sz="600" b="1" i="0" lang="pt-BR">
+                          <a:solidFill>
+                            <a:srgbClr val="757575"/>
+                          </a:solidFill>
+                          <a:latin typeface="Arial"/>
+                        </a:rPr>
+                        <a:t>2.4.7</a:t>
+                      </a:r>
+                    </a:p>
+                  </a:txBody>
+                  <a:tcPr marL="64008" marR="64008" marT="45720" marB="45720" anchor="t">
+                    <a:lnL w="6350" cap="flat" cmpd="sng" algn="ctr">
+                      <a:noFill/>
+                    </a:lnL>
+                    <a:lnR w="6350" cap="flat" cmpd="sng" algn="ctr">
+                      <a:noFill/>
+                    </a:lnR>
+                    <a:lnT w="6350" cap="flat" cmpd="sng" algn="ctr">
+                      <a:noFill/>
+                    </a:lnT>
+                    <a:lnB w="6350" cap="flat" cmpd="sng" algn="ctr">
+                      <a:solidFill>
+                        <a:srgbClr val="ECECEC"/>
+                      </a:solidFill>
+                    </a:lnB>
+                    <a:noFill/>
+                  </a:tcPr>
+                </a:tc>
+                <a:tc>
+                  <a:txBody>
+                    <a:bodyPr wrap="square"/>
+                    <a:lstStyle/>
+                    <a:p>
+                      <a:pPr algn="l">
+                        <a:defRPr sz="650">
+                          <a:latin typeface="Arial"/>
+                        </a:defRPr>
+                      </a:pPr>
+                      <a:r>
+                        <a:rPr sz="650" b="0" i="0" lang="pt-BR">
+                          <a:solidFill>
+                            <a:srgbClr val="1A1A1A"/>
+                          </a:solidFill>
+                          <a:latin typeface="Arial"/>
+                        </a:rPr>
+                        <a:t>Modelo de clusterização revisado com base nas distâncias entre lojas e novo modelo de alocação</a:t>
+                      </a:r>
+                    </a:p>
+                  </a:txBody>
+                  <a:tcPr marL="64008" marR="64008" marT="36576" marB="36576" anchor="ctr">
+                    <a:lnL w="6350" cap="flat" cmpd="sng" algn="ctr">
+                      <a:noFill/>
+                    </a:lnL>
+                    <a:lnR w="6350" cap="flat" cmpd="sng" algn="ctr">
+                      <a:noFill/>
+                    </a:lnR>
+                    <a:lnT w="6350" cap="flat" cmpd="sng" algn="ctr">
+                      <a:noFill/>
+                    </a:lnT>
+                    <a:lnB w="6350" cap="flat" cmpd="sng" algn="ctr">
+                      <a:solidFill>
+                        <a:srgbClr val="ECECEC"/>
+                      </a:solidFill>
+                    </a:lnB>
+                    <a:noFill/>
+                  </a:tcPr>
+                </a:tc>
+                <a:tc>
+                  <a:txBody>
+                    <a:bodyPr wrap="square"/>
+                    <a:lstStyle/>
+                    <a:p>
+                      <a:pPr algn="l"/>
+                      <a:r>
+                        <a:rPr sz="650" b="0" i="0" lang="pt-BR">
+                          <a:solidFill>
+                            <a:srgbClr val="333333"/>
+                          </a:solidFill>
+                          <a:latin typeface="Arial"/>
+                        </a:rPr>
+                        <a:t>João Azevedo</a:t>
+                      </a:r>
+                    </a:p>
+                  </a:txBody>
+                  <a:tcPr marL="64008" marR="64008" marT="45720" marB="45720" anchor="ctr">
+                    <a:lnL w="6350" cap="flat" cmpd="sng" algn="ctr">
+                      <a:noFill/>
+                    </a:lnL>
+                    <a:lnR w="6350" cap="flat" cmpd="sng" algn="ctr">
+                      <a:noFill/>
+                    </a:lnR>
+                    <a:lnT w="6350" cap="flat" cmpd="sng" algn="ctr">
+                      <a:noFill/>
+                    </a:lnT>
+                    <a:lnB w="6350" cap="flat" cmpd="sng" algn="ctr">
+                      <a:solidFill>
+                        <a:srgbClr val="ECECEC"/>
+                      </a:solidFill>
+                    </a:lnB>
+                    <a:noFill/>
+                  </a:tcPr>
+                </a:tc>
+                <a:tc>
+                  <a:txBody>
+                    <a:bodyPr wrap="square"/>
+                    <a:lstStyle/>
+                    <a:p>
+                      <a:pPr algn="l"/>
+                      <a:r>
+                        <a:rPr sz="650" b="0" i="0" lang="pt-BR">
+                          <a:solidFill>
+                            <a:srgbClr val="333333"/>
+                          </a:solidFill>
+                          <a:latin typeface="Arial"/>
+                        </a:rPr>
+                        <a:t>25/set</a:t>
+                      </a:r>
+                    </a:p>
+                  </a:txBody>
+                  <a:tcPr marL="64008" marR="64008" marT="45720" marB="45720" anchor="ctr">
+                    <a:lnL w="6350" cap="flat" cmpd="sng" algn="ctr">
+                      <a:noFill/>
+                    </a:lnL>
+                    <a:lnR w="6350" cap="flat" cmpd="sng" algn="ctr">
+                      <a:noFill/>
+                    </a:lnR>
+                    <a:lnT w="6350" cap="flat" cmpd="sng" algn="ctr">
+                      <a:noFill/>
+                    </a:lnT>
+                    <a:lnB w="6350" cap="flat" cmpd="sng" algn="ctr">
+                      <a:solidFill>
+                        <a:srgbClr val="ECECEC"/>
+                      </a:solidFill>
+                    </a:lnB>
+                    <a:noFill/>
+                  </a:tcPr>
+                </a:tc>
+                <a:tc>
+                  <a:txBody>
+                    <a:bodyPr wrap="square"/>
+                    <a:lstStyle/>
+                    <a:p>
+                      <a:pPr algn="ctr"/>
+                      <a:r>
+                        <a:rPr sz="600" b="1" i="0" lang="pt-BR">
+                          <a:solidFill>
+                            <a:srgbClr val="6B5700"/>
+                          </a:solidFill>
+                          <a:latin typeface="Arial"/>
+                        </a:rPr>
+                        <a:t>Em progresso</a:t>
+                      </a:r>
+                    </a:p>
+                  </a:txBody>
+                  <a:tcPr marL="36576" marR="36576" marT="45720" marB="45720" anchor="ctr">
+                    <a:lnL w="31750" cap="flat" cmpd="sng" algn="ctr">
+                      <a:solidFill>
+                        <a:srgbClr val="FFFFFF"/>
+                      </a:solidFill>
+                    </a:lnL>
+                    <a:lnR w="31750" cap="flat" cmpd="sng" algn="ctr">
+                      <a:solidFill>
+                        <a:srgbClr val="FFFFFF"/>
+                      </a:solidFill>
+                    </a:lnR>
+                    <a:lnT w="31750" cap="flat" cmpd="sng" algn="ctr">
+                      <a:solidFill>
+                        <a:srgbClr val="FFFFFF"/>
+                      </a:solidFill>
+                    </a:lnT>
+                    <a:lnB w="31750" cap="flat" cmpd="sng" algn="ctr">
+                      <a:solidFill>
+                        <a:srgbClr val="FFFFFF"/>
+                      </a:solidFill>
+                    </a:lnB>
+                    <a:solidFill>
+                      <a:srgbClr val="FFF8E1"/>
+                    </a:solidFill>
+                  </a:tcPr>
+                </a:tc>
+                <a:tc>
+                  <a:txBody>
+                    <a:bodyPr wrap="square"/>
+                    <a:lstStyle/>
+                    <a:p>
+                      <a:pPr algn="l">
+                        <a:defRPr sz="650">
+                          <a:latin typeface="Arial"/>
+                        </a:defRPr>
+                      </a:pPr>
+                      <a:r>
+                        <a:rPr sz="650" b="0" i="0" lang="pt-BR">
+                          <a:solidFill>
+                            <a:srgbClr val="828282"/>
+                          </a:solidFill>
+                          <a:latin typeface="Arial"/>
+                        </a:rPr>
+                        <a:t>N/A</a:t>
+                      </a:r>
+                    </a:p>
+                  </a:txBody>
+                  <a:tcPr marL="64008" marR="64008" marT="36576" marB="36576" anchor="ctr">
+                    <a:lnL w="6350" cap="flat" cmpd="sng" algn="ctr">
+                      <a:noFill/>
+                    </a:lnL>
+                    <a:lnR w="6350" cap="flat" cmpd="sng" algn="ctr">
+                      <a:noFill/>
+                    </a:lnR>
+                    <a:lnT w="6350" cap="flat" cmpd="sng" algn="ctr">
+                      <a:noFill/>
+                    </a:lnT>
+                    <a:lnB w="6350" cap="flat" cmpd="sng" algn="ctr">
+                      <a:solidFill>
+                        <a:srgbClr val="ECECEC"/>
+                      </a:solidFill>
+                    </a:lnB>
+                    <a:noFill/>
+                  </a:tcPr>
+                </a:tc>
+                <a:tc>
+                  <a:txBody>
+                    <a:bodyPr wrap="square"/>
+                    <a:lstStyle/>
+                    <a:p>
+                      <a:pPr algn="l">
+                        <a:defRPr sz="650">
+                          <a:latin typeface="Arial"/>
+                        </a:defRPr>
+                      </a:pPr>
+                      <a:r>
+                        <a:rPr sz="650" b="0" i="0" lang="pt-BR">
+                          <a:solidFill>
+                            <a:srgbClr val="333333"/>
+                          </a:solidFill>
+                          <a:latin typeface="Arial"/>
+                        </a:rPr>
+                        <a:t>Avaliar reclusterização com base no resultado do piloto das 70 lojas</a:t>
+                      </a:r>
+                    </a:p>
+                  </a:txBody>
+                  <a:tcPr marL="64008" marR="64008" marT="36576" marB="36576" anchor="ctr">
+                    <a:lnL w="6350" cap="flat" cmpd="sng" algn="ctr">
+                      <a:noFill/>
+                    </a:lnL>
+                    <a:lnR w="6350" cap="flat" cmpd="sng" algn="ctr">
+                      <a:noFill/>
+                    </a:lnR>
+                    <a:lnT w="6350" cap="flat" cmpd="sng" algn="ctr">
+                      <a:noFill/>
+                    </a:lnT>
+                    <a:lnB w="6350" cap="flat" cmpd="sng" algn="ctr">
+                      <a:solidFill>
+                        <a:srgbClr val="ECECEC"/>
+                      </a:solidFill>
+                    </a:lnB>
+                    <a:noFill/>
+                  </a:tcPr>
+                </a:tc>
+                <a:tc>
+                  <a:txBody>
+                    <a:bodyPr wrap="square"/>
+                    <a:lstStyle/>
+                    <a:p>
+                      <a:pPr algn="l">
+                        <a:defRPr sz="650">
+                          <a:latin typeface="Arial"/>
+                        </a:defRPr>
+                      </a:pPr>
+                      <a:r>
+                        <a:rPr sz="650" b="0" i="0" lang="pt-BR">
+                          <a:solidFill>
+                            <a:srgbClr val="828282"/>
+                          </a:solidFill>
+                          <a:latin typeface="Arial"/>
+                        </a:rPr>
+                        <a:t>N/A</a:t>
+                      </a:r>
+                    </a:p>
+                  </a:txBody>
+                  <a:tcPr marL="64008" marR="64008" marT="36576" marB="36576" anchor="ctr">
+                    <a:lnL w="6350" cap="flat" cmpd="sng" algn="ctr">
+                      <a:noFill/>
+                    </a:lnL>
+                    <a:lnR w="6350" cap="flat" cmpd="sng" algn="ctr">
+                      <a:noFill/>
+                    </a:lnR>
+                    <a:lnT w="6350" cap="flat" cmpd="sng" algn="ctr">
+                      <a:noFill/>
+                    </a:lnT>
+                    <a:lnB w="6350" cap="flat" cmpd="sng" algn="ctr">
+                      <a:solidFill>
+                        <a:srgbClr val="ECECEC"/>
+                      </a:solidFill>
+                    </a:lnB>
+                    <a:noFill/>
+                  </a:tcPr>
+                </a:tc>
+              </a:tr>
+              <a:tr h="624776">
+                <a:tc>
+                  <a:txBody>
+                    <a:bodyPr wrap="none"/>
+                    <a:lstStyle/>
+                    <a:p>
+                      <a:pPr algn="l"/>
+                      <a:r>
+                        <a:rPr sz="600" b="1" i="0" lang="pt-BR">
+                          <a:solidFill>
+                            <a:srgbClr val="757575"/>
+                          </a:solidFill>
+                          <a:latin typeface="Arial"/>
+                        </a:rPr>
+                        <a:t>2.4.8</a:t>
+                      </a:r>
+                    </a:p>
+                  </a:txBody>
+                  <a:tcPr marL="64008" marR="64008" marT="45720" marB="45720" anchor="t">
+                    <a:lnL w="6350" cap="flat" cmpd="sng" algn="ctr">
+                      <a:noFill/>
+                    </a:lnL>
+                    <a:lnR w="6350" cap="flat" cmpd="sng" algn="ctr">
+                      <a:noFill/>
+                    </a:lnR>
+                    <a:lnT w="6350" cap="flat" cmpd="sng" algn="ctr">
+                      <a:noFill/>
+                    </a:lnT>
+                    <a:lnB w="6350" cap="flat" cmpd="sng" algn="ctr">
+                      <a:solidFill>
+                        <a:srgbClr val="D5D5D5"/>
+                      </a:solidFill>
+                    </a:lnB>
+                    <a:noFill/>
+                  </a:tcPr>
+                </a:tc>
+                <a:tc>
+                  <a:txBody>
+                    <a:bodyPr wrap="square"/>
+                    <a:lstStyle/>
+                    <a:p>
+                      <a:pPr algn="l">
+                        <a:defRPr sz="650">
+                          <a:latin typeface="Arial"/>
+                        </a:defRPr>
+                      </a:pPr>
+                      <a:r>
+                        <a:rPr sz="650" b="0" i="0" lang="pt-BR">
+                          <a:solidFill>
+                            <a:srgbClr val="1A1A1A"/>
+                          </a:solidFill>
+                          <a:latin typeface="Arial"/>
+                        </a:rPr>
+                        <a:t>Piloto de alocação total dos leads muito frios na Liza para aquecimento do lead</a:t>
+                      </a:r>
+                    </a:p>
+                  </a:txBody>
+                  <a:tcPr marL="64008" marR="64008" marT="36576" marB="36576" anchor="ctr">
+                    <a:lnL w="6350" cap="flat" cmpd="sng" algn="ctr">
+                      <a:noFill/>
+                    </a:lnL>
+                    <a:lnR w="6350" cap="flat" cmpd="sng" algn="ctr">
+                      <a:noFill/>
+                    </a:lnR>
+                    <a:lnT w="6350" cap="flat" cmpd="sng" algn="ctr">
+                      <a:noFill/>
+                    </a:lnT>
+                    <a:lnB w="6350" cap="flat" cmpd="sng" algn="ctr">
+                      <a:solidFill>
+                        <a:srgbClr val="D5D5D5"/>
+                      </a:solidFill>
+                    </a:lnB>
+                    <a:noFill/>
+                  </a:tcPr>
+                </a:tc>
+                <a:tc>
+                  <a:txBody>
+                    <a:bodyPr wrap="square"/>
+                    <a:lstStyle/>
+                    <a:p>
+                      <a:pPr algn="l"/>
+                      <a:r>
+                        <a:rPr sz="650" b="0" i="0" lang="pt-BR">
+                          <a:solidFill>
+                            <a:srgbClr val="333333"/>
+                          </a:solidFill>
+                          <a:latin typeface="Arial"/>
+                        </a:rPr>
+                        <a:t>João Azevedo</a:t>
+                      </a:r>
+                    </a:p>
+                  </a:txBody>
+                  <a:tcPr marL="64008" marR="64008" marT="45720" marB="45720" anchor="ctr">
+                    <a:lnL w="6350" cap="flat" cmpd="sng" algn="ctr">
+                      <a:noFill/>
+                    </a:lnL>
+                    <a:lnR w="6350" cap="flat" cmpd="sng" algn="ctr">
+                      <a:noFill/>
+                    </a:lnR>
+                    <a:lnT w="6350" cap="flat" cmpd="sng" algn="ctr">
+                      <a:noFill/>
+                    </a:lnT>
+                    <a:lnB w="6350" cap="flat" cmpd="sng" algn="ctr">
+                      <a:solidFill>
+                        <a:srgbClr val="D5D5D5"/>
+                      </a:solidFill>
+                    </a:lnB>
+                    <a:noFill/>
+                  </a:tcPr>
+                </a:tc>
+                <a:tc>
+                  <a:txBody>
+                    <a:bodyPr wrap="square"/>
+                    <a:lstStyle/>
+                    <a:p>
+                      <a:pPr algn="l"/>
+                      <a:r>
+                        <a:rPr sz="650" b="0" i="0" lang="pt-BR">
+                          <a:solidFill>
+                            <a:srgbClr val="333333"/>
+                          </a:solidFill>
+                          <a:latin typeface="Arial"/>
+                        </a:rPr>
+                        <a:t>11/set</a:t>
+                      </a:r>
+                    </a:p>
+                  </a:txBody>
+                  <a:tcPr marL="64008" marR="64008" marT="45720" marB="45720" anchor="ctr">
+                    <a:lnL w="6350" cap="flat" cmpd="sng" algn="ctr">
+                      <a:noFill/>
+                    </a:lnL>
+                    <a:lnR w="6350" cap="flat" cmpd="sng" algn="ctr">
+                      <a:noFill/>
+                    </a:lnR>
+                    <a:lnT w="6350" cap="flat" cmpd="sng" algn="ctr">
+                      <a:noFill/>
+                    </a:lnT>
+                    <a:lnB w="6350" cap="flat" cmpd="sng" algn="ctr">
+                      <a:solidFill>
+                        <a:srgbClr val="D5D5D5"/>
+                      </a:solidFill>
+                    </a:lnB>
+                    <a:noFill/>
+                  </a:tcPr>
+                </a:tc>
+                <a:tc>
+                  <a:txBody>
+                    <a:bodyPr wrap="square"/>
+                    <a:lstStyle/>
+                    <a:p>
+                      <a:pPr algn="ctr"/>
+                      <a:r>
+                        <a:rPr sz="600" b="1" i="0" lang="pt-BR">
+                          <a:solidFill>
+                            <a:srgbClr val="6B5700"/>
+                          </a:solidFill>
+                          <a:latin typeface="Arial"/>
+                        </a:rPr>
+                        <a:t>Em progresso</a:t>
+                      </a:r>
+                    </a:p>
+                  </a:txBody>
+                  <a:tcPr marL="36576" marR="36576" marT="45720" marB="45720" anchor="ctr">
+                    <a:lnL w="31750" cap="flat" cmpd="sng" algn="ctr">
+                      <a:solidFill>
+                        <a:srgbClr val="FFFFFF"/>
+                      </a:solidFill>
+                    </a:lnL>
+                    <a:lnR w="31750" cap="flat" cmpd="sng" algn="ctr">
+                      <a:solidFill>
+                        <a:srgbClr val="FFFFFF"/>
+                      </a:solidFill>
+                    </a:lnR>
+                    <a:lnT w="31750" cap="flat" cmpd="sng" algn="ctr">
+                      <a:solidFill>
+                        <a:srgbClr val="FFFFFF"/>
+                      </a:solidFill>
+                    </a:lnT>
+                    <a:lnB w="31750" cap="flat" cmpd="sng" algn="ctr">
+                      <a:solidFill>
+                        <a:srgbClr val="FFFFFF"/>
+                      </a:solidFill>
+                    </a:lnB>
+                    <a:solidFill>
+                      <a:srgbClr val="FFF8E1"/>
+                    </a:solidFill>
+                  </a:tcPr>
+                </a:tc>
+                <a:tc>
+                  <a:txBody>
+                    <a:bodyPr wrap="square"/>
+                    <a:lstStyle/>
+                    <a:p>
+                      <a:pPr algn="l">
+                        <a:defRPr sz="650">
+                          <a:latin typeface="Arial"/>
+                        </a:defRPr>
+                      </a:pPr>
+                      <a:r>
+                        <a:rPr sz="650" b="0" i="0" lang="pt-BR">
+                          <a:solidFill>
+                            <a:srgbClr val="333333"/>
+                          </a:solidFill>
+                          <a:latin typeface="Arial"/>
+                        </a:rPr>
+                        <a:t>Expansão do envio de leads muito frios para a Liza em outras 100 lojas</a:t>
+                      </a:r>
+                    </a:p>
+                  </a:txBody>
+                  <a:tcPr marL="64008" marR="64008" marT="36576" marB="36576" anchor="ctr">
+                    <a:lnL w="6350" cap="flat" cmpd="sng" algn="ctr">
+                      <a:noFill/>
+                    </a:lnL>
+                    <a:lnR w="6350" cap="flat" cmpd="sng" algn="ctr">
+                      <a:noFill/>
+                    </a:lnR>
+                    <a:lnT w="6350" cap="flat" cmpd="sng" algn="ctr">
+                      <a:noFill/>
+                    </a:lnT>
+                    <a:lnB w="6350" cap="flat" cmpd="sng" algn="ctr">
+                      <a:solidFill>
+                        <a:srgbClr val="D5D5D5"/>
+                      </a:solidFill>
+                    </a:lnB>
+                    <a:noFill/>
+                  </a:tcPr>
+                </a:tc>
+                <a:tc>
+                  <a:txBody>
+                    <a:bodyPr wrap="square"/>
+                    <a:lstStyle/>
+                    <a:p>
+                      <a:pPr algn="l">
+                        <a:defRPr sz="650">
+                          <a:latin typeface="Arial"/>
+                        </a:defRPr>
+                      </a:pPr>
+                      <a:r>
+                        <a:rPr sz="650" b="0" i="0" lang="pt-BR">
+                          <a:solidFill>
+                            <a:srgbClr val="333333"/>
+                          </a:solidFill>
+                          <a:latin typeface="Arial"/>
+                        </a:rPr>
+                        <a:t>• </a:t>
+                      </a:r>
+                      <a:r>
+                        <a:rPr sz="650" b="0" i="0" lang="pt-BR">
+                          <a:solidFill>
+                            <a:srgbClr val="333333"/>
+                          </a:solidFill>
+                          <a:latin typeface="Arial"/>
+                        </a:rPr>
+                        <a:t>Avaliar resultado do piloto</a:t>
+                      </a:r>
+                    </a:p>
+                    <a:p>
+                      <a:pPr algn="l">
+                        <a:spcBef>
+                          <a:spcPts val="200"/>
+                        </a:spcBef>
+                        <a:defRPr sz="650">
+                          <a:latin typeface="Arial"/>
+                        </a:defRPr>
+                      </a:pPr>
+                      <a:r>
+                        <a:rPr sz="650" b="0" i="0" lang="pt-BR">
+                          <a:solidFill>
+                            <a:srgbClr val="333333"/>
+                          </a:solidFill>
+                          <a:latin typeface="Arial"/>
+                        </a:rPr>
+                        <a:t>• </a:t>
+                      </a:r>
+                      <a:r>
+                        <a:rPr sz="650" b="0" i="0" lang="pt-BR">
+                          <a:solidFill>
+                            <a:srgbClr val="333333"/>
+                          </a:solidFill>
+                          <a:latin typeface="Arial"/>
+                        </a:rPr>
+                        <a:t>Escalar para todos os leads muito frios</a:t>
+                      </a:r>
+                    </a:p>
+                  </a:txBody>
+                  <a:tcPr marL="64008" marR="64008" marT="36576" marB="36576" anchor="ctr">
+                    <a:lnL w="6350" cap="flat" cmpd="sng" algn="ctr">
+                      <a:noFill/>
+                    </a:lnL>
+                    <a:lnR w="6350" cap="flat" cmpd="sng" algn="ctr">
+                      <a:noFill/>
+                    </a:lnR>
+                    <a:lnT w="6350" cap="flat" cmpd="sng" algn="ctr">
+                      <a:noFill/>
+                    </a:lnT>
+                    <a:lnB w="6350" cap="flat" cmpd="sng" algn="ctr">
+                      <a:solidFill>
+                        <a:srgbClr val="D5D5D5"/>
+                      </a:solidFill>
+                    </a:lnB>
+                    <a:noFill/>
+                  </a:tcPr>
+                </a:tc>
+                <a:tc>
+                  <a:txBody>
+                    <a:bodyPr wrap="square"/>
+                    <a:lstStyle/>
+                    <a:p>
+                      <a:pPr algn="l">
+                        <a:defRPr sz="650">
+                          <a:latin typeface="Arial"/>
+                        </a:defRPr>
+                      </a:pPr>
+                      <a:r>
+                        <a:rPr sz="650" b="0" i="0" lang="pt-BR">
+                          <a:solidFill>
+                            <a:srgbClr val="828282"/>
+                          </a:solidFill>
+                          <a:latin typeface="Arial"/>
+                        </a:rPr>
+                        <a:t>N/A</a:t>
+                      </a:r>
+                    </a:p>
+                  </a:txBody>
+                  <a:tcPr marL="64008" marR="64008" marT="36576" marB="36576" anchor="ctr">
+                    <a:lnL w="6350" cap="flat" cmpd="sng" algn="ctr">
+                      <a:noFill/>
+                    </a:lnL>
+                    <a:lnR w="6350" cap="flat" cmpd="sng" algn="ctr">
+                      <a:noFill/>
+                    </a:lnR>
+                    <a:lnT w="6350" cap="flat" cmpd="sng" algn="ctr">
+                      <a:noFill/>
+                    </a:lnT>
+                    <a:lnB w="6350" cap="flat" cmpd="sng" algn="ctr">
+                      <a:solidFill>
+                        <a:srgbClr val="D5D5D5"/>
+                      </a:solidFill>
+                    </a:lnB>
+                    <a:noFill/>
+                  </a:tcPr>
+                </a:tc>
+              </a:tr>
+            </a:tbl>
+          </a:graphicData>
+        </a:graphic>
+      </p:graphicFrame>
+      <p:sp>
+        <p:nvSpPr>
+          <p:cNvPr id="24" name="Oval 23"/>
+          <p:cNvSpPr/>
+          <p:nvPr/>
+        </p:nvSpPr>
+        <p:spPr>
+          <a:xfrm>
+            <a:off x="5141583" y="3441509"/>
+            <a:ext cx="146304" cy="146304"/>
+          </a:xfrm>
+          <a:prstGeom prst="ellipse">
+            <a:avLst/>
+          </a:prstGeom>
+          <a:solidFill>
+            <a:srgbClr val="78DE1F"/>
+          </a:solidFill>
+          <a:ln>
+            <a:noFill/>
+          </a:ln>
+          <a:effectLst/>
+        </p:spPr>
+        <p:txBody>
+          <a:bodyPr rtlCol="0" anchor="ctr" lIns="0" rIns="0" tIns="0" bIns="0" wrap="none"/>
+          <a:lstStyle/>
+          <a:p>
+            <a:pPr algn="ctr"/>
+            <a:r>
+              <a:rPr sz="650" b="1" i="0" lang="pt-BR">
+                <a:solidFill>
+                  <a:srgbClr val="1A1A1A"/>
+                </a:solidFill>
+                <a:latin typeface="Arial"/>
+              </a:rPr>
+              <a:t>A</a:t>
+            </a:r>
+          </a:p>
+        </p:txBody>
+      </p:sp>
+      <p:sp>
+        <p:nvSpPr>
+          <p:cNvPr id="25" name="Oval 24"/>
+          <p:cNvSpPr/>
+          <p:nvPr/>
+        </p:nvSpPr>
+        <p:spPr>
+          <a:xfrm>
+            <a:off x="5141583" y="5940615"/>
+            <a:ext cx="146304" cy="146304"/>
+          </a:xfrm>
+          <a:prstGeom prst="ellipse">
+            <a:avLst/>
+          </a:prstGeom>
+          <a:solidFill>
+            <a:srgbClr val="78DE1F"/>
+          </a:solidFill>
+          <a:ln>
+            <a:noFill/>
+          </a:ln>
+          <a:effectLst/>
+        </p:spPr>
+        <p:txBody>
+          <a:bodyPr rtlCol="0" anchor="ctr" lIns="0" rIns="0" tIns="0" bIns="0" wrap="none"/>
+          <a:lstStyle/>
+          <a:p>
+            <a:pPr algn="ctr"/>
+            <a:r>
+              <a:rPr sz="650" b="1" i="0" lang="pt-BR">
+                <a:solidFill>
+                  <a:srgbClr val="1A1A1A"/>
+                </a:solidFill>
+                <a:latin typeface="Arial"/>
+              </a:rPr>
+              <a:t>B</a:t>
+            </a:r>
+          </a:p>
+        </p:txBody>
+      </p:sp>
+      <p:sp>
+        <p:nvSpPr>
+          <p:cNvPr id="26" name="Oval 25"/>
+          <p:cNvSpPr/>
+          <p:nvPr/>
+        </p:nvSpPr>
+        <p:spPr>
+          <a:xfrm>
+            <a:off x="5141583" y="6565392"/>
+            <a:ext cx="146304" cy="146304"/>
+          </a:xfrm>
+          <a:prstGeom prst="ellipse">
+            <a:avLst/>
+          </a:prstGeom>
+          <a:solidFill>
+            <a:srgbClr val="78DE1F"/>
+          </a:solidFill>
+          <a:ln>
+            <a:noFill/>
+          </a:ln>
+          <a:effectLst/>
+        </p:spPr>
+        <p:txBody>
+          <a:bodyPr rtlCol="0" anchor="ctr" lIns="0" rIns="0" tIns="0" bIns="0" wrap="none"/>
+          <a:lstStyle/>
+          <a:p>
+            <a:pPr algn="ctr"/>
+            <a:r>
+              <a:rPr sz="650" b="1" i="0" lang="pt-BR">
+                <a:solidFill>
+                  <a:srgbClr val="1A1A1A"/>
+                </a:solidFill>
+                <a:latin typeface="Arial"/>
+              </a:rPr>
+              <a:t>B</a:t>
+            </a:r>
+          </a:p>
+        </p:txBody>
+      </p:sp>
+      <p:sp>
+        <p:nvSpPr>
+          <p:cNvPr id="27" name="Rounded Rectangle 26"/>
+          <p:cNvSpPr/>
+          <p:nvPr/>
+        </p:nvSpPr>
+        <p:spPr>
+          <a:xfrm>
+            <a:off x="4718353" y="2104644"/>
+            <a:ext cx="237744" cy="2135378"/>
+          </a:xfrm>
+          <a:prstGeom prst="roundRect">
+            <a:avLst>
+              <a:gd name="adj" fmla="val 5566"/>
+            </a:avLst>
+          </a:prstGeom>
+          <a:solidFill>
+            <a:srgbClr val="9FD4B8"/>
+          </a:solidFill>
+          <a:ln>
+            <a:noFill/>
+          </a:ln>
+          <a:effectLst/>
+        </p:spPr>
+        <p:txBody>
+          <a:bodyPr rtlCol="0" anchor="ctr" lIns="0" rIns="0" tIns="0" bIns="0" wrap="square" vert="vert270"/>
+          <a:lstStyle/>
+          <a:p>
+            <a:pPr algn="ctr"/>
+            <a:r>
+              <a:rPr sz="650" b="1" i="0" lang="pt-BR">
+                <a:solidFill>
+                  <a:srgbClr val="1F4E3D"/>
+                </a:solidFill>
+                <a:latin typeface="Arial"/>
+              </a:rPr>
+              <a:t>V 1.0 do modelo de alocação</a:t>
+            </a:r>
+          </a:p>
+        </p:txBody>
+      </p:sp>
+      <p:sp>
+        <p:nvSpPr>
+          <p:cNvPr id="28" name="Rounded Rectangle 27"/>
+          <p:cNvSpPr/>
+          <p:nvPr/>
+        </p:nvSpPr>
+        <p:spPr>
+          <a:xfrm>
+            <a:off x="4718353" y="4294886"/>
+            <a:ext cx="237744" cy="2444242"/>
+          </a:xfrm>
+          <a:prstGeom prst="roundRect">
+            <a:avLst>
+              <a:gd name="adj" fmla="val 4863"/>
+            </a:avLst>
+          </a:prstGeom>
+          <a:solidFill>
+            <a:srgbClr val="9FD4B8"/>
+          </a:solidFill>
+          <a:ln>
+            <a:noFill/>
+          </a:ln>
+          <a:effectLst/>
+        </p:spPr>
+        <p:txBody>
+          <a:bodyPr rtlCol="0" anchor="ctr" lIns="0" rIns="0" tIns="0" bIns="0" wrap="square" vert="vert270"/>
+          <a:lstStyle/>
+          <a:p>
+            <a:pPr algn="ctr"/>
+            <a:r>
+              <a:rPr sz="650" b="1" i="0" lang="pt-BR">
+                <a:solidFill>
+                  <a:srgbClr val="1F4E3D"/>
+                </a:solidFill>
+                <a:latin typeface="Arial"/>
+              </a:rPr>
+              <a:t>V 2.0 do modelo</a:t>
+            </a:r>
+          </a:p>
+        </p:txBody>
+      </p:sp>
+    </p:spTree>
+  </p:cSld>
+  <p:clrMapOvr>
+    <a:masterClrMapping/>
+  </p:clrMapOvr>
+</p:sld>
+</file>
+
 <file path=ppt/theme/theme1.xml><?xml version="1.0" encoding="utf-8"?>
 <a:theme xmlns:a="http://schemas.openxmlformats.org/drawingml/2006/main" name="Office Theme">
   <a:themeElements>
